--- a/IEP/t2-lesson4-comparing-linear-functions-IEP.pptx
+++ b/IEP/t2-lesson4-comparing-linear-functions-IEP.pptx
@@ -1629,6 +1629,40 @@
           </a:p>
         </p:txBody>
       </p:sp>
+      <p:sp>
+        <p:nvSpPr>
+          <p:cNvPr id="11" name="Slide Number 11"/>
+          <p:cNvSpPr txBox="1"/>
+          <p:nvPr/>
+        </p:nvSpPr>
+        <p:spPr>
+          <a:xfrm>
+            <a:off x="11277295" y="6611112"/>
+            <a:ext cx="685800" cy="201168"/>
+          </a:xfrm>
+          <a:prstGeom prst="rect">
+            <a:avLst/>
+          </a:prstGeom>
+          <a:noFill/>
+        </p:spPr>
+        <p:txBody>
+          <a:bodyPr wrap="none" lIns="0" tIns="0" rIns="0" bIns="0" anchor="b">
+            <a:noAutofit/>
+          </a:bodyPr>
+          <a:lstStyle/>
+          <a:p>
+            <a:pPr algn="r"/>
+            <a:fld id="{5C1A6E0B-3B1F-4D5E-9C7A-2F4B8D6E1A90}" type="slidenum">
+              <a:rPr lang="en-US" sz="1200" dirty="0">
+                <a:solidFill>
+                  <a:srgbClr val="5F6272"/>
+                </a:solidFill>
+              </a:rPr>
+              <a:t>1</a:t>
+            </a:fld>
+          </a:p>
+        </p:txBody>
+      </p:sp>
     </p:spTree>
   </p:cSld>
   <p:clrMapOvr>
@@ -1966,6 +2000,40 @@
               <a:t xml:space="preserve">$3 before driving</a:t>
             </a:r>
             <a:endParaRPr lang="en-US" sz="2325" dirty="0"/>
+          </a:p>
+        </p:txBody>
+      </p:sp>
+      <p:sp>
+        <p:nvSpPr>
+          <p:cNvPr id="8" name="Slide Number 8"/>
+          <p:cNvSpPr txBox="1"/>
+          <p:nvPr/>
+        </p:nvSpPr>
+        <p:spPr>
+          <a:xfrm>
+            <a:off x="11277295" y="6611112"/>
+            <a:ext cx="685800" cy="201168"/>
+          </a:xfrm>
+          <a:prstGeom prst="rect">
+            <a:avLst/>
+          </a:prstGeom>
+          <a:noFill/>
+        </p:spPr>
+        <p:txBody>
+          <a:bodyPr wrap="none" lIns="0" tIns="0" rIns="0" bIns="0" anchor="b">
+            <a:noAutofit/>
+          </a:bodyPr>
+          <a:lstStyle/>
+          <a:p>
+            <a:pPr algn="r"/>
+            <a:fld id="{5C1A6E0B-3B1F-4D5E-9C7A-2F4B8D6E1A90}" type="slidenum">
+              <a:rPr lang="en-US" sz="1200" dirty="0">
+                <a:solidFill>
+                  <a:srgbClr val="5F6272"/>
+                </a:solidFill>
+              </a:rPr>
+              <a:t>10</a:t>
+            </a:fld>
           </a:p>
         </p:txBody>
       </p:sp>
@@ -2856,6 +2924,40 @@
               <a:t xml:space="preserve">$50 to start</a:t>
             </a:r>
             <a:endParaRPr lang="en-US" sz="2325" dirty="0"/>
+          </a:p>
+        </p:txBody>
+      </p:sp>
+      <p:sp>
+        <p:nvSpPr>
+          <p:cNvPr id="13" name="Slide Number 13"/>
+          <p:cNvSpPr txBox="1"/>
+          <p:nvPr/>
+        </p:nvSpPr>
+        <p:spPr>
+          <a:xfrm>
+            <a:off x="11277295" y="6611112"/>
+            <a:ext cx="685800" cy="201168"/>
+          </a:xfrm>
+          <a:prstGeom prst="rect">
+            <a:avLst/>
+          </a:prstGeom>
+          <a:noFill/>
+        </p:spPr>
+        <p:txBody>
+          <a:bodyPr wrap="none" lIns="0" tIns="0" rIns="0" bIns="0" anchor="b">
+            <a:noAutofit/>
+          </a:bodyPr>
+          <a:lstStyle/>
+          <a:p>
+            <a:pPr algn="r"/>
+            <a:fld id="{5C1A6E0B-3B1F-4D5E-9C7A-2F4B8D6E1A90}" type="slidenum">
+              <a:rPr lang="en-US" sz="1200" dirty="0">
+                <a:solidFill>
+                  <a:srgbClr val="5F6272"/>
+                </a:solidFill>
+              </a:rPr>
+              <a:t>11</a:t>
+            </a:fld>
           </a:p>
         </p:txBody>
       </p:sp>
@@ -3464,6 +3566,40 @@
           </a:p>
         </p:txBody>
       </p:sp>
+      <p:sp>
+        <p:nvSpPr>
+          <p:cNvPr id="6" name="Slide Number 6"/>
+          <p:cNvSpPr txBox="1"/>
+          <p:nvPr/>
+        </p:nvSpPr>
+        <p:spPr>
+          <a:xfrm>
+            <a:off x="11277295" y="6611112"/>
+            <a:ext cx="685800" cy="201168"/>
+          </a:xfrm>
+          <a:prstGeom prst="rect">
+            <a:avLst/>
+          </a:prstGeom>
+          <a:noFill/>
+        </p:spPr>
+        <p:txBody>
+          <a:bodyPr wrap="none" lIns="0" tIns="0" rIns="0" bIns="0" anchor="b">
+            <a:noAutofit/>
+          </a:bodyPr>
+          <a:lstStyle/>
+          <a:p>
+            <a:pPr algn="r"/>
+            <a:fld id="{5C1A6E0B-3B1F-4D5E-9C7A-2F4B8D6E1A90}" type="slidenum">
+              <a:rPr lang="en-US" sz="1200" dirty="0">
+                <a:solidFill>
+                  <a:srgbClr val="5F6272"/>
+                </a:solidFill>
+              </a:rPr>
+              <a:t>12</a:t>
+            </a:fld>
+          </a:p>
+        </p:txBody>
+      </p:sp>
     </p:spTree>
   </p:cSld>
   <p:clrMapOvr>
@@ -4185,6 +4321,40 @@
               <a:t xml:space="preserve">1</a:t>
             </a:r>
             <a:endParaRPr lang="en-US" sz="2325" dirty="0"/>
+          </a:p>
+        </p:txBody>
+      </p:sp>
+      <p:sp>
+        <p:nvSpPr>
+          <p:cNvPr id="12" name="Slide Number 12"/>
+          <p:cNvSpPr txBox="1"/>
+          <p:nvPr/>
+        </p:nvSpPr>
+        <p:spPr>
+          <a:xfrm>
+            <a:off x="11277295" y="6611112"/>
+            <a:ext cx="685800" cy="201168"/>
+          </a:xfrm>
+          <a:prstGeom prst="rect">
+            <a:avLst/>
+          </a:prstGeom>
+          <a:noFill/>
+        </p:spPr>
+        <p:txBody>
+          <a:bodyPr wrap="none" lIns="0" tIns="0" rIns="0" bIns="0" anchor="b">
+            <a:noAutofit/>
+          </a:bodyPr>
+          <a:lstStyle/>
+          <a:p>
+            <a:pPr algn="r"/>
+            <a:fld id="{5C1A6E0B-3B1F-4D5E-9C7A-2F4B8D6E1A90}" type="slidenum">
+              <a:rPr lang="en-US" sz="1200" dirty="0">
+                <a:solidFill>
+                  <a:srgbClr val="5F6272"/>
+                </a:solidFill>
+              </a:rPr>
+              <a:t>2</a:t>
+            </a:fld>
           </a:p>
         </p:txBody>
       </p:sp>
@@ -5318,6 +5488,40 @@
           </a:p>
         </p:txBody>
       </p:sp>
+      <p:sp>
+        <p:nvSpPr>
+          <p:cNvPr id="12" name="Slide Number 12"/>
+          <p:cNvSpPr txBox="1"/>
+          <p:nvPr/>
+        </p:nvSpPr>
+        <p:spPr>
+          <a:xfrm>
+            <a:off x="11277295" y="6611112"/>
+            <a:ext cx="685800" cy="201168"/>
+          </a:xfrm>
+          <a:prstGeom prst="rect">
+            <a:avLst/>
+          </a:prstGeom>
+          <a:noFill/>
+        </p:spPr>
+        <p:txBody>
+          <a:bodyPr wrap="none" lIns="0" tIns="0" rIns="0" bIns="0" anchor="b">
+            <a:noAutofit/>
+          </a:bodyPr>
+          <a:lstStyle/>
+          <a:p>
+            <a:pPr algn="r"/>
+            <a:fld id="{5C1A6E0B-3B1F-4D5E-9C7A-2F4B8D6E1A90}" type="slidenum">
+              <a:rPr lang="en-US" sz="1200" dirty="0">
+                <a:solidFill>
+                  <a:srgbClr val="5F6272"/>
+                </a:solidFill>
+              </a:rPr>
+              <a:t>3</a:t>
+            </a:fld>
+          </a:p>
+        </p:txBody>
+      </p:sp>
     </p:spTree>
   </p:cSld>
   <p:clrMapOvr>
@@ -6446,6 +6650,40 @@
           </a:p>
         </p:txBody>
       </p:sp>
+      <p:sp>
+        <p:nvSpPr>
+          <p:cNvPr id="16" name="Slide Number 16"/>
+          <p:cNvSpPr txBox="1"/>
+          <p:nvPr/>
+        </p:nvSpPr>
+        <p:spPr>
+          <a:xfrm>
+            <a:off x="11277295" y="6611112"/>
+            <a:ext cx="685800" cy="201168"/>
+          </a:xfrm>
+          <a:prstGeom prst="rect">
+            <a:avLst/>
+          </a:prstGeom>
+          <a:noFill/>
+        </p:spPr>
+        <p:txBody>
+          <a:bodyPr wrap="none" lIns="0" tIns="0" rIns="0" bIns="0" anchor="b">
+            <a:noAutofit/>
+          </a:bodyPr>
+          <a:lstStyle/>
+          <a:p>
+            <a:pPr algn="r"/>
+            <a:fld id="{5C1A6E0B-3B1F-4D5E-9C7A-2F4B8D6E1A90}" type="slidenum">
+              <a:rPr lang="en-US" sz="1200" dirty="0">
+                <a:solidFill>
+                  <a:srgbClr val="5F6272"/>
+                </a:solidFill>
+              </a:rPr>
+              <a:t>4</a:t>
+            </a:fld>
+          </a:p>
+        </p:txBody>
+      </p:sp>
     </p:spTree>
   </p:cSld>
   <p:clrMapOvr>
@@ -7018,6 +7256,40 @@
           </a:p>
         </p:txBody>
       </p:sp>
+      <p:sp>
+        <p:nvSpPr>
+          <p:cNvPr id="8" name="Slide Number 8"/>
+          <p:cNvSpPr txBox="1"/>
+          <p:nvPr/>
+        </p:nvSpPr>
+        <p:spPr>
+          <a:xfrm>
+            <a:off x="11277295" y="6611112"/>
+            <a:ext cx="685800" cy="201168"/>
+          </a:xfrm>
+          <a:prstGeom prst="rect">
+            <a:avLst/>
+          </a:prstGeom>
+          <a:noFill/>
+        </p:spPr>
+        <p:txBody>
+          <a:bodyPr wrap="none" lIns="0" tIns="0" rIns="0" bIns="0" anchor="b">
+            <a:noAutofit/>
+          </a:bodyPr>
+          <a:lstStyle/>
+          <a:p>
+            <a:pPr algn="r"/>
+            <a:fld id="{5C1A6E0B-3B1F-4D5E-9C7A-2F4B8D6E1A90}" type="slidenum">
+              <a:rPr lang="en-US" sz="1200" dirty="0">
+                <a:solidFill>
+                  <a:srgbClr val="5F6272"/>
+                </a:solidFill>
+              </a:rPr>
+              <a:t>5</a:t>
+            </a:fld>
+          </a:p>
+        </p:txBody>
+      </p:sp>
     </p:spTree>
   </p:cSld>
   <p:clrMapOvr>
@@ -7761,6 +8033,40 @@
               <a:t xml:space="preserve"> − 3, different start.</a:t>
             </a:r>
             <a:endParaRPr lang="en-US" sz="1950" dirty="0"/>
+          </a:p>
+        </p:txBody>
+      </p:sp>
+      <p:sp>
+        <p:nvSpPr>
+          <p:cNvPr id="15" name="Slide Number 15"/>
+          <p:cNvSpPr txBox="1"/>
+          <p:nvPr/>
+        </p:nvSpPr>
+        <p:spPr>
+          <a:xfrm>
+            <a:off x="11277295" y="6611112"/>
+            <a:ext cx="685800" cy="201168"/>
+          </a:xfrm>
+          <a:prstGeom prst="rect">
+            <a:avLst/>
+          </a:prstGeom>
+          <a:noFill/>
+        </p:spPr>
+        <p:txBody>
+          <a:bodyPr wrap="none" lIns="0" tIns="0" rIns="0" bIns="0" anchor="b">
+            <a:noAutofit/>
+          </a:bodyPr>
+          <a:lstStyle/>
+          <a:p>
+            <a:pPr algn="r"/>
+            <a:fld id="{5C1A6E0B-3B1F-4D5E-9C7A-2F4B8D6E1A90}" type="slidenum">
+              <a:rPr lang="en-US" sz="1200" dirty="0">
+                <a:solidFill>
+                  <a:srgbClr val="5F6272"/>
+                </a:solidFill>
+              </a:rPr>
+              <a:t>6</a:t>
+            </a:fld>
           </a:p>
         </p:txBody>
       </p:sp>
@@ -8400,6 +8706,40 @@
               <a:t xml:space="preserve">perpendicular</a:t>
             </a:r>
             <a:endParaRPr lang="en-US" sz="2325" dirty="0"/>
+          </a:p>
+        </p:txBody>
+      </p:sp>
+      <p:sp>
+        <p:nvSpPr>
+          <p:cNvPr id="10" name="Slide Number 10"/>
+          <p:cNvSpPr txBox="1"/>
+          <p:nvPr/>
+        </p:nvSpPr>
+        <p:spPr>
+          <a:xfrm>
+            <a:off x="11277295" y="6611112"/>
+            <a:ext cx="685800" cy="201168"/>
+          </a:xfrm>
+          <a:prstGeom prst="rect">
+            <a:avLst/>
+          </a:prstGeom>
+          <a:noFill/>
+        </p:spPr>
+        <p:txBody>
+          <a:bodyPr wrap="none" lIns="0" tIns="0" rIns="0" bIns="0" anchor="b">
+            <a:noAutofit/>
+          </a:bodyPr>
+          <a:lstStyle/>
+          <a:p>
+            <a:pPr algn="r"/>
+            <a:fld id="{5C1A6E0B-3B1F-4D5E-9C7A-2F4B8D6E1A90}" type="slidenum">
+              <a:rPr lang="en-US" sz="1200" dirty="0">
+                <a:solidFill>
+                  <a:srgbClr val="5F6272"/>
+                </a:solidFill>
+              </a:rPr>
+              <a:t>7</a:t>
+            </a:fld>
           </a:p>
         </p:txBody>
       </p:sp>
@@ -9426,6 +9766,40 @@
               <a:t xml:space="preserve">Hays County</a:t>
             </a:r>
             <a:endParaRPr lang="en-US" sz="2325" dirty="0"/>
+          </a:p>
+        </p:txBody>
+      </p:sp>
+      <p:sp>
+        <p:nvSpPr>
+          <p:cNvPr id="18" name="Slide Number 18"/>
+          <p:cNvSpPr txBox="1"/>
+          <p:nvPr/>
+        </p:nvSpPr>
+        <p:spPr>
+          <a:xfrm>
+            <a:off x="11277295" y="6611112"/>
+            <a:ext cx="685800" cy="201168"/>
+          </a:xfrm>
+          <a:prstGeom prst="rect">
+            <a:avLst/>
+          </a:prstGeom>
+          <a:noFill/>
+        </p:spPr>
+        <p:txBody>
+          <a:bodyPr wrap="none" lIns="0" tIns="0" rIns="0" bIns="0" anchor="b">
+            <a:noAutofit/>
+          </a:bodyPr>
+          <a:lstStyle/>
+          <a:p>
+            <a:pPr algn="r"/>
+            <a:fld id="{5C1A6E0B-3B1F-4D5E-9C7A-2F4B8D6E1A90}" type="slidenum">
+              <a:rPr lang="en-US" sz="1200" dirty="0">
+                <a:solidFill>
+                  <a:srgbClr val="5F6272"/>
+                </a:solidFill>
+              </a:rPr>
+              <a:t>8</a:t>
+            </a:fld>
           </a:p>
         </p:txBody>
       </p:sp>
@@ -10193,6 +10567,40 @@
               <a:t xml:space="preserve">Lauren ($25 &gt; $20)</a:t>
             </a:r>
             <a:endParaRPr lang="en-US" sz="2325" dirty="0"/>
+          </a:p>
+        </p:txBody>
+      </p:sp>
+      <p:sp>
+        <p:nvSpPr>
+          <p:cNvPr id="9" name="Slide Number 9"/>
+          <p:cNvSpPr txBox="1"/>
+          <p:nvPr/>
+        </p:nvSpPr>
+        <p:spPr>
+          <a:xfrm>
+            <a:off x="11277295" y="6611112"/>
+            <a:ext cx="685800" cy="201168"/>
+          </a:xfrm>
+          <a:prstGeom prst="rect">
+            <a:avLst/>
+          </a:prstGeom>
+          <a:noFill/>
+        </p:spPr>
+        <p:txBody>
+          <a:bodyPr wrap="none" lIns="0" tIns="0" rIns="0" bIns="0" anchor="b">
+            <a:noAutofit/>
+          </a:bodyPr>
+          <a:lstStyle/>
+          <a:p>
+            <a:pPr algn="r"/>
+            <a:fld id="{5C1A6E0B-3B1F-4D5E-9C7A-2F4B8D6E1A90}" type="slidenum">
+              <a:rPr lang="en-US" sz="1200" dirty="0">
+                <a:solidFill>
+                  <a:srgbClr val="5F6272"/>
+                </a:solidFill>
+              </a:rPr>
+              <a:t>9</a:t>
+            </a:fld>
           </a:p>
         </p:txBody>
       </p:sp>

--- a/IEP/t2-lesson4-comparing-linear-functions-IEP.pptx
+++ b/IEP/t2-lesson4-comparing-linear-functions-IEP.pptx
@@ -20,6 +20,8 @@
     <p:sldId id="265" r:id="rId20"/>
     <p:sldId id="266" r:id="rId21"/>
     <p:sldId id="267" r:id="rId22"/>
+    <p:sldId id="268" r:id="rId23"/>
+    <p:sldId id="269" r:id="rId24"/>
   </p:sldIdLst>
   <p:sldSz cx="12192000" cy="6858000"/>
   <p:notesSz cx="6858000" cy="9144000"/>
@@ -226,7 +228,10 @@
           <a:bodyPr/>
           <a:lstStyle/>
           <a:p>
-            <a:endParaRPr lang="en-US"/>
+            <a:r>
+              <a:rPr lang="en-US" dirty="0"/>
+              <a:t>Units: dollars per month.</a:t>
+            </a:r>
           </a:p>
         </p:txBody>
       </p:sp>
@@ -282,10 +287,7 @@
           <a:bodyPr/>
           <a:lstStyle/>
           <a:p>
-            <a:r>
-              <a:rPr lang="en-US" dirty="0"/>
-              <a:t>Give students time to try all items before revealing. Students may use the steps slide and their notes.</a:t>
-            </a:r>
+            <a:endParaRPr lang="en-US"/>
           </a:p>
         </p:txBody>
       </p:sp>
@@ -341,6 +343,124 @@
           <a:bodyPr/>
           <a:lstStyle/>
           <a:p>
+            <a:r>
+              <a:rPr lang="en-US" dirty="0"/>
+              <a:t>For the teacher or assistant: click once for each step. Read the step aloud, and before each click ask the student what to do next. Students check their own paper and fix any mistake in a different color.</a:t>
+            </a:r>
+          </a:p>
+        </p:txBody>
+      </p:sp>
+    </p:spTree>
+  </p:cSld>
+  <p:clrMapOvr>
+    <a:masterClrMapping/>
+  </p:clrMapOvr>
+</p:notes>
+</file>
+
+<file path=ppt/notesSlides/notesSlide13.xml><?xml version="1.0" encoding="utf-8"?>
+<p:notes xmlns:a="http://schemas.openxmlformats.org/drawingml/2006/main" xmlns:r="http://schemas.openxmlformats.org/officeDocument/2006/relationships" xmlns:p="http://schemas.openxmlformats.org/presentationml/2006/main">
+  <p:cSld>
+    <p:spTree>
+      <p:nvGrpSpPr>
+        <p:cNvPr id="1" name=""/>
+        <p:cNvGrpSpPr/>
+        <p:nvPr/>
+      </p:nvGrpSpPr>
+      <p:grpSpPr>
+        <a:xfrm>
+          <a:off x="0" y="0"/>
+          <a:ext cx="0" cy="0"/>
+          <a:chOff x="0" y="0"/>
+          <a:chExt cx="0" cy="0"/>
+        </a:xfrm>
+      </p:grpSpPr>
+      <p:sp>
+        <p:nvSpPr>
+          <p:cNvPr id="2" name="Slide Image Placeholder 1"/>
+          <p:cNvSpPr>
+            <a:spLocks noGrp="1" noRot="1" noChangeAspect="1"/>
+          </p:cNvSpPr>
+          <p:nvPr>
+            <p:ph type="sldImg"/>
+          </p:nvPr>
+        </p:nvSpPr>
+        <p:spPr/>
+      </p:sp>
+      <p:sp>
+        <p:nvSpPr>
+          <p:cNvPr id="3" name="Notes Placeholder 2"/>
+          <p:cNvSpPr>
+            <a:spLocks noGrp="1"/>
+          </p:cNvSpPr>
+          <p:nvPr>
+            <p:ph type="body" idx="1"/>
+          </p:nvPr>
+        </p:nvSpPr>
+        <p:spPr/>
+        <p:txBody>
+          <a:bodyPr/>
+          <a:lstStyle/>
+          <a:p>
+            <a:r>
+              <a:rPr lang="en-US" dirty="0"/>
+              <a:t>Give students time to try all items before revealing. Students may use the steps slide and their notes.</a:t>
+            </a:r>
+          </a:p>
+        </p:txBody>
+      </p:sp>
+    </p:spTree>
+  </p:cSld>
+  <p:clrMapOvr>
+    <a:masterClrMapping/>
+  </p:clrMapOvr>
+</p:notes>
+</file>
+
+<file path=ppt/notesSlides/notesSlide14.xml><?xml version="1.0" encoding="utf-8"?>
+<p:notes xmlns:a="http://schemas.openxmlformats.org/drawingml/2006/main" xmlns:r="http://schemas.openxmlformats.org/officeDocument/2006/relationships" xmlns:p="http://schemas.openxmlformats.org/presentationml/2006/main">
+  <p:cSld>
+    <p:spTree>
+      <p:nvGrpSpPr>
+        <p:cNvPr id="1" name=""/>
+        <p:cNvGrpSpPr/>
+        <p:nvPr/>
+      </p:nvGrpSpPr>
+      <p:grpSpPr>
+        <a:xfrm>
+          <a:off x="0" y="0"/>
+          <a:ext cx="0" cy="0"/>
+          <a:chOff x="0" y="0"/>
+          <a:chExt cx="0" cy="0"/>
+        </a:xfrm>
+      </p:grpSpPr>
+      <p:sp>
+        <p:nvSpPr>
+          <p:cNvPr id="2" name="Slide Image Placeholder 1"/>
+          <p:cNvSpPr>
+            <a:spLocks noGrp="1" noRot="1" noChangeAspect="1"/>
+          </p:cNvSpPr>
+          <p:nvPr>
+            <p:ph type="sldImg"/>
+          </p:nvPr>
+        </p:nvSpPr>
+        <p:spPr/>
+      </p:sp>
+      <p:sp>
+        <p:nvSpPr>
+          <p:cNvPr id="3" name="Notes Placeholder 2"/>
+          <p:cNvSpPr>
+            <a:spLocks noGrp="1"/>
+          </p:cNvSpPr>
+          <p:nvPr>
+            <p:ph type="body" idx="1"/>
+          </p:nvPr>
+        </p:nvSpPr>
+        <p:spPr/>
+        <p:txBody>
+          <a:bodyPr/>
+          <a:lstStyle/>
+          <a:p>
             <a:endParaRPr lang="en-US"/>
           </a:p>
         </p:txBody>
@@ -745,7 +865,10 @@
           <a:bodyPr/>
           <a:lstStyle/>
           <a:p>
-            <a:endParaRPr lang="en-US"/>
+            <a:r>
+              <a:rPr lang="en-US" dirty="0"/>
+              <a:t>For the teacher or assistant: click once for each step. Read the step aloud, and before each click ask the student what to do next. Students check their own paper and fix any mistake in a different color.</a:t>
+            </a:r>
           </a:p>
         </p:txBody>
       </p:sp>
@@ -801,10 +924,7 @@
           <a:bodyPr/>
           <a:lstStyle/>
           <a:p>
-            <a:r>
-              <a:rPr lang="en-US" dirty="0"/>
-              <a:t>Units: dollars per month.</a:t>
-            </a:r>
+            <a:endParaRPr lang="en-US"/>
           </a:p>
         </p:txBody>
       </p:sp>
@@ -1729,7 +1849,7 @@
                 <a:latin typeface="Segoe UI"/>
                 <a:cs typeface="Segoe UI"/>
               </a:rPr>
-              <a:t xml:space="preserve">You do · Try it</a:t>
+              <a:t xml:space="preserve">I do · Meaning in a story</a:t>
             </a:r>
             <a:endParaRPr lang="en-US" sz="1200" dirty="0"/>
           </a:p>
@@ -1773,7 +1893,7 @@
                 <a:latin typeface="Segoe UI"/>
                 <a:cs typeface="Segoe UI"/>
               </a:rPr>
-              <a:t xml:space="preserve">A taxi charges $3 plus $2 per mile</a:t>
+              <a:t xml:space="preserve">Lauren starts with $25 and saves $25 each month</a:t>
             </a:r>
             <a:endParaRPr lang="en-US" sz="3450" dirty="0"/>
           </a:p>
@@ -1788,7 +1908,7 @@
         <p:spPr>
           <a:xfrm>
             <a:off x="685800" y="1618488"/>
-            <a:ext cx="10820095" cy="352044"/>
+            <a:ext cx="10820095" cy="489204"/>
           </a:xfrm>
           <a:prstGeom prst="rect">
             <a:avLst/>
@@ -1810,6 +1930,110 @@
               </a:lnSpc>
             </a:pPr>
             <a:r>
+              <a:rPr lang="en-US" sz="2850" dirty="0" i="1">
+                <a:solidFill>
+                  <a:srgbClr val="16171D"/>
+                </a:solidFill>
+                <a:latin typeface="Cambria"/>
+                <a:cs typeface="Cambria"/>
+              </a:rPr>
+              <a:t xml:space="preserve">y</a:t>
+            </a:r>
+            <a:r>
+              <a:rPr lang="en-US" sz="2850" dirty="0">
+                <a:solidFill>
+                  <a:srgbClr val="16171D"/>
+                </a:solidFill>
+                <a:latin typeface="Cambria"/>
+                <a:cs typeface="Cambria"/>
+              </a:rPr>
+              <a:t xml:space="preserve"> = </a:t>
+            </a:r>
+            <a:r>
+              <a:rPr lang="en-US" sz="2850" dirty="0" b="1">
+                <a:solidFill>
+                  <a:srgbClr val="C9561F"/>
+                </a:solidFill>
+                <a:latin typeface="Cambria"/>
+                <a:cs typeface="Cambria"/>
+              </a:rPr>
+              <a:t xml:space="preserve">25</a:t>
+            </a:r>
+            <a:r>
+              <a:rPr lang="en-US" sz="2850" dirty="0" i="1">
+                <a:solidFill>
+                  <a:srgbClr val="16171D"/>
+                </a:solidFill>
+                <a:latin typeface="Cambria"/>
+                <a:cs typeface="Cambria"/>
+              </a:rPr>
+              <a:t xml:space="preserve">x</a:t>
+            </a:r>
+            <a:r>
+              <a:rPr lang="en-US" sz="2850" dirty="0">
+                <a:solidFill>
+                  <a:srgbClr val="16171D"/>
+                </a:solidFill>
+                <a:latin typeface="Cambria"/>
+                <a:cs typeface="Cambria"/>
+              </a:rPr>
+              <a:t xml:space="preserve"> + </a:t>
+            </a:r>
+            <a:r>
+              <a:rPr lang="en-US" sz="2850" dirty="0" b="1">
+                <a:solidFill>
+                  <a:srgbClr val="3050B8"/>
+                </a:solidFill>
+                <a:latin typeface="Cambria"/>
+                <a:cs typeface="Cambria"/>
+              </a:rPr>
+              <a:t xml:space="preserve">25</a:t>
+            </a:r>
+            <a:endParaRPr lang="en-US" sz="2850" dirty="0"/>
+          </a:p>
+        </p:txBody>
+      </p:sp>
+      <p:sp>
+        <p:nvSpPr>
+          <p:cNvPr id="5" name="Shape 5"/>
+          <p:cNvSpPr txBox="1"/>
+          <p:nvPr/>
+        </p:nvSpPr>
+        <p:spPr>
+          <a:xfrm>
+            <a:off x="685800" y="2279142"/>
+            <a:ext cx="10820095" cy="352044"/>
+          </a:xfrm>
+          <a:prstGeom prst="rect">
+            <a:avLst/>
+          </a:prstGeom>
+          <a:noFill/>
+          <a:ln>
+            <a:noFill/>
+          </a:ln>
+        </p:spPr>
+        <p:txBody>
+          <a:bodyPr wrap="square" lIns="36576" tIns="27432" rIns="36576" bIns="27432" anchor="t">
+            <a:noAutofit/>
+          </a:bodyPr>
+          <a:lstStyle/>
+          <a:p>
+            <a:pPr algn="l">
+              <a:lnSpc>
+                <a:spcPct val="100000"/>
+              </a:lnSpc>
+            </a:pPr>
+            <a:r>
+              <a:rPr lang="en-US" sz="1950" dirty="0" b="1">
+                <a:solidFill>
+                  <a:srgbClr val="C9561F"/>
+                </a:solidFill>
+                <a:latin typeface="Segoe UI"/>
+                <a:cs typeface="Segoe UI"/>
+              </a:rPr>
+              <a:t xml:space="preserve">25</a:t>
+            </a:r>
+            <a:r>
               <a:rPr lang="en-US" sz="1950" dirty="0">
                 <a:solidFill>
                   <a:srgbClr val="16171D"/>
@@ -1817,7 +2041,7 @@
                 <a:latin typeface="Segoe UI"/>
                 <a:cs typeface="Segoe UI"/>
               </a:rPr>
-              <a:t xml:space="preserve">1. Slope (with units): ____</a:t>
+              <a:t xml:space="preserve"> (slope): she saves $25 each month.</a:t>
             </a:r>
             <a:endParaRPr lang="en-US" sz="1950" dirty="0"/>
           </a:p>
@@ -1825,14 +2049,132 @@
       </p:sp>
       <p:sp>
         <p:nvSpPr>
-          <p:cNvPr id="5" name="Shape 5"/>
-          <p:cNvSpPr txBox="1"/>
-          <p:nvPr/>
-        </p:nvSpPr>
-        <p:spPr>
-          <a:xfrm>
-            <a:off x="685800" y="2141982"/>
-            <a:ext cx="3737153" cy="518922"/>
+          <p:cNvPr id="6" name="Shape 6"/>
+          <p:cNvSpPr txBox="1"/>
+          <p:nvPr/>
+        </p:nvSpPr>
+        <p:spPr>
+          <a:xfrm>
+            <a:off x="685800" y="2802636"/>
+            <a:ext cx="10820095" cy="352044"/>
+          </a:xfrm>
+          <a:prstGeom prst="rect">
+            <a:avLst/>
+          </a:prstGeom>
+          <a:noFill/>
+          <a:ln>
+            <a:noFill/>
+          </a:ln>
+        </p:spPr>
+        <p:txBody>
+          <a:bodyPr wrap="square" lIns="36576" tIns="27432" rIns="36576" bIns="27432" anchor="t">
+            <a:noAutofit/>
+          </a:bodyPr>
+          <a:lstStyle/>
+          <a:p>
+            <a:pPr algn="l">
+              <a:lnSpc>
+                <a:spcPct val="100000"/>
+              </a:lnSpc>
+            </a:pPr>
+            <a:r>
+              <a:rPr lang="en-US" sz="1950" dirty="0" b="1">
+                <a:solidFill>
+                  <a:srgbClr val="3050B8"/>
+                </a:solidFill>
+                <a:latin typeface="Segoe UI"/>
+                <a:cs typeface="Segoe UI"/>
+              </a:rPr>
+              <a:t xml:space="preserve">25</a:t>
+            </a:r>
+            <a:r>
+              <a:rPr lang="en-US" sz="1950" dirty="0">
+                <a:solidFill>
+                  <a:srgbClr val="16171D"/>
+                </a:solidFill>
+                <a:latin typeface="Segoe UI"/>
+                <a:cs typeface="Segoe UI"/>
+              </a:rPr>
+              <a:t xml:space="preserve"> (</a:t>
+            </a:r>
+            <a:r>
+              <a:rPr lang="en-US" sz="1950" dirty="0" i="1">
+                <a:solidFill>
+                  <a:srgbClr val="16171D"/>
+                </a:solidFill>
+                <a:latin typeface="Segoe UI"/>
+                <a:cs typeface="Segoe UI"/>
+              </a:rPr>
+              <a:t xml:space="preserve">y</a:t>
+            </a:r>
+            <a:r>
+              <a:rPr lang="en-US" sz="1950" dirty="0">
+                <a:solidFill>
+                  <a:srgbClr val="16171D"/>
+                </a:solidFill>
+                <a:latin typeface="Segoe UI"/>
+                <a:cs typeface="Segoe UI"/>
+              </a:rPr>
+              <a:t xml:space="preserve">-intercept): she started with $25.</a:t>
+            </a:r>
+            <a:endParaRPr lang="en-US" sz="1950" dirty="0"/>
+          </a:p>
+        </p:txBody>
+      </p:sp>
+      <p:sp>
+        <p:nvSpPr>
+          <p:cNvPr id="7" name="Shape 7"/>
+          <p:cNvSpPr txBox="1"/>
+          <p:nvPr/>
+        </p:nvSpPr>
+        <p:spPr>
+          <a:xfrm>
+            <a:off x="685800" y="3326130"/>
+            <a:ext cx="10820095" cy="352044"/>
+          </a:xfrm>
+          <a:prstGeom prst="rect">
+            <a:avLst/>
+          </a:prstGeom>
+          <a:noFill/>
+          <a:ln>
+            <a:noFill/>
+          </a:ln>
+        </p:spPr>
+        <p:txBody>
+          <a:bodyPr wrap="square" lIns="36576" tIns="27432" rIns="36576" bIns="27432" anchor="t">
+            <a:noAutofit/>
+          </a:bodyPr>
+          <a:lstStyle/>
+          <a:p>
+            <a:pPr algn="l">
+              <a:lnSpc>
+                <a:spcPct val="100000"/>
+              </a:lnSpc>
+            </a:pPr>
+            <a:r>
+              <a:rPr lang="en-US" sz="1950" dirty="0">
+                <a:solidFill>
+                  <a:srgbClr val="16171D"/>
+                </a:solidFill>
+                <a:latin typeface="Segoe UI"/>
+                <a:cs typeface="Segoe UI"/>
+              </a:rPr>
+              <a:t xml:space="preserve">Miguel saves $20 a month from $0. Who saves faster?</a:t>
+            </a:r>
+            <a:endParaRPr lang="en-US" sz="1950" dirty="0"/>
+          </a:p>
+        </p:txBody>
+      </p:sp>
+      <p:sp>
+        <p:nvSpPr>
+          <p:cNvPr id="8" name="Shape 8"/>
+          <p:cNvSpPr txBox="1"/>
+          <p:nvPr/>
+        </p:nvSpPr>
+        <p:spPr>
+          <a:xfrm>
+            <a:off x="685800" y="3849624"/>
+            <a:ext cx="4897938" cy="518922"/>
           </a:xfrm>
           <a:prstGeom prst="roundRect">
             <a:avLst>
@@ -1875,7 +2217,7 @@
                 <a:latin typeface="Cambria"/>
                 <a:cs typeface="Cambria"/>
               </a:rPr>
-              <a:t xml:space="preserve">$2 per mile</a:t>
+              <a:t xml:space="preserve">Lauren ($25 &gt; $20)</a:t>
             </a:r>
             <a:endParaRPr lang="en-US" sz="2325" dirty="0"/>
           </a:p>
@@ -1883,14 +2225,205 @@
       </p:sp>
       <p:sp>
         <p:nvSpPr>
-          <p:cNvPr id="6" name="Shape 6"/>
-          <p:cNvSpPr txBox="1"/>
-          <p:nvPr/>
-        </p:nvSpPr>
-        <p:spPr>
-          <a:xfrm>
-            <a:off x="685800" y="2832354"/>
-            <a:ext cx="10820095" cy="352044"/>
+          <p:cNvPr id="9" name="Slide Number 9"/>
+          <p:cNvSpPr txBox="1"/>
+          <p:nvPr/>
+        </p:nvSpPr>
+        <p:spPr>
+          <a:xfrm>
+            <a:off x="11277295" y="6611112"/>
+            <a:ext cx="685800" cy="201168"/>
+          </a:xfrm>
+          <a:prstGeom prst="rect">
+            <a:avLst/>
+          </a:prstGeom>
+          <a:noFill/>
+        </p:spPr>
+        <p:txBody>
+          <a:bodyPr wrap="none" lIns="0" tIns="0" rIns="0" bIns="0" anchor="b">
+            <a:noAutofit/>
+          </a:bodyPr>
+          <a:lstStyle/>
+          <a:p>
+            <a:pPr algn="r"/>
+            <a:fld id="{5C1A6E0B-3B1F-4D5E-9C7A-2F4B8D6E1A90}" type="slidenum">
+              <a:rPr lang="en-US" sz="1200" dirty="0">
+                <a:solidFill>
+                  <a:srgbClr val="5F6272"/>
+                </a:solidFill>
+              </a:rPr>
+              <a:t>10</a:t>
+            </a:fld>
+          </a:p>
+        </p:txBody>
+      </p:sp>
+    </p:spTree>
+  </p:cSld>
+  <p:clrMapOvr>
+    <a:masterClrMapping/>
+  </p:clrMapOvr>
+  <p:transition spd="med">
+    <p:fade/>
+  </p:transition>
+  <p:timing>
+    <p:tnLst>
+      <p:par>
+        <p:cTn id="1" dur="indefinite" restart="never" nodeType="tmRoot">
+          <p:childTnLst>
+            <p:seq concurrent="1" nextAc="seek">
+              <p:cTn id="2" dur="indefinite" nodeType="mainSeq">
+                <p:childTnLst>
+                  <p:par>
+                    <p:cTn id="8" fill="hold">
+                      <p:stCondLst>
+                        <p:cond delay="indefinite"/>
+                      </p:stCondLst>
+                      <p:childTnLst>
+                        <p:par>
+                          <p:cTn id="9" fill="hold">
+                            <p:stCondLst>
+                              <p:cond delay="0"/>
+                            </p:stCondLst>
+                            <p:childTnLst>
+                              <p:par>
+                                <p:cTn id="7" presetID="53" presetClass="entr" presetSubtype="16" fill="hold" nodeType="clickEffect">
+                                  <p:stCondLst>
+                                    <p:cond delay="0"/>
+                                  </p:stCondLst>
+                                  <p:childTnLst>
+                                    <p:set>
+                                      <p:cBhvr>
+                                        <p:cTn id="3" dur="1" fill="hold">
+                                          <p:stCondLst>
+                                            <p:cond delay="0"/>
+                                          </p:stCondLst>
+                                        </p:cTn>
+                                        <p:tgtEl>
+                                          <p:spTgt spid="8"/>
+                                        </p:tgtEl>
+                                        <p:attrNameLst>
+                                          <p:attrName>style.visibility</p:attrName>
+                                        </p:attrNameLst>
+                                      </p:cBhvr>
+                                      <p:to>
+                                        <p:strVal val="visible"/>
+                                      </p:to>
+                                    </p:set>
+                                    <p:animEffect transition="in" filter="fade">
+                                      <p:cBhvr>
+                                        <p:cTn id="4" dur="500"/>
+                                        <p:tgtEl>
+                                          <p:spTgt spid="8"/>
+                                        </p:tgtEl>
+                                      </p:cBhvr>
+                                    </p:animEffect>
+                                    <p:anim calcmode="lin" valueType="num">
+                                      <p:cBhvr>
+                                        <p:cTn id="5" dur="500" fill="hold"/>
+                                        <p:tgtEl>
+                                          <p:spTgt spid="8"/>
+                                        </p:tgtEl>
+                                        <p:attrNameLst>
+                                          <p:attrName>ppt_w</p:attrName>
+                                        </p:attrNameLst>
+                                      </p:cBhvr>
+                                      <p:tavLst>
+                                        <p:tav tm="0">
+                                          <p:val>
+                                            <p:fltVal val="0"/>
+                                          </p:val>
+                                        </p:tav>
+                                        <p:tav tm="100000">
+                                          <p:val>
+                                            <p:strVal val="#ppt_w"/>
+                                          </p:val>
+                                        </p:tav>
+                                      </p:tavLst>
+                                    </p:anim>
+                                    <p:anim calcmode="lin" valueType="num">
+                                      <p:cBhvr>
+                                        <p:cTn id="6" dur="500" fill="hold"/>
+                                        <p:tgtEl>
+                                          <p:spTgt spid="8"/>
+                                        </p:tgtEl>
+                                        <p:attrNameLst>
+                                          <p:attrName>ppt_h</p:attrName>
+                                        </p:attrNameLst>
+                                      </p:cBhvr>
+                                      <p:tavLst>
+                                        <p:tav tm="0">
+                                          <p:val>
+                                            <p:fltVal val="0"/>
+                                          </p:val>
+                                        </p:tav>
+                                        <p:tav tm="100000">
+                                          <p:val>
+                                            <p:strVal val="#ppt_h"/>
+                                          </p:val>
+                                        </p:tav>
+                                      </p:tavLst>
+                                    </p:anim>
+                                  </p:childTnLst>
+                                </p:cTn>
+                              </p:par>
+                            </p:childTnLst>
+                          </p:cTn>
+                        </p:par>
+                      </p:childTnLst>
+                    </p:cTn>
+                  </p:par>
+                </p:childTnLst>
+              </p:cTn>
+              <p:prevCondLst>
+                <p:cond evt="onPrev" delay="0">
+                  <p:tgtEl>
+                    <p:sldTgt/>
+                  </p:tgtEl>
+                </p:cond>
+              </p:prevCondLst>
+              <p:nextCondLst>
+                <p:cond evt="onNext" delay="0">
+                  <p:tgtEl>
+                    <p:sldTgt/>
+                  </p:tgtEl>
+                </p:cond>
+              </p:nextCondLst>
+            </p:seq>
+          </p:childTnLst>
+        </p:cTn>
+      </p:par>
+    </p:tnLst>
+  </p:timing>
+</p:sld>
+</file>
+
+<file path=ppt/slides/slide11.xml><?xml version="1.0" encoding="utf-8"?>
+<p:sld xmlns:a="http://schemas.openxmlformats.org/drawingml/2006/main" xmlns:r="http://schemas.openxmlformats.org/officeDocument/2006/relationships" xmlns:p="http://schemas.openxmlformats.org/presentationml/2006/main">
+  <p:cSld>
+    <p:spTree>
+      <p:nvGrpSpPr>
+        <p:cNvPr id="1" name=""/>
+        <p:cNvGrpSpPr/>
+        <p:nvPr/>
+      </p:nvGrpSpPr>
+      <p:grpSpPr>
+        <a:xfrm>
+          <a:off x="0" y="0"/>
+          <a:ext cx="0" cy="0"/>
+          <a:chOff x="0" y="0"/>
+          <a:chExt cx="0" cy="0"/>
+        </a:xfrm>
+      </p:grpSpPr>
+      <p:sp>
+        <p:nvSpPr>
+          <p:cNvPr id="2" name="Shape 2"/>
+          <p:cNvSpPr txBox="1"/>
+          <p:nvPr/>
+        </p:nvSpPr>
+        <p:spPr>
+          <a:xfrm>
+            <a:off x="685800" y="457200"/>
+            <a:ext cx="10820095" cy="237744"/>
           </a:xfrm>
           <a:prstGeom prst="rect">
             <a:avLst/>
@@ -1912,6 +2445,94 @@
               </a:lnSpc>
             </a:pPr>
             <a:r>
+              <a:rPr lang="en-US" sz="1200" dirty="0" b="1" spc="150" cap="all">
+                <a:solidFill>
+                  <a:srgbClr val="5F6272"/>
+                </a:solidFill>
+                <a:latin typeface="Segoe UI"/>
+                <a:cs typeface="Segoe UI"/>
+              </a:rPr>
+              <a:t xml:space="preserve">You do · Try it</a:t>
+            </a:r>
+            <a:endParaRPr lang="en-US" sz="1200" dirty="0"/>
+          </a:p>
+        </p:txBody>
+      </p:sp>
+      <p:sp>
+        <p:nvSpPr>
+          <p:cNvPr id="3" name="Shape 3"/>
+          <p:cNvSpPr txBox="1"/>
+          <p:nvPr/>
+        </p:nvSpPr>
+        <p:spPr>
+          <a:xfrm>
+            <a:off x="685800" y="866394"/>
+            <a:ext cx="10820095" cy="580644"/>
+          </a:xfrm>
+          <a:prstGeom prst="rect">
+            <a:avLst/>
+          </a:prstGeom>
+          <a:noFill/>
+          <a:ln>
+            <a:noFill/>
+          </a:ln>
+        </p:spPr>
+        <p:txBody>
+          <a:bodyPr wrap="square" lIns="36576" tIns="27432" rIns="36576" bIns="27432" anchor="t">
+            <a:noAutofit/>
+          </a:bodyPr>
+          <a:lstStyle/>
+          <a:p>
+            <a:pPr algn="l">
+              <a:lnSpc>
+                <a:spcPct val="100000"/>
+              </a:lnSpc>
+            </a:pPr>
+            <a:r>
+              <a:rPr lang="en-US" sz="3450" dirty="0" b="1">
+                <a:solidFill>
+                  <a:srgbClr val="16171D"/>
+                </a:solidFill>
+                <a:latin typeface="Segoe UI"/>
+                <a:cs typeface="Segoe UI"/>
+              </a:rPr>
+              <a:t xml:space="preserve">A taxi charges $3 plus $2 per mile</a:t>
+            </a:r>
+            <a:endParaRPr lang="en-US" sz="3450" dirty="0"/>
+          </a:p>
+        </p:txBody>
+      </p:sp>
+      <p:sp>
+        <p:nvSpPr>
+          <p:cNvPr id="4" name="Shape 4"/>
+          <p:cNvSpPr txBox="1"/>
+          <p:nvPr/>
+        </p:nvSpPr>
+        <p:spPr>
+          <a:xfrm>
+            <a:off x="685800" y="1618488"/>
+            <a:ext cx="10820095" cy="352044"/>
+          </a:xfrm>
+          <a:prstGeom prst="rect">
+            <a:avLst/>
+          </a:prstGeom>
+          <a:noFill/>
+          <a:ln>
+            <a:noFill/>
+          </a:ln>
+        </p:spPr>
+        <p:txBody>
+          <a:bodyPr wrap="square" lIns="36576" tIns="27432" rIns="36576" bIns="27432" anchor="t">
+            <a:noAutofit/>
+          </a:bodyPr>
+          <a:lstStyle/>
+          <a:p>
+            <a:pPr algn="l">
+              <a:lnSpc>
+                <a:spcPct val="100000"/>
+              </a:lnSpc>
+            </a:pPr>
+            <a:r>
               <a:rPr lang="en-US" sz="1950" dirty="0">
                 <a:solidFill>
                   <a:srgbClr val="16171D"/>
@@ -1919,27 +2540,7 @@
                 <a:latin typeface="Segoe UI"/>
                 <a:cs typeface="Segoe UI"/>
               </a:rPr>
-              <a:t xml:space="preserve">2. </a:t>
-            </a:r>
-            <a:r>
-              <a:rPr lang="en-US" sz="1950" dirty="0" i="1">
-                <a:solidFill>
-                  <a:srgbClr val="16171D"/>
-                </a:solidFill>
-                <a:latin typeface="Segoe UI"/>
-                <a:cs typeface="Segoe UI"/>
-              </a:rPr>
-              <a:t xml:space="preserve">y</a:t>
-            </a:r>
-            <a:r>
-              <a:rPr lang="en-US" sz="1950" dirty="0">
-                <a:solidFill>
-                  <a:srgbClr val="16171D"/>
-                </a:solidFill>
-                <a:latin typeface="Segoe UI"/>
-                <a:cs typeface="Segoe UI"/>
-              </a:rPr>
-              <a:t xml:space="preserve">-intercept meaning: ____</a:t>
+              <a:t xml:space="preserve">1. Slope (with units): ____</a:t>
             </a:r>
             <a:endParaRPr lang="en-US" sz="1950" dirty="0"/>
           </a:p>
@@ -1947,14 +2548,14 @@
       </p:sp>
       <p:sp>
         <p:nvSpPr>
-          <p:cNvPr id="7" name="Shape 7"/>
-          <p:cNvSpPr txBox="1"/>
-          <p:nvPr/>
-        </p:nvSpPr>
-        <p:spPr>
-          <a:xfrm>
-            <a:off x="685800" y="3355848"/>
-            <a:ext cx="4732111" cy="518922"/>
+          <p:cNvPr id="5" name="Shape 5"/>
+          <p:cNvSpPr txBox="1"/>
+          <p:nvPr/>
+        </p:nvSpPr>
+        <p:spPr>
+          <a:xfrm>
+            <a:off x="685800" y="2141982"/>
+            <a:ext cx="3737153" cy="518922"/>
           </a:xfrm>
           <a:prstGeom prst="roundRect">
             <a:avLst>
@@ -1997,6 +2598,128 @@
                 <a:latin typeface="Cambria"/>
                 <a:cs typeface="Cambria"/>
               </a:rPr>
+              <a:t xml:space="preserve">$2 per mile</a:t>
+            </a:r>
+            <a:endParaRPr lang="en-US" sz="2325" dirty="0"/>
+          </a:p>
+        </p:txBody>
+      </p:sp>
+      <p:sp>
+        <p:nvSpPr>
+          <p:cNvPr id="6" name="Shape 6"/>
+          <p:cNvSpPr txBox="1"/>
+          <p:nvPr/>
+        </p:nvSpPr>
+        <p:spPr>
+          <a:xfrm>
+            <a:off x="685800" y="2832354"/>
+            <a:ext cx="10820095" cy="352044"/>
+          </a:xfrm>
+          <a:prstGeom prst="rect">
+            <a:avLst/>
+          </a:prstGeom>
+          <a:noFill/>
+          <a:ln>
+            <a:noFill/>
+          </a:ln>
+        </p:spPr>
+        <p:txBody>
+          <a:bodyPr wrap="square" lIns="36576" tIns="27432" rIns="36576" bIns="27432" anchor="t">
+            <a:noAutofit/>
+          </a:bodyPr>
+          <a:lstStyle/>
+          <a:p>
+            <a:pPr algn="l">
+              <a:lnSpc>
+                <a:spcPct val="100000"/>
+              </a:lnSpc>
+            </a:pPr>
+            <a:r>
+              <a:rPr lang="en-US" sz="1950" dirty="0">
+                <a:solidFill>
+                  <a:srgbClr val="16171D"/>
+                </a:solidFill>
+                <a:latin typeface="Segoe UI"/>
+                <a:cs typeface="Segoe UI"/>
+              </a:rPr>
+              <a:t xml:space="preserve">2. </a:t>
+            </a:r>
+            <a:r>
+              <a:rPr lang="en-US" sz="1950" dirty="0" i="1">
+                <a:solidFill>
+                  <a:srgbClr val="16171D"/>
+                </a:solidFill>
+                <a:latin typeface="Segoe UI"/>
+                <a:cs typeface="Segoe UI"/>
+              </a:rPr>
+              <a:t xml:space="preserve">y</a:t>
+            </a:r>
+            <a:r>
+              <a:rPr lang="en-US" sz="1950" dirty="0">
+                <a:solidFill>
+                  <a:srgbClr val="16171D"/>
+                </a:solidFill>
+                <a:latin typeface="Segoe UI"/>
+                <a:cs typeface="Segoe UI"/>
+              </a:rPr>
+              <a:t xml:space="preserve">-intercept meaning: ____</a:t>
+            </a:r>
+            <a:endParaRPr lang="en-US" sz="1950" dirty="0"/>
+          </a:p>
+        </p:txBody>
+      </p:sp>
+      <p:sp>
+        <p:nvSpPr>
+          <p:cNvPr id="7" name="Shape 7"/>
+          <p:cNvSpPr txBox="1"/>
+          <p:nvPr/>
+        </p:nvSpPr>
+        <p:spPr>
+          <a:xfrm>
+            <a:off x="685800" y="3355848"/>
+            <a:ext cx="4732111" cy="518922"/>
+          </a:xfrm>
+          <a:prstGeom prst="roundRect">
+            <a:avLst>
+              <a:gd name="adj" fmla="val 8000"/>
+            </a:avLst>
+          </a:prstGeom>
+          <a:solidFill>
+            <a:srgbClr val="EDF5E9"/>
+          </a:solidFill>
+          <a:ln>
+            <a:noFill/>
+          </a:ln>
+        </p:spPr>
+        <p:txBody>
+          <a:bodyPr wrap="square" lIns="164592" tIns="64008" rIns="164592" bIns="64008" anchor="ctr">
+            <a:noAutofit/>
+          </a:bodyPr>
+          <a:lstStyle/>
+          <a:p>
+            <a:pPr algn="l">
+              <a:lnSpc>
+                <a:spcPct val="100000"/>
+              </a:lnSpc>
+            </a:pPr>
+            <a:r>
+              <a:rPr lang="en-US" sz="1125" dirty="0" b="1" spc="100">
+                <a:solidFill>
+                  <a:srgbClr val="4F8A3C"/>
+                </a:solidFill>
+                <a:latin typeface="Segoe UI"/>
+                <a:cs typeface="Segoe UI"/>
+              </a:rPr>
+              <a:t xml:space="preserve">ANSWER   </a:t>
+            </a:r>
+            <a:r>
+              <a:rPr lang="en-US" sz="2325" dirty="0">
+                <a:solidFill>
+                  <a:srgbClr val="16171D"/>
+                </a:solidFill>
+                <a:latin typeface="Cambria"/>
+                <a:cs typeface="Cambria"/>
+              </a:rPr>
               <a:t xml:space="preserve">$3 before driving</a:t>
             </a:r>
             <a:endParaRPr lang="en-US" sz="2325" dirty="0"/>
@@ -2032,7 +2755,7 @@
                   <a:srgbClr val="5F6272"/>
                 </a:solidFill>
               </a:rPr>
-              <a:t>10</a:t>
+              <a:t>11</a:t>
             </a:fld>
           </a:p>
         </p:txBody>
@@ -2276,7 +2999,7 @@
 </p:sld>
 </file>
 
-<file path=ppt/slides/slide11.xml><?xml version="1.0" encoding="utf-8"?>
+<file path=ppt/slides/slide12.xml><?xml version="1.0" encoding="utf-8"?>
 <p:sld xmlns:a="http://schemas.openxmlformats.org/drawingml/2006/main" xmlns:r="http://schemas.openxmlformats.org/officeDocument/2006/relationships" xmlns:p="http://schemas.openxmlformats.org/presentationml/2006/main">
   <p:cSld>
     <p:spTree>
@@ -2331,7 +3054,7 @@
                 <a:latin typeface="Segoe UI"/>
                 <a:cs typeface="Segoe UI"/>
               </a:rPr>
-              <a:t xml:space="preserve">Exit Ticket</a:t>
+              <a:t xml:space="preserve">Check it · Step by step</a:t>
             </a:r>
             <a:endParaRPr lang="en-US" sz="1200" dirty="0"/>
           </a:p>
@@ -2375,7 +3098,7 @@
                 <a:latin typeface="Segoe UI"/>
                 <a:cs typeface="Segoe UI"/>
               </a:rPr>
-              <a:t xml:space="preserve">Show what you know</a:t>
+              <a:t xml:space="preserve">A taxi charges $3 plus $2 per mile</a:t>
             </a:r>
             <a:endParaRPr lang="en-US" sz="3450" dirty="0"/>
           </a:p>
@@ -2383,14 +3106,14 @@
       </p:sp>
       <p:sp>
         <p:nvSpPr>
-          <p:cNvPr id="6" name="Shape 6"/>
+          <p:cNvPr id="9" name="Shape 9"/>
           <p:cNvSpPr txBox="1"/>
           <p:nvPr/>
         </p:nvSpPr>
         <p:spPr>
           <a:xfrm>
             <a:off x="685800" y="1618488"/>
-            <a:ext cx="10820095" cy="1309116"/>
+            <a:ext cx="5295748" cy="2982468"/>
           </a:xfrm>
           <a:prstGeom prst="roundRect">
             <a:avLst>
@@ -2430,7 +3153,7 @@
         <p:spPr>
           <a:xfrm>
             <a:off x="895350" y="1789938"/>
-            <a:ext cx="10400995" cy="352044"/>
+            <a:ext cx="4876648" cy="374904"/>
           </a:xfrm>
           <a:prstGeom prst="rect">
             <a:avLst/>
@@ -2452,16 +3175,16 @@
               </a:lnSpc>
             </a:pPr>
             <a:r>
-              <a:rPr lang="en-US" sz="1950" dirty="0">
-                <a:solidFill>
-                  <a:srgbClr val="16171D"/>
-                </a:solidFill>
-                <a:latin typeface="Segoe UI"/>
-                <a:cs typeface="Segoe UI"/>
-              </a:rPr>
-              <a:t xml:space="preserve">1. A table has (0, 1) and (2, 9). What is its slope?</a:t>
-            </a:r>
-            <a:endParaRPr lang="en-US" sz="1950" dirty="0"/>
+              <a:rPr lang="en-US" sz="2100" dirty="0" b="1">
+                <a:solidFill>
+                  <a:srgbClr val="16171D"/>
+                </a:solidFill>
+                <a:latin typeface="Segoe UI"/>
+                <a:cs typeface="Segoe UI"/>
+              </a:rPr>
+              <a:t xml:space="preserve">1. Slope (with units)</a:t>
+            </a:r>
+            <a:endParaRPr lang="en-US" sz="2100" dirty="0"/>
           </a:p>
         </p:txBody>
       </p:sp>
@@ -2473,8 +3196,190 @@
         </p:nvSpPr>
         <p:spPr>
           <a:xfrm>
-            <a:off x="895350" y="2237232"/>
-            <a:ext cx="2078888" cy="518922"/>
+            <a:off x="895350" y="2260092"/>
+            <a:ext cx="4876648" cy="294894"/>
+          </a:xfrm>
+          <a:prstGeom prst="rect">
+            <a:avLst/>
+          </a:prstGeom>
+          <a:noFill/>
+          <a:ln>
+            <a:noFill/>
+          </a:ln>
+        </p:spPr>
+        <p:txBody>
+          <a:bodyPr wrap="square" lIns="36576" tIns="27432" rIns="36576" bIns="27432" anchor="t">
+            <a:noAutofit/>
+          </a:bodyPr>
+          <a:lstStyle/>
+          <a:p>
+            <a:pPr algn="l">
+              <a:lnSpc>
+                <a:spcPct val="100000"/>
+              </a:lnSpc>
+            </a:pPr>
+            <a:r>
+              <a:rPr lang="en-US" sz="1575" dirty="0" b="1">
+                <a:solidFill>
+                  <a:srgbClr val="16171D"/>
+                </a:solidFill>
+                <a:latin typeface="Segoe UI"/>
+                <a:cs typeface="Segoe UI"/>
+              </a:rPr>
+              <a:t xml:space="preserve">Step 1.</a:t>
+            </a:r>
+            <a:r>
+              <a:rPr lang="en-US" sz="1575" dirty="0">
+                <a:solidFill>
+                  <a:srgbClr val="16171D"/>
+                </a:solidFill>
+                <a:latin typeface="Segoe UI"/>
+                <a:cs typeface="Segoe UI"/>
+              </a:rPr>
+              <a:t xml:space="preserve"> Look for "per": $2 </a:t>
+            </a:r>
+            <a:r>
+              <a:rPr lang="en-US" sz="1575" dirty="0" b="1">
+                <a:solidFill>
+                  <a:srgbClr val="16171D"/>
+                </a:solidFill>
+                <a:latin typeface="Segoe UI"/>
+                <a:cs typeface="Segoe UI"/>
+              </a:rPr>
+              <a:t xml:space="preserve">per</a:t>
+            </a:r>
+            <a:r>
+              <a:rPr lang="en-US" sz="1575" dirty="0">
+                <a:solidFill>
+                  <a:srgbClr val="16171D"/>
+                </a:solidFill>
+                <a:latin typeface="Segoe UI"/>
+                <a:cs typeface="Segoe UI"/>
+              </a:rPr>
+              <a:t xml:space="preserve"> mile.</a:t>
+            </a:r>
+            <a:endParaRPr lang="en-US" sz="1575" dirty="0"/>
+          </a:p>
+        </p:txBody>
+      </p:sp>
+      <p:sp>
+        <p:nvSpPr>
+          <p:cNvPr id="6" name="Shape 6"/>
+          <p:cNvSpPr txBox="1"/>
+          <p:nvPr/>
+        </p:nvSpPr>
+        <p:spPr>
+          <a:xfrm>
+            <a:off x="895350" y="2650236"/>
+            <a:ext cx="4876648" cy="534924"/>
+          </a:xfrm>
+          <a:prstGeom prst="rect">
+            <a:avLst/>
+          </a:prstGeom>
+          <a:noFill/>
+          <a:ln>
+            <a:noFill/>
+          </a:ln>
+        </p:spPr>
+        <p:txBody>
+          <a:bodyPr wrap="square" lIns="36576" tIns="27432" rIns="36576" bIns="27432" anchor="t">
+            <a:noAutofit/>
+          </a:bodyPr>
+          <a:lstStyle/>
+          <a:p>
+            <a:pPr algn="l">
+              <a:lnSpc>
+                <a:spcPct val="100000"/>
+              </a:lnSpc>
+            </a:pPr>
+            <a:r>
+              <a:rPr lang="en-US" sz="1575" dirty="0" b="1">
+                <a:solidFill>
+                  <a:srgbClr val="16171D"/>
+                </a:solidFill>
+                <a:latin typeface="Segoe UI"/>
+                <a:cs typeface="Segoe UI"/>
+              </a:rPr>
+              <a:t xml:space="preserve">Step 2.</a:t>
+            </a:r>
+            <a:r>
+              <a:rPr lang="en-US" sz="1575" dirty="0">
+                <a:solidFill>
+                  <a:srgbClr val="16171D"/>
+                </a:solidFill>
+                <a:latin typeface="Segoe UI"/>
+                <a:cs typeface="Segoe UI"/>
+              </a:rPr>
+              <a:t xml:space="preserve"> The slope is how much the cost goes up for each 1 mile: $2.</a:t>
+            </a:r>
+            <a:endParaRPr lang="en-US" sz="1575" dirty="0"/>
+          </a:p>
+        </p:txBody>
+      </p:sp>
+      <p:sp>
+        <p:nvSpPr>
+          <p:cNvPr id="7" name="Shape 7"/>
+          <p:cNvSpPr txBox="1"/>
+          <p:nvPr/>
+        </p:nvSpPr>
+        <p:spPr>
+          <a:xfrm>
+            <a:off x="895350" y="3280410"/>
+            <a:ext cx="4876648" cy="534924"/>
+          </a:xfrm>
+          <a:prstGeom prst="rect">
+            <a:avLst/>
+          </a:prstGeom>
+          <a:noFill/>
+          <a:ln>
+            <a:noFill/>
+          </a:ln>
+        </p:spPr>
+        <p:txBody>
+          <a:bodyPr wrap="square" lIns="36576" tIns="27432" rIns="36576" bIns="27432" anchor="t">
+            <a:noAutofit/>
+          </a:bodyPr>
+          <a:lstStyle/>
+          <a:p>
+            <a:pPr algn="l">
+              <a:lnSpc>
+                <a:spcPct val="100000"/>
+              </a:lnSpc>
+            </a:pPr>
+            <a:r>
+              <a:rPr lang="en-US" sz="1575" dirty="0" b="1">
+                <a:solidFill>
+                  <a:srgbClr val="16171D"/>
+                </a:solidFill>
+                <a:latin typeface="Segoe UI"/>
+                <a:cs typeface="Segoe UI"/>
+              </a:rPr>
+              <a:t xml:space="preserve">Step 3.</a:t>
+            </a:r>
+            <a:r>
+              <a:rPr lang="en-US" sz="1575" dirty="0">
+                <a:solidFill>
+                  <a:srgbClr val="16171D"/>
+                </a:solidFill>
+                <a:latin typeface="Segoe UI"/>
+                <a:cs typeface="Segoe UI"/>
+              </a:rPr>
+              <a:t xml:space="preserve"> Units: output (dollars) per input (miles).</a:t>
+            </a:r>
+            <a:endParaRPr lang="en-US" sz="1575" dirty="0"/>
+          </a:p>
+        </p:txBody>
+      </p:sp>
+      <p:sp>
+        <p:nvSpPr>
+          <p:cNvPr id="8" name="Shape 8"/>
+          <p:cNvSpPr txBox="1"/>
+          <p:nvPr/>
+        </p:nvSpPr>
+        <p:spPr>
+          <a:xfrm>
+            <a:off x="895350" y="3910584"/>
+            <a:ext cx="3737153" cy="518922"/>
           </a:xfrm>
           <a:prstGeom prst="roundRect">
             <a:avLst>
@@ -2517,7 +3422,7 @@
                 <a:latin typeface="Cambria"/>
                 <a:cs typeface="Cambria"/>
               </a:rPr>
-              <a:t xml:space="preserve">4</a:t>
+              <a:t xml:space="preserve">$2 per mile</a:t>
             </a:r>
             <a:endParaRPr lang="en-US" sz="2325" dirty="0"/>
           </a:p>
@@ -2525,14 +3430,14 @@
       </p:sp>
       <p:sp>
         <p:nvSpPr>
-          <p:cNvPr id="9" name="Shape 9"/>
-          <p:cNvSpPr txBox="1"/>
-          <p:nvPr/>
-        </p:nvSpPr>
-        <p:spPr>
-          <a:xfrm>
-            <a:off x="685800" y="3060954"/>
-            <a:ext cx="10820095" cy="1309116"/>
+          <p:cNvPr id="15" name="Shape 15"/>
+          <p:cNvSpPr txBox="1"/>
+          <p:nvPr/>
+        </p:nvSpPr>
+        <p:spPr>
+          <a:xfrm>
+            <a:off x="6210148" y="1618488"/>
+            <a:ext cx="5295748" cy="2982468"/>
           </a:xfrm>
           <a:prstGeom prst="roundRect">
             <a:avLst>
@@ -2565,14 +3470,14 @@
       </p:sp>
       <p:sp>
         <p:nvSpPr>
-          <p:cNvPr id="7" name="Shape 7"/>
-          <p:cNvSpPr txBox="1"/>
-          <p:nvPr/>
-        </p:nvSpPr>
-        <p:spPr>
-          <a:xfrm>
-            <a:off x="895350" y="3232404"/>
-            <a:ext cx="10400995" cy="352044"/>
+          <p:cNvPr id="10" name="Shape 10"/>
+          <p:cNvSpPr txBox="1"/>
+          <p:nvPr/>
+        </p:nvSpPr>
+        <p:spPr>
+          <a:xfrm>
+            <a:off x="6419698" y="1789938"/>
+            <a:ext cx="4876648" cy="374904"/>
           </a:xfrm>
           <a:prstGeom prst="rect">
             <a:avLst/>
@@ -2594,17 +3499,17 @@
               </a:lnSpc>
             </a:pPr>
             <a:r>
-              <a:rPr lang="en-US" sz="1950" dirty="0">
-                <a:solidFill>
-                  <a:srgbClr val="16171D"/>
-                </a:solidFill>
-                <a:latin typeface="Segoe UI"/>
-                <a:cs typeface="Segoe UI"/>
-              </a:rPr>
-              <a:t xml:space="preserve">2. Is </a:t>
-            </a:r>
-            <a:r>
-              <a:rPr lang="en-US" sz="1950" dirty="0" i="1">
+              <a:rPr lang="en-US" sz="2100" dirty="0" b="1">
+                <a:solidFill>
+                  <a:srgbClr val="16171D"/>
+                </a:solidFill>
+                <a:latin typeface="Segoe UI"/>
+                <a:cs typeface="Segoe UI"/>
+              </a:rPr>
+              <a:t xml:space="preserve">2. What the </a:t>
+            </a:r>
+            <a:r>
+              <a:rPr lang="en-US" sz="2100" dirty="0" b="1" i="1">
                 <a:solidFill>
                   <a:srgbClr val="16171D"/>
                 </a:solidFill>
@@ -2614,17 +3519,91 @@
               <a:t xml:space="preserve">y</a:t>
             </a:r>
             <a:r>
-              <a:rPr lang="en-US" sz="1950" dirty="0">
-                <a:solidFill>
-                  <a:srgbClr val="16171D"/>
-                </a:solidFill>
-                <a:latin typeface="Segoe UI"/>
-                <a:cs typeface="Segoe UI"/>
-              </a:rPr>
-              <a:t xml:space="preserve"> = 4</a:t>
-            </a:r>
-            <a:r>
-              <a:rPr lang="en-US" sz="1950" dirty="0" i="1">
+              <a:rPr lang="en-US" sz="2100" dirty="0" b="1">
+                <a:solidFill>
+                  <a:srgbClr val="16171D"/>
+                </a:solidFill>
+                <a:latin typeface="Segoe UI"/>
+                <a:cs typeface="Segoe UI"/>
+              </a:rPr>
+              <a:t xml:space="preserve">-intercept means</a:t>
+            </a:r>
+            <a:endParaRPr lang="en-US" sz="2100" dirty="0"/>
+          </a:p>
+        </p:txBody>
+      </p:sp>
+      <p:sp>
+        <p:nvSpPr>
+          <p:cNvPr id="11" name="Shape 11"/>
+          <p:cNvSpPr txBox="1"/>
+          <p:nvPr/>
+        </p:nvSpPr>
+        <p:spPr>
+          <a:xfrm>
+            <a:off x="6419698" y="2260092"/>
+            <a:ext cx="4876648" cy="534924"/>
+          </a:xfrm>
+          <a:prstGeom prst="rect">
+            <a:avLst/>
+          </a:prstGeom>
+          <a:noFill/>
+          <a:ln>
+            <a:noFill/>
+          </a:ln>
+        </p:spPr>
+        <p:txBody>
+          <a:bodyPr wrap="square" lIns="36576" tIns="27432" rIns="36576" bIns="27432" anchor="t">
+            <a:noAutofit/>
+          </a:bodyPr>
+          <a:lstStyle/>
+          <a:p>
+            <a:pPr algn="l">
+              <a:lnSpc>
+                <a:spcPct val="100000"/>
+              </a:lnSpc>
+            </a:pPr>
+            <a:r>
+              <a:rPr lang="en-US" sz="1575" dirty="0" b="1">
+                <a:solidFill>
+                  <a:srgbClr val="16171D"/>
+                </a:solidFill>
+                <a:latin typeface="Segoe UI"/>
+                <a:cs typeface="Segoe UI"/>
+              </a:rPr>
+              <a:t xml:space="preserve">Step 1.</a:t>
+            </a:r>
+            <a:r>
+              <a:rPr lang="en-US" sz="1575" dirty="0">
+                <a:solidFill>
+                  <a:srgbClr val="16171D"/>
+                </a:solidFill>
+                <a:latin typeface="Segoe UI"/>
+                <a:cs typeface="Segoe UI"/>
+              </a:rPr>
+              <a:t xml:space="preserve"> The </a:t>
+            </a:r>
+            <a:r>
+              <a:rPr lang="en-US" sz="1575" dirty="0" i="1">
+                <a:solidFill>
+                  <a:srgbClr val="16171D"/>
+                </a:solidFill>
+                <a:latin typeface="Segoe UI"/>
+                <a:cs typeface="Segoe UI"/>
+              </a:rPr>
+              <a:t xml:space="preserve">y</a:t>
+            </a:r>
+            <a:r>
+              <a:rPr lang="en-US" sz="1575" dirty="0">
+                <a:solidFill>
+                  <a:srgbClr val="16171D"/>
+                </a:solidFill>
+                <a:latin typeface="Segoe UI"/>
+                <a:cs typeface="Segoe UI"/>
+              </a:rPr>
+              <a:t xml:space="preserve">-intercept is the cost when </a:t>
+            </a:r>
+            <a:r>
+              <a:rPr lang="en-US" sz="1575" dirty="0" i="1">
                 <a:solidFill>
                   <a:srgbClr val="16171D"/>
                 </a:solidFill>
@@ -2634,17 +3613,125 @@
               <a:t xml:space="preserve">x</a:t>
             </a:r>
             <a:r>
-              <a:rPr lang="en-US" sz="1950" dirty="0">
-                <a:solidFill>
-                  <a:srgbClr val="16171D"/>
-                </a:solidFill>
-                <a:latin typeface="Segoe UI"/>
-                <a:cs typeface="Segoe UI"/>
-              </a:rPr>
-              <a:t xml:space="preserve"> + 7 parallel or perpendicular to </a:t>
-            </a:r>
-            <a:r>
-              <a:rPr lang="en-US" sz="1950" dirty="0" i="1">
+              <a:rPr lang="en-US" sz="1575" dirty="0">
+                <a:solidFill>
+                  <a:srgbClr val="16171D"/>
+                </a:solidFill>
+                <a:latin typeface="Segoe UI"/>
+                <a:cs typeface="Segoe UI"/>
+              </a:rPr>
+              <a:t xml:space="preserve"> = 0 miles.</a:t>
+            </a:r>
+            <a:endParaRPr lang="en-US" sz="1575" dirty="0"/>
+          </a:p>
+        </p:txBody>
+      </p:sp>
+      <p:sp>
+        <p:nvSpPr>
+          <p:cNvPr id="12" name="Shape 12"/>
+          <p:cNvSpPr txBox="1"/>
+          <p:nvPr/>
+        </p:nvSpPr>
+        <p:spPr>
+          <a:xfrm>
+            <a:off x="6419698" y="2890266"/>
+            <a:ext cx="4876648" cy="294894"/>
+          </a:xfrm>
+          <a:prstGeom prst="rect">
+            <a:avLst/>
+          </a:prstGeom>
+          <a:noFill/>
+          <a:ln>
+            <a:noFill/>
+          </a:ln>
+        </p:spPr>
+        <p:txBody>
+          <a:bodyPr wrap="square" lIns="36576" tIns="27432" rIns="36576" bIns="27432" anchor="t">
+            <a:noAutofit/>
+          </a:bodyPr>
+          <a:lstStyle/>
+          <a:p>
+            <a:pPr algn="l">
+              <a:lnSpc>
+                <a:spcPct val="100000"/>
+              </a:lnSpc>
+            </a:pPr>
+            <a:r>
+              <a:rPr lang="en-US" sz="1575" dirty="0" b="1">
+                <a:solidFill>
+                  <a:srgbClr val="16171D"/>
+                </a:solidFill>
+                <a:latin typeface="Segoe UI"/>
+                <a:cs typeface="Segoe UI"/>
+              </a:rPr>
+              <a:t xml:space="preserve">Step 2.</a:t>
+            </a:r>
+            <a:r>
+              <a:rPr lang="en-US" sz="1575" dirty="0">
+                <a:solidFill>
+                  <a:srgbClr val="16171D"/>
+                </a:solidFill>
+                <a:latin typeface="Segoe UI"/>
+                <a:cs typeface="Segoe UI"/>
+              </a:rPr>
+              <a:t xml:space="preserve"> At 0 miles you still pay the $3.</a:t>
+            </a:r>
+            <a:endParaRPr lang="en-US" sz="1575" dirty="0"/>
+          </a:p>
+        </p:txBody>
+      </p:sp>
+      <p:sp>
+        <p:nvSpPr>
+          <p:cNvPr id="13" name="Shape 13"/>
+          <p:cNvSpPr txBox="1"/>
+          <p:nvPr/>
+        </p:nvSpPr>
+        <p:spPr>
+          <a:xfrm>
+            <a:off x="6419698" y="3280410"/>
+            <a:ext cx="4876648" cy="534924"/>
+          </a:xfrm>
+          <a:prstGeom prst="rect">
+            <a:avLst/>
+          </a:prstGeom>
+          <a:noFill/>
+          <a:ln>
+            <a:noFill/>
+          </a:ln>
+        </p:spPr>
+        <p:txBody>
+          <a:bodyPr wrap="square" lIns="36576" tIns="27432" rIns="36576" bIns="27432" anchor="t">
+            <a:noAutofit/>
+          </a:bodyPr>
+          <a:lstStyle/>
+          <a:p>
+            <a:pPr algn="l">
+              <a:lnSpc>
+                <a:spcPct val="100000"/>
+              </a:lnSpc>
+            </a:pPr>
+            <a:r>
+              <a:rPr lang="en-US" sz="1575" dirty="0" b="1">
+                <a:solidFill>
+                  <a:srgbClr val="16171D"/>
+                </a:solidFill>
+                <a:latin typeface="Segoe UI"/>
+                <a:cs typeface="Segoe UI"/>
+              </a:rPr>
+              <a:t xml:space="preserve">Step 3.</a:t>
+            </a:r>
+            <a:r>
+              <a:rPr lang="en-US" sz="1575" dirty="0">
+                <a:solidFill>
+                  <a:srgbClr val="16171D"/>
+                </a:solidFill>
+                <a:latin typeface="Segoe UI"/>
+                <a:cs typeface="Segoe UI"/>
+              </a:rPr>
+              <a:t xml:space="preserve"> So the equation is </a:t>
+            </a:r>
+            <a:r>
+              <a:rPr lang="en-US" sz="1575" dirty="0" i="1">
                 <a:solidFill>
                   <a:srgbClr val="16171D"/>
                 </a:solidFill>
@@ -2654,17 +3741,17 @@
               <a:t xml:space="preserve">y</a:t>
             </a:r>
             <a:r>
-              <a:rPr lang="en-US" sz="1950" dirty="0">
-                <a:solidFill>
-                  <a:srgbClr val="16171D"/>
-                </a:solidFill>
-                <a:latin typeface="Segoe UI"/>
-                <a:cs typeface="Segoe UI"/>
-              </a:rPr>
-              <a:t xml:space="preserve"> = 4</a:t>
-            </a:r>
-            <a:r>
-              <a:rPr lang="en-US" sz="1950" dirty="0" i="1">
+              <a:rPr lang="en-US" sz="1575" dirty="0">
+                <a:solidFill>
+                  <a:srgbClr val="16171D"/>
+                </a:solidFill>
+                <a:latin typeface="Segoe UI"/>
+                <a:cs typeface="Segoe UI"/>
+              </a:rPr>
+              <a:t xml:space="preserve"> = 2</a:t>
+            </a:r>
+            <a:r>
+              <a:rPr lang="en-US" sz="1575" dirty="0" i="1">
                 <a:solidFill>
                   <a:srgbClr val="16171D"/>
                 </a:solidFill>
@@ -2674,29 +3761,29 @@
               <a:t xml:space="preserve">x</a:t>
             </a:r>
             <a:r>
-              <a:rPr lang="en-US" sz="1950" dirty="0">
-                <a:solidFill>
-                  <a:srgbClr val="16171D"/>
-                </a:solidFill>
-                <a:latin typeface="Segoe UI"/>
-                <a:cs typeface="Segoe UI"/>
-              </a:rPr>
-              <a:t xml:space="preserve"> − 3?</a:t>
-            </a:r>
-            <a:endParaRPr lang="en-US" sz="1950" dirty="0"/>
-          </a:p>
-        </p:txBody>
-      </p:sp>
-      <p:sp>
-        <p:nvSpPr>
-          <p:cNvPr id="8" name="Shape 8"/>
-          <p:cNvSpPr txBox="1"/>
-          <p:nvPr/>
-        </p:nvSpPr>
-        <p:spPr>
-          <a:xfrm>
-            <a:off x="895350" y="3679698"/>
-            <a:ext cx="3239673" cy="518922"/>
+              <a:rPr lang="en-US" sz="1575" dirty="0">
+                <a:solidFill>
+                  <a:srgbClr val="16171D"/>
+                </a:solidFill>
+                <a:latin typeface="Segoe UI"/>
+                <a:cs typeface="Segoe UI"/>
+              </a:rPr>
+              <a:t xml:space="preserve"> + 3, and 3 is the start.</a:t>
+            </a:r>
+            <a:endParaRPr lang="en-US" sz="1575" dirty="0"/>
+          </a:p>
+        </p:txBody>
+      </p:sp>
+      <p:sp>
+        <p:nvSpPr>
+          <p:cNvPr id="14" name="Shape 14"/>
+          <p:cNvSpPr txBox="1"/>
+          <p:nvPr/>
+        </p:nvSpPr>
+        <p:spPr>
+          <a:xfrm>
+            <a:off x="6419698" y="3910584"/>
+            <a:ext cx="4732111" cy="518922"/>
           </a:xfrm>
           <a:prstGeom prst="roundRect">
             <a:avLst>
@@ -2739,7 +3826,7 @@
                 <a:latin typeface="Cambria"/>
                 <a:cs typeface="Cambria"/>
               </a:rPr>
-              <a:t xml:space="preserve">parallel</a:t>
+              <a:t xml:space="preserve">$3 before driving</a:t>
             </a:r>
             <a:endParaRPr lang="en-US" sz="2325" dirty="0"/>
           </a:p>
@@ -2747,13 +3834,985 @@
       </p:sp>
       <p:sp>
         <p:nvSpPr>
-          <p:cNvPr id="12" name="Shape 12"/>
-          <p:cNvSpPr txBox="1"/>
-          <p:nvPr/>
-        </p:nvSpPr>
-        <p:spPr>
-          <a:xfrm>
-            <a:off x="685800" y="4503420"/>
+          <p:cNvPr id="16" name="Slide Number 16"/>
+          <p:cNvSpPr txBox="1"/>
+          <p:nvPr/>
+        </p:nvSpPr>
+        <p:spPr>
+          <a:xfrm>
+            <a:off x="11277295" y="6611112"/>
+            <a:ext cx="685800" cy="201168"/>
+          </a:xfrm>
+          <a:prstGeom prst="rect">
+            <a:avLst/>
+          </a:prstGeom>
+          <a:noFill/>
+        </p:spPr>
+        <p:txBody>
+          <a:bodyPr wrap="none" lIns="0" tIns="0" rIns="0" bIns="0" anchor="b">
+            <a:noAutofit/>
+          </a:bodyPr>
+          <a:lstStyle/>
+          <a:p>
+            <a:pPr algn="r"/>
+            <a:fld id="{5C1A6E0B-3B1F-4D5E-9C7A-2F4B8D6E1A90}" type="slidenum">
+              <a:rPr lang="en-US" sz="1200" dirty="0">
+                <a:solidFill>
+                  <a:srgbClr val="5F6272"/>
+                </a:solidFill>
+              </a:rPr>
+              <a:t>12</a:t>
+            </a:fld>
+          </a:p>
+        </p:txBody>
+      </p:sp>
+    </p:spTree>
+  </p:cSld>
+  <p:clrMapOvr>
+    <a:masterClrMapping/>
+  </p:clrMapOvr>
+  <p:transition spd="med">
+    <p:fade/>
+  </p:transition>
+  <p:timing>
+    <p:tnLst>
+      <p:par>
+        <p:cTn id="1" dur="indefinite" restart="never" nodeType="tmRoot">
+          <p:childTnLst>
+            <p:seq concurrent="1" nextAc="seek">
+              <p:cTn id="2" dur="indefinite" nodeType="mainSeq">
+                <p:childTnLst>
+                  <p:par>
+                    <p:cTn id="8" fill="hold">
+                      <p:stCondLst>
+                        <p:cond delay="indefinite"/>
+                      </p:stCondLst>
+                      <p:childTnLst>
+                        <p:par>
+                          <p:cTn id="9" fill="hold">
+                            <p:stCondLst>
+                              <p:cond delay="0"/>
+                            </p:stCondLst>
+                            <p:childTnLst>
+                              <p:par>
+                                <p:cTn id="7" presetID="42" presetClass="entr" presetSubtype="0" fill="hold" nodeType="clickEffect">
+                                  <p:stCondLst>
+                                    <p:cond delay="0"/>
+                                  </p:stCondLst>
+                                  <p:childTnLst>
+                                    <p:set>
+                                      <p:cBhvr>
+                                        <p:cTn id="3" dur="1" fill="hold">
+                                          <p:stCondLst>
+                                            <p:cond delay="0"/>
+                                          </p:stCondLst>
+                                        </p:cTn>
+                                        <p:tgtEl>
+                                          <p:spTgt spid="5"/>
+                                        </p:tgtEl>
+                                        <p:attrNameLst>
+                                          <p:attrName>style.visibility</p:attrName>
+                                        </p:attrNameLst>
+                                      </p:cBhvr>
+                                      <p:to>
+                                        <p:strVal val="visible"/>
+                                      </p:to>
+                                    </p:set>
+                                    <p:animEffect transition="in" filter="fade">
+                                      <p:cBhvr>
+                                        <p:cTn id="4" dur="500"/>
+                                        <p:tgtEl>
+                                          <p:spTgt spid="5"/>
+                                        </p:tgtEl>
+                                      </p:cBhvr>
+                                    </p:animEffect>
+                                    <p:anim calcmode="lin" valueType="num">
+                                      <p:cBhvr>
+                                        <p:cTn id="5" dur="500" fill="hold"/>
+                                        <p:tgtEl>
+                                          <p:spTgt spid="5"/>
+                                        </p:tgtEl>
+                                        <p:attrNameLst>
+                                          <p:attrName>ppt_x</p:attrName>
+                                        </p:attrNameLst>
+                                      </p:cBhvr>
+                                      <p:tavLst>
+                                        <p:tav tm="0">
+                                          <p:val>
+                                            <p:strVal val="#ppt_x"/>
+                                          </p:val>
+                                        </p:tav>
+                                        <p:tav tm="100000">
+                                          <p:val>
+                                            <p:strVal val="#ppt_x"/>
+                                          </p:val>
+                                        </p:tav>
+                                      </p:tavLst>
+                                    </p:anim>
+                                    <p:anim calcmode="lin" valueType="num">
+                                      <p:cBhvr>
+                                        <p:cTn id="6" dur="500" fill="hold"/>
+                                        <p:tgtEl>
+                                          <p:spTgt spid="5"/>
+                                        </p:tgtEl>
+                                        <p:attrNameLst>
+                                          <p:attrName>ppt_y</p:attrName>
+                                        </p:attrNameLst>
+                                      </p:cBhvr>
+                                      <p:tavLst>
+                                        <p:tav tm="0">
+                                          <p:val>
+                                            <p:strVal val="#ppt_y+.1"/>
+                                          </p:val>
+                                        </p:tav>
+                                        <p:tav tm="100000">
+                                          <p:val>
+                                            <p:strVal val="#ppt_y"/>
+                                          </p:val>
+                                        </p:tav>
+                                      </p:tavLst>
+                                    </p:anim>
+                                  </p:childTnLst>
+                                </p:cTn>
+                              </p:par>
+                            </p:childTnLst>
+                          </p:cTn>
+                        </p:par>
+                      </p:childTnLst>
+                    </p:cTn>
+                  </p:par>
+                  <p:par>
+                    <p:cTn id="15" fill="hold">
+                      <p:stCondLst>
+                        <p:cond delay="indefinite"/>
+                      </p:stCondLst>
+                      <p:childTnLst>
+                        <p:par>
+                          <p:cTn id="16" fill="hold">
+                            <p:stCondLst>
+                              <p:cond delay="0"/>
+                            </p:stCondLst>
+                            <p:childTnLst>
+                              <p:par>
+                                <p:cTn id="14" presetID="42" presetClass="entr" presetSubtype="0" fill="hold" nodeType="clickEffect">
+                                  <p:stCondLst>
+                                    <p:cond delay="0"/>
+                                  </p:stCondLst>
+                                  <p:childTnLst>
+                                    <p:set>
+                                      <p:cBhvr>
+                                        <p:cTn id="10" dur="1" fill="hold">
+                                          <p:stCondLst>
+                                            <p:cond delay="0"/>
+                                          </p:stCondLst>
+                                        </p:cTn>
+                                        <p:tgtEl>
+                                          <p:spTgt spid="6"/>
+                                        </p:tgtEl>
+                                        <p:attrNameLst>
+                                          <p:attrName>style.visibility</p:attrName>
+                                        </p:attrNameLst>
+                                      </p:cBhvr>
+                                      <p:to>
+                                        <p:strVal val="visible"/>
+                                      </p:to>
+                                    </p:set>
+                                    <p:animEffect transition="in" filter="fade">
+                                      <p:cBhvr>
+                                        <p:cTn id="11" dur="500"/>
+                                        <p:tgtEl>
+                                          <p:spTgt spid="6"/>
+                                        </p:tgtEl>
+                                      </p:cBhvr>
+                                    </p:animEffect>
+                                    <p:anim calcmode="lin" valueType="num">
+                                      <p:cBhvr>
+                                        <p:cTn id="12" dur="500" fill="hold"/>
+                                        <p:tgtEl>
+                                          <p:spTgt spid="6"/>
+                                        </p:tgtEl>
+                                        <p:attrNameLst>
+                                          <p:attrName>ppt_x</p:attrName>
+                                        </p:attrNameLst>
+                                      </p:cBhvr>
+                                      <p:tavLst>
+                                        <p:tav tm="0">
+                                          <p:val>
+                                            <p:strVal val="#ppt_x"/>
+                                          </p:val>
+                                        </p:tav>
+                                        <p:tav tm="100000">
+                                          <p:val>
+                                            <p:strVal val="#ppt_x"/>
+                                          </p:val>
+                                        </p:tav>
+                                      </p:tavLst>
+                                    </p:anim>
+                                    <p:anim calcmode="lin" valueType="num">
+                                      <p:cBhvr>
+                                        <p:cTn id="13" dur="500" fill="hold"/>
+                                        <p:tgtEl>
+                                          <p:spTgt spid="6"/>
+                                        </p:tgtEl>
+                                        <p:attrNameLst>
+                                          <p:attrName>ppt_y</p:attrName>
+                                        </p:attrNameLst>
+                                      </p:cBhvr>
+                                      <p:tavLst>
+                                        <p:tav tm="0">
+                                          <p:val>
+                                            <p:strVal val="#ppt_y+.1"/>
+                                          </p:val>
+                                        </p:tav>
+                                        <p:tav tm="100000">
+                                          <p:val>
+                                            <p:strVal val="#ppt_y"/>
+                                          </p:val>
+                                        </p:tav>
+                                      </p:tavLst>
+                                    </p:anim>
+                                  </p:childTnLst>
+                                </p:cTn>
+                              </p:par>
+                            </p:childTnLst>
+                          </p:cTn>
+                        </p:par>
+                      </p:childTnLst>
+                    </p:cTn>
+                  </p:par>
+                  <p:par>
+                    <p:cTn id="22" fill="hold">
+                      <p:stCondLst>
+                        <p:cond delay="indefinite"/>
+                      </p:stCondLst>
+                      <p:childTnLst>
+                        <p:par>
+                          <p:cTn id="23" fill="hold">
+                            <p:stCondLst>
+                              <p:cond delay="0"/>
+                            </p:stCondLst>
+                            <p:childTnLst>
+                              <p:par>
+                                <p:cTn id="21" presetID="42" presetClass="entr" presetSubtype="0" fill="hold" nodeType="clickEffect">
+                                  <p:stCondLst>
+                                    <p:cond delay="0"/>
+                                  </p:stCondLst>
+                                  <p:childTnLst>
+                                    <p:set>
+                                      <p:cBhvr>
+                                        <p:cTn id="17" dur="1" fill="hold">
+                                          <p:stCondLst>
+                                            <p:cond delay="0"/>
+                                          </p:stCondLst>
+                                        </p:cTn>
+                                        <p:tgtEl>
+                                          <p:spTgt spid="7"/>
+                                        </p:tgtEl>
+                                        <p:attrNameLst>
+                                          <p:attrName>style.visibility</p:attrName>
+                                        </p:attrNameLst>
+                                      </p:cBhvr>
+                                      <p:to>
+                                        <p:strVal val="visible"/>
+                                      </p:to>
+                                    </p:set>
+                                    <p:animEffect transition="in" filter="fade">
+                                      <p:cBhvr>
+                                        <p:cTn id="18" dur="500"/>
+                                        <p:tgtEl>
+                                          <p:spTgt spid="7"/>
+                                        </p:tgtEl>
+                                      </p:cBhvr>
+                                    </p:animEffect>
+                                    <p:anim calcmode="lin" valueType="num">
+                                      <p:cBhvr>
+                                        <p:cTn id="19" dur="500" fill="hold"/>
+                                        <p:tgtEl>
+                                          <p:spTgt spid="7"/>
+                                        </p:tgtEl>
+                                        <p:attrNameLst>
+                                          <p:attrName>ppt_x</p:attrName>
+                                        </p:attrNameLst>
+                                      </p:cBhvr>
+                                      <p:tavLst>
+                                        <p:tav tm="0">
+                                          <p:val>
+                                            <p:strVal val="#ppt_x"/>
+                                          </p:val>
+                                        </p:tav>
+                                        <p:tav tm="100000">
+                                          <p:val>
+                                            <p:strVal val="#ppt_x"/>
+                                          </p:val>
+                                        </p:tav>
+                                      </p:tavLst>
+                                    </p:anim>
+                                    <p:anim calcmode="lin" valueType="num">
+                                      <p:cBhvr>
+                                        <p:cTn id="20" dur="500" fill="hold"/>
+                                        <p:tgtEl>
+                                          <p:spTgt spid="7"/>
+                                        </p:tgtEl>
+                                        <p:attrNameLst>
+                                          <p:attrName>ppt_y</p:attrName>
+                                        </p:attrNameLst>
+                                      </p:cBhvr>
+                                      <p:tavLst>
+                                        <p:tav tm="0">
+                                          <p:val>
+                                            <p:strVal val="#ppt_y+.1"/>
+                                          </p:val>
+                                        </p:tav>
+                                        <p:tav tm="100000">
+                                          <p:val>
+                                            <p:strVal val="#ppt_y"/>
+                                          </p:val>
+                                        </p:tav>
+                                      </p:tavLst>
+                                    </p:anim>
+                                  </p:childTnLst>
+                                </p:cTn>
+                              </p:par>
+                            </p:childTnLst>
+                          </p:cTn>
+                        </p:par>
+                      </p:childTnLst>
+                    </p:cTn>
+                  </p:par>
+                  <p:par>
+                    <p:cTn id="29" fill="hold">
+                      <p:stCondLst>
+                        <p:cond delay="indefinite"/>
+                      </p:stCondLst>
+                      <p:childTnLst>
+                        <p:par>
+                          <p:cTn id="30" fill="hold">
+                            <p:stCondLst>
+                              <p:cond delay="0"/>
+                            </p:stCondLst>
+                            <p:childTnLst>
+                              <p:par>
+                                <p:cTn id="28" presetID="53" presetClass="entr" presetSubtype="16" fill="hold" nodeType="clickEffect">
+                                  <p:stCondLst>
+                                    <p:cond delay="0"/>
+                                  </p:stCondLst>
+                                  <p:childTnLst>
+                                    <p:set>
+                                      <p:cBhvr>
+                                        <p:cTn id="24" dur="1" fill="hold">
+                                          <p:stCondLst>
+                                            <p:cond delay="0"/>
+                                          </p:stCondLst>
+                                        </p:cTn>
+                                        <p:tgtEl>
+                                          <p:spTgt spid="8"/>
+                                        </p:tgtEl>
+                                        <p:attrNameLst>
+                                          <p:attrName>style.visibility</p:attrName>
+                                        </p:attrNameLst>
+                                      </p:cBhvr>
+                                      <p:to>
+                                        <p:strVal val="visible"/>
+                                      </p:to>
+                                    </p:set>
+                                    <p:animEffect transition="in" filter="fade">
+                                      <p:cBhvr>
+                                        <p:cTn id="25" dur="500"/>
+                                        <p:tgtEl>
+                                          <p:spTgt spid="8"/>
+                                        </p:tgtEl>
+                                      </p:cBhvr>
+                                    </p:animEffect>
+                                    <p:anim calcmode="lin" valueType="num">
+                                      <p:cBhvr>
+                                        <p:cTn id="26" dur="500" fill="hold"/>
+                                        <p:tgtEl>
+                                          <p:spTgt spid="8"/>
+                                        </p:tgtEl>
+                                        <p:attrNameLst>
+                                          <p:attrName>ppt_w</p:attrName>
+                                        </p:attrNameLst>
+                                      </p:cBhvr>
+                                      <p:tavLst>
+                                        <p:tav tm="0">
+                                          <p:val>
+                                            <p:fltVal val="0"/>
+                                          </p:val>
+                                        </p:tav>
+                                        <p:tav tm="100000">
+                                          <p:val>
+                                            <p:strVal val="#ppt_w"/>
+                                          </p:val>
+                                        </p:tav>
+                                      </p:tavLst>
+                                    </p:anim>
+                                    <p:anim calcmode="lin" valueType="num">
+                                      <p:cBhvr>
+                                        <p:cTn id="27" dur="500" fill="hold"/>
+                                        <p:tgtEl>
+                                          <p:spTgt spid="8"/>
+                                        </p:tgtEl>
+                                        <p:attrNameLst>
+                                          <p:attrName>ppt_h</p:attrName>
+                                        </p:attrNameLst>
+                                      </p:cBhvr>
+                                      <p:tavLst>
+                                        <p:tav tm="0">
+                                          <p:val>
+                                            <p:fltVal val="0"/>
+                                          </p:val>
+                                        </p:tav>
+                                        <p:tav tm="100000">
+                                          <p:val>
+                                            <p:strVal val="#ppt_h"/>
+                                          </p:val>
+                                        </p:tav>
+                                      </p:tavLst>
+                                    </p:anim>
+                                  </p:childTnLst>
+                                </p:cTn>
+                              </p:par>
+                            </p:childTnLst>
+                          </p:cTn>
+                        </p:par>
+                      </p:childTnLst>
+                    </p:cTn>
+                  </p:par>
+                  <p:par>
+                    <p:cTn id="36" fill="hold">
+                      <p:stCondLst>
+                        <p:cond delay="indefinite"/>
+                      </p:stCondLst>
+                      <p:childTnLst>
+                        <p:par>
+                          <p:cTn id="37" fill="hold">
+                            <p:stCondLst>
+                              <p:cond delay="0"/>
+                            </p:stCondLst>
+                            <p:childTnLst>
+                              <p:par>
+                                <p:cTn id="35" presetID="42" presetClass="entr" presetSubtype="0" fill="hold" nodeType="clickEffect">
+                                  <p:stCondLst>
+                                    <p:cond delay="0"/>
+                                  </p:stCondLst>
+                                  <p:childTnLst>
+                                    <p:set>
+                                      <p:cBhvr>
+                                        <p:cTn id="31" dur="1" fill="hold">
+                                          <p:stCondLst>
+                                            <p:cond delay="0"/>
+                                          </p:stCondLst>
+                                        </p:cTn>
+                                        <p:tgtEl>
+                                          <p:spTgt spid="11"/>
+                                        </p:tgtEl>
+                                        <p:attrNameLst>
+                                          <p:attrName>style.visibility</p:attrName>
+                                        </p:attrNameLst>
+                                      </p:cBhvr>
+                                      <p:to>
+                                        <p:strVal val="visible"/>
+                                      </p:to>
+                                    </p:set>
+                                    <p:animEffect transition="in" filter="fade">
+                                      <p:cBhvr>
+                                        <p:cTn id="32" dur="500"/>
+                                        <p:tgtEl>
+                                          <p:spTgt spid="11"/>
+                                        </p:tgtEl>
+                                      </p:cBhvr>
+                                    </p:animEffect>
+                                    <p:anim calcmode="lin" valueType="num">
+                                      <p:cBhvr>
+                                        <p:cTn id="33" dur="500" fill="hold"/>
+                                        <p:tgtEl>
+                                          <p:spTgt spid="11"/>
+                                        </p:tgtEl>
+                                        <p:attrNameLst>
+                                          <p:attrName>ppt_x</p:attrName>
+                                        </p:attrNameLst>
+                                      </p:cBhvr>
+                                      <p:tavLst>
+                                        <p:tav tm="0">
+                                          <p:val>
+                                            <p:strVal val="#ppt_x"/>
+                                          </p:val>
+                                        </p:tav>
+                                        <p:tav tm="100000">
+                                          <p:val>
+                                            <p:strVal val="#ppt_x"/>
+                                          </p:val>
+                                        </p:tav>
+                                      </p:tavLst>
+                                    </p:anim>
+                                    <p:anim calcmode="lin" valueType="num">
+                                      <p:cBhvr>
+                                        <p:cTn id="34" dur="500" fill="hold"/>
+                                        <p:tgtEl>
+                                          <p:spTgt spid="11"/>
+                                        </p:tgtEl>
+                                        <p:attrNameLst>
+                                          <p:attrName>ppt_y</p:attrName>
+                                        </p:attrNameLst>
+                                      </p:cBhvr>
+                                      <p:tavLst>
+                                        <p:tav tm="0">
+                                          <p:val>
+                                            <p:strVal val="#ppt_y+.1"/>
+                                          </p:val>
+                                        </p:tav>
+                                        <p:tav tm="100000">
+                                          <p:val>
+                                            <p:strVal val="#ppt_y"/>
+                                          </p:val>
+                                        </p:tav>
+                                      </p:tavLst>
+                                    </p:anim>
+                                  </p:childTnLst>
+                                </p:cTn>
+                              </p:par>
+                            </p:childTnLst>
+                          </p:cTn>
+                        </p:par>
+                      </p:childTnLst>
+                    </p:cTn>
+                  </p:par>
+                  <p:par>
+                    <p:cTn id="43" fill="hold">
+                      <p:stCondLst>
+                        <p:cond delay="indefinite"/>
+                      </p:stCondLst>
+                      <p:childTnLst>
+                        <p:par>
+                          <p:cTn id="44" fill="hold">
+                            <p:stCondLst>
+                              <p:cond delay="0"/>
+                            </p:stCondLst>
+                            <p:childTnLst>
+                              <p:par>
+                                <p:cTn id="42" presetID="42" presetClass="entr" presetSubtype="0" fill="hold" nodeType="clickEffect">
+                                  <p:stCondLst>
+                                    <p:cond delay="0"/>
+                                  </p:stCondLst>
+                                  <p:childTnLst>
+                                    <p:set>
+                                      <p:cBhvr>
+                                        <p:cTn id="38" dur="1" fill="hold">
+                                          <p:stCondLst>
+                                            <p:cond delay="0"/>
+                                          </p:stCondLst>
+                                        </p:cTn>
+                                        <p:tgtEl>
+                                          <p:spTgt spid="12"/>
+                                        </p:tgtEl>
+                                        <p:attrNameLst>
+                                          <p:attrName>style.visibility</p:attrName>
+                                        </p:attrNameLst>
+                                      </p:cBhvr>
+                                      <p:to>
+                                        <p:strVal val="visible"/>
+                                      </p:to>
+                                    </p:set>
+                                    <p:animEffect transition="in" filter="fade">
+                                      <p:cBhvr>
+                                        <p:cTn id="39" dur="500"/>
+                                        <p:tgtEl>
+                                          <p:spTgt spid="12"/>
+                                        </p:tgtEl>
+                                      </p:cBhvr>
+                                    </p:animEffect>
+                                    <p:anim calcmode="lin" valueType="num">
+                                      <p:cBhvr>
+                                        <p:cTn id="40" dur="500" fill="hold"/>
+                                        <p:tgtEl>
+                                          <p:spTgt spid="12"/>
+                                        </p:tgtEl>
+                                        <p:attrNameLst>
+                                          <p:attrName>ppt_x</p:attrName>
+                                        </p:attrNameLst>
+                                      </p:cBhvr>
+                                      <p:tavLst>
+                                        <p:tav tm="0">
+                                          <p:val>
+                                            <p:strVal val="#ppt_x"/>
+                                          </p:val>
+                                        </p:tav>
+                                        <p:tav tm="100000">
+                                          <p:val>
+                                            <p:strVal val="#ppt_x"/>
+                                          </p:val>
+                                        </p:tav>
+                                      </p:tavLst>
+                                    </p:anim>
+                                    <p:anim calcmode="lin" valueType="num">
+                                      <p:cBhvr>
+                                        <p:cTn id="41" dur="500" fill="hold"/>
+                                        <p:tgtEl>
+                                          <p:spTgt spid="12"/>
+                                        </p:tgtEl>
+                                        <p:attrNameLst>
+                                          <p:attrName>ppt_y</p:attrName>
+                                        </p:attrNameLst>
+                                      </p:cBhvr>
+                                      <p:tavLst>
+                                        <p:tav tm="0">
+                                          <p:val>
+                                            <p:strVal val="#ppt_y+.1"/>
+                                          </p:val>
+                                        </p:tav>
+                                        <p:tav tm="100000">
+                                          <p:val>
+                                            <p:strVal val="#ppt_y"/>
+                                          </p:val>
+                                        </p:tav>
+                                      </p:tavLst>
+                                    </p:anim>
+                                  </p:childTnLst>
+                                </p:cTn>
+                              </p:par>
+                            </p:childTnLst>
+                          </p:cTn>
+                        </p:par>
+                      </p:childTnLst>
+                    </p:cTn>
+                  </p:par>
+                  <p:par>
+                    <p:cTn id="50" fill="hold">
+                      <p:stCondLst>
+                        <p:cond delay="indefinite"/>
+                      </p:stCondLst>
+                      <p:childTnLst>
+                        <p:par>
+                          <p:cTn id="51" fill="hold">
+                            <p:stCondLst>
+                              <p:cond delay="0"/>
+                            </p:stCondLst>
+                            <p:childTnLst>
+                              <p:par>
+                                <p:cTn id="49" presetID="42" presetClass="entr" presetSubtype="0" fill="hold" nodeType="clickEffect">
+                                  <p:stCondLst>
+                                    <p:cond delay="0"/>
+                                  </p:stCondLst>
+                                  <p:childTnLst>
+                                    <p:set>
+                                      <p:cBhvr>
+                                        <p:cTn id="45" dur="1" fill="hold">
+                                          <p:stCondLst>
+                                            <p:cond delay="0"/>
+                                          </p:stCondLst>
+                                        </p:cTn>
+                                        <p:tgtEl>
+                                          <p:spTgt spid="13"/>
+                                        </p:tgtEl>
+                                        <p:attrNameLst>
+                                          <p:attrName>style.visibility</p:attrName>
+                                        </p:attrNameLst>
+                                      </p:cBhvr>
+                                      <p:to>
+                                        <p:strVal val="visible"/>
+                                      </p:to>
+                                    </p:set>
+                                    <p:animEffect transition="in" filter="fade">
+                                      <p:cBhvr>
+                                        <p:cTn id="46" dur="500"/>
+                                        <p:tgtEl>
+                                          <p:spTgt spid="13"/>
+                                        </p:tgtEl>
+                                      </p:cBhvr>
+                                    </p:animEffect>
+                                    <p:anim calcmode="lin" valueType="num">
+                                      <p:cBhvr>
+                                        <p:cTn id="47" dur="500" fill="hold"/>
+                                        <p:tgtEl>
+                                          <p:spTgt spid="13"/>
+                                        </p:tgtEl>
+                                        <p:attrNameLst>
+                                          <p:attrName>ppt_x</p:attrName>
+                                        </p:attrNameLst>
+                                      </p:cBhvr>
+                                      <p:tavLst>
+                                        <p:tav tm="0">
+                                          <p:val>
+                                            <p:strVal val="#ppt_x"/>
+                                          </p:val>
+                                        </p:tav>
+                                        <p:tav tm="100000">
+                                          <p:val>
+                                            <p:strVal val="#ppt_x"/>
+                                          </p:val>
+                                        </p:tav>
+                                      </p:tavLst>
+                                    </p:anim>
+                                    <p:anim calcmode="lin" valueType="num">
+                                      <p:cBhvr>
+                                        <p:cTn id="48" dur="500" fill="hold"/>
+                                        <p:tgtEl>
+                                          <p:spTgt spid="13"/>
+                                        </p:tgtEl>
+                                        <p:attrNameLst>
+                                          <p:attrName>ppt_y</p:attrName>
+                                        </p:attrNameLst>
+                                      </p:cBhvr>
+                                      <p:tavLst>
+                                        <p:tav tm="0">
+                                          <p:val>
+                                            <p:strVal val="#ppt_y+.1"/>
+                                          </p:val>
+                                        </p:tav>
+                                        <p:tav tm="100000">
+                                          <p:val>
+                                            <p:strVal val="#ppt_y"/>
+                                          </p:val>
+                                        </p:tav>
+                                      </p:tavLst>
+                                    </p:anim>
+                                  </p:childTnLst>
+                                </p:cTn>
+                              </p:par>
+                            </p:childTnLst>
+                          </p:cTn>
+                        </p:par>
+                      </p:childTnLst>
+                    </p:cTn>
+                  </p:par>
+                  <p:par>
+                    <p:cTn id="57" fill="hold">
+                      <p:stCondLst>
+                        <p:cond delay="indefinite"/>
+                      </p:stCondLst>
+                      <p:childTnLst>
+                        <p:par>
+                          <p:cTn id="58" fill="hold">
+                            <p:stCondLst>
+                              <p:cond delay="0"/>
+                            </p:stCondLst>
+                            <p:childTnLst>
+                              <p:par>
+                                <p:cTn id="56" presetID="53" presetClass="entr" presetSubtype="16" fill="hold" nodeType="clickEffect">
+                                  <p:stCondLst>
+                                    <p:cond delay="0"/>
+                                  </p:stCondLst>
+                                  <p:childTnLst>
+                                    <p:set>
+                                      <p:cBhvr>
+                                        <p:cTn id="52" dur="1" fill="hold">
+                                          <p:stCondLst>
+                                            <p:cond delay="0"/>
+                                          </p:stCondLst>
+                                        </p:cTn>
+                                        <p:tgtEl>
+                                          <p:spTgt spid="14"/>
+                                        </p:tgtEl>
+                                        <p:attrNameLst>
+                                          <p:attrName>style.visibility</p:attrName>
+                                        </p:attrNameLst>
+                                      </p:cBhvr>
+                                      <p:to>
+                                        <p:strVal val="visible"/>
+                                      </p:to>
+                                    </p:set>
+                                    <p:animEffect transition="in" filter="fade">
+                                      <p:cBhvr>
+                                        <p:cTn id="53" dur="500"/>
+                                        <p:tgtEl>
+                                          <p:spTgt spid="14"/>
+                                        </p:tgtEl>
+                                      </p:cBhvr>
+                                    </p:animEffect>
+                                    <p:anim calcmode="lin" valueType="num">
+                                      <p:cBhvr>
+                                        <p:cTn id="54" dur="500" fill="hold"/>
+                                        <p:tgtEl>
+                                          <p:spTgt spid="14"/>
+                                        </p:tgtEl>
+                                        <p:attrNameLst>
+                                          <p:attrName>ppt_w</p:attrName>
+                                        </p:attrNameLst>
+                                      </p:cBhvr>
+                                      <p:tavLst>
+                                        <p:tav tm="0">
+                                          <p:val>
+                                            <p:fltVal val="0"/>
+                                          </p:val>
+                                        </p:tav>
+                                        <p:tav tm="100000">
+                                          <p:val>
+                                            <p:strVal val="#ppt_w"/>
+                                          </p:val>
+                                        </p:tav>
+                                      </p:tavLst>
+                                    </p:anim>
+                                    <p:anim calcmode="lin" valueType="num">
+                                      <p:cBhvr>
+                                        <p:cTn id="55" dur="500" fill="hold"/>
+                                        <p:tgtEl>
+                                          <p:spTgt spid="14"/>
+                                        </p:tgtEl>
+                                        <p:attrNameLst>
+                                          <p:attrName>ppt_h</p:attrName>
+                                        </p:attrNameLst>
+                                      </p:cBhvr>
+                                      <p:tavLst>
+                                        <p:tav tm="0">
+                                          <p:val>
+                                            <p:fltVal val="0"/>
+                                          </p:val>
+                                        </p:tav>
+                                        <p:tav tm="100000">
+                                          <p:val>
+                                            <p:strVal val="#ppt_h"/>
+                                          </p:val>
+                                        </p:tav>
+                                      </p:tavLst>
+                                    </p:anim>
+                                  </p:childTnLst>
+                                </p:cTn>
+                              </p:par>
+                            </p:childTnLst>
+                          </p:cTn>
+                        </p:par>
+                      </p:childTnLst>
+                    </p:cTn>
+                  </p:par>
+                </p:childTnLst>
+              </p:cTn>
+              <p:prevCondLst>
+                <p:cond evt="onPrev" delay="0">
+                  <p:tgtEl>
+                    <p:sldTgt/>
+                  </p:tgtEl>
+                </p:cond>
+              </p:prevCondLst>
+              <p:nextCondLst>
+                <p:cond evt="onNext" delay="0">
+                  <p:tgtEl>
+                    <p:sldTgt/>
+                  </p:tgtEl>
+                </p:cond>
+              </p:nextCondLst>
+            </p:seq>
+          </p:childTnLst>
+        </p:cTn>
+      </p:par>
+    </p:tnLst>
+  </p:timing>
+</p:sld>
+</file>
+
+<file path=ppt/slides/slide13.xml><?xml version="1.0" encoding="utf-8"?>
+<p:sld xmlns:a="http://schemas.openxmlformats.org/drawingml/2006/main" xmlns:r="http://schemas.openxmlformats.org/officeDocument/2006/relationships" xmlns:p="http://schemas.openxmlformats.org/presentationml/2006/main">
+  <p:cSld>
+    <p:spTree>
+      <p:nvGrpSpPr>
+        <p:cNvPr id="1" name=""/>
+        <p:cNvGrpSpPr/>
+        <p:nvPr/>
+      </p:nvGrpSpPr>
+      <p:grpSpPr>
+        <a:xfrm>
+          <a:off x="0" y="0"/>
+          <a:ext cx="0" cy="0"/>
+          <a:chOff x="0" y="0"/>
+          <a:chExt cx="0" cy="0"/>
+        </a:xfrm>
+      </p:grpSpPr>
+      <p:sp>
+        <p:nvSpPr>
+          <p:cNvPr id="2" name="Shape 2"/>
+          <p:cNvSpPr txBox="1"/>
+          <p:nvPr/>
+        </p:nvSpPr>
+        <p:spPr>
+          <a:xfrm>
+            <a:off x="685800" y="457200"/>
+            <a:ext cx="10820095" cy="237744"/>
+          </a:xfrm>
+          <a:prstGeom prst="rect">
+            <a:avLst/>
+          </a:prstGeom>
+          <a:noFill/>
+          <a:ln>
+            <a:noFill/>
+          </a:ln>
+        </p:spPr>
+        <p:txBody>
+          <a:bodyPr wrap="square" lIns="36576" tIns="27432" rIns="36576" bIns="27432" anchor="t">
+            <a:noAutofit/>
+          </a:bodyPr>
+          <a:lstStyle/>
+          <a:p>
+            <a:pPr algn="l">
+              <a:lnSpc>
+                <a:spcPct val="100000"/>
+              </a:lnSpc>
+            </a:pPr>
+            <a:r>
+              <a:rPr lang="en-US" sz="1200" dirty="0" b="1" spc="150" cap="all">
+                <a:solidFill>
+                  <a:srgbClr val="5F6272"/>
+                </a:solidFill>
+                <a:latin typeface="Segoe UI"/>
+                <a:cs typeface="Segoe UI"/>
+              </a:rPr>
+              <a:t xml:space="preserve">Exit Ticket</a:t>
+            </a:r>
+            <a:endParaRPr lang="en-US" sz="1200" dirty="0"/>
+          </a:p>
+        </p:txBody>
+      </p:sp>
+      <p:sp>
+        <p:nvSpPr>
+          <p:cNvPr id="3" name="Shape 3"/>
+          <p:cNvSpPr txBox="1"/>
+          <p:nvPr/>
+        </p:nvSpPr>
+        <p:spPr>
+          <a:xfrm>
+            <a:off x="685800" y="866394"/>
+            <a:ext cx="10820095" cy="580644"/>
+          </a:xfrm>
+          <a:prstGeom prst="rect">
+            <a:avLst/>
+          </a:prstGeom>
+          <a:noFill/>
+          <a:ln>
+            <a:noFill/>
+          </a:ln>
+        </p:spPr>
+        <p:txBody>
+          <a:bodyPr wrap="square" lIns="36576" tIns="27432" rIns="36576" bIns="27432" anchor="t">
+            <a:noAutofit/>
+          </a:bodyPr>
+          <a:lstStyle/>
+          <a:p>
+            <a:pPr algn="l">
+              <a:lnSpc>
+                <a:spcPct val="100000"/>
+              </a:lnSpc>
+            </a:pPr>
+            <a:r>
+              <a:rPr lang="en-US" sz="3450" dirty="0" b="1">
+                <a:solidFill>
+                  <a:srgbClr val="16171D"/>
+                </a:solidFill>
+                <a:latin typeface="Segoe UI"/>
+                <a:cs typeface="Segoe UI"/>
+              </a:rPr>
+              <a:t xml:space="preserve">Show what you know</a:t>
+            </a:r>
+            <a:endParaRPr lang="en-US" sz="3450" dirty="0"/>
+          </a:p>
+        </p:txBody>
+      </p:sp>
+      <p:sp>
+        <p:nvSpPr>
+          <p:cNvPr id="6" name="Shape 6"/>
+          <p:cNvSpPr txBox="1"/>
+          <p:nvPr/>
+        </p:nvSpPr>
+        <p:spPr>
+          <a:xfrm>
+            <a:off x="685800" y="1618488"/>
             <a:ext cx="10820095" cy="1309116"/>
           </a:xfrm>
           <a:prstGeom prst="roundRect">
@@ -2787,13 +4846,13 @@
       </p:sp>
       <p:sp>
         <p:nvSpPr>
-          <p:cNvPr id="10" name="Shape 10"/>
-          <p:cNvSpPr txBox="1"/>
-          <p:nvPr/>
-        </p:nvSpPr>
-        <p:spPr>
-          <a:xfrm>
-            <a:off x="895350" y="4674870"/>
+          <p:cNvPr id="4" name="Shape 4"/>
+          <p:cNvSpPr txBox="1"/>
+          <p:nvPr/>
+        </p:nvSpPr>
+        <p:spPr>
+          <a:xfrm>
+            <a:off x="895350" y="1789938"/>
             <a:ext cx="10400995" cy="352044"/>
           </a:xfrm>
           <a:prstGeom prst="rect">
@@ -2823,47 +4882,7 @@
                 <a:latin typeface="Segoe UI"/>
                 <a:cs typeface="Segoe UI"/>
               </a:rPr>
-              <a:t xml:space="preserve">3. Savings: </a:t>
-            </a:r>
-            <a:r>
-              <a:rPr lang="en-US" sz="1950" dirty="0" i="1">
-                <a:solidFill>
-                  <a:srgbClr val="16171D"/>
-                </a:solidFill>
-                <a:latin typeface="Segoe UI"/>
-                <a:cs typeface="Segoe UI"/>
-              </a:rPr>
-              <a:t xml:space="preserve">y</a:t>
-            </a:r>
-            <a:r>
-              <a:rPr lang="en-US" sz="1950" dirty="0">
-                <a:solidFill>
-                  <a:srgbClr val="16171D"/>
-                </a:solidFill>
-                <a:latin typeface="Segoe UI"/>
-                <a:cs typeface="Segoe UI"/>
-              </a:rPr>
-              <a:t xml:space="preserve"> = 10</a:t>
-            </a:r>
-            <a:r>
-              <a:rPr lang="en-US" sz="1950" dirty="0" i="1">
-                <a:solidFill>
-                  <a:srgbClr val="16171D"/>
-                </a:solidFill>
-                <a:latin typeface="Segoe UI"/>
-                <a:cs typeface="Segoe UI"/>
-              </a:rPr>
-              <a:t xml:space="preserve">x</a:t>
-            </a:r>
-            <a:r>
-              <a:rPr lang="en-US" sz="1950" dirty="0">
-                <a:solidFill>
-                  <a:srgbClr val="16171D"/>
-                </a:solidFill>
-                <a:latin typeface="Segoe UI"/>
-                <a:cs typeface="Segoe UI"/>
-              </a:rPr>
-              <a:t xml:space="preserve"> + 50. What does 50 mean?</a:t>
+              <a:t xml:space="preserve">1. A table has (0, 1) and (2, 9). What is its slope?</a:t>
             </a:r>
             <a:endParaRPr lang="en-US" sz="1950" dirty="0"/>
           </a:p>
@@ -2871,14 +4890,14 @@
       </p:sp>
       <p:sp>
         <p:nvSpPr>
-          <p:cNvPr id="11" name="Shape 11"/>
-          <p:cNvSpPr txBox="1"/>
-          <p:nvPr/>
-        </p:nvSpPr>
-        <p:spPr>
-          <a:xfrm>
-            <a:off x="895350" y="5122164"/>
-            <a:ext cx="3902979" cy="518922"/>
+          <p:cNvPr id="5" name="Shape 5"/>
+          <p:cNvSpPr txBox="1"/>
+          <p:nvPr/>
+        </p:nvSpPr>
+        <p:spPr>
+          <a:xfrm>
+            <a:off x="895350" y="2237232"/>
+            <a:ext cx="2078888" cy="518922"/>
           </a:xfrm>
           <a:prstGeom prst="roundRect">
             <a:avLst>
@@ -2921,6 +4940,410 @@
                 <a:latin typeface="Cambria"/>
                 <a:cs typeface="Cambria"/>
               </a:rPr>
+              <a:t xml:space="preserve">4</a:t>
+            </a:r>
+            <a:endParaRPr lang="en-US" sz="2325" dirty="0"/>
+          </a:p>
+        </p:txBody>
+      </p:sp>
+      <p:sp>
+        <p:nvSpPr>
+          <p:cNvPr id="9" name="Shape 9"/>
+          <p:cNvSpPr txBox="1"/>
+          <p:nvPr/>
+        </p:nvSpPr>
+        <p:spPr>
+          <a:xfrm>
+            <a:off x="685800" y="3060954"/>
+            <a:ext cx="10820095" cy="1309116"/>
+          </a:xfrm>
+          <a:prstGeom prst="roundRect">
+            <a:avLst>
+              <a:gd name="adj" fmla="val 8000"/>
+            </a:avLst>
+          </a:prstGeom>
+          <a:solidFill>
+            <a:srgbClr val="FFFFFF"/>
+          </a:solidFill>
+          <a:ln w="12700">
+            <a:solidFill>
+              <a:srgbClr val="E3E4EC"/>
+            </a:solidFill>
+          </a:ln>
+        </p:spPr>
+        <p:txBody>
+          <a:bodyPr wrap="square" lIns="36576" tIns="27432" rIns="36576" bIns="27432" anchor="t">
+            <a:noAutofit/>
+          </a:bodyPr>
+          <a:lstStyle/>
+          <a:p>
+            <a:pPr algn="l">
+              <a:lnSpc>
+                <a:spcPct val="100000"/>
+              </a:lnSpc>
+            </a:pPr>
+            <a:endParaRPr lang="en-US" sz="1950" dirty="0"/>
+          </a:p>
+        </p:txBody>
+      </p:sp>
+      <p:sp>
+        <p:nvSpPr>
+          <p:cNvPr id="7" name="Shape 7"/>
+          <p:cNvSpPr txBox="1"/>
+          <p:nvPr/>
+        </p:nvSpPr>
+        <p:spPr>
+          <a:xfrm>
+            <a:off x="895350" y="3232404"/>
+            <a:ext cx="10400995" cy="352044"/>
+          </a:xfrm>
+          <a:prstGeom prst="rect">
+            <a:avLst/>
+          </a:prstGeom>
+          <a:noFill/>
+          <a:ln>
+            <a:noFill/>
+          </a:ln>
+        </p:spPr>
+        <p:txBody>
+          <a:bodyPr wrap="square" lIns="36576" tIns="27432" rIns="36576" bIns="27432" anchor="t">
+            <a:noAutofit/>
+          </a:bodyPr>
+          <a:lstStyle/>
+          <a:p>
+            <a:pPr algn="l">
+              <a:lnSpc>
+                <a:spcPct val="100000"/>
+              </a:lnSpc>
+            </a:pPr>
+            <a:r>
+              <a:rPr lang="en-US" sz="1950" dirty="0">
+                <a:solidFill>
+                  <a:srgbClr val="16171D"/>
+                </a:solidFill>
+                <a:latin typeface="Segoe UI"/>
+                <a:cs typeface="Segoe UI"/>
+              </a:rPr>
+              <a:t xml:space="preserve">2. Is </a:t>
+            </a:r>
+            <a:r>
+              <a:rPr lang="en-US" sz="1950" dirty="0" i="1">
+                <a:solidFill>
+                  <a:srgbClr val="16171D"/>
+                </a:solidFill>
+                <a:latin typeface="Segoe UI"/>
+                <a:cs typeface="Segoe UI"/>
+              </a:rPr>
+              <a:t xml:space="preserve">y</a:t>
+            </a:r>
+            <a:r>
+              <a:rPr lang="en-US" sz="1950" dirty="0">
+                <a:solidFill>
+                  <a:srgbClr val="16171D"/>
+                </a:solidFill>
+                <a:latin typeface="Segoe UI"/>
+                <a:cs typeface="Segoe UI"/>
+              </a:rPr>
+              <a:t xml:space="preserve"> = 4</a:t>
+            </a:r>
+            <a:r>
+              <a:rPr lang="en-US" sz="1950" dirty="0" i="1">
+                <a:solidFill>
+                  <a:srgbClr val="16171D"/>
+                </a:solidFill>
+                <a:latin typeface="Segoe UI"/>
+                <a:cs typeface="Segoe UI"/>
+              </a:rPr>
+              <a:t xml:space="preserve">x</a:t>
+            </a:r>
+            <a:r>
+              <a:rPr lang="en-US" sz="1950" dirty="0">
+                <a:solidFill>
+                  <a:srgbClr val="16171D"/>
+                </a:solidFill>
+                <a:latin typeface="Segoe UI"/>
+                <a:cs typeface="Segoe UI"/>
+              </a:rPr>
+              <a:t xml:space="preserve"> + 7 parallel or perpendicular to </a:t>
+            </a:r>
+            <a:r>
+              <a:rPr lang="en-US" sz="1950" dirty="0" i="1">
+                <a:solidFill>
+                  <a:srgbClr val="16171D"/>
+                </a:solidFill>
+                <a:latin typeface="Segoe UI"/>
+                <a:cs typeface="Segoe UI"/>
+              </a:rPr>
+              <a:t xml:space="preserve">y</a:t>
+            </a:r>
+            <a:r>
+              <a:rPr lang="en-US" sz="1950" dirty="0">
+                <a:solidFill>
+                  <a:srgbClr val="16171D"/>
+                </a:solidFill>
+                <a:latin typeface="Segoe UI"/>
+                <a:cs typeface="Segoe UI"/>
+              </a:rPr>
+              <a:t xml:space="preserve"> = 4</a:t>
+            </a:r>
+            <a:r>
+              <a:rPr lang="en-US" sz="1950" dirty="0" i="1">
+                <a:solidFill>
+                  <a:srgbClr val="16171D"/>
+                </a:solidFill>
+                <a:latin typeface="Segoe UI"/>
+                <a:cs typeface="Segoe UI"/>
+              </a:rPr>
+              <a:t xml:space="preserve">x</a:t>
+            </a:r>
+            <a:r>
+              <a:rPr lang="en-US" sz="1950" dirty="0">
+                <a:solidFill>
+                  <a:srgbClr val="16171D"/>
+                </a:solidFill>
+                <a:latin typeface="Segoe UI"/>
+                <a:cs typeface="Segoe UI"/>
+              </a:rPr>
+              <a:t xml:space="preserve"> − 3?</a:t>
+            </a:r>
+            <a:endParaRPr lang="en-US" sz="1950" dirty="0"/>
+          </a:p>
+        </p:txBody>
+      </p:sp>
+      <p:sp>
+        <p:nvSpPr>
+          <p:cNvPr id="8" name="Shape 8"/>
+          <p:cNvSpPr txBox="1"/>
+          <p:nvPr/>
+        </p:nvSpPr>
+        <p:spPr>
+          <a:xfrm>
+            <a:off x="895350" y="3679698"/>
+            <a:ext cx="3239673" cy="518922"/>
+          </a:xfrm>
+          <a:prstGeom prst="roundRect">
+            <a:avLst>
+              <a:gd name="adj" fmla="val 8000"/>
+            </a:avLst>
+          </a:prstGeom>
+          <a:solidFill>
+            <a:srgbClr val="EDF5E9"/>
+          </a:solidFill>
+          <a:ln>
+            <a:noFill/>
+          </a:ln>
+        </p:spPr>
+        <p:txBody>
+          <a:bodyPr wrap="square" lIns="164592" tIns="64008" rIns="164592" bIns="64008" anchor="ctr">
+            <a:noAutofit/>
+          </a:bodyPr>
+          <a:lstStyle/>
+          <a:p>
+            <a:pPr algn="l">
+              <a:lnSpc>
+                <a:spcPct val="100000"/>
+              </a:lnSpc>
+            </a:pPr>
+            <a:r>
+              <a:rPr lang="en-US" sz="1125" dirty="0" b="1" spc="100">
+                <a:solidFill>
+                  <a:srgbClr val="4F8A3C"/>
+                </a:solidFill>
+                <a:latin typeface="Segoe UI"/>
+                <a:cs typeface="Segoe UI"/>
+              </a:rPr>
+              <a:t xml:space="preserve">ANSWER   </a:t>
+            </a:r>
+            <a:r>
+              <a:rPr lang="en-US" sz="2325" dirty="0">
+                <a:solidFill>
+                  <a:srgbClr val="16171D"/>
+                </a:solidFill>
+                <a:latin typeface="Cambria"/>
+                <a:cs typeface="Cambria"/>
+              </a:rPr>
+              <a:t xml:space="preserve">parallel</a:t>
+            </a:r>
+            <a:endParaRPr lang="en-US" sz="2325" dirty="0"/>
+          </a:p>
+        </p:txBody>
+      </p:sp>
+      <p:sp>
+        <p:nvSpPr>
+          <p:cNvPr id="12" name="Shape 12"/>
+          <p:cNvSpPr txBox="1"/>
+          <p:nvPr/>
+        </p:nvSpPr>
+        <p:spPr>
+          <a:xfrm>
+            <a:off x="685800" y="4503420"/>
+            <a:ext cx="10820095" cy="1309116"/>
+          </a:xfrm>
+          <a:prstGeom prst="roundRect">
+            <a:avLst>
+              <a:gd name="adj" fmla="val 8000"/>
+            </a:avLst>
+          </a:prstGeom>
+          <a:solidFill>
+            <a:srgbClr val="FFFFFF"/>
+          </a:solidFill>
+          <a:ln w="12700">
+            <a:solidFill>
+              <a:srgbClr val="E3E4EC"/>
+            </a:solidFill>
+          </a:ln>
+        </p:spPr>
+        <p:txBody>
+          <a:bodyPr wrap="square" lIns="36576" tIns="27432" rIns="36576" bIns="27432" anchor="t">
+            <a:noAutofit/>
+          </a:bodyPr>
+          <a:lstStyle/>
+          <a:p>
+            <a:pPr algn="l">
+              <a:lnSpc>
+                <a:spcPct val="100000"/>
+              </a:lnSpc>
+            </a:pPr>
+            <a:endParaRPr lang="en-US" sz="1950" dirty="0"/>
+          </a:p>
+        </p:txBody>
+      </p:sp>
+      <p:sp>
+        <p:nvSpPr>
+          <p:cNvPr id="10" name="Shape 10"/>
+          <p:cNvSpPr txBox="1"/>
+          <p:nvPr/>
+        </p:nvSpPr>
+        <p:spPr>
+          <a:xfrm>
+            <a:off x="895350" y="4674870"/>
+            <a:ext cx="10400995" cy="352044"/>
+          </a:xfrm>
+          <a:prstGeom prst="rect">
+            <a:avLst/>
+          </a:prstGeom>
+          <a:noFill/>
+          <a:ln>
+            <a:noFill/>
+          </a:ln>
+        </p:spPr>
+        <p:txBody>
+          <a:bodyPr wrap="square" lIns="36576" tIns="27432" rIns="36576" bIns="27432" anchor="t">
+            <a:noAutofit/>
+          </a:bodyPr>
+          <a:lstStyle/>
+          <a:p>
+            <a:pPr algn="l">
+              <a:lnSpc>
+                <a:spcPct val="100000"/>
+              </a:lnSpc>
+            </a:pPr>
+            <a:r>
+              <a:rPr lang="en-US" sz="1950" dirty="0">
+                <a:solidFill>
+                  <a:srgbClr val="16171D"/>
+                </a:solidFill>
+                <a:latin typeface="Segoe UI"/>
+                <a:cs typeface="Segoe UI"/>
+              </a:rPr>
+              <a:t xml:space="preserve">3. Savings: </a:t>
+            </a:r>
+            <a:r>
+              <a:rPr lang="en-US" sz="1950" dirty="0" i="1">
+                <a:solidFill>
+                  <a:srgbClr val="16171D"/>
+                </a:solidFill>
+                <a:latin typeface="Segoe UI"/>
+                <a:cs typeface="Segoe UI"/>
+              </a:rPr>
+              <a:t xml:space="preserve">y</a:t>
+            </a:r>
+            <a:r>
+              <a:rPr lang="en-US" sz="1950" dirty="0">
+                <a:solidFill>
+                  <a:srgbClr val="16171D"/>
+                </a:solidFill>
+                <a:latin typeface="Segoe UI"/>
+                <a:cs typeface="Segoe UI"/>
+              </a:rPr>
+              <a:t xml:space="preserve"> = 10</a:t>
+            </a:r>
+            <a:r>
+              <a:rPr lang="en-US" sz="1950" dirty="0" i="1">
+                <a:solidFill>
+                  <a:srgbClr val="16171D"/>
+                </a:solidFill>
+                <a:latin typeface="Segoe UI"/>
+                <a:cs typeface="Segoe UI"/>
+              </a:rPr>
+              <a:t xml:space="preserve">x</a:t>
+            </a:r>
+            <a:r>
+              <a:rPr lang="en-US" sz="1950" dirty="0">
+                <a:solidFill>
+                  <a:srgbClr val="16171D"/>
+                </a:solidFill>
+                <a:latin typeface="Segoe UI"/>
+                <a:cs typeface="Segoe UI"/>
+              </a:rPr>
+              <a:t xml:space="preserve"> + 50. What does 50 mean?</a:t>
+            </a:r>
+            <a:endParaRPr lang="en-US" sz="1950" dirty="0"/>
+          </a:p>
+        </p:txBody>
+      </p:sp>
+      <p:sp>
+        <p:nvSpPr>
+          <p:cNvPr id="11" name="Shape 11"/>
+          <p:cNvSpPr txBox="1"/>
+          <p:nvPr/>
+        </p:nvSpPr>
+        <p:spPr>
+          <a:xfrm>
+            <a:off x="895350" y="5122164"/>
+            <a:ext cx="3902979" cy="518922"/>
+          </a:xfrm>
+          <a:prstGeom prst="roundRect">
+            <a:avLst>
+              <a:gd name="adj" fmla="val 8000"/>
+            </a:avLst>
+          </a:prstGeom>
+          <a:solidFill>
+            <a:srgbClr val="EDF5E9"/>
+          </a:solidFill>
+          <a:ln>
+            <a:noFill/>
+          </a:ln>
+        </p:spPr>
+        <p:txBody>
+          <a:bodyPr wrap="square" lIns="164592" tIns="64008" rIns="164592" bIns="64008" anchor="ctr">
+            <a:noAutofit/>
+          </a:bodyPr>
+          <a:lstStyle/>
+          <a:p>
+            <a:pPr algn="l">
+              <a:lnSpc>
+                <a:spcPct val="100000"/>
+              </a:lnSpc>
+            </a:pPr>
+            <a:r>
+              <a:rPr lang="en-US" sz="1125" dirty="0" b="1" spc="100">
+                <a:solidFill>
+                  <a:srgbClr val="4F8A3C"/>
+                </a:solidFill>
+                <a:latin typeface="Segoe UI"/>
+                <a:cs typeface="Segoe UI"/>
+              </a:rPr>
+              <a:t xml:space="preserve">ANSWER   </a:t>
+            </a:r>
+            <a:r>
+              <a:rPr lang="en-US" sz="2325" dirty="0">
+                <a:solidFill>
+                  <a:srgbClr val="16171D"/>
+                </a:solidFill>
+                <a:latin typeface="Cambria"/>
+                <a:cs typeface="Cambria"/>
+              </a:rPr>
               <a:t xml:space="preserve">$50 to start</a:t>
             </a:r>
             <a:endParaRPr lang="en-US" sz="2325" dirty="0"/>
@@ -2956,7 +5379,7 @@
                   <a:srgbClr val="5F6272"/>
                 </a:solidFill>
               </a:rPr>
-              <a:t>11</a:t>
+              <a:t>13</a:t>
             </a:fld>
           </a:p>
         </p:txBody>
@@ -3299,7 +5722,7 @@
 </p:sld>
 </file>
 
-<file path=ppt/slides/slide12.xml><?xml version="1.0" encoding="utf-8"?>
+<file path=ppt/slides/slide14.xml><?xml version="1.0" encoding="utf-8"?>
 <p:sld xmlns:a="http://schemas.openxmlformats.org/drawingml/2006/main" xmlns:r="http://schemas.openxmlformats.org/officeDocument/2006/relationships" xmlns:p="http://schemas.openxmlformats.org/presentationml/2006/main">
   <p:cSld>
     <p:spTree>
@@ -3595,7 +6018,7 @@
                   <a:srgbClr val="5F6272"/>
                 </a:solidFill>
               </a:rPr>
-              <a:t>12</a:t>
+              <a:t>14</a:t>
             </a:fld>
           </a:p>
         </p:txBody>
@@ -9037,6 +11460,1876 @@
                 <a:latin typeface="Segoe UI"/>
                 <a:cs typeface="Segoe UI"/>
               </a:rPr>
+              <a:t xml:space="preserve">Check it · Step by step</a:t>
+            </a:r>
+            <a:endParaRPr lang="en-US" sz="1200" dirty="0"/>
+          </a:p>
+        </p:txBody>
+      </p:sp>
+      <p:sp>
+        <p:nvSpPr>
+          <p:cNvPr id="3" name="Shape 3"/>
+          <p:cNvSpPr txBox="1"/>
+          <p:nvPr/>
+        </p:nvSpPr>
+        <p:spPr>
+          <a:xfrm>
+            <a:off x="685800" y="866394"/>
+            <a:ext cx="10820095" cy="580644"/>
+          </a:xfrm>
+          <a:prstGeom prst="rect">
+            <a:avLst/>
+          </a:prstGeom>
+          <a:noFill/>
+          <a:ln>
+            <a:noFill/>
+          </a:ln>
+        </p:spPr>
+        <p:txBody>
+          <a:bodyPr wrap="square" lIns="36576" tIns="27432" rIns="36576" bIns="27432" anchor="t">
+            <a:noAutofit/>
+          </a:bodyPr>
+          <a:lstStyle/>
+          <a:p>
+            <a:pPr algn="l">
+              <a:lnSpc>
+                <a:spcPct val="100000"/>
+              </a:lnSpc>
+            </a:pPr>
+            <a:r>
+              <a:rPr lang="en-US" sz="3450" dirty="0" b="1">
+                <a:solidFill>
+                  <a:srgbClr val="16171D"/>
+                </a:solidFill>
+                <a:latin typeface="Segoe UI"/>
+                <a:cs typeface="Segoe UI"/>
+              </a:rPr>
+              <a:t xml:space="preserve">Compare to </a:t>
+            </a:r>
+            <a:r>
+              <a:rPr lang="en-US" sz="3450" dirty="0" b="1" i="1">
+                <a:solidFill>
+                  <a:srgbClr val="16171D"/>
+                </a:solidFill>
+                <a:latin typeface="Segoe UI"/>
+                <a:cs typeface="Segoe UI"/>
+              </a:rPr>
+              <a:t xml:space="preserve">y</a:t>
+            </a:r>
+            <a:r>
+              <a:rPr lang="en-US" sz="3450" dirty="0" b="1">
+                <a:solidFill>
+                  <a:srgbClr val="16171D"/>
+                </a:solidFill>
+                <a:latin typeface="Segoe UI"/>
+                <a:cs typeface="Segoe UI"/>
+              </a:rPr>
+              <a:t xml:space="preserve"> = 4</a:t>
+            </a:r>
+            <a:r>
+              <a:rPr lang="en-US" sz="3450" dirty="0" b="1" i="1">
+                <a:solidFill>
+                  <a:srgbClr val="16171D"/>
+                </a:solidFill>
+                <a:latin typeface="Segoe UI"/>
+                <a:cs typeface="Segoe UI"/>
+              </a:rPr>
+              <a:t xml:space="preserve">x</a:t>
+            </a:r>
+            <a:r>
+              <a:rPr lang="en-US" sz="3450" dirty="0" b="1">
+                <a:solidFill>
+                  <a:srgbClr val="16171D"/>
+                </a:solidFill>
+                <a:latin typeface="Segoe UI"/>
+                <a:cs typeface="Segoe UI"/>
+              </a:rPr>
+              <a:t xml:space="preserve"> − 3</a:t>
+            </a:r>
+            <a:endParaRPr lang="en-US" sz="3450" dirty="0"/>
+          </a:p>
+        </p:txBody>
+      </p:sp>
+      <p:sp>
+        <p:nvSpPr>
+          <p:cNvPr id="9" name="Shape 9"/>
+          <p:cNvSpPr txBox="1"/>
+          <p:nvPr/>
+        </p:nvSpPr>
+        <p:spPr>
+          <a:xfrm>
+            <a:off x="685800" y="1618488"/>
+            <a:ext cx="5295748" cy="3542538"/>
+          </a:xfrm>
+          <a:prstGeom prst="roundRect">
+            <a:avLst>
+              <a:gd name="adj" fmla="val 8000"/>
+            </a:avLst>
+          </a:prstGeom>
+          <a:solidFill>
+            <a:srgbClr val="FFFFFF"/>
+          </a:solidFill>
+          <a:ln w="12700">
+            <a:solidFill>
+              <a:srgbClr val="E3E4EC"/>
+            </a:solidFill>
+          </a:ln>
+        </p:spPr>
+        <p:txBody>
+          <a:bodyPr wrap="square" lIns="36576" tIns="27432" rIns="36576" bIns="27432" anchor="t">
+            <a:noAutofit/>
+          </a:bodyPr>
+          <a:lstStyle/>
+          <a:p>
+            <a:pPr algn="l">
+              <a:lnSpc>
+                <a:spcPct val="100000"/>
+              </a:lnSpc>
+            </a:pPr>
+            <a:endParaRPr lang="en-US" sz="1950" dirty="0"/>
+          </a:p>
+        </p:txBody>
+      </p:sp>
+      <p:sp>
+        <p:nvSpPr>
+          <p:cNvPr id="4" name="Shape 4"/>
+          <p:cNvSpPr txBox="1"/>
+          <p:nvPr/>
+        </p:nvSpPr>
+        <p:spPr>
+          <a:xfrm>
+            <a:off x="895350" y="1789938"/>
+            <a:ext cx="4876648" cy="694944"/>
+          </a:xfrm>
+          <a:prstGeom prst="rect">
+            <a:avLst/>
+          </a:prstGeom>
+          <a:noFill/>
+          <a:ln>
+            <a:noFill/>
+          </a:ln>
+        </p:spPr>
+        <p:txBody>
+          <a:bodyPr wrap="square" lIns="36576" tIns="27432" rIns="36576" bIns="27432" anchor="t">
+            <a:noAutofit/>
+          </a:bodyPr>
+          <a:lstStyle/>
+          <a:p>
+            <a:pPr algn="l">
+              <a:lnSpc>
+                <a:spcPct val="100000"/>
+              </a:lnSpc>
+            </a:pPr>
+            <a:r>
+              <a:rPr lang="en-US" sz="2100" dirty="0" b="1">
+                <a:solidFill>
+                  <a:srgbClr val="16171D"/>
+                </a:solidFill>
+                <a:latin typeface="Segoe UI"/>
+                <a:cs typeface="Segoe UI"/>
+              </a:rPr>
+              <a:t xml:space="preserve">1. Chiletso makes 4 dozen cookies per hour.</a:t>
+            </a:r>
+            <a:endParaRPr lang="en-US" sz="2100" dirty="0"/>
+          </a:p>
+        </p:txBody>
+      </p:sp>
+      <p:sp>
+        <p:nvSpPr>
+          <p:cNvPr id="5" name="Shape 5"/>
+          <p:cNvSpPr txBox="1"/>
+          <p:nvPr/>
+        </p:nvSpPr>
+        <p:spPr>
+          <a:xfrm>
+            <a:off x="895350" y="2580132"/>
+            <a:ext cx="4876648" cy="534924"/>
+          </a:xfrm>
+          <a:prstGeom prst="rect">
+            <a:avLst/>
+          </a:prstGeom>
+          <a:noFill/>
+          <a:ln>
+            <a:noFill/>
+          </a:ln>
+        </p:spPr>
+        <p:txBody>
+          <a:bodyPr wrap="square" lIns="36576" tIns="27432" rIns="36576" bIns="27432" anchor="t">
+            <a:noAutofit/>
+          </a:bodyPr>
+          <a:lstStyle/>
+          <a:p>
+            <a:pPr algn="l">
+              <a:lnSpc>
+                <a:spcPct val="100000"/>
+              </a:lnSpc>
+            </a:pPr>
+            <a:r>
+              <a:rPr lang="en-US" sz="1575" dirty="0" b="1">
+                <a:solidFill>
+                  <a:srgbClr val="16171D"/>
+                </a:solidFill>
+                <a:latin typeface="Segoe UI"/>
+                <a:cs typeface="Segoe UI"/>
+              </a:rPr>
+              <a:t xml:space="preserve">Step 1.</a:t>
+            </a:r>
+            <a:r>
+              <a:rPr lang="en-US" sz="1575" dirty="0">
+                <a:solidFill>
+                  <a:srgbClr val="16171D"/>
+                </a:solidFill>
+                <a:latin typeface="Segoe UI"/>
+                <a:cs typeface="Segoe UI"/>
+              </a:rPr>
+              <a:t xml:space="preserve"> Look for "per": 4 dozen </a:t>
+            </a:r>
+            <a:r>
+              <a:rPr lang="en-US" sz="1575" dirty="0" b="1">
+                <a:solidFill>
+                  <a:srgbClr val="16171D"/>
+                </a:solidFill>
+                <a:latin typeface="Segoe UI"/>
+                <a:cs typeface="Segoe UI"/>
+              </a:rPr>
+              <a:t xml:space="preserve">per</a:t>
+            </a:r>
+            <a:r>
+              <a:rPr lang="en-US" sz="1575" dirty="0">
+                <a:solidFill>
+                  <a:srgbClr val="16171D"/>
+                </a:solidFill>
+                <a:latin typeface="Segoe UI"/>
+                <a:cs typeface="Segoe UI"/>
+              </a:rPr>
+              <a:t xml:space="preserve"> hour. The slope is 4.</a:t>
+            </a:r>
+            <a:endParaRPr lang="en-US" sz="1575" dirty="0"/>
+          </a:p>
+        </p:txBody>
+      </p:sp>
+      <p:sp>
+        <p:nvSpPr>
+          <p:cNvPr id="6" name="Shape 6"/>
+          <p:cNvSpPr txBox="1"/>
+          <p:nvPr/>
+        </p:nvSpPr>
+        <p:spPr>
+          <a:xfrm>
+            <a:off x="895350" y="3210306"/>
+            <a:ext cx="4876648" cy="534924"/>
+          </a:xfrm>
+          <a:prstGeom prst="rect">
+            <a:avLst/>
+          </a:prstGeom>
+          <a:noFill/>
+          <a:ln>
+            <a:noFill/>
+          </a:ln>
+        </p:spPr>
+        <p:txBody>
+          <a:bodyPr wrap="square" lIns="36576" tIns="27432" rIns="36576" bIns="27432" anchor="t">
+            <a:noAutofit/>
+          </a:bodyPr>
+          <a:lstStyle/>
+          <a:p>
+            <a:pPr algn="l">
+              <a:lnSpc>
+                <a:spcPct val="100000"/>
+              </a:lnSpc>
+            </a:pPr>
+            <a:r>
+              <a:rPr lang="en-US" sz="1575" dirty="0" b="1">
+                <a:solidFill>
+                  <a:srgbClr val="16171D"/>
+                </a:solidFill>
+                <a:latin typeface="Segoe UI"/>
+                <a:cs typeface="Segoe UI"/>
+              </a:rPr>
+              <a:t xml:space="preserve">Step 2.</a:t>
+            </a:r>
+            <a:r>
+              <a:rPr lang="en-US" sz="1575" dirty="0">
+                <a:solidFill>
+                  <a:srgbClr val="16171D"/>
+                </a:solidFill>
+                <a:latin typeface="Segoe UI"/>
+                <a:cs typeface="Segoe UI"/>
+              </a:rPr>
+              <a:t xml:space="preserve"> The slope of </a:t>
+            </a:r>
+            <a:r>
+              <a:rPr lang="en-US" sz="1575" dirty="0" i="1">
+                <a:solidFill>
+                  <a:srgbClr val="16171D"/>
+                </a:solidFill>
+                <a:latin typeface="Segoe UI"/>
+                <a:cs typeface="Segoe UI"/>
+              </a:rPr>
+              <a:t xml:space="preserve">y</a:t>
+            </a:r>
+            <a:r>
+              <a:rPr lang="en-US" sz="1575" dirty="0">
+                <a:solidFill>
+                  <a:srgbClr val="16171D"/>
+                </a:solidFill>
+                <a:latin typeface="Segoe UI"/>
+                <a:cs typeface="Segoe UI"/>
+              </a:rPr>
+              <a:t xml:space="preserve"> = 4</a:t>
+            </a:r>
+            <a:r>
+              <a:rPr lang="en-US" sz="1575" dirty="0" i="1">
+                <a:solidFill>
+                  <a:srgbClr val="16171D"/>
+                </a:solidFill>
+                <a:latin typeface="Segoe UI"/>
+                <a:cs typeface="Segoe UI"/>
+              </a:rPr>
+              <a:t xml:space="preserve">x</a:t>
+            </a:r>
+            <a:r>
+              <a:rPr lang="en-US" sz="1575" dirty="0">
+                <a:solidFill>
+                  <a:srgbClr val="16171D"/>
+                </a:solidFill>
+                <a:latin typeface="Segoe UI"/>
+                <a:cs typeface="Segoe UI"/>
+              </a:rPr>
+              <a:t xml:space="preserve"> − 3 is the number with </a:t>
+            </a:r>
+            <a:r>
+              <a:rPr lang="en-US" sz="1575" dirty="0" i="1">
+                <a:solidFill>
+                  <a:srgbClr val="16171D"/>
+                </a:solidFill>
+                <a:latin typeface="Segoe UI"/>
+                <a:cs typeface="Segoe UI"/>
+              </a:rPr>
+              <a:t xml:space="preserve">x</a:t>
+            </a:r>
+            <a:r>
+              <a:rPr lang="en-US" sz="1575" dirty="0">
+                <a:solidFill>
+                  <a:srgbClr val="16171D"/>
+                </a:solidFill>
+                <a:latin typeface="Segoe UI"/>
+                <a:cs typeface="Segoe UI"/>
+              </a:rPr>
+              <a:t xml:space="preserve">: 4.</a:t>
+            </a:r>
+            <a:endParaRPr lang="en-US" sz="1575" dirty="0"/>
+          </a:p>
+        </p:txBody>
+      </p:sp>
+      <p:sp>
+        <p:nvSpPr>
+          <p:cNvPr id="7" name="Shape 7"/>
+          <p:cNvSpPr txBox="1"/>
+          <p:nvPr/>
+        </p:nvSpPr>
+        <p:spPr>
+          <a:xfrm>
+            <a:off x="895350" y="3840480"/>
+            <a:ext cx="4876648" cy="534924"/>
+          </a:xfrm>
+          <a:prstGeom prst="rect">
+            <a:avLst/>
+          </a:prstGeom>
+          <a:noFill/>
+          <a:ln>
+            <a:noFill/>
+          </a:ln>
+        </p:spPr>
+        <p:txBody>
+          <a:bodyPr wrap="square" lIns="36576" tIns="27432" rIns="36576" bIns="27432" anchor="t">
+            <a:noAutofit/>
+          </a:bodyPr>
+          <a:lstStyle/>
+          <a:p>
+            <a:pPr algn="l">
+              <a:lnSpc>
+                <a:spcPct val="100000"/>
+              </a:lnSpc>
+            </a:pPr>
+            <a:r>
+              <a:rPr lang="en-US" sz="1575" dirty="0" b="1">
+                <a:solidFill>
+                  <a:srgbClr val="16171D"/>
+                </a:solidFill>
+                <a:latin typeface="Segoe UI"/>
+                <a:cs typeface="Segoe UI"/>
+              </a:rPr>
+              <a:t xml:space="preserve">Step 3.</a:t>
+            </a:r>
+            <a:r>
+              <a:rPr lang="en-US" sz="1575" dirty="0">
+                <a:solidFill>
+                  <a:srgbClr val="16171D"/>
+                </a:solidFill>
+                <a:latin typeface="Segoe UI"/>
+                <a:cs typeface="Segoe UI"/>
+              </a:rPr>
+              <a:t xml:space="preserve"> 4 and 4 are the same slope, so the lines are parallel.</a:t>
+            </a:r>
+            <a:endParaRPr lang="en-US" sz="1575" dirty="0"/>
+          </a:p>
+        </p:txBody>
+      </p:sp>
+      <p:sp>
+        <p:nvSpPr>
+          <p:cNvPr id="8" name="Shape 8"/>
+          <p:cNvSpPr txBox="1"/>
+          <p:nvPr/>
+        </p:nvSpPr>
+        <p:spPr>
+          <a:xfrm>
+            <a:off x="895350" y="4470654"/>
+            <a:ext cx="4732111" cy="518922"/>
+          </a:xfrm>
+          <a:prstGeom prst="roundRect">
+            <a:avLst>
+              <a:gd name="adj" fmla="val 8000"/>
+            </a:avLst>
+          </a:prstGeom>
+          <a:solidFill>
+            <a:srgbClr val="EDF5E9"/>
+          </a:solidFill>
+          <a:ln>
+            <a:noFill/>
+          </a:ln>
+        </p:spPr>
+        <p:txBody>
+          <a:bodyPr wrap="square" lIns="164592" tIns="64008" rIns="164592" bIns="64008" anchor="ctr">
+            <a:noAutofit/>
+          </a:bodyPr>
+          <a:lstStyle/>
+          <a:p>
+            <a:pPr algn="l">
+              <a:lnSpc>
+                <a:spcPct val="100000"/>
+              </a:lnSpc>
+            </a:pPr>
+            <a:r>
+              <a:rPr lang="en-US" sz="1125" dirty="0" b="1" spc="100">
+                <a:solidFill>
+                  <a:srgbClr val="4F8A3C"/>
+                </a:solidFill>
+                <a:latin typeface="Segoe UI"/>
+                <a:cs typeface="Segoe UI"/>
+              </a:rPr>
+              <a:t xml:space="preserve">ANSWER   </a:t>
+            </a:r>
+            <a:r>
+              <a:rPr lang="en-US" sz="2325" dirty="0">
+                <a:solidFill>
+                  <a:srgbClr val="16171D"/>
+                </a:solidFill>
+                <a:latin typeface="Cambria"/>
+                <a:cs typeface="Cambria"/>
+              </a:rPr>
+              <a:t xml:space="preserve">slope 4: parallel</a:t>
+            </a:r>
+            <a:endParaRPr lang="en-US" sz="2325" dirty="0"/>
+          </a:p>
+        </p:txBody>
+      </p:sp>
+      <p:sp>
+        <p:nvSpPr>
+          <p:cNvPr id="15" name="Shape 15"/>
+          <p:cNvSpPr txBox="1"/>
+          <p:nvPr/>
+        </p:nvSpPr>
+        <p:spPr>
+          <a:xfrm>
+            <a:off x="6210148" y="1618488"/>
+            <a:ext cx="5295748" cy="2982468"/>
+          </a:xfrm>
+          <a:prstGeom prst="roundRect">
+            <a:avLst>
+              <a:gd name="adj" fmla="val 8000"/>
+            </a:avLst>
+          </a:prstGeom>
+          <a:solidFill>
+            <a:srgbClr val="FFFFFF"/>
+          </a:solidFill>
+          <a:ln w="12700">
+            <a:solidFill>
+              <a:srgbClr val="E3E4EC"/>
+            </a:solidFill>
+          </a:ln>
+        </p:spPr>
+        <p:txBody>
+          <a:bodyPr wrap="square" lIns="36576" tIns="27432" rIns="36576" bIns="27432" anchor="t">
+            <a:noAutofit/>
+          </a:bodyPr>
+          <a:lstStyle/>
+          <a:p>
+            <a:pPr algn="l">
+              <a:lnSpc>
+                <a:spcPct val="100000"/>
+              </a:lnSpc>
+            </a:pPr>
+            <a:endParaRPr lang="en-US" sz="1950" dirty="0"/>
+          </a:p>
+        </p:txBody>
+      </p:sp>
+      <p:sp>
+        <p:nvSpPr>
+          <p:cNvPr id="10" name="Shape 10"/>
+          <p:cNvSpPr txBox="1"/>
+          <p:nvPr/>
+        </p:nvSpPr>
+        <p:spPr>
+          <a:xfrm>
+            <a:off x="6419698" y="1789938"/>
+            <a:ext cx="4876648" cy="374904"/>
+          </a:xfrm>
+          <a:prstGeom prst="rect">
+            <a:avLst/>
+          </a:prstGeom>
+          <a:noFill/>
+          <a:ln>
+            <a:noFill/>
+          </a:ln>
+        </p:spPr>
+        <p:txBody>
+          <a:bodyPr wrap="square" lIns="36576" tIns="27432" rIns="36576" bIns="27432" anchor="t">
+            <a:noAutofit/>
+          </a:bodyPr>
+          <a:lstStyle/>
+          <a:p>
+            <a:pPr algn="l">
+              <a:lnSpc>
+                <a:spcPct val="100000"/>
+              </a:lnSpc>
+            </a:pPr>
+            <a:r>
+              <a:rPr lang="en-US" sz="2100" dirty="0" b="1">
+                <a:solidFill>
+                  <a:srgbClr val="16171D"/>
+                </a:solidFill>
+                <a:latin typeface="Segoe UI"/>
+                <a:cs typeface="Segoe UI"/>
+              </a:rPr>
+              <a:t xml:space="preserve">2. </a:t>
+            </a:r>
+            <a:r>
+              <a:rPr lang="en-US" sz="2100" dirty="0" b="1" i="1">
+                <a:solidFill>
+                  <a:srgbClr val="16171D"/>
+                </a:solidFill>
+                <a:latin typeface="Segoe UI"/>
+                <a:cs typeface="Segoe UI"/>
+              </a:rPr>
+              <a:t xml:space="preserve">y</a:t>
+            </a:r>
+            <a:r>
+              <a:rPr lang="en-US" sz="2100" dirty="0" b="1">
+                <a:solidFill>
+                  <a:srgbClr val="16171D"/>
+                </a:solidFill>
+                <a:latin typeface="Segoe UI"/>
+                <a:cs typeface="Segoe UI"/>
+              </a:rPr>
+              <a:t xml:space="preserve"> = −</a:t>
+            </a:r>
+            <a:r>
+              <a:rPr lang="en-US" sz="2100" dirty="0" b="1">
+                <a:solidFill>
+                  <a:srgbClr val="16171D"/>
+                </a:solidFill>
+                <a:latin typeface="Segoe UI"/>
+                <a:cs typeface="Segoe UI"/>
+              </a:rPr>
+              <a:t xml:space="preserve">1</a:t>
+            </a:r>
+            <a:r>
+              <a:rPr lang="en-US" sz="2100" dirty="0" b="1">
+                <a:solidFill>
+                  <a:srgbClr val="16171D"/>
+                </a:solidFill>
+                <a:latin typeface="Segoe UI"/>
+                <a:cs typeface="Segoe UI"/>
+              </a:rPr>
+              <a:t xml:space="preserve">/</a:t>
+            </a:r>
+            <a:r>
+              <a:rPr lang="en-US" sz="2100" dirty="0" b="1">
+                <a:solidFill>
+                  <a:srgbClr val="16171D"/>
+                </a:solidFill>
+                <a:latin typeface="Segoe UI"/>
+                <a:cs typeface="Segoe UI"/>
+              </a:rPr>
+              <a:t xml:space="preserve">4</a:t>
+            </a:r>
+            <a:r>
+              <a:rPr lang="en-US" sz="2100" dirty="0" b="1" i="1">
+                <a:solidFill>
+                  <a:srgbClr val="16171D"/>
+                </a:solidFill>
+                <a:latin typeface="Segoe UI"/>
+                <a:cs typeface="Segoe UI"/>
+              </a:rPr>
+              <a:t xml:space="preserve">x</a:t>
+            </a:r>
+            <a:r>
+              <a:rPr lang="en-US" sz="2100" dirty="0" b="1">
+                <a:solidFill>
+                  <a:srgbClr val="16171D"/>
+                </a:solidFill>
+                <a:latin typeface="Segoe UI"/>
+                <a:cs typeface="Segoe UI"/>
+              </a:rPr>
+              <a:t xml:space="preserve"> + 2</a:t>
+            </a:r>
+            <a:endParaRPr lang="en-US" sz="2100" dirty="0"/>
+          </a:p>
+        </p:txBody>
+      </p:sp>
+      <p:sp>
+        <p:nvSpPr>
+          <p:cNvPr id="11" name="Shape 11"/>
+          <p:cNvSpPr txBox="1"/>
+          <p:nvPr/>
+        </p:nvSpPr>
+        <p:spPr>
+          <a:xfrm>
+            <a:off x="6419698" y="2260092"/>
+            <a:ext cx="4876648" cy="294894"/>
+          </a:xfrm>
+          <a:prstGeom prst="rect">
+            <a:avLst/>
+          </a:prstGeom>
+          <a:noFill/>
+          <a:ln>
+            <a:noFill/>
+          </a:ln>
+        </p:spPr>
+        <p:txBody>
+          <a:bodyPr wrap="square" lIns="36576" tIns="27432" rIns="36576" bIns="27432" anchor="t">
+            <a:noAutofit/>
+          </a:bodyPr>
+          <a:lstStyle/>
+          <a:p>
+            <a:pPr algn="l">
+              <a:lnSpc>
+                <a:spcPct val="100000"/>
+              </a:lnSpc>
+            </a:pPr>
+            <a:r>
+              <a:rPr lang="en-US" sz="1575" dirty="0" b="1">
+                <a:solidFill>
+                  <a:srgbClr val="16171D"/>
+                </a:solidFill>
+                <a:latin typeface="Segoe UI"/>
+                <a:cs typeface="Segoe UI"/>
+              </a:rPr>
+              <a:t xml:space="preserve">Step 1.</a:t>
+            </a:r>
+            <a:r>
+              <a:rPr lang="en-US" sz="1575" dirty="0">
+                <a:solidFill>
+                  <a:srgbClr val="16171D"/>
+                </a:solidFill>
+                <a:latin typeface="Segoe UI"/>
+                <a:cs typeface="Segoe UI"/>
+              </a:rPr>
+              <a:t xml:space="preserve"> The slope is the number with </a:t>
+            </a:r>
+            <a:r>
+              <a:rPr lang="en-US" sz="1575" dirty="0" i="1">
+                <a:solidFill>
+                  <a:srgbClr val="16171D"/>
+                </a:solidFill>
+                <a:latin typeface="Segoe UI"/>
+                <a:cs typeface="Segoe UI"/>
+              </a:rPr>
+              <a:t xml:space="preserve">x</a:t>
+            </a:r>
+            <a:r>
+              <a:rPr lang="en-US" sz="1575" dirty="0">
+                <a:solidFill>
+                  <a:srgbClr val="16171D"/>
+                </a:solidFill>
+                <a:latin typeface="Segoe UI"/>
+                <a:cs typeface="Segoe UI"/>
+              </a:rPr>
+              <a:t xml:space="preserve">: −</a:t>
+            </a:r>
+            <a:r>
+              <a:rPr lang="en-US" sz="1575" dirty="0">
+                <a:solidFill>
+                  <a:srgbClr val="16171D"/>
+                </a:solidFill>
+                <a:latin typeface="Segoe UI"/>
+                <a:cs typeface="Segoe UI"/>
+              </a:rPr>
+              <a:t xml:space="preserve">1</a:t>
+            </a:r>
+            <a:r>
+              <a:rPr lang="en-US" sz="1575" dirty="0">
+                <a:solidFill>
+                  <a:srgbClr val="16171D"/>
+                </a:solidFill>
+                <a:latin typeface="Segoe UI"/>
+                <a:cs typeface="Segoe UI"/>
+              </a:rPr>
+              <a:t xml:space="preserve">/</a:t>
+            </a:r>
+            <a:r>
+              <a:rPr lang="en-US" sz="1575" dirty="0">
+                <a:solidFill>
+                  <a:srgbClr val="16171D"/>
+                </a:solidFill>
+                <a:latin typeface="Segoe UI"/>
+                <a:cs typeface="Segoe UI"/>
+              </a:rPr>
+              <a:t xml:space="preserve">4</a:t>
+            </a:r>
+            <a:r>
+              <a:rPr lang="en-US" sz="1575" dirty="0">
+                <a:solidFill>
+                  <a:srgbClr val="16171D"/>
+                </a:solidFill>
+                <a:latin typeface="Segoe UI"/>
+                <a:cs typeface="Segoe UI"/>
+              </a:rPr>
+              <a:t xml:space="preserve">.</a:t>
+            </a:r>
+            <a:endParaRPr lang="en-US" sz="1575" dirty="0"/>
+          </a:p>
+        </p:txBody>
+      </p:sp>
+      <p:sp>
+        <p:nvSpPr>
+          <p:cNvPr id="12" name="Shape 12"/>
+          <p:cNvSpPr txBox="1"/>
+          <p:nvPr/>
+        </p:nvSpPr>
+        <p:spPr>
+          <a:xfrm>
+            <a:off x="6419698" y="2650236"/>
+            <a:ext cx="4876648" cy="534924"/>
+          </a:xfrm>
+          <a:prstGeom prst="rect">
+            <a:avLst/>
+          </a:prstGeom>
+          <a:noFill/>
+          <a:ln>
+            <a:noFill/>
+          </a:ln>
+        </p:spPr>
+        <p:txBody>
+          <a:bodyPr wrap="square" lIns="36576" tIns="27432" rIns="36576" bIns="27432" anchor="t">
+            <a:noAutofit/>
+          </a:bodyPr>
+          <a:lstStyle/>
+          <a:p>
+            <a:pPr algn="l">
+              <a:lnSpc>
+                <a:spcPct val="100000"/>
+              </a:lnSpc>
+            </a:pPr>
+            <a:r>
+              <a:rPr lang="en-US" sz="1575" dirty="0" b="1">
+                <a:solidFill>
+                  <a:srgbClr val="16171D"/>
+                </a:solidFill>
+                <a:latin typeface="Segoe UI"/>
+                <a:cs typeface="Segoe UI"/>
+              </a:rPr>
+              <a:t xml:space="preserve">Step 2.</a:t>
+            </a:r>
+            <a:r>
+              <a:rPr lang="en-US" sz="1575" dirty="0">
+                <a:solidFill>
+                  <a:srgbClr val="16171D"/>
+                </a:solidFill>
+                <a:latin typeface="Segoe UI"/>
+                <a:cs typeface="Segoe UI"/>
+              </a:rPr>
+              <a:t xml:space="preserve"> Is it the same as 4? No, so not parallel.</a:t>
+            </a:r>
+            <a:endParaRPr lang="en-US" sz="1575" dirty="0"/>
+          </a:p>
+        </p:txBody>
+      </p:sp>
+      <p:sp>
+        <p:nvSpPr>
+          <p:cNvPr id="13" name="Shape 13"/>
+          <p:cNvSpPr txBox="1"/>
+          <p:nvPr/>
+        </p:nvSpPr>
+        <p:spPr>
+          <a:xfrm>
+            <a:off x="6419698" y="3280410"/>
+            <a:ext cx="4876648" cy="534924"/>
+          </a:xfrm>
+          <a:prstGeom prst="rect">
+            <a:avLst/>
+          </a:prstGeom>
+          <a:noFill/>
+          <a:ln>
+            <a:noFill/>
+          </a:ln>
+        </p:spPr>
+        <p:txBody>
+          <a:bodyPr wrap="square" lIns="36576" tIns="27432" rIns="36576" bIns="27432" anchor="t">
+            <a:noAutofit/>
+          </a:bodyPr>
+          <a:lstStyle/>
+          <a:p>
+            <a:pPr algn="l">
+              <a:lnSpc>
+                <a:spcPct val="100000"/>
+              </a:lnSpc>
+            </a:pPr>
+            <a:r>
+              <a:rPr lang="en-US" sz="1575" dirty="0" b="1">
+                <a:solidFill>
+                  <a:srgbClr val="16171D"/>
+                </a:solidFill>
+                <a:latin typeface="Segoe UI"/>
+                <a:cs typeface="Segoe UI"/>
+              </a:rPr>
+              <a:t xml:space="preserve">Step 3.</a:t>
+            </a:r>
+            <a:r>
+              <a:rPr lang="en-US" sz="1575" dirty="0">
+                <a:solidFill>
+                  <a:srgbClr val="16171D"/>
+                </a:solidFill>
+                <a:latin typeface="Segoe UI"/>
+                <a:cs typeface="Segoe UI"/>
+              </a:rPr>
+              <a:t xml:space="preserve"> Multiply the slopes: 4 · (−</a:t>
+            </a:r>
+            <a:r>
+              <a:rPr lang="en-US" sz="1575" dirty="0">
+                <a:solidFill>
+                  <a:srgbClr val="16171D"/>
+                </a:solidFill>
+                <a:latin typeface="Segoe UI"/>
+                <a:cs typeface="Segoe UI"/>
+              </a:rPr>
+              <a:t xml:space="preserve">1</a:t>
+            </a:r>
+            <a:r>
+              <a:rPr lang="en-US" sz="1575" dirty="0">
+                <a:solidFill>
+                  <a:srgbClr val="16171D"/>
+                </a:solidFill>
+                <a:latin typeface="Segoe UI"/>
+                <a:cs typeface="Segoe UI"/>
+              </a:rPr>
+              <a:t xml:space="preserve">/</a:t>
+            </a:r>
+            <a:r>
+              <a:rPr lang="en-US" sz="1575" dirty="0">
+                <a:solidFill>
+                  <a:srgbClr val="16171D"/>
+                </a:solidFill>
+                <a:latin typeface="Segoe UI"/>
+                <a:cs typeface="Segoe UI"/>
+              </a:rPr>
+              <a:t xml:space="preserve">4</a:t>
+            </a:r>
+            <a:r>
+              <a:rPr lang="en-US" sz="1575" dirty="0">
+                <a:solidFill>
+                  <a:srgbClr val="16171D"/>
+                </a:solidFill>
+                <a:latin typeface="Segoe UI"/>
+                <a:cs typeface="Segoe UI"/>
+              </a:rPr>
+              <a:t xml:space="preserve">) = −1. A product of −1 means perpendicular.</a:t>
+            </a:r>
+            <a:endParaRPr lang="en-US" sz="1575" dirty="0"/>
+          </a:p>
+        </p:txBody>
+      </p:sp>
+      <p:sp>
+        <p:nvSpPr>
+          <p:cNvPr id="14" name="Shape 14"/>
+          <p:cNvSpPr txBox="1"/>
+          <p:nvPr/>
+        </p:nvSpPr>
+        <p:spPr>
+          <a:xfrm>
+            <a:off x="6419698" y="3910584"/>
+            <a:ext cx="4068806" cy="518922"/>
+          </a:xfrm>
+          <a:prstGeom prst="roundRect">
+            <a:avLst>
+              <a:gd name="adj" fmla="val 8000"/>
+            </a:avLst>
+          </a:prstGeom>
+          <a:solidFill>
+            <a:srgbClr val="EDF5E9"/>
+          </a:solidFill>
+          <a:ln>
+            <a:noFill/>
+          </a:ln>
+        </p:spPr>
+        <p:txBody>
+          <a:bodyPr wrap="square" lIns="164592" tIns="64008" rIns="164592" bIns="64008" anchor="ctr">
+            <a:noAutofit/>
+          </a:bodyPr>
+          <a:lstStyle/>
+          <a:p>
+            <a:pPr algn="l">
+              <a:lnSpc>
+                <a:spcPct val="100000"/>
+              </a:lnSpc>
+            </a:pPr>
+            <a:r>
+              <a:rPr lang="en-US" sz="1125" dirty="0" b="1" spc="100">
+                <a:solidFill>
+                  <a:srgbClr val="4F8A3C"/>
+                </a:solidFill>
+                <a:latin typeface="Segoe UI"/>
+                <a:cs typeface="Segoe UI"/>
+              </a:rPr>
+              <a:t xml:space="preserve">ANSWER   </a:t>
+            </a:r>
+            <a:r>
+              <a:rPr lang="en-US" sz="2325" dirty="0">
+                <a:solidFill>
+                  <a:srgbClr val="16171D"/>
+                </a:solidFill>
+                <a:latin typeface="Cambria"/>
+                <a:cs typeface="Cambria"/>
+              </a:rPr>
+              <a:t xml:space="preserve">perpendicular</a:t>
+            </a:r>
+            <a:endParaRPr lang="en-US" sz="2325" dirty="0"/>
+          </a:p>
+        </p:txBody>
+      </p:sp>
+      <p:sp>
+        <p:nvSpPr>
+          <p:cNvPr id="16" name="Slide Number 16"/>
+          <p:cNvSpPr txBox="1"/>
+          <p:nvPr/>
+        </p:nvSpPr>
+        <p:spPr>
+          <a:xfrm>
+            <a:off x="11277295" y="6611112"/>
+            <a:ext cx="685800" cy="201168"/>
+          </a:xfrm>
+          <a:prstGeom prst="rect">
+            <a:avLst/>
+          </a:prstGeom>
+          <a:noFill/>
+        </p:spPr>
+        <p:txBody>
+          <a:bodyPr wrap="none" lIns="0" tIns="0" rIns="0" bIns="0" anchor="b">
+            <a:noAutofit/>
+          </a:bodyPr>
+          <a:lstStyle/>
+          <a:p>
+            <a:pPr algn="r"/>
+            <a:fld id="{5C1A6E0B-3B1F-4D5E-9C7A-2F4B8D6E1A90}" type="slidenum">
+              <a:rPr lang="en-US" sz="1200" dirty="0">
+                <a:solidFill>
+                  <a:srgbClr val="5F6272"/>
+                </a:solidFill>
+              </a:rPr>
+              <a:t>8</a:t>
+            </a:fld>
+          </a:p>
+        </p:txBody>
+      </p:sp>
+    </p:spTree>
+  </p:cSld>
+  <p:clrMapOvr>
+    <a:masterClrMapping/>
+  </p:clrMapOvr>
+  <p:transition spd="med">
+    <p:fade/>
+  </p:transition>
+  <p:timing>
+    <p:tnLst>
+      <p:par>
+        <p:cTn id="1" dur="indefinite" restart="never" nodeType="tmRoot">
+          <p:childTnLst>
+            <p:seq concurrent="1" nextAc="seek">
+              <p:cTn id="2" dur="indefinite" nodeType="mainSeq">
+                <p:childTnLst>
+                  <p:par>
+                    <p:cTn id="8" fill="hold">
+                      <p:stCondLst>
+                        <p:cond delay="indefinite"/>
+                      </p:stCondLst>
+                      <p:childTnLst>
+                        <p:par>
+                          <p:cTn id="9" fill="hold">
+                            <p:stCondLst>
+                              <p:cond delay="0"/>
+                            </p:stCondLst>
+                            <p:childTnLst>
+                              <p:par>
+                                <p:cTn id="7" presetID="42" presetClass="entr" presetSubtype="0" fill="hold" nodeType="clickEffect">
+                                  <p:stCondLst>
+                                    <p:cond delay="0"/>
+                                  </p:stCondLst>
+                                  <p:childTnLst>
+                                    <p:set>
+                                      <p:cBhvr>
+                                        <p:cTn id="3" dur="1" fill="hold">
+                                          <p:stCondLst>
+                                            <p:cond delay="0"/>
+                                          </p:stCondLst>
+                                        </p:cTn>
+                                        <p:tgtEl>
+                                          <p:spTgt spid="5"/>
+                                        </p:tgtEl>
+                                        <p:attrNameLst>
+                                          <p:attrName>style.visibility</p:attrName>
+                                        </p:attrNameLst>
+                                      </p:cBhvr>
+                                      <p:to>
+                                        <p:strVal val="visible"/>
+                                      </p:to>
+                                    </p:set>
+                                    <p:animEffect transition="in" filter="fade">
+                                      <p:cBhvr>
+                                        <p:cTn id="4" dur="500"/>
+                                        <p:tgtEl>
+                                          <p:spTgt spid="5"/>
+                                        </p:tgtEl>
+                                      </p:cBhvr>
+                                    </p:animEffect>
+                                    <p:anim calcmode="lin" valueType="num">
+                                      <p:cBhvr>
+                                        <p:cTn id="5" dur="500" fill="hold"/>
+                                        <p:tgtEl>
+                                          <p:spTgt spid="5"/>
+                                        </p:tgtEl>
+                                        <p:attrNameLst>
+                                          <p:attrName>ppt_x</p:attrName>
+                                        </p:attrNameLst>
+                                      </p:cBhvr>
+                                      <p:tavLst>
+                                        <p:tav tm="0">
+                                          <p:val>
+                                            <p:strVal val="#ppt_x"/>
+                                          </p:val>
+                                        </p:tav>
+                                        <p:tav tm="100000">
+                                          <p:val>
+                                            <p:strVal val="#ppt_x"/>
+                                          </p:val>
+                                        </p:tav>
+                                      </p:tavLst>
+                                    </p:anim>
+                                    <p:anim calcmode="lin" valueType="num">
+                                      <p:cBhvr>
+                                        <p:cTn id="6" dur="500" fill="hold"/>
+                                        <p:tgtEl>
+                                          <p:spTgt spid="5"/>
+                                        </p:tgtEl>
+                                        <p:attrNameLst>
+                                          <p:attrName>ppt_y</p:attrName>
+                                        </p:attrNameLst>
+                                      </p:cBhvr>
+                                      <p:tavLst>
+                                        <p:tav tm="0">
+                                          <p:val>
+                                            <p:strVal val="#ppt_y+.1"/>
+                                          </p:val>
+                                        </p:tav>
+                                        <p:tav tm="100000">
+                                          <p:val>
+                                            <p:strVal val="#ppt_y"/>
+                                          </p:val>
+                                        </p:tav>
+                                      </p:tavLst>
+                                    </p:anim>
+                                  </p:childTnLst>
+                                </p:cTn>
+                              </p:par>
+                            </p:childTnLst>
+                          </p:cTn>
+                        </p:par>
+                      </p:childTnLst>
+                    </p:cTn>
+                  </p:par>
+                  <p:par>
+                    <p:cTn id="15" fill="hold">
+                      <p:stCondLst>
+                        <p:cond delay="indefinite"/>
+                      </p:stCondLst>
+                      <p:childTnLst>
+                        <p:par>
+                          <p:cTn id="16" fill="hold">
+                            <p:stCondLst>
+                              <p:cond delay="0"/>
+                            </p:stCondLst>
+                            <p:childTnLst>
+                              <p:par>
+                                <p:cTn id="14" presetID="42" presetClass="entr" presetSubtype="0" fill="hold" nodeType="clickEffect">
+                                  <p:stCondLst>
+                                    <p:cond delay="0"/>
+                                  </p:stCondLst>
+                                  <p:childTnLst>
+                                    <p:set>
+                                      <p:cBhvr>
+                                        <p:cTn id="10" dur="1" fill="hold">
+                                          <p:stCondLst>
+                                            <p:cond delay="0"/>
+                                          </p:stCondLst>
+                                        </p:cTn>
+                                        <p:tgtEl>
+                                          <p:spTgt spid="6"/>
+                                        </p:tgtEl>
+                                        <p:attrNameLst>
+                                          <p:attrName>style.visibility</p:attrName>
+                                        </p:attrNameLst>
+                                      </p:cBhvr>
+                                      <p:to>
+                                        <p:strVal val="visible"/>
+                                      </p:to>
+                                    </p:set>
+                                    <p:animEffect transition="in" filter="fade">
+                                      <p:cBhvr>
+                                        <p:cTn id="11" dur="500"/>
+                                        <p:tgtEl>
+                                          <p:spTgt spid="6"/>
+                                        </p:tgtEl>
+                                      </p:cBhvr>
+                                    </p:animEffect>
+                                    <p:anim calcmode="lin" valueType="num">
+                                      <p:cBhvr>
+                                        <p:cTn id="12" dur="500" fill="hold"/>
+                                        <p:tgtEl>
+                                          <p:spTgt spid="6"/>
+                                        </p:tgtEl>
+                                        <p:attrNameLst>
+                                          <p:attrName>ppt_x</p:attrName>
+                                        </p:attrNameLst>
+                                      </p:cBhvr>
+                                      <p:tavLst>
+                                        <p:tav tm="0">
+                                          <p:val>
+                                            <p:strVal val="#ppt_x"/>
+                                          </p:val>
+                                        </p:tav>
+                                        <p:tav tm="100000">
+                                          <p:val>
+                                            <p:strVal val="#ppt_x"/>
+                                          </p:val>
+                                        </p:tav>
+                                      </p:tavLst>
+                                    </p:anim>
+                                    <p:anim calcmode="lin" valueType="num">
+                                      <p:cBhvr>
+                                        <p:cTn id="13" dur="500" fill="hold"/>
+                                        <p:tgtEl>
+                                          <p:spTgt spid="6"/>
+                                        </p:tgtEl>
+                                        <p:attrNameLst>
+                                          <p:attrName>ppt_y</p:attrName>
+                                        </p:attrNameLst>
+                                      </p:cBhvr>
+                                      <p:tavLst>
+                                        <p:tav tm="0">
+                                          <p:val>
+                                            <p:strVal val="#ppt_y+.1"/>
+                                          </p:val>
+                                        </p:tav>
+                                        <p:tav tm="100000">
+                                          <p:val>
+                                            <p:strVal val="#ppt_y"/>
+                                          </p:val>
+                                        </p:tav>
+                                      </p:tavLst>
+                                    </p:anim>
+                                  </p:childTnLst>
+                                </p:cTn>
+                              </p:par>
+                            </p:childTnLst>
+                          </p:cTn>
+                        </p:par>
+                      </p:childTnLst>
+                    </p:cTn>
+                  </p:par>
+                  <p:par>
+                    <p:cTn id="22" fill="hold">
+                      <p:stCondLst>
+                        <p:cond delay="indefinite"/>
+                      </p:stCondLst>
+                      <p:childTnLst>
+                        <p:par>
+                          <p:cTn id="23" fill="hold">
+                            <p:stCondLst>
+                              <p:cond delay="0"/>
+                            </p:stCondLst>
+                            <p:childTnLst>
+                              <p:par>
+                                <p:cTn id="21" presetID="42" presetClass="entr" presetSubtype="0" fill="hold" nodeType="clickEffect">
+                                  <p:stCondLst>
+                                    <p:cond delay="0"/>
+                                  </p:stCondLst>
+                                  <p:childTnLst>
+                                    <p:set>
+                                      <p:cBhvr>
+                                        <p:cTn id="17" dur="1" fill="hold">
+                                          <p:stCondLst>
+                                            <p:cond delay="0"/>
+                                          </p:stCondLst>
+                                        </p:cTn>
+                                        <p:tgtEl>
+                                          <p:spTgt spid="7"/>
+                                        </p:tgtEl>
+                                        <p:attrNameLst>
+                                          <p:attrName>style.visibility</p:attrName>
+                                        </p:attrNameLst>
+                                      </p:cBhvr>
+                                      <p:to>
+                                        <p:strVal val="visible"/>
+                                      </p:to>
+                                    </p:set>
+                                    <p:animEffect transition="in" filter="fade">
+                                      <p:cBhvr>
+                                        <p:cTn id="18" dur="500"/>
+                                        <p:tgtEl>
+                                          <p:spTgt spid="7"/>
+                                        </p:tgtEl>
+                                      </p:cBhvr>
+                                    </p:animEffect>
+                                    <p:anim calcmode="lin" valueType="num">
+                                      <p:cBhvr>
+                                        <p:cTn id="19" dur="500" fill="hold"/>
+                                        <p:tgtEl>
+                                          <p:spTgt spid="7"/>
+                                        </p:tgtEl>
+                                        <p:attrNameLst>
+                                          <p:attrName>ppt_x</p:attrName>
+                                        </p:attrNameLst>
+                                      </p:cBhvr>
+                                      <p:tavLst>
+                                        <p:tav tm="0">
+                                          <p:val>
+                                            <p:strVal val="#ppt_x"/>
+                                          </p:val>
+                                        </p:tav>
+                                        <p:tav tm="100000">
+                                          <p:val>
+                                            <p:strVal val="#ppt_x"/>
+                                          </p:val>
+                                        </p:tav>
+                                      </p:tavLst>
+                                    </p:anim>
+                                    <p:anim calcmode="lin" valueType="num">
+                                      <p:cBhvr>
+                                        <p:cTn id="20" dur="500" fill="hold"/>
+                                        <p:tgtEl>
+                                          <p:spTgt spid="7"/>
+                                        </p:tgtEl>
+                                        <p:attrNameLst>
+                                          <p:attrName>ppt_y</p:attrName>
+                                        </p:attrNameLst>
+                                      </p:cBhvr>
+                                      <p:tavLst>
+                                        <p:tav tm="0">
+                                          <p:val>
+                                            <p:strVal val="#ppt_y+.1"/>
+                                          </p:val>
+                                        </p:tav>
+                                        <p:tav tm="100000">
+                                          <p:val>
+                                            <p:strVal val="#ppt_y"/>
+                                          </p:val>
+                                        </p:tav>
+                                      </p:tavLst>
+                                    </p:anim>
+                                  </p:childTnLst>
+                                </p:cTn>
+                              </p:par>
+                            </p:childTnLst>
+                          </p:cTn>
+                        </p:par>
+                      </p:childTnLst>
+                    </p:cTn>
+                  </p:par>
+                  <p:par>
+                    <p:cTn id="29" fill="hold">
+                      <p:stCondLst>
+                        <p:cond delay="indefinite"/>
+                      </p:stCondLst>
+                      <p:childTnLst>
+                        <p:par>
+                          <p:cTn id="30" fill="hold">
+                            <p:stCondLst>
+                              <p:cond delay="0"/>
+                            </p:stCondLst>
+                            <p:childTnLst>
+                              <p:par>
+                                <p:cTn id="28" presetID="53" presetClass="entr" presetSubtype="16" fill="hold" nodeType="clickEffect">
+                                  <p:stCondLst>
+                                    <p:cond delay="0"/>
+                                  </p:stCondLst>
+                                  <p:childTnLst>
+                                    <p:set>
+                                      <p:cBhvr>
+                                        <p:cTn id="24" dur="1" fill="hold">
+                                          <p:stCondLst>
+                                            <p:cond delay="0"/>
+                                          </p:stCondLst>
+                                        </p:cTn>
+                                        <p:tgtEl>
+                                          <p:spTgt spid="8"/>
+                                        </p:tgtEl>
+                                        <p:attrNameLst>
+                                          <p:attrName>style.visibility</p:attrName>
+                                        </p:attrNameLst>
+                                      </p:cBhvr>
+                                      <p:to>
+                                        <p:strVal val="visible"/>
+                                      </p:to>
+                                    </p:set>
+                                    <p:animEffect transition="in" filter="fade">
+                                      <p:cBhvr>
+                                        <p:cTn id="25" dur="500"/>
+                                        <p:tgtEl>
+                                          <p:spTgt spid="8"/>
+                                        </p:tgtEl>
+                                      </p:cBhvr>
+                                    </p:animEffect>
+                                    <p:anim calcmode="lin" valueType="num">
+                                      <p:cBhvr>
+                                        <p:cTn id="26" dur="500" fill="hold"/>
+                                        <p:tgtEl>
+                                          <p:spTgt spid="8"/>
+                                        </p:tgtEl>
+                                        <p:attrNameLst>
+                                          <p:attrName>ppt_w</p:attrName>
+                                        </p:attrNameLst>
+                                      </p:cBhvr>
+                                      <p:tavLst>
+                                        <p:tav tm="0">
+                                          <p:val>
+                                            <p:fltVal val="0"/>
+                                          </p:val>
+                                        </p:tav>
+                                        <p:tav tm="100000">
+                                          <p:val>
+                                            <p:strVal val="#ppt_w"/>
+                                          </p:val>
+                                        </p:tav>
+                                      </p:tavLst>
+                                    </p:anim>
+                                    <p:anim calcmode="lin" valueType="num">
+                                      <p:cBhvr>
+                                        <p:cTn id="27" dur="500" fill="hold"/>
+                                        <p:tgtEl>
+                                          <p:spTgt spid="8"/>
+                                        </p:tgtEl>
+                                        <p:attrNameLst>
+                                          <p:attrName>ppt_h</p:attrName>
+                                        </p:attrNameLst>
+                                      </p:cBhvr>
+                                      <p:tavLst>
+                                        <p:tav tm="0">
+                                          <p:val>
+                                            <p:fltVal val="0"/>
+                                          </p:val>
+                                        </p:tav>
+                                        <p:tav tm="100000">
+                                          <p:val>
+                                            <p:strVal val="#ppt_h"/>
+                                          </p:val>
+                                        </p:tav>
+                                      </p:tavLst>
+                                    </p:anim>
+                                  </p:childTnLst>
+                                </p:cTn>
+                              </p:par>
+                            </p:childTnLst>
+                          </p:cTn>
+                        </p:par>
+                      </p:childTnLst>
+                    </p:cTn>
+                  </p:par>
+                  <p:par>
+                    <p:cTn id="36" fill="hold">
+                      <p:stCondLst>
+                        <p:cond delay="indefinite"/>
+                      </p:stCondLst>
+                      <p:childTnLst>
+                        <p:par>
+                          <p:cTn id="37" fill="hold">
+                            <p:stCondLst>
+                              <p:cond delay="0"/>
+                            </p:stCondLst>
+                            <p:childTnLst>
+                              <p:par>
+                                <p:cTn id="35" presetID="42" presetClass="entr" presetSubtype="0" fill="hold" nodeType="clickEffect">
+                                  <p:stCondLst>
+                                    <p:cond delay="0"/>
+                                  </p:stCondLst>
+                                  <p:childTnLst>
+                                    <p:set>
+                                      <p:cBhvr>
+                                        <p:cTn id="31" dur="1" fill="hold">
+                                          <p:stCondLst>
+                                            <p:cond delay="0"/>
+                                          </p:stCondLst>
+                                        </p:cTn>
+                                        <p:tgtEl>
+                                          <p:spTgt spid="11"/>
+                                        </p:tgtEl>
+                                        <p:attrNameLst>
+                                          <p:attrName>style.visibility</p:attrName>
+                                        </p:attrNameLst>
+                                      </p:cBhvr>
+                                      <p:to>
+                                        <p:strVal val="visible"/>
+                                      </p:to>
+                                    </p:set>
+                                    <p:animEffect transition="in" filter="fade">
+                                      <p:cBhvr>
+                                        <p:cTn id="32" dur="500"/>
+                                        <p:tgtEl>
+                                          <p:spTgt spid="11"/>
+                                        </p:tgtEl>
+                                      </p:cBhvr>
+                                    </p:animEffect>
+                                    <p:anim calcmode="lin" valueType="num">
+                                      <p:cBhvr>
+                                        <p:cTn id="33" dur="500" fill="hold"/>
+                                        <p:tgtEl>
+                                          <p:spTgt spid="11"/>
+                                        </p:tgtEl>
+                                        <p:attrNameLst>
+                                          <p:attrName>ppt_x</p:attrName>
+                                        </p:attrNameLst>
+                                      </p:cBhvr>
+                                      <p:tavLst>
+                                        <p:tav tm="0">
+                                          <p:val>
+                                            <p:strVal val="#ppt_x"/>
+                                          </p:val>
+                                        </p:tav>
+                                        <p:tav tm="100000">
+                                          <p:val>
+                                            <p:strVal val="#ppt_x"/>
+                                          </p:val>
+                                        </p:tav>
+                                      </p:tavLst>
+                                    </p:anim>
+                                    <p:anim calcmode="lin" valueType="num">
+                                      <p:cBhvr>
+                                        <p:cTn id="34" dur="500" fill="hold"/>
+                                        <p:tgtEl>
+                                          <p:spTgt spid="11"/>
+                                        </p:tgtEl>
+                                        <p:attrNameLst>
+                                          <p:attrName>ppt_y</p:attrName>
+                                        </p:attrNameLst>
+                                      </p:cBhvr>
+                                      <p:tavLst>
+                                        <p:tav tm="0">
+                                          <p:val>
+                                            <p:strVal val="#ppt_y+.1"/>
+                                          </p:val>
+                                        </p:tav>
+                                        <p:tav tm="100000">
+                                          <p:val>
+                                            <p:strVal val="#ppt_y"/>
+                                          </p:val>
+                                        </p:tav>
+                                      </p:tavLst>
+                                    </p:anim>
+                                  </p:childTnLst>
+                                </p:cTn>
+                              </p:par>
+                            </p:childTnLst>
+                          </p:cTn>
+                        </p:par>
+                      </p:childTnLst>
+                    </p:cTn>
+                  </p:par>
+                  <p:par>
+                    <p:cTn id="43" fill="hold">
+                      <p:stCondLst>
+                        <p:cond delay="indefinite"/>
+                      </p:stCondLst>
+                      <p:childTnLst>
+                        <p:par>
+                          <p:cTn id="44" fill="hold">
+                            <p:stCondLst>
+                              <p:cond delay="0"/>
+                            </p:stCondLst>
+                            <p:childTnLst>
+                              <p:par>
+                                <p:cTn id="42" presetID="42" presetClass="entr" presetSubtype="0" fill="hold" nodeType="clickEffect">
+                                  <p:stCondLst>
+                                    <p:cond delay="0"/>
+                                  </p:stCondLst>
+                                  <p:childTnLst>
+                                    <p:set>
+                                      <p:cBhvr>
+                                        <p:cTn id="38" dur="1" fill="hold">
+                                          <p:stCondLst>
+                                            <p:cond delay="0"/>
+                                          </p:stCondLst>
+                                        </p:cTn>
+                                        <p:tgtEl>
+                                          <p:spTgt spid="12"/>
+                                        </p:tgtEl>
+                                        <p:attrNameLst>
+                                          <p:attrName>style.visibility</p:attrName>
+                                        </p:attrNameLst>
+                                      </p:cBhvr>
+                                      <p:to>
+                                        <p:strVal val="visible"/>
+                                      </p:to>
+                                    </p:set>
+                                    <p:animEffect transition="in" filter="fade">
+                                      <p:cBhvr>
+                                        <p:cTn id="39" dur="500"/>
+                                        <p:tgtEl>
+                                          <p:spTgt spid="12"/>
+                                        </p:tgtEl>
+                                      </p:cBhvr>
+                                    </p:animEffect>
+                                    <p:anim calcmode="lin" valueType="num">
+                                      <p:cBhvr>
+                                        <p:cTn id="40" dur="500" fill="hold"/>
+                                        <p:tgtEl>
+                                          <p:spTgt spid="12"/>
+                                        </p:tgtEl>
+                                        <p:attrNameLst>
+                                          <p:attrName>ppt_x</p:attrName>
+                                        </p:attrNameLst>
+                                      </p:cBhvr>
+                                      <p:tavLst>
+                                        <p:tav tm="0">
+                                          <p:val>
+                                            <p:strVal val="#ppt_x"/>
+                                          </p:val>
+                                        </p:tav>
+                                        <p:tav tm="100000">
+                                          <p:val>
+                                            <p:strVal val="#ppt_x"/>
+                                          </p:val>
+                                        </p:tav>
+                                      </p:tavLst>
+                                    </p:anim>
+                                    <p:anim calcmode="lin" valueType="num">
+                                      <p:cBhvr>
+                                        <p:cTn id="41" dur="500" fill="hold"/>
+                                        <p:tgtEl>
+                                          <p:spTgt spid="12"/>
+                                        </p:tgtEl>
+                                        <p:attrNameLst>
+                                          <p:attrName>ppt_y</p:attrName>
+                                        </p:attrNameLst>
+                                      </p:cBhvr>
+                                      <p:tavLst>
+                                        <p:tav tm="0">
+                                          <p:val>
+                                            <p:strVal val="#ppt_y+.1"/>
+                                          </p:val>
+                                        </p:tav>
+                                        <p:tav tm="100000">
+                                          <p:val>
+                                            <p:strVal val="#ppt_y"/>
+                                          </p:val>
+                                        </p:tav>
+                                      </p:tavLst>
+                                    </p:anim>
+                                  </p:childTnLst>
+                                </p:cTn>
+                              </p:par>
+                            </p:childTnLst>
+                          </p:cTn>
+                        </p:par>
+                      </p:childTnLst>
+                    </p:cTn>
+                  </p:par>
+                  <p:par>
+                    <p:cTn id="50" fill="hold">
+                      <p:stCondLst>
+                        <p:cond delay="indefinite"/>
+                      </p:stCondLst>
+                      <p:childTnLst>
+                        <p:par>
+                          <p:cTn id="51" fill="hold">
+                            <p:stCondLst>
+                              <p:cond delay="0"/>
+                            </p:stCondLst>
+                            <p:childTnLst>
+                              <p:par>
+                                <p:cTn id="49" presetID="42" presetClass="entr" presetSubtype="0" fill="hold" nodeType="clickEffect">
+                                  <p:stCondLst>
+                                    <p:cond delay="0"/>
+                                  </p:stCondLst>
+                                  <p:childTnLst>
+                                    <p:set>
+                                      <p:cBhvr>
+                                        <p:cTn id="45" dur="1" fill="hold">
+                                          <p:stCondLst>
+                                            <p:cond delay="0"/>
+                                          </p:stCondLst>
+                                        </p:cTn>
+                                        <p:tgtEl>
+                                          <p:spTgt spid="13"/>
+                                        </p:tgtEl>
+                                        <p:attrNameLst>
+                                          <p:attrName>style.visibility</p:attrName>
+                                        </p:attrNameLst>
+                                      </p:cBhvr>
+                                      <p:to>
+                                        <p:strVal val="visible"/>
+                                      </p:to>
+                                    </p:set>
+                                    <p:animEffect transition="in" filter="fade">
+                                      <p:cBhvr>
+                                        <p:cTn id="46" dur="500"/>
+                                        <p:tgtEl>
+                                          <p:spTgt spid="13"/>
+                                        </p:tgtEl>
+                                      </p:cBhvr>
+                                    </p:animEffect>
+                                    <p:anim calcmode="lin" valueType="num">
+                                      <p:cBhvr>
+                                        <p:cTn id="47" dur="500" fill="hold"/>
+                                        <p:tgtEl>
+                                          <p:spTgt spid="13"/>
+                                        </p:tgtEl>
+                                        <p:attrNameLst>
+                                          <p:attrName>ppt_x</p:attrName>
+                                        </p:attrNameLst>
+                                      </p:cBhvr>
+                                      <p:tavLst>
+                                        <p:tav tm="0">
+                                          <p:val>
+                                            <p:strVal val="#ppt_x"/>
+                                          </p:val>
+                                        </p:tav>
+                                        <p:tav tm="100000">
+                                          <p:val>
+                                            <p:strVal val="#ppt_x"/>
+                                          </p:val>
+                                        </p:tav>
+                                      </p:tavLst>
+                                    </p:anim>
+                                    <p:anim calcmode="lin" valueType="num">
+                                      <p:cBhvr>
+                                        <p:cTn id="48" dur="500" fill="hold"/>
+                                        <p:tgtEl>
+                                          <p:spTgt spid="13"/>
+                                        </p:tgtEl>
+                                        <p:attrNameLst>
+                                          <p:attrName>ppt_y</p:attrName>
+                                        </p:attrNameLst>
+                                      </p:cBhvr>
+                                      <p:tavLst>
+                                        <p:tav tm="0">
+                                          <p:val>
+                                            <p:strVal val="#ppt_y+.1"/>
+                                          </p:val>
+                                        </p:tav>
+                                        <p:tav tm="100000">
+                                          <p:val>
+                                            <p:strVal val="#ppt_y"/>
+                                          </p:val>
+                                        </p:tav>
+                                      </p:tavLst>
+                                    </p:anim>
+                                  </p:childTnLst>
+                                </p:cTn>
+                              </p:par>
+                            </p:childTnLst>
+                          </p:cTn>
+                        </p:par>
+                      </p:childTnLst>
+                    </p:cTn>
+                  </p:par>
+                  <p:par>
+                    <p:cTn id="57" fill="hold">
+                      <p:stCondLst>
+                        <p:cond delay="indefinite"/>
+                      </p:stCondLst>
+                      <p:childTnLst>
+                        <p:par>
+                          <p:cTn id="58" fill="hold">
+                            <p:stCondLst>
+                              <p:cond delay="0"/>
+                            </p:stCondLst>
+                            <p:childTnLst>
+                              <p:par>
+                                <p:cTn id="56" presetID="53" presetClass="entr" presetSubtype="16" fill="hold" nodeType="clickEffect">
+                                  <p:stCondLst>
+                                    <p:cond delay="0"/>
+                                  </p:stCondLst>
+                                  <p:childTnLst>
+                                    <p:set>
+                                      <p:cBhvr>
+                                        <p:cTn id="52" dur="1" fill="hold">
+                                          <p:stCondLst>
+                                            <p:cond delay="0"/>
+                                          </p:stCondLst>
+                                        </p:cTn>
+                                        <p:tgtEl>
+                                          <p:spTgt spid="14"/>
+                                        </p:tgtEl>
+                                        <p:attrNameLst>
+                                          <p:attrName>style.visibility</p:attrName>
+                                        </p:attrNameLst>
+                                      </p:cBhvr>
+                                      <p:to>
+                                        <p:strVal val="visible"/>
+                                      </p:to>
+                                    </p:set>
+                                    <p:animEffect transition="in" filter="fade">
+                                      <p:cBhvr>
+                                        <p:cTn id="53" dur="500"/>
+                                        <p:tgtEl>
+                                          <p:spTgt spid="14"/>
+                                        </p:tgtEl>
+                                      </p:cBhvr>
+                                    </p:animEffect>
+                                    <p:anim calcmode="lin" valueType="num">
+                                      <p:cBhvr>
+                                        <p:cTn id="54" dur="500" fill="hold"/>
+                                        <p:tgtEl>
+                                          <p:spTgt spid="14"/>
+                                        </p:tgtEl>
+                                        <p:attrNameLst>
+                                          <p:attrName>ppt_w</p:attrName>
+                                        </p:attrNameLst>
+                                      </p:cBhvr>
+                                      <p:tavLst>
+                                        <p:tav tm="0">
+                                          <p:val>
+                                            <p:fltVal val="0"/>
+                                          </p:val>
+                                        </p:tav>
+                                        <p:tav tm="100000">
+                                          <p:val>
+                                            <p:strVal val="#ppt_w"/>
+                                          </p:val>
+                                        </p:tav>
+                                      </p:tavLst>
+                                    </p:anim>
+                                    <p:anim calcmode="lin" valueType="num">
+                                      <p:cBhvr>
+                                        <p:cTn id="55" dur="500" fill="hold"/>
+                                        <p:tgtEl>
+                                          <p:spTgt spid="14"/>
+                                        </p:tgtEl>
+                                        <p:attrNameLst>
+                                          <p:attrName>ppt_h</p:attrName>
+                                        </p:attrNameLst>
+                                      </p:cBhvr>
+                                      <p:tavLst>
+                                        <p:tav tm="0">
+                                          <p:val>
+                                            <p:fltVal val="0"/>
+                                          </p:val>
+                                        </p:tav>
+                                        <p:tav tm="100000">
+                                          <p:val>
+                                            <p:strVal val="#ppt_h"/>
+                                          </p:val>
+                                        </p:tav>
+                                      </p:tavLst>
+                                    </p:anim>
+                                  </p:childTnLst>
+                                </p:cTn>
+                              </p:par>
+                            </p:childTnLst>
+                          </p:cTn>
+                        </p:par>
+                      </p:childTnLst>
+                    </p:cTn>
+                  </p:par>
+                </p:childTnLst>
+              </p:cTn>
+              <p:prevCondLst>
+                <p:cond evt="onPrev" delay="0">
+                  <p:tgtEl>
+                    <p:sldTgt/>
+                  </p:tgtEl>
+                </p:cond>
+              </p:prevCondLst>
+              <p:nextCondLst>
+                <p:cond evt="onNext" delay="0">
+                  <p:tgtEl>
+                    <p:sldTgt/>
+                  </p:tgtEl>
+                </p:cond>
+              </p:nextCondLst>
+            </p:seq>
+          </p:childTnLst>
+        </p:cTn>
+      </p:par>
+    </p:tnLst>
+  </p:timing>
+</p:sld>
+</file>
+
+<file path=ppt/slides/slide9.xml><?xml version="1.0" encoding="utf-8"?>
+<p:sld xmlns:a="http://schemas.openxmlformats.org/drawingml/2006/main" xmlns:r="http://schemas.openxmlformats.org/officeDocument/2006/relationships" xmlns:p="http://schemas.openxmlformats.org/presentationml/2006/main">
+  <p:cSld>
+    <p:spTree>
+      <p:nvGrpSpPr>
+        <p:cNvPr id="1" name=""/>
+        <p:cNvGrpSpPr/>
+        <p:nvPr/>
+      </p:nvGrpSpPr>
+      <p:grpSpPr>
+        <a:xfrm>
+          <a:off x="0" y="0"/>
+          <a:ext cx="0" cy="0"/>
+          <a:chOff x="0" y="0"/>
+          <a:chExt cx="0" cy="0"/>
+        </a:xfrm>
+      </p:grpSpPr>
+      <p:sp>
+        <p:nvSpPr>
+          <p:cNvPr id="2" name="Shape 2"/>
+          <p:cNvSpPr txBox="1"/>
+          <p:nvPr/>
+        </p:nvSpPr>
+        <p:spPr>
+          <a:xfrm>
+            <a:off x="685800" y="457200"/>
+            <a:ext cx="10820095" cy="237744"/>
+          </a:xfrm>
+          <a:prstGeom prst="rect">
+            <a:avLst/>
+          </a:prstGeom>
+          <a:noFill/>
+          <a:ln>
+            <a:noFill/>
+          </a:ln>
+        </p:spPr>
+        <p:txBody>
+          <a:bodyPr wrap="square" lIns="36576" tIns="27432" rIns="36576" bIns="27432" anchor="t">
+            <a:noAutofit/>
+          </a:bodyPr>
+          <a:lstStyle/>
+          <a:p>
+            <a:pPr algn="l">
+              <a:lnSpc>
+                <a:spcPct val="100000"/>
+              </a:lnSpc>
+            </a:pPr>
+            <a:r>
+              <a:rPr lang="en-US" sz="1200" dirty="0" b="1" spc="150" cap="all">
+                <a:solidFill>
+                  <a:srgbClr val="5F6272"/>
+                </a:solidFill>
+                <a:latin typeface="Segoe UI"/>
+                <a:cs typeface="Segoe UI"/>
+              </a:rPr>
               <a:t xml:space="preserve">We do · Table and graph</a:t>
             </a:r>
             <a:endParaRPr lang="en-US" sz="1200" dirty="0"/>
@@ -9798,7 +14091,7 @@
                   <a:srgbClr val="5F6272"/>
                 </a:solidFill>
               </a:rPr>
-              <a:t>8</a:t>
+              <a:t>9</a:t>
             </a:fld>
           </a:p>
         </p:txBody>
@@ -10141,609 +14434,6 @@
 </p:sld>
 </file>
 
-<file path=ppt/slides/slide9.xml><?xml version="1.0" encoding="utf-8"?>
-<p:sld xmlns:a="http://schemas.openxmlformats.org/drawingml/2006/main" xmlns:r="http://schemas.openxmlformats.org/officeDocument/2006/relationships" xmlns:p="http://schemas.openxmlformats.org/presentationml/2006/main">
-  <p:cSld>
-    <p:spTree>
-      <p:nvGrpSpPr>
-        <p:cNvPr id="1" name=""/>
-        <p:cNvGrpSpPr/>
-        <p:nvPr/>
-      </p:nvGrpSpPr>
-      <p:grpSpPr>
-        <a:xfrm>
-          <a:off x="0" y="0"/>
-          <a:ext cx="0" cy="0"/>
-          <a:chOff x="0" y="0"/>
-          <a:chExt cx="0" cy="0"/>
-        </a:xfrm>
-      </p:grpSpPr>
-      <p:sp>
-        <p:nvSpPr>
-          <p:cNvPr id="2" name="Shape 2"/>
-          <p:cNvSpPr txBox="1"/>
-          <p:nvPr/>
-        </p:nvSpPr>
-        <p:spPr>
-          <a:xfrm>
-            <a:off x="685800" y="457200"/>
-            <a:ext cx="10820095" cy="237744"/>
-          </a:xfrm>
-          <a:prstGeom prst="rect">
-            <a:avLst/>
-          </a:prstGeom>
-          <a:noFill/>
-          <a:ln>
-            <a:noFill/>
-          </a:ln>
-        </p:spPr>
-        <p:txBody>
-          <a:bodyPr wrap="square" lIns="36576" tIns="27432" rIns="36576" bIns="27432" anchor="t">
-            <a:noAutofit/>
-          </a:bodyPr>
-          <a:lstStyle/>
-          <a:p>
-            <a:pPr algn="l">
-              <a:lnSpc>
-                <a:spcPct val="100000"/>
-              </a:lnSpc>
-            </a:pPr>
-            <a:r>
-              <a:rPr lang="en-US" sz="1200" dirty="0" b="1" spc="150" cap="all">
-                <a:solidFill>
-                  <a:srgbClr val="5F6272"/>
-                </a:solidFill>
-                <a:latin typeface="Segoe UI"/>
-                <a:cs typeface="Segoe UI"/>
-              </a:rPr>
-              <a:t xml:space="preserve">I do · Meaning in a story</a:t>
-            </a:r>
-            <a:endParaRPr lang="en-US" sz="1200" dirty="0"/>
-          </a:p>
-        </p:txBody>
-      </p:sp>
-      <p:sp>
-        <p:nvSpPr>
-          <p:cNvPr id="3" name="Shape 3"/>
-          <p:cNvSpPr txBox="1"/>
-          <p:nvPr/>
-        </p:nvSpPr>
-        <p:spPr>
-          <a:xfrm>
-            <a:off x="685800" y="866394"/>
-            <a:ext cx="10820095" cy="580644"/>
-          </a:xfrm>
-          <a:prstGeom prst="rect">
-            <a:avLst/>
-          </a:prstGeom>
-          <a:noFill/>
-          <a:ln>
-            <a:noFill/>
-          </a:ln>
-        </p:spPr>
-        <p:txBody>
-          <a:bodyPr wrap="square" lIns="36576" tIns="27432" rIns="36576" bIns="27432" anchor="t">
-            <a:noAutofit/>
-          </a:bodyPr>
-          <a:lstStyle/>
-          <a:p>
-            <a:pPr algn="l">
-              <a:lnSpc>
-                <a:spcPct val="100000"/>
-              </a:lnSpc>
-            </a:pPr>
-            <a:r>
-              <a:rPr lang="en-US" sz="3450" dirty="0" b="1">
-                <a:solidFill>
-                  <a:srgbClr val="16171D"/>
-                </a:solidFill>
-                <a:latin typeface="Segoe UI"/>
-                <a:cs typeface="Segoe UI"/>
-              </a:rPr>
-              <a:t xml:space="preserve">Lauren starts with $25 and saves $25 each month</a:t>
-            </a:r>
-            <a:endParaRPr lang="en-US" sz="3450" dirty="0"/>
-          </a:p>
-        </p:txBody>
-      </p:sp>
-      <p:sp>
-        <p:nvSpPr>
-          <p:cNvPr id="4" name="Shape 4"/>
-          <p:cNvSpPr txBox="1"/>
-          <p:nvPr/>
-        </p:nvSpPr>
-        <p:spPr>
-          <a:xfrm>
-            <a:off x="685800" y="1618488"/>
-            <a:ext cx="10820095" cy="489204"/>
-          </a:xfrm>
-          <a:prstGeom prst="rect">
-            <a:avLst/>
-          </a:prstGeom>
-          <a:noFill/>
-          <a:ln>
-            <a:noFill/>
-          </a:ln>
-        </p:spPr>
-        <p:txBody>
-          <a:bodyPr wrap="square" lIns="36576" tIns="27432" rIns="36576" bIns="27432" anchor="t">
-            <a:noAutofit/>
-          </a:bodyPr>
-          <a:lstStyle/>
-          <a:p>
-            <a:pPr algn="l">
-              <a:lnSpc>
-                <a:spcPct val="100000"/>
-              </a:lnSpc>
-            </a:pPr>
-            <a:r>
-              <a:rPr lang="en-US" sz="2850" dirty="0" i="1">
-                <a:solidFill>
-                  <a:srgbClr val="16171D"/>
-                </a:solidFill>
-                <a:latin typeface="Cambria"/>
-                <a:cs typeface="Cambria"/>
-              </a:rPr>
-              <a:t xml:space="preserve">y</a:t>
-            </a:r>
-            <a:r>
-              <a:rPr lang="en-US" sz="2850" dirty="0">
-                <a:solidFill>
-                  <a:srgbClr val="16171D"/>
-                </a:solidFill>
-                <a:latin typeface="Cambria"/>
-                <a:cs typeface="Cambria"/>
-              </a:rPr>
-              <a:t xml:space="preserve"> = </a:t>
-            </a:r>
-            <a:r>
-              <a:rPr lang="en-US" sz="2850" dirty="0" b="1">
-                <a:solidFill>
-                  <a:srgbClr val="C9561F"/>
-                </a:solidFill>
-                <a:latin typeface="Cambria"/>
-                <a:cs typeface="Cambria"/>
-              </a:rPr>
-              <a:t xml:space="preserve">25</a:t>
-            </a:r>
-            <a:r>
-              <a:rPr lang="en-US" sz="2850" dirty="0" i="1">
-                <a:solidFill>
-                  <a:srgbClr val="16171D"/>
-                </a:solidFill>
-                <a:latin typeface="Cambria"/>
-                <a:cs typeface="Cambria"/>
-              </a:rPr>
-              <a:t xml:space="preserve">x</a:t>
-            </a:r>
-            <a:r>
-              <a:rPr lang="en-US" sz="2850" dirty="0">
-                <a:solidFill>
-                  <a:srgbClr val="16171D"/>
-                </a:solidFill>
-                <a:latin typeface="Cambria"/>
-                <a:cs typeface="Cambria"/>
-              </a:rPr>
-              <a:t xml:space="preserve"> + </a:t>
-            </a:r>
-            <a:r>
-              <a:rPr lang="en-US" sz="2850" dirty="0" b="1">
-                <a:solidFill>
-                  <a:srgbClr val="3050B8"/>
-                </a:solidFill>
-                <a:latin typeface="Cambria"/>
-                <a:cs typeface="Cambria"/>
-              </a:rPr>
-              <a:t xml:space="preserve">25</a:t>
-            </a:r>
-            <a:endParaRPr lang="en-US" sz="2850" dirty="0"/>
-          </a:p>
-        </p:txBody>
-      </p:sp>
-      <p:sp>
-        <p:nvSpPr>
-          <p:cNvPr id="5" name="Shape 5"/>
-          <p:cNvSpPr txBox="1"/>
-          <p:nvPr/>
-        </p:nvSpPr>
-        <p:spPr>
-          <a:xfrm>
-            <a:off x="685800" y="2279142"/>
-            <a:ext cx="10820095" cy="352044"/>
-          </a:xfrm>
-          <a:prstGeom prst="rect">
-            <a:avLst/>
-          </a:prstGeom>
-          <a:noFill/>
-          <a:ln>
-            <a:noFill/>
-          </a:ln>
-        </p:spPr>
-        <p:txBody>
-          <a:bodyPr wrap="square" lIns="36576" tIns="27432" rIns="36576" bIns="27432" anchor="t">
-            <a:noAutofit/>
-          </a:bodyPr>
-          <a:lstStyle/>
-          <a:p>
-            <a:pPr algn="l">
-              <a:lnSpc>
-                <a:spcPct val="100000"/>
-              </a:lnSpc>
-            </a:pPr>
-            <a:r>
-              <a:rPr lang="en-US" sz="1950" dirty="0" b="1">
-                <a:solidFill>
-                  <a:srgbClr val="C9561F"/>
-                </a:solidFill>
-                <a:latin typeface="Segoe UI"/>
-                <a:cs typeface="Segoe UI"/>
-              </a:rPr>
-              <a:t xml:space="preserve">25</a:t>
-            </a:r>
-            <a:r>
-              <a:rPr lang="en-US" sz="1950" dirty="0">
-                <a:solidFill>
-                  <a:srgbClr val="16171D"/>
-                </a:solidFill>
-                <a:latin typeface="Segoe UI"/>
-                <a:cs typeface="Segoe UI"/>
-              </a:rPr>
-              <a:t xml:space="preserve"> (slope): she saves $25 each month.</a:t>
-            </a:r>
-            <a:endParaRPr lang="en-US" sz="1950" dirty="0"/>
-          </a:p>
-        </p:txBody>
-      </p:sp>
-      <p:sp>
-        <p:nvSpPr>
-          <p:cNvPr id="6" name="Shape 6"/>
-          <p:cNvSpPr txBox="1"/>
-          <p:nvPr/>
-        </p:nvSpPr>
-        <p:spPr>
-          <a:xfrm>
-            <a:off x="685800" y="2802636"/>
-            <a:ext cx="10820095" cy="352044"/>
-          </a:xfrm>
-          <a:prstGeom prst="rect">
-            <a:avLst/>
-          </a:prstGeom>
-          <a:noFill/>
-          <a:ln>
-            <a:noFill/>
-          </a:ln>
-        </p:spPr>
-        <p:txBody>
-          <a:bodyPr wrap="square" lIns="36576" tIns="27432" rIns="36576" bIns="27432" anchor="t">
-            <a:noAutofit/>
-          </a:bodyPr>
-          <a:lstStyle/>
-          <a:p>
-            <a:pPr algn="l">
-              <a:lnSpc>
-                <a:spcPct val="100000"/>
-              </a:lnSpc>
-            </a:pPr>
-            <a:r>
-              <a:rPr lang="en-US" sz="1950" dirty="0" b="1">
-                <a:solidFill>
-                  <a:srgbClr val="3050B8"/>
-                </a:solidFill>
-                <a:latin typeface="Segoe UI"/>
-                <a:cs typeface="Segoe UI"/>
-              </a:rPr>
-              <a:t xml:space="preserve">25</a:t>
-            </a:r>
-            <a:r>
-              <a:rPr lang="en-US" sz="1950" dirty="0">
-                <a:solidFill>
-                  <a:srgbClr val="16171D"/>
-                </a:solidFill>
-                <a:latin typeface="Segoe UI"/>
-                <a:cs typeface="Segoe UI"/>
-              </a:rPr>
-              <a:t xml:space="preserve"> (</a:t>
-            </a:r>
-            <a:r>
-              <a:rPr lang="en-US" sz="1950" dirty="0" i="1">
-                <a:solidFill>
-                  <a:srgbClr val="16171D"/>
-                </a:solidFill>
-                <a:latin typeface="Segoe UI"/>
-                <a:cs typeface="Segoe UI"/>
-              </a:rPr>
-              <a:t xml:space="preserve">y</a:t>
-            </a:r>
-            <a:r>
-              <a:rPr lang="en-US" sz="1950" dirty="0">
-                <a:solidFill>
-                  <a:srgbClr val="16171D"/>
-                </a:solidFill>
-                <a:latin typeface="Segoe UI"/>
-                <a:cs typeface="Segoe UI"/>
-              </a:rPr>
-              <a:t xml:space="preserve">-intercept): she started with $25.</a:t>
-            </a:r>
-            <a:endParaRPr lang="en-US" sz="1950" dirty="0"/>
-          </a:p>
-        </p:txBody>
-      </p:sp>
-      <p:sp>
-        <p:nvSpPr>
-          <p:cNvPr id="7" name="Shape 7"/>
-          <p:cNvSpPr txBox="1"/>
-          <p:nvPr/>
-        </p:nvSpPr>
-        <p:spPr>
-          <a:xfrm>
-            <a:off x="685800" y="3326130"/>
-            <a:ext cx="10820095" cy="352044"/>
-          </a:xfrm>
-          <a:prstGeom prst="rect">
-            <a:avLst/>
-          </a:prstGeom>
-          <a:noFill/>
-          <a:ln>
-            <a:noFill/>
-          </a:ln>
-        </p:spPr>
-        <p:txBody>
-          <a:bodyPr wrap="square" lIns="36576" tIns="27432" rIns="36576" bIns="27432" anchor="t">
-            <a:noAutofit/>
-          </a:bodyPr>
-          <a:lstStyle/>
-          <a:p>
-            <a:pPr algn="l">
-              <a:lnSpc>
-                <a:spcPct val="100000"/>
-              </a:lnSpc>
-            </a:pPr>
-            <a:r>
-              <a:rPr lang="en-US" sz="1950" dirty="0">
-                <a:solidFill>
-                  <a:srgbClr val="16171D"/>
-                </a:solidFill>
-                <a:latin typeface="Segoe UI"/>
-                <a:cs typeface="Segoe UI"/>
-              </a:rPr>
-              <a:t xml:space="preserve">Miguel saves $20 a month from $0. Who saves faster?</a:t>
-            </a:r>
-            <a:endParaRPr lang="en-US" sz="1950" dirty="0"/>
-          </a:p>
-        </p:txBody>
-      </p:sp>
-      <p:sp>
-        <p:nvSpPr>
-          <p:cNvPr id="8" name="Shape 8"/>
-          <p:cNvSpPr txBox="1"/>
-          <p:nvPr/>
-        </p:nvSpPr>
-        <p:spPr>
-          <a:xfrm>
-            <a:off x="685800" y="3849624"/>
-            <a:ext cx="4897938" cy="518922"/>
-          </a:xfrm>
-          <a:prstGeom prst="roundRect">
-            <a:avLst>
-              <a:gd name="adj" fmla="val 8000"/>
-            </a:avLst>
-          </a:prstGeom>
-          <a:solidFill>
-            <a:srgbClr val="EDF5E9"/>
-          </a:solidFill>
-          <a:ln>
-            <a:noFill/>
-          </a:ln>
-        </p:spPr>
-        <p:txBody>
-          <a:bodyPr wrap="square" lIns="164592" tIns="64008" rIns="164592" bIns="64008" anchor="ctr">
-            <a:noAutofit/>
-          </a:bodyPr>
-          <a:lstStyle/>
-          <a:p>
-            <a:pPr algn="l">
-              <a:lnSpc>
-                <a:spcPct val="100000"/>
-              </a:lnSpc>
-            </a:pPr>
-            <a:r>
-              <a:rPr lang="en-US" sz="1125" dirty="0" b="1" spc="100">
-                <a:solidFill>
-                  <a:srgbClr val="4F8A3C"/>
-                </a:solidFill>
-                <a:latin typeface="Segoe UI"/>
-                <a:cs typeface="Segoe UI"/>
-              </a:rPr>
-              <a:t xml:space="preserve">ANSWER   </a:t>
-            </a:r>
-            <a:r>
-              <a:rPr lang="en-US" sz="2325" dirty="0">
-                <a:solidFill>
-                  <a:srgbClr val="16171D"/>
-                </a:solidFill>
-                <a:latin typeface="Cambria"/>
-                <a:cs typeface="Cambria"/>
-              </a:rPr>
-              <a:t xml:space="preserve">Lauren ($25 &gt; $20)</a:t>
-            </a:r>
-            <a:endParaRPr lang="en-US" sz="2325" dirty="0"/>
-          </a:p>
-        </p:txBody>
-      </p:sp>
-      <p:sp>
-        <p:nvSpPr>
-          <p:cNvPr id="9" name="Slide Number 9"/>
-          <p:cNvSpPr txBox="1"/>
-          <p:nvPr/>
-        </p:nvSpPr>
-        <p:spPr>
-          <a:xfrm>
-            <a:off x="11277295" y="6611112"/>
-            <a:ext cx="685800" cy="201168"/>
-          </a:xfrm>
-          <a:prstGeom prst="rect">
-            <a:avLst/>
-          </a:prstGeom>
-          <a:noFill/>
-        </p:spPr>
-        <p:txBody>
-          <a:bodyPr wrap="none" lIns="0" tIns="0" rIns="0" bIns="0" anchor="b">
-            <a:noAutofit/>
-          </a:bodyPr>
-          <a:lstStyle/>
-          <a:p>
-            <a:pPr algn="r"/>
-            <a:fld id="{5C1A6E0B-3B1F-4D5E-9C7A-2F4B8D6E1A90}" type="slidenum">
-              <a:rPr lang="en-US" sz="1200" dirty="0">
-                <a:solidFill>
-                  <a:srgbClr val="5F6272"/>
-                </a:solidFill>
-              </a:rPr>
-              <a:t>9</a:t>
-            </a:fld>
-          </a:p>
-        </p:txBody>
-      </p:sp>
-    </p:spTree>
-  </p:cSld>
-  <p:clrMapOvr>
-    <a:masterClrMapping/>
-  </p:clrMapOvr>
-  <p:transition spd="med">
-    <p:fade/>
-  </p:transition>
-  <p:timing>
-    <p:tnLst>
-      <p:par>
-        <p:cTn id="1" dur="indefinite" restart="never" nodeType="tmRoot">
-          <p:childTnLst>
-            <p:seq concurrent="1" nextAc="seek">
-              <p:cTn id="2" dur="indefinite" nodeType="mainSeq">
-                <p:childTnLst>
-                  <p:par>
-                    <p:cTn id="8" fill="hold">
-                      <p:stCondLst>
-                        <p:cond delay="indefinite"/>
-                      </p:stCondLst>
-                      <p:childTnLst>
-                        <p:par>
-                          <p:cTn id="9" fill="hold">
-                            <p:stCondLst>
-                              <p:cond delay="0"/>
-                            </p:stCondLst>
-                            <p:childTnLst>
-                              <p:par>
-                                <p:cTn id="7" presetID="53" presetClass="entr" presetSubtype="16" fill="hold" nodeType="clickEffect">
-                                  <p:stCondLst>
-                                    <p:cond delay="0"/>
-                                  </p:stCondLst>
-                                  <p:childTnLst>
-                                    <p:set>
-                                      <p:cBhvr>
-                                        <p:cTn id="3" dur="1" fill="hold">
-                                          <p:stCondLst>
-                                            <p:cond delay="0"/>
-                                          </p:stCondLst>
-                                        </p:cTn>
-                                        <p:tgtEl>
-                                          <p:spTgt spid="8"/>
-                                        </p:tgtEl>
-                                        <p:attrNameLst>
-                                          <p:attrName>style.visibility</p:attrName>
-                                        </p:attrNameLst>
-                                      </p:cBhvr>
-                                      <p:to>
-                                        <p:strVal val="visible"/>
-                                      </p:to>
-                                    </p:set>
-                                    <p:animEffect transition="in" filter="fade">
-                                      <p:cBhvr>
-                                        <p:cTn id="4" dur="500"/>
-                                        <p:tgtEl>
-                                          <p:spTgt spid="8"/>
-                                        </p:tgtEl>
-                                      </p:cBhvr>
-                                    </p:animEffect>
-                                    <p:anim calcmode="lin" valueType="num">
-                                      <p:cBhvr>
-                                        <p:cTn id="5" dur="500" fill="hold"/>
-                                        <p:tgtEl>
-                                          <p:spTgt spid="8"/>
-                                        </p:tgtEl>
-                                        <p:attrNameLst>
-                                          <p:attrName>ppt_w</p:attrName>
-                                        </p:attrNameLst>
-                                      </p:cBhvr>
-                                      <p:tavLst>
-                                        <p:tav tm="0">
-                                          <p:val>
-                                            <p:fltVal val="0"/>
-                                          </p:val>
-                                        </p:tav>
-                                        <p:tav tm="100000">
-                                          <p:val>
-                                            <p:strVal val="#ppt_w"/>
-                                          </p:val>
-                                        </p:tav>
-                                      </p:tavLst>
-                                    </p:anim>
-                                    <p:anim calcmode="lin" valueType="num">
-                                      <p:cBhvr>
-                                        <p:cTn id="6" dur="500" fill="hold"/>
-                                        <p:tgtEl>
-                                          <p:spTgt spid="8"/>
-                                        </p:tgtEl>
-                                        <p:attrNameLst>
-                                          <p:attrName>ppt_h</p:attrName>
-                                        </p:attrNameLst>
-                                      </p:cBhvr>
-                                      <p:tavLst>
-                                        <p:tav tm="0">
-                                          <p:val>
-                                            <p:fltVal val="0"/>
-                                          </p:val>
-                                        </p:tav>
-                                        <p:tav tm="100000">
-                                          <p:val>
-                                            <p:strVal val="#ppt_h"/>
-                                          </p:val>
-                                        </p:tav>
-                                      </p:tavLst>
-                                    </p:anim>
-                                  </p:childTnLst>
-                                </p:cTn>
-                              </p:par>
-                            </p:childTnLst>
-                          </p:cTn>
-                        </p:par>
-                      </p:childTnLst>
-                    </p:cTn>
-                  </p:par>
-                </p:childTnLst>
-              </p:cTn>
-              <p:prevCondLst>
-                <p:cond evt="onPrev" delay="0">
-                  <p:tgtEl>
-                    <p:sldTgt/>
-                  </p:tgtEl>
-                </p:cond>
-              </p:prevCondLst>
-              <p:nextCondLst>
-                <p:cond evt="onNext" delay="0">
-                  <p:tgtEl>
-                    <p:sldTgt/>
-                  </p:tgtEl>
-                </p:cond>
-              </p:nextCondLst>
-            </p:seq>
-          </p:childTnLst>
-        </p:cTn>
-      </p:par>
-    </p:tnLst>
-  </p:timing>
-</p:sld>
-</file>
-
 <file path=ppt/theme/theme1.xml><?xml version="1.0" encoding="utf-8"?>
 <a:theme xmlns:a="http://schemas.openxmlformats.org/drawingml/2006/main" name="Comparing Linear Functions in Different Forms">
   <a:themeElements>

--- a/IEP/t2-lesson4-comparing-linear-functions-IEP.pptx
+++ b/IEP/t2-lesson4-comparing-linear-functions-IEP.pptx
@@ -519,7 +519,7 @@
           <a:p>
             <a:r>
               <a:rPr lang="en-US" dirty="0"/>
-              <a:t>Added for this deck; not from the textbook. Have this up as students walk in; they work silently while you take attendance (about 5 minutes). The same 4 questions are on the online Day 1 bell work. Reveal the answers one at a time. Answer key: 1. Slope = (4 − (−6)) ÷ (0 − (−2.5)) = 10 ÷ 2.5 = 4. 2. Parallel lines have equal slopes. 3. The negative reciprocal of 4 is −¼. 4. Equal numbers of each grade: y = x, slope 1.</a:t>
+              <a:t>Have this up as students walk in (about 5 minutes). The same 4 questions are on the online IEP Day 1 bell work, which shows the same formula under each question and these steps after each answer. Click to reveal one answer at a time; read each step aloud and point to where the formula is used.</a:t>
             </a:r>
           </a:p>
         </p:txBody>
@@ -578,7 +578,7 @@
           <a:p>
             <a:r>
               <a:rPr lang="en-US" dirty="0"/>
-              <a:t>Added for this deck; not from the textbook. Have this up as students walk in; they work silently while you take attendance (about 5 minutes). The same 4 questions are on the online Day 2 bell work. Reveal the answers one at a time. Answer key: 1. 15 · 3 = 45. 2. Slope = 20 ÷ 1 = 20 dollars per ton. 3. 9/5 · 10 + 32 = 18 + 32 = 50, so 10°C is 50°F. 4. 80 ÷ 4 = 20 dollars per month.</a:t>
+              <a:t>Have this up as students walk in (about 5 minutes). The same 4 questions are on the online IEP Day 2 bell work, which shows the same formula under each question and these steps after each answer. Click to reveal one answer at a time; read each step aloud and point to where the formula is used.</a:t>
             </a:r>
           </a:p>
         </p:txBody>
@@ -6141,21 +6141,27 @@
       </p:sp>
       <p:sp>
         <p:nvSpPr>
-          <p:cNvPr id="4" name="Shape 4"/>
-          <p:cNvSpPr txBox="1"/>
-          <p:nvPr/>
-        </p:nvSpPr>
-        <p:spPr>
-          <a:xfrm>
-            <a:off x="685800" y="1675638"/>
-            <a:ext cx="5143348" cy="649224"/>
-          </a:xfrm>
-          <a:prstGeom prst="rect">
-            <a:avLst/>
-          </a:prstGeom>
-          <a:noFill/>
-          <a:ln>
-            <a:noFill/>
+          <p:cNvPr id="7" name="Shape 7"/>
+          <p:cNvSpPr txBox="1"/>
+          <p:nvPr/>
+        </p:nvSpPr>
+        <p:spPr>
+          <a:xfrm>
+            <a:off x="685800" y="1618488"/>
+            <a:ext cx="5295748" cy="2282190"/>
+          </a:xfrm>
+          <a:prstGeom prst="roundRect">
+            <a:avLst>
+              <a:gd name="adj" fmla="val 8000"/>
+            </a:avLst>
+          </a:prstGeom>
+          <a:solidFill>
+            <a:srgbClr val="FFFFFF"/>
+          </a:solidFill>
+          <a:ln w="12700">
+            <a:solidFill>
+              <a:srgbClr val="E3E4EC"/>
+            </a:solidFill>
           </a:ln>
         </p:spPr>
         <p:txBody>
@@ -6169,18 +6175,62 @@
                 <a:spcPct val="100000"/>
               </a:lnSpc>
             </a:pPr>
-            <a:r>
-              <a:rPr lang="en-US" sz="1950" dirty="0">
-                <a:solidFill>
-                  <a:srgbClr val="16171D"/>
-                </a:solidFill>
-                <a:latin typeface="Segoe UI"/>
-                <a:cs typeface="Segoe UI"/>
-              </a:rPr>
-              <a:t xml:space="preserve">1. What is the slope of the line through </a:t>
-            </a:r>
-            <a:r>
-              <a:rPr lang="en-US" sz="1950" dirty="0">
+            <a:endParaRPr lang="en-US" sz="1950" dirty="0"/>
+          </a:p>
+        </p:txBody>
+      </p:sp>
+      <p:sp>
+        <p:nvSpPr>
+          <p:cNvPr id="4" name="Shape 4"/>
+          <p:cNvSpPr txBox="1"/>
+          <p:nvPr/>
+        </p:nvSpPr>
+        <p:spPr>
+          <a:xfrm>
+            <a:off x="895350" y="1789938"/>
+            <a:ext cx="4876648" cy="534924"/>
+          </a:xfrm>
+          <a:prstGeom prst="rect">
+            <a:avLst/>
+          </a:prstGeom>
+          <a:noFill/>
+          <a:ln>
+            <a:noFill/>
+          </a:ln>
+        </p:spPr>
+        <p:txBody>
+          <a:bodyPr wrap="square" lIns="36576" tIns="27432" rIns="36576" bIns="27432" anchor="t">
+            <a:noAutofit/>
+          </a:bodyPr>
+          <a:lstStyle/>
+          <a:p>
+            <a:pPr algn="l">
+              <a:lnSpc>
+                <a:spcPct val="100000"/>
+              </a:lnSpc>
+            </a:pPr>
+            <a:r>
+              <a:rPr lang="en-US" sz="1575" dirty="0" b="1">
+                <a:solidFill>
+                  <a:srgbClr val="16171D"/>
+                </a:solidFill>
+                <a:latin typeface="Segoe UI"/>
+                <a:cs typeface="Segoe UI"/>
+              </a:rPr>
+              <a:t xml:space="preserve">1.</a:t>
+            </a:r>
+            <a:r>
+              <a:rPr lang="en-US" sz="1575" dirty="0">
+                <a:solidFill>
+                  <a:srgbClr val="16171D"/>
+                </a:solidFill>
+                <a:latin typeface="Segoe UI"/>
+                <a:cs typeface="Segoe UI"/>
+              </a:rPr>
+              <a:t xml:space="preserve"> What is the slope of the line through </a:t>
+            </a:r>
+            <a:r>
+              <a:rPr lang="en-US" sz="1575" dirty="0">
                 <a:solidFill>
                   <a:srgbClr val="16171D"/>
                 </a:solidFill>
@@ -6190,7 +6240,7 @@
               <a:t xml:space="preserve">(−2.5, −6)</a:t>
             </a:r>
             <a:r>
-              <a:rPr lang="en-US" sz="1950" dirty="0">
+              <a:rPr lang="en-US" sz="1575" dirty="0">
                 <a:solidFill>
                   <a:srgbClr val="16171D"/>
                 </a:solidFill>
@@ -6200,7 +6250,7 @@
               <a:t xml:space="preserve"> and </a:t>
             </a:r>
             <a:r>
-              <a:rPr lang="en-US" sz="1950" dirty="0">
+              <a:rPr lang="en-US" sz="1575" dirty="0">
                 <a:solidFill>
                   <a:srgbClr val="16171D"/>
                 </a:solidFill>
@@ -6210,26 +6260,16 @@
               <a:t xml:space="preserve">(0, 4)</a:t>
             </a:r>
             <a:r>
-              <a:rPr lang="en-US" sz="1950" dirty="0">
-                <a:solidFill>
-                  <a:srgbClr val="16171D"/>
-                </a:solidFill>
-                <a:latin typeface="Segoe UI"/>
-                <a:cs typeface="Segoe UI"/>
-              </a:rPr>
-              <a:t xml:space="preserve">? </a:t>
-            </a:r>
-            <a:r>
               <a:rPr lang="en-US" sz="1575" dirty="0">
                 <a:solidFill>
-                  <a:srgbClr val="5F6272"/>
-                </a:solidFill>
-                <a:latin typeface="Segoe UI"/>
-                <a:cs typeface="Segoe UI"/>
-              </a:rPr>
-              <a:t xml:space="preserve">(SE p. 321)</a:t>
-            </a:r>
-            <a:endParaRPr lang="en-US" sz="1950" dirty="0"/>
+                  <a:srgbClr val="16171D"/>
+                </a:solidFill>
+                <a:latin typeface="Segoe UI"/>
+                <a:cs typeface="Segoe UI"/>
+              </a:rPr>
+              <a:t xml:space="preserve">?</a:t>
+            </a:r>
+            <a:endParaRPr lang="en-US" sz="1575" dirty="0"/>
           </a:p>
         </p:txBody>
       </p:sp>
@@ -6241,8 +6281,162 @@
         </p:nvSpPr>
         <p:spPr>
           <a:xfrm>
-            <a:off x="685800" y="2458212"/>
-            <a:ext cx="2078888" cy="518922"/>
+            <a:off x="895350" y="2362962"/>
+            <a:ext cx="4876648" cy="294894"/>
+          </a:xfrm>
+          <a:prstGeom prst="rect">
+            <a:avLst/>
+          </a:prstGeom>
+          <a:noFill/>
+          <a:ln>
+            <a:noFill/>
+          </a:ln>
+        </p:spPr>
+        <p:txBody>
+          <a:bodyPr wrap="square" lIns="36576" tIns="27432" rIns="36576" bIns="27432" anchor="t">
+            <a:noAutofit/>
+          </a:bodyPr>
+          <a:lstStyle/>
+          <a:p>
+            <a:pPr algn="l">
+              <a:lnSpc>
+                <a:spcPct val="100000"/>
+              </a:lnSpc>
+            </a:pPr>
+            <a:r>
+              <a:rPr lang="en-US" sz="1575" dirty="0" b="1">
+                <a:solidFill>
+                  <a:srgbClr val="16171D"/>
+                </a:solidFill>
+                <a:latin typeface="Segoe UI"/>
+                <a:cs typeface="Segoe UI"/>
+              </a:rPr>
+              <a:t xml:space="preserve">Formula:</a:t>
+            </a:r>
+            <a:r>
+              <a:rPr lang="en-US" sz="1575" dirty="0">
+                <a:solidFill>
+                  <a:srgbClr val="16171D"/>
+                </a:solidFill>
+                <a:latin typeface="Segoe UI"/>
+                <a:cs typeface="Segoe UI"/>
+              </a:rPr>
+              <a:t xml:space="preserve"> </a:t>
+            </a:r>
+            <a:r>
+              <a:rPr lang="en-US" sz="1575" dirty="0" i="1">
+                <a:solidFill>
+                  <a:srgbClr val="16171D"/>
+                </a:solidFill>
+                <a:latin typeface="Cambria"/>
+                <a:cs typeface="Cambria"/>
+              </a:rPr>
+              <a:t xml:space="preserve">m</a:t>
+            </a:r>
+            <a:r>
+              <a:rPr lang="en-US" sz="1575" dirty="0">
+                <a:solidFill>
+                  <a:srgbClr val="16171D"/>
+                </a:solidFill>
+                <a:latin typeface="Cambria"/>
+                <a:cs typeface="Cambria"/>
+              </a:rPr>
+              <a:t xml:space="preserve"> = (</a:t>
+            </a:r>
+            <a:r>
+              <a:rPr lang="en-US" sz="1575" dirty="0" i="1">
+                <a:solidFill>
+                  <a:srgbClr val="16171D"/>
+                </a:solidFill>
+                <a:latin typeface="Cambria"/>
+                <a:cs typeface="Cambria"/>
+              </a:rPr>
+              <a:t xml:space="preserve">y</a:t>
+            </a:r>
+            <a:r>
+              <a:rPr lang="en-US" sz="1575" dirty="0">
+                <a:solidFill>
+                  <a:srgbClr val="16171D"/>
+                </a:solidFill>
+                <a:latin typeface="Cambria"/>
+                <a:cs typeface="Cambria"/>
+              </a:rPr>
+              <a:t xml:space="preserve">₂ − </a:t>
+            </a:r>
+            <a:r>
+              <a:rPr lang="en-US" sz="1575" dirty="0" i="1">
+                <a:solidFill>
+                  <a:srgbClr val="16171D"/>
+                </a:solidFill>
+                <a:latin typeface="Cambria"/>
+                <a:cs typeface="Cambria"/>
+              </a:rPr>
+              <a:t xml:space="preserve">y</a:t>
+            </a:r>
+            <a:r>
+              <a:rPr lang="en-US" sz="1575" dirty="0">
+                <a:solidFill>
+                  <a:srgbClr val="16171D"/>
+                </a:solidFill>
+                <a:latin typeface="Cambria"/>
+                <a:cs typeface="Cambria"/>
+              </a:rPr>
+              <a:t xml:space="preserve">₁) ÷ (</a:t>
+            </a:r>
+            <a:r>
+              <a:rPr lang="en-US" sz="1575" dirty="0" i="1">
+                <a:solidFill>
+                  <a:srgbClr val="16171D"/>
+                </a:solidFill>
+                <a:latin typeface="Cambria"/>
+                <a:cs typeface="Cambria"/>
+              </a:rPr>
+              <a:t xml:space="preserve">x</a:t>
+            </a:r>
+            <a:r>
+              <a:rPr lang="en-US" sz="1575" dirty="0">
+                <a:solidFill>
+                  <a:srgbClr val="16171D"/>
+                </a:solidFill>
+                <a:latin typeface="Cambria"/>
+                <a:cs typeface="Cambria"/>
+              </a:rPr>
+              <a:t xml:space="preserve">₂ − </a:t>
+            </a:r>
+            <a:r>
+              <a:rPr lang="en-US" sz="1575" dirty="0" i="1">
+                <a:solidFill>
+                  <a:srgbClr val="16171D"/>
+                </a:solidFill>
+                <a:latin typeface="Cambria"/>
+                <a:cs typeface="Cambria"/>
+              </a:rPr>
+              <a:t xml:space="preserve">x</a:t>
+            </a:r>
+            <a:r>
+              <a:rPr lang="en-US" sz="1575" dirty="0">
+                <a:solidFill>
+                  <a:srgbClr val="16171D"/>
+                </a:solidFill>
+                <a:latin typeface="Cambria"/>
+                <a:cs typeface="Cambria"/>
+              </a:rPr>
+              <a:t xml:space="preserve">₁)</a:t>
+            </a:r>
+            <a:endParaRPr lang="en-US" sz="1575" dirty="0"/>
+          </a:p>
+        </p:txBody>
+      </p:sp>
+      <p:sp>
+        <p:nvSpPr>
+          <p:cNvPr id="6" name="Shape 6"/>
+          <p:cNvSpPr txBox="1"/>
+          <p:nvPr/>
+        </p:nvSpPr>
+        <p:spPr>
+          <a:xfrm>
+            <a:off x="895350" y="2695956"/>
+            <a:ext cx="4876648" cy="1033272"/>
           </a:xfrm>
           <a:prstGeom prst="roundRect">
             <a:avLst>
@@ -6278,7 +6472,7 @@
               <a:t xml:space="preserve">ANSWER   </a:t>
             </a:r>
             <a:r>
-              <a:rPr lang="en-US" sz="2325" dirty="0">
+              <a:rPr lang="en-US" sz="1425" dirty="0" b="1">
                 <a:solidFill>
                   <a:srgbClr val="16171D"/>
                 </a:solidFill>
@@ -6287,27 +6481,220 @@
               </a:rPr>
               <a:t xml:space="preserve">4</a:t>
             </a:r>
-            <a:endParaRPr lang="en-US" sz="2325" dirty="0"/>
-          </a:p>
-        </p:txBody>
-      </p:sp>
-      <p:sp>
-        <p:nvSpPr>
-          <p:cNvPr id="6" name="Shape 6"/>
-          <p:cNvSpPr txBox="1"/>
-          <p:nvPr/>
-        </p:nvSpPr>
-        <p:spPr>
-          <a:xfrm>
-            <a:off x="685800" y="3243834"/>
-            <a:ext cx="5143348" cy="649224"/>
-          </a:xfrm>
-          <a:prstGeom prst="rect">
-            <a:avLst/>
-          </a:prstGeom>
-          <a:noFill/>
-          <a:ln>
-            <a:noFill/>
+            <a:br>
+              <a:rPr lang="en-US" sz="1425" dirty="0">
+                <a:solidFill>
+                  <a:srgbClr val="16171D"/>
+                </a:solidFill>
+                <a:latin typeface="Segoe UI"/>
+                <a:cs typeface="Segoe UI"/>
+              </a:rPr>
+            </a:br>
+            <a:r>
+              <a:rPr lang="en-US" sz="1425" dirty="0" b="1">
+                <a:solidFill>
+                  <a:srgbClr val="16171D"/>
+                </a:solidFill>
+                <a:latin typeface="Segoe UI"/>
+                <a:cs typeface="Segoe UI"/>
+              </a:rPr>
+              <a:t xml:space="preserve">1.</a:t>
+            </a:r>
+            <a:r>
+              <a:rPr lang="en-US" sz="1425" dirty="0">
+                <a:solidFill>
+                  <a:srgbClr val="16171D"/>
+                </a:solidFill>
+                <a:latin typeface="Segoe UI"/>
+                <a:cs typeface="Segoe UI"/>
+              </a:rPr>
+              <a:t xml:space="preserve"> Subtract the </a:t>
+            </a:r>
+            <a:r>
+              <a:rPr lang="en-US" sz="1425" dirty="0" i="1">
+                <a:solidFill>
+                  <a:srgbClr val="16171D"/>
+                </a:solidFill>
+                <a:latin typeface="Cambria"/>
+                <a:cs typeface="Cambria"/>
+              </a:rPr>
+              <a:t xml:space="preserve">y</a:t>
+            </a:r>
+            <a:r>
+              <a:rPr lang="en-US" sz="1425" dirty="0">
+                <a:solidFill>
+                  <a:srgbClr val="16171D"/>
+                </a:solidFill>
+                <a:latin typeface="Segoe UI"/>
+                <a:cs typeface="Segoe UI"/>
+              </a:rPr>
+              <a:t xml:space="preserve">-values: </a:t>
+            </a:r>
+            <a:r>
+              <a:rPr lang="en-US" sz="1425" dirty="0">
+                <a:solidFill>
+                  <a:srgbClr val="16171D"/>
+                </a:solidFill>
+                <a:latin typeface="Cambria"/>
+                <a:cs typeface="Cambria"/>
+              </a:rPr>
+              <a:t xml:space="preserve">4 − (−6) = 4 + 6 = 10</a:t>
+            </a:r>
+            <a:r>
+              <a:rPr lang="en-US" sz="1425" dirty="0">
+                <a:solidFill>
+                  <a:srgbClr val="16171D"/>
+                </a:solidFill>
+                <a:latin typeface="Segoe UI"/>
+                <a:cs typeface="Segoe UI"/>
+              </a:rPr>
+              <a:t xml:space="preserve">.</a:t>
+            </a:r>
+            <a:br>
+              <a:rPr lang="en-US" sz="1425" dirty="0">
+                <a:solidFill>
+                  <a:srgbClr val="16171D"/>
+                </a:solidFill>
+                <a:latin typeface="Segoe UI"/>
+                <a:cs typeface="Segoe UI"/>
+              </a:rPr>
+            </a:br>
+            <a:r>
+              <a:rPr lang="en-US" sz="1425" dirty="0" b="1">
+                <a:solidFill>
+                  <a:srgbClr val="16171D"/>
+                </a:solidFill>
+                <a:latin typeface="Segoe UI"/>
+                <a:cs typeface="Segoe UI"/>
+              </a:rPr>
+              <a:t xml:space="preserve">2.</a:t>
+            </a:r>
+            <a:r>
+              <a:rPr lang="en-US" sz="1425" dirty="0">
+                <a:solidFill>
+                  <a:srgbClr val="16171D"/>
+                </a:solidFill>
+                <a:latin typeface="Segoe UI"/>
+                <a:cs typeface="Segoe UI"/>
+              </a:rPr>
+              <a:t xml:space="preserve"> Subtract the </a:t>
+            </a:r>
+            <a:r>
+              <a:rPr lang="en-US" sz="1425" dirty="0" i="1">
+                <a:solidFill>
+                  <a:srgbClr val="16171D"/>
+                </a:solidFill>
+                <a:latin typeface="Cambria"/>
+                <a:cs typeface="Cambria"/>
+              </a:rPr>
+              <a:t xml:space="preserve">x</a:t>
+            </a:r>
+            <a:r>
+              <a:rPr lang="en-US" sz="1425" dirty="0">
+                <a:solidFill>
+                  <a:srgbClr val="16171D"/>
+                </a:solidFill>
+                <a:latin typeface="Segoe UI"/>
+                <a:cs typeface="Segoe UI"/>
+              </a:rPr>
+              <a:t xml:space="preserve">-values: </a:t>
+            </a:r>
+            <a:r>
+              <a:rPr lang="en-US" sz="1425" dirty="0">
+                <a:solidFill>
+                  <a:srgbClr val="16171D"/>
+                </a:solidFill>
+                <a:latin typeface="Cambria"/>
+                <a:cs typeface="Cambria"/>
+              </a:rPr>
+              <a:t xml:space="preserve">0 − (−2.5) = 2.5</a:t>
+            </a:r>
+            <a:r>
+              <a:rPr lang="en-US" sz="1425" dirty="0">
+                <a:solidFill>
+                  <a:srgbClr val="16171D"/>
+                </a:solidFill>
+                <a:latin typeface="Segoe UI"/>
+                <a:cs typeface="Segoe UI"/>
+              </a:rPr>
+              <a:t xml:space="preserve">.</a:t>
+            </a:r>
+            <a:br>
+              <a:rPr lang="en-US" sz="1425" dirty="0">
+                <a:solidFill>
+                  <a:srgbClr val="16171D"/>
+                </a:solidFill>
+                <a:latin typeface="Segoe UI"/>
+                <a:cs typeface="Segoe UI"/>
+              </a:rPr>
+            </a:br>
+            <a:r>
+              <a:rPr lang="en-US" sz="1425" dirty="0" b="1">
+                <a:solidFill>
+                  <a:srgbClr val="16171D"/>
+                </a:solidFill>
+                <a:latin typeface="Segoe UI"/>
+                <a:cs typeface="Segoe UI"/>
+              </a:rPr>
+              <a:t xml:space="preserve">3.</a:t>
+            </a:r>
+            <a:r>
+              <a:rPr lang="en-US" sz="1425" dirty="0">
+                <a:solidFill>
+                  <a:srgbClr val="16171D"/>
+                </a:solidFill>
+                <a:latin typeface="Segoe UI"/>
+                <a:cs typeface="Segoe UI"/>
+              </a:rPr>
+              <a:t xml:space="preserve"> Divide: </a:t>
+            </a:r>
+            <a:r>
+              <a:rPr lang="en-US" sz="1425" dirty="0">
+                <a:solidFill>
+                  <a:srgbClr val="16171D"/>
+                </a:solidFill>
+                <a:latin typeface="Cambria"/>
+                <a:cs typeface="Cambria"/>
+              </a:rPr>
+              <a:t xml:space="preserve">10 ÷ 2.5 = 4</a:t>
+            </a:r>
+            <a:r>
+              <a:rPr lang="en-US" sz="1425" dirty="0">
+                <a:solidFill>
+                  <a:srgbClr val="16171D"/>
+                </a:solidFill>
+                <a:latin typeface="Segoe UI"/>
+                <a:cs typeface="Segoe UI"/>
+              </a:rPr>
+              <a:t xml:space="preserve">.</a:t>
+            </a:r>
+            <a:endParaRPr lang="en-US" sz="1425" dirty="0"/>
+          </a:p>
+        </p:txBody>
+      </p:sp>
+      <p:sp>
+        <p:nvSpPr>
+          <p:cNvPr id="11" name="Shape 11"/>
+          <p:cNvSpPr txBox="1"/>
+          <p:nvPr/>
+        </p:nvSpPr>
+        <p:spPr>
+          <a:xfrm>
+            <a:off x="685800" y="4034028"/>
+            <a:ext cx="5295748" cy="2282190"/>
+          </a:xfrm>
+          <a:prstGeom prst="roundRect">
+            <a:avLst>
+              <a:gd name="adj" fmla="val 8000"/>
+            </a:avLst>
+          </a:prstGeom>
+          <a:solidFill>
+            <a:srgbClr val="FFFFFF"/>
+          </a:solidFill>
+          <a:ln w="12700">
+            <a:solidFill>
+              <a:srgbClr val="E3E4EC"/>
+            </a:solidFill>
           </a:ln>
         </p:spPr>
         <p:txBody>
@@ -6321,18 +6708,62 @@
                 <a:spcPct val="100000"/>
               </a:lnSpc>
             </a:pPr>
-            <a:r>
-              <a:rPr lang="en-US" sz="1950" dirty="0">
-                <a:solidFill>
-                  <a:srgbClr val="16171D"/>
-                </a:solidFill>
-                <a:latin typeface="Segoe UI"/>
-                <a:cs typeface="Segoe UI"/>
-              </a:rPr>
-              <a:t xml:space="preserve">2. What slope does a line parallel to </a:t>
-            </a:r>
-            <a:r>
-              <a:rPr lang="en-US" sz="1950" dirty="0" i="1">
+            <a:endParaRPr lang="en-US" sz="1950" dirty="0"/>
+          </a:p>
+        </p:txBody>
+      </p:sp>
+      <p:sp>
+        <p:nvSpPr>
+          <p:cNvPr id="8" name="Shape 8"/>
+          <p:cNvSpPr txBox="1"/>
+          <p:nvPr/>
+        </p:nvSpPr>
+        <p:spPr>
+          <a:xfrm>
+            <a:off x="895350" y="4205478"/>
+            <a:ext cx="4876648" cy="534924"/>
+          </a:xfrm>
+          <a:prstGeom prst="rect">
+            <a:avLst/>
+          </a:prstGeom>
+          <a:noFill/>
+          <a:ln>
+            <a:noFill/>
+          </a:ln>
+        </p:spPr>
+        <p:txBody>
+          <a:bodyPr wrap="square" lIns="36576" tIns="27432" rIns="36576" bIns="27432" anchor="t">
+            <a:noAutofit/>
+          </a:bodyPr>
+          <a:lstStyle/>
+          <a:p>
+            <a:pPr algn="l">
+              <a:lnSpc>
+                <a:spcPct val="100000"/>
+              </a:lnSpc>
+            </a:pPr>
+            <a:r>
+              <a:rPr lang="en-US" sz="1575" dirty="0" b="1">
+                <a:solidFill>
+                  <a:srgbClr val="16171D"/>
+                </a:solidFill>
+                <a:latin typeface="Segoe UI"/>
+                <a:cs typeface="Segoe UI"/>
+              </a:rPr>
+              <a:t xml:space="preserve">2.</a:t>
+            </a:r>
+            <a:r>
+              <a:rPr lang="en-US" sz="1575" dirty="0">
+                <a:solidFill>
+                  <a:srgbClr val="16171D"/>
+                </a:solidFill>
+                <a:latin typeface="Segoe UI"/>
+                <a:cs typeface="Segoe UI"/>
+              </a:rPr>
+              <a:t xml:space="preserve"> What slope does a line parallel to </a:t>
+            </a:r>
+            <a:r>
+              <a:rPr lang="en-US" sz="1575" dirty="0" i="1">
                 <a:solidFill>
                   <a:srgbClr val="16171D"/>
                 </a:solidFill>
@@ -6342,7 +6773,7 @@
               <a:t xml:space="preserve">y</a:t>
             </a:r>
             <a:r>
-              <a:rPr lang="en-US" sz="1950" dirty="0">
+              <a:rPr lang="en-US" sz="1575" dirty="0">
                 <a:solidFill>
                   <a:srgbClr val="16171D"/>
                 </a:solidFill>
@@ -6352,7 +6783,7 @@
               <a:t xml:space="preserve"> = 4</a:t>
             </a:r>
             <a:r>
-              <a:rPr lang="en-US" sz="1950" dirty="0" i="1">
+              <a:rPr lang="en-US" sz="1575" dirty="0" i="1">
                 <a:solidFill>
                   <a:srgbClr val="16171D"/>
                 </a:solidFill>
@@ -6362,7 +6793,7 @@
               <a:t xml:space="preserve">x</a:t>
             </a:r>
             <a:r>
-              <a:rPr lang="en-US" sz="1950" dirty="0">
+              <a:rPr lang="en-US" sz="1575" dirty="0">
                 <a:solidFill>
                   <a:srgbClr val="16171D"/>
                 </a:solidFill>
@@ -6372,39 +6803,83 @@
               <a:t xml:space="preserve"> − 3</a:t>
             </a:r>
             <a:r>
-              <a:rPr lang="en-US" sz="1950" dirty="0">
-                <a:solidFill>
-                  <a:srgbClr val="16171D"/>
-                </a:solidFill>
-                <a:latin typeface="Segoe UI"/>
-                <a:cs typeface="Segoe UI"/>
-              </a:rPr>
-              <a:t xml:space="preserve"> have? </a:t>
-            </a:r>
-            <a:r>
               <a:rPr lang="en-US" sz="1575" dirty="0">
                 <a:solidFill>
-                  <a:srgbClr val="5F6272"/>
-                </a:solidFill>
-                <a:latin typeface="Segoe UI"/>
-                <a:cs typeface="Segoe UI"/>
-              </a:rPr>
-              <a:t xml:space="preserve">(SE p. 321)</a:t>
-            </a:r>
-            <a:endParaRPr lang="en-US" sz="1950" dirty="0"/>
-          </a:p>
-        </p:txBody>
-      </p:sp>
-      <p:sp>
-        <p:nvSpPr>
-          <p:cNvPr id="7" name="Shape 7"/>
-          <p:cNvSpPr txBox="1"/>
-          <p:nvPr/>
-        </p:nvSpPr>
-        <p:spPr>
-          <a:xfrm>
-            <a:off x="685800" y="4026408"/>
-            <a:ext cx="2078888" cy="518922"/>
+                  <a:srgbClr val="16171D"/>
+                </a:solidFill>
+                <a:latin typeface="Segoe UI"/>
+                <a:cs typeface="Segoe UI"/>
+              </a:rPr>
+              <a:t xml:space="preserve"> have?</a:t>
+            </a:r>
+            <a:endParaRPr lang="en-US" sz="1575" dirty="0"/>
+          </a:p>
+        </p:txBody>
+      </p:sp>
+      <p:sp>
+        <p:nvSpPr>
+          <p:cNvPr id="9" name="Shape 9"/>
+          <p:cNvSpPr txBox="1"/>
+          <p:nvPr/>
+        </p:nvSpPr>
+        <p:spPr>
+          <a:xfrm>
+            <a:off x="895350" y="4778502"/>
+            <a:ext cx="4876648" cy="294894"/>
+          </a:xfrm>
+          <a:prstGeom prst="rect">
+            <a:avLst/>
+          </a:prstGeom>
+          <a:noFill/>
+          <a:ln>
+            <a:noFill/>
+          </a:ln>
+        </p:spPr>
+        <p:txBody>
+          <a:bodyPr wrap="square" lIns="36576" tIns="27432" rIns="36576" bIns="27432" anchor="t">
+            <a:noAutofit/>
+          </a:bodyPr>
+          <a:lstStyle/>
+          <a:p>
+            <a:pPr algn="l">
+              <a:lnSpc>
+                <a:spcPct val="100000"/>
+              </a:lnSpc>
+            </a:pPr>
+            <a:r>
+              <a:rPr lang="en-US" sz="1575" dirty="0" b="1">
+                <a:solidFill>
+                  <a:srgbClr val="16171D"/>
+                </a:solidFill>
+                <a:latin typeface="Segoe UI"/>
+                <a:cs typeface="Segoe UI"/>
+              </a:rPr>
+              <a:t xml:space="preserve">Formula:</a:t>
+            </a:r>
+            <a:r>
+              <a:rPr lang="en-US" sz="1575" dirty="0">
+                <a:solidFill>
+                  <a:srgbClr val="16171D"/>
+                </a:solidFill>
+                <a:latin typeface="Segoe UI"/>
+                <a:cs typeface="Segoe UI"/>
+              </a:rPr>
+              <a:t xml:space="preserve"> parallel lines have the same slope</a:t>
+            </a:r>
+            <a:endParaRPr lang="en-US" sz="1575" dirty="0"/>
+          </a:p>
+        </p:txBody>
+      </p:sp>
+      <p:sp>
+        <p:nvSpPr>
+          <p:cNvPr id="10" name="Shape 10"/>
+          <p:cNvSpPr txBox="1"/>
+          <p:nvPr/>
+        </p:nvSpPr>
+        <p:spPr>
+          <a:xfrm>
+            <a:off x="895350" y="5111496"/>
+            <a:ext cx="4876648" cy="1033272"/>
           </a:xfrm>
           <a:prstGeom prst="roundRect">
             <a:avLst>
@@ -6440,7 +6915,7 @@
               <a:t xml:space="preserve">ANSWER   </a:t>
             </a:r>
             <a:r>
-              <a:rPr lang="en-US" sz="2325" dirty="0">
+              <a:rPr lang="en-US" sz="1425" dirty="0" b="1">
                 <a:solidFill>
                   <a:srgbClr val="16171D"/>
                 </a:solidFill>
@@ -6449,27 +6924,161 @@
               </a:rPr>
               <a:t xml:space="preserve">4</a:t>
             </a:r>
-            <a:endParaRPr lang="en-US" sz="2325" dirty="0"/>
-          </a:p>
-        </p:txBody>
-      </p:sp>
-      <p:sp>
-        <p:nvSpPr>
-          <p:cNvPr id="8" name="Shape 8"/>
-          <p:cNvSpPr txBox="1"/>
-          <p:nvPr/>
-        </p:nvSpPr>
-        <p:spPr>
-          <a:xfrm>
-            <a:off x="6362548" y="1675638"/>
-            <a:ext cx="5143348" cy="649224"/>
-          </a:xfrm>
-          <a:prstGeom prst="rect">
-            <a:avLst/>
-          </a:prstGeom>
-          <a:noFill/>
-          <a:ln>
-            <a:noFill/>
+            <a:br>
+              <a:rPr lang="en-US" sz="1425" dirty="0">
+                <a:solidFill>
+                  <a:srgbClr val="16171D"/>
+                </a:solidFill>
+                <a:latin typeface="Segoe UI"/>
+                <a:cs typeface="Segoe UI"/>
+              </a:rPr>
+            </a:br>
+            <a:r>
+              <a:rPr lang="en-US" sz="1425" dirty="0" b="1">
+                <a:solidFill>
+                  <a:srgbClr val="16171D"/>
+                </a:solidFill>
+                <a:latin typeface="Segoe UI"/>
+                <a:cs typeface="Segoe UI"/>
+              </a:rPr>
+              <a:t xml:space="preserve">1.</a:t>
+            </a:r>
+            <a:r>
+              <a:rPr lang="en-US" sz="1425" dirty="0">
+                <a:solidFill>
+                  <a:srgbClr val="16171D"/>
+                </a:solidFill>
+                <a:latin typeface="Segoe UI"/>
+                <a:cs typeface="Segoe UI"/>
+              </a:rPr>
+              <a:t xml:space="preserve"> The slope of </a:t>
+            </a:r>
+            <a:r>
+              <a:rPr lang="en-US" sz="1425" dirty="0" i="1">
+                <a:solidFill>
+                  <a:srgbClr val="16171D"/>
+                </a:solidFill>
+                <a:latin typeface="Cambria"/>
+                <a:cs typeface="Cambria"/>
+              </a:rPr>
+              <a:t xml:space="preserve">y</a:t>
+            </a:r>
+            <a:r>
+              <a:rPr lang="en-US" sz="1425" dirty="0">
+                <a:solidFill>
+                  <a:srgbClr val="16171D"/>
+                </a:solidFill>
+                <a:latin typeface="Cambria"/>
+                <a:cs typeface="Cambria"/>
+              </a:rPr>
+              <a:t xml:space="preserve"> = 4</a:t>
+            </a:r>
+            <a:r>
+              <a:rPr lang="en-US" sz="1425" dirty="0" i="1">
+                <a:solidFill>
+                  <a:srgbClr val="16171D"/>
+                </a:solidFill>
+                <a:latin typeface="Cambria"/>
+                <a:cs typeface="Cambria"/>
+              </a:rPr>
+              <a:t xml:space="preserve">x</a:t>
+            </a:r>
+            <a:r>
+              <a:rPr lang="en-US" sz="1425" dirty="0">
+                <a:solidFill>
+                  <a:srgbClr val="16171D"/>
+                </a:solidFill>
+                <a:latin typeface="Cambria"/>
+                <a:cs typeface="Cambria"/>
+              </a:rPr>
+              <a:t xml:space="preserve"> − 3</a:t>
+            </a:r>
+            <a:r>
+              <a:rPr lang="en-US" sz="1425" dirty="0">
+                <a:solidFill>
+                  <a:srgbClr val="16171D"/>
+                </a:solidFill>
+                <a:latin typeface="Segoe UI"/>
+                <a:cs typeface="Segoe UI"/>
+              </a:rPr>
+              <a:t xml:space="preserve"> is 4, the number with </a:t>
+            </a:r>
+            <a:r>
+              <a:rPr lang="en-US" sz="1425" dirty="0" i="1">
+                <a:solidFill>
+                  <a:srgbClr val="16171D"/>
+                </a:solidFill>
+                <a:latin typeface="Cambria"/>
+                <a:cs typeface="Cambria"/>
+              </a:rPr>
+              <a:t xml:space="preserve">x</a:t>
+            </a:r>
+            <a:r>
+              <a:rPr lang="en-US" sz="1425" dirty="0">
+                <a:solidFill>
+                  <a:srgbClr val="16171D"/>
+                </a:solidFill>
+                <a:latin typeface="Segoe UI"/>
+                <a:cs typeface="Segoe UI"/>
+              </a:rPr>
+              <a:t xml:space="preserve">.</a:t>
+            </a:r>
+            <a:br>
+              <a:rPr lang="en-US" sz="1425" dirty="0">
+                <a:solidFill>
+                  <a:srgbClr val="16171D"/>
+                </a:solidFill>
+                <a:latin typeface="Segoe UI"/>
+                <a:cs typeface="Segoe UI"/>
+              </a:rPr>
+            </a:br>
+            <a:r>
+              <a:rPr lang="en-US" sz="1425" dirty="0" b="1">
+                <a:solidFill>
+                  <a:srgbClr val="16171D"/>
+                </a:solidFill>
+                <a:latin typeface="Segoe UI"/>
+                <a:cs typeface="Segoe UI"/>
+              </a:rPr>
+              <a:t xml:space="preserve">2.</a:t>
+            </a:r>
+            <a:r>
+              <a:rPr lang="en-US" sz="1425" dirty="0">
+                <a:solidFill>
+                  <a:srgbClr val="16171D"/>
+                </a:solidFill>
+                <a:latin typeface="Segoe UI"/>
+                <a:cs typeface="Segoe UI"/>
+              </a:rPr>
+              <a:t xml:space="preserve"> A parallel line has the same slope: 4.</a:t>
+            </a:r>
+            <a:endParaRPr lang="en-US" sz="1425" dirty="0"/>
+          </a:p>
+        </p:txBody>
+      </p:sp>
+      <p:sp>
+        <p:nvSpPr>
+          <p:cNvPr id="15" name="Shape 15"/>
+          <p:cNvSpPr txBox="1"/>
+          <p:nvPr/>
+        </p:nvSpPr>
+        <p:spPr>
+          <a:xfrm>
+            <a:off x="6210148" y="1618488"/>
+            <a:ext cx="5295748" cy="2282190"/>
+          </a:xfrm>
+          <a:prstGeom prst="roundRect">
+            <a:avLst>
+              <a:gd name="adj" fmla="val 8000"/>
+            </a:avLst>
+          </a:prstGeom>
+          <a:solidFill>
+            <a:srgbClr val="FFFFFF"/>
+          </a:solidFill>
+          <a:ln w="12700">
+            <a:solidFill>
+              <a:srgbClr val="E3E4EC"/>
+            </a:solidFill>
           </a:ln>
         </p:spPr>
         <p:txBody>
@@ -6483,18 +7092,62 @@
                 <a:spcPct val="100000"/>
               </a:lnSpc>
             </a:pPr>
-            <a:r>
-              <a:rPr lang="en-US" sz="1950" dirty="0">
-                <a:solidFill>
-                  <a:srgbClr val="16171D"/>
-                </a:solidFill>
-                <a:latin typeface="Segoe UI"/>
-                <a:cs typeface="Segoe UI"/>
-              </a:rPr>
-              <a:t xml:space="preserve">3. What slope does a line perpendicular to </a:t>
-            </a:r>
-            <a:r>
-              <a:rPr lang="en-US" sz="1950" dirty="0" i="1">
+            <a:endParaRPr lang="en-US" sz="1950" dirty="0"/>
+          </a:p>
+        </p:txBody>
+      </p:sp>
+      <p:sp>
+        <p:nvSpPr>
+          <p:cNvPr id="12" name="Shape 12"/>
+          <p:cNvSpPr txBox="1"/>
+          <p:nvPr/>
+        </p:nvSpPr>
+        <p:spPr>
+          <a:xfrm>
+            <a:off x="6419698" y="1789938"/>
+            <a:ext cx="4876648" cy="534924"/>
+          </a:xfrm>
+          <a:prstGeom prst="rect">
+            <a:avLst/>
+          </a:prstGeom>
+          <a:noFill/>
+          <a:ln>
+            <a:noFill/>
+          </a:ln>
+        </p:spPr>
+        <p:txBody>
+          <a:bodyPr wrap="square" lIns="36576" tIns="27432" rIns="36576" bIns="27432" anchor="t">
+            <a:noAutofit/>
+          </a:bodyPr>
+          <a:lstStyle/>
+          <a:p>
+            <a:pPr algn="l">
+              <a:lnSpc>
+                <a:spcPct val="100000"/>
+              </a:lnSpc>
+            </a:pPr>
+            <a:r>
+              <a:rPr lang="en-US" sz="1575" dirty="0" b="1">
+                <a:solidFill>
+                  <a:srgbClr val="16171D"/>
+                </a:solidFill>
+                <a:latin typeface="Segoe UI"/>
+                <a:cs typeface="Segoe UI"/>
+              </a:rPr>
+              <a:t xml:space="preserve">3.</a:t>
+            </a:r>
+            <a:r>
+              <a:rPr lang="en-US" sz="1575" dirty="0">
+                <a:solidFill>
+                  <a:srgbClr val="16171D"/>
+                </a:solidFill>
+                <a:latin typeface="Segoe UI"/>
+                <a:cs typeface="Segoe UI"/>
+              </a:rPr>
+              <a:t xml:space="preserve"> What slope does a line perpendicular to </a:t>
+            </a:r>
+            <a:r>
+              <a:rPr lang="en-US" sz="1575" dirty="0" i="1">
                 <a:solidFill>
                   <a:srgbClr val="16171D"/>
                 </a:solidFill>
@@ -6504,7 +7157,7 @@
               <a:t xml:space="preserve">y</a:t>
             </a:r>
             <a:r>
-              <a:rPr lang="en-US" sz="1950" dirty="0">
+              <a:rPr lang="en-US" sz="1575" dirty="0">
                 <a:solidFill>
                   <a:srgbClr val="16171D"/>
                 </a:solidFill>
@@ -6514,7 +7167,7 @@
               <a:t xml:space="preserve"> = 4</a:t>
             </a:r>
             <a:r>
-              <a:rPr lang="en-US" sz="1950" dirty="0" i="1">
+              <a:rPr lang="en-US" sz="1575" dirty="0" i="1">
                 <a:solidFill>
                   <a:srgbClr val="16171D"/>
                 </a:solidFill>
@@ -6524,7 +7177,7 @@
               <a:t xml:space="preserve">x</a:t>
             </a:r>
             <a:r>
-              <a:rPr lang="en-US" sz="1950" dirty="0">
+              <a:rPr lang="en-US" sz="1575" dirty="0">
                 <a:solidFill>
                   <a:srgbClr val="16171D"/>
                 </a:solidFill>
@@ -6534,39 +7187,83 @@
               <a:t xml:space="preserve"> − 3</a:t>
             </a:r>
             <a:r>
-              <a:rPr lang="en-US" sz="1950" dirty="0">
-                <a:solidFill>
-                  <a:srgbClr val="16171D"/>
-                </a:solidFill>
-                <a:latin typeface="Segoe UI"/>
-                <a:cs typeface="Segoe UI"/>
-              </a:rPr>
-              <a:t xml:space="preserve"> have? </a:t>
-            </a:r>
-            <a:r>
               <a:rPr lang="en-US" sz="1575" dirty="0">
                 <a:solidFill>
-                  <a:srgbClr val="5F6272"/>
-                </a:solidFill>
-                <a:latin typeface="Segoe UI"/>
-                <a:cs typeface="Segoe UI"/>
-              </a:rPr>
-              <a:t xml:space="preserve">(SE p. 321)</a:t>
-            </a:r>
-            <a:endParaRPr lang="en-US" sz="1950" dirty="0"/>
-          </a:p>
-        </p:txBody>
-      </p:sp>
-      <p:sp>
-        <p:nvSpPr>
-          <p:cNvPr id="9" name="Shape 9"/>
-          <p:cNvSpPr txBox="1"/>
-          <p:nvPr/>
-        </p:nvSpPr>
-        <p:spPr>
-          <a:xfrm>
-            <a:off x="6362548" y="2458212"/>
-            <a:ext cx="2244715" cy="518922"/>
+                  <a:srgbClr val="16171D"/>
+                </a:solidFill>
+                <a:latin typeface="Segoe UI"/>
+                <a:cs typeface="Segoe UI"/>
+              </a:rPr>
+              <a:t xml:space="preserve"> have?</a:t>
+            </a:r>
+            <a:endParaRPr lang="en-US" sz="1575" dirty="0"/>
+          </a:p>
+        </p:txBody>
+      </p:sp>
+      <p:sp>
+        <p:nvSpPr>
+          <p:cNvPr id="13" name="Shape 13"/>
+          <p:cNvSpPr txBox="1"/>
+          <p:nvPr/>
+        </p:nvSpPr>
+        <p:spPr>
+          <a:xfrm>
+            <a:off x="6419698" y="2362962"/>
+            <a:ext cx="4876648" cy="294894"/>
+          </a:xfrm>
+          <a:prstGeom prst="rect">
+            <a:avLst/>
+          </a:prstGeom>
+          <a:noFill/>
+          <a:ln>
+            <a:noFill/>
+          </a:ln>
+        </p:spPr>
+        <p:txBody>
+          <a:bodyPr wrap="square" lIns="36576" tIns="27432" rIns="36576" bIns="27432" anchor="t">
+            <a:noAutofit/>
+          </a:bodyPr>
+          <a:lstStyle/>
+          <a:p>
+            <a:pPr algn="l">
+              <a:lnSpc>
+                <a:spcPct val="100000"/>
+              </a:lnSpc>
+            </a:pPr>
+            <a:r>
+              <a:rPr lang="en-US" sz="1575" dirty="0" b="1">
+                <a:solidFill>
+                  <a:srgbClr val="16171D"/>
+                </a:solidFill>
+                <a:latin typeface="Segoe UI"/>
+                <a:cs typeface="Segoe UI"/>
+              </a:rPr>
+              <a:t xml:space="preserve">Formula:</a:t>
+            </a:r>
+            <a:r>
+              <a:rPr lang="en-US" sz="1575" dirty="0">
+                <a:solidFill>
+                  <a:srgbClr val="16171D"/>
+                </a:solidFill>
+                <a:latin typeface="Segoe UI"/>
+                <a:cs typeface="Segoe UI"/>
+              </a:rPr>
+              <a:t xml:space="preserve"> perpendicular: flip and change the sign</a:t>
+            </a:r>
+            <a:endParaRPr lang="en-US" sz="1575" dirty="0"/>
+          </a:p>
+        </p:txBody>
+      </p:sp>
+      <p:sp>
+        <p:nvSpPr>
+          <p:cNvPr id="14" name="Shape 14"/>
+          <p:cNvSpPr txBox="1"/>
+          <p:nvPr/>
+        </p:nvSpPr>
+        <p:spPr>
+          <a:xfrm>
+            <a:off x="6419698" y="2695956"/>
+            <a:ext cx="2814923" cy="1033272"/>
           </a:xfrm>
           <a:prstGeom prst="roundRect">
             <a:avLst>
@@ -6602,7 +7299,7 @@
               <a:t xml:space="preserve">ANSWER   </a:t>
             </a:r>
             <a:r>
-              <a:rPr lang="en-US" sz="2325" dirty="0">
+              <a:rPr lang="en-US" sz="1425" dirty="0" b="1">
                 <a:solidFill>
                   <a:srgbClr val="16171D"/>
                 </a:solidFill>
@@ -6611,27 +7308,200 @@
               </a:rPr>
               <a:t xml:space="preserve">−¼</a:t>
             </a:r>
-            <a:endParaRPr lang="en-US" sz="2325" dirty="0"/>
-          </a:p>
-        </p:txBody>
-      </p:sp>
-      <p:sp>
-        <p:nvSpPr>
-          <p:cNvPr id="10" name="Shape 10"/>
-          <p:cNvSpPr txBox="1"/>
-          <p:nvPr/>
-        </p:nvSpPr>
-        <p:spPr>
-          <a:xfrm>
-            <a:off x="6362548" y="3243834"/>
-            <a:ext cx="5143348" cy="946404"/>
-          </a:xfrm>
-          <a:prstGeom prst="rect">
-            <a:avLst/>
-          </a:prstGeom>
-          <a:noFill/>
-          <a:ln>
-            <a:noFill/>
+            <a:br>
+              <a:rPr lang="en-US" sz="1425" dirty="0">
+                <a:solidFill>
+                  <a:srgbClr val="16171D"/>
+                </a:solidFill>
+                <a:latin typeface="Segoe UI"/>
+                <a:cs typeface="Segoe UI"/>
+              </a:rPr>
+            </a:br>
+            <a:r>
+              <a:rPr lang="en-US" sz="1425" dirty="0" b="1">
+                <a:solidFill>
+                  <a:srgbClr val="16171D"/>
+                </a:solidFill>
+                <a:latin typeface="Segoe UI"/>
+                <a:cs typeface="Segoe UI"/>
+              </a:rPr>
+              <a:t xml:space="preserve">1.</a:t>
+            </a:r>
+            <a:r>
+              <a:rPr lang="en-US" sz="1425" dirty="0">
+                <a:solidFill>
+                  <a:srgbClr val="16171D"/>
+                </a:solidFill>
+                <a:latin typeface="Segoe UI"/>
+                <a:cs typeface="Segoe UI"/>
+              </a:rPr>
+              <a:t xml:space="preserve"> </a:t>
+            </a:r>
+            <a:r>
+              <a:rPr lang="en-US" sz="1425" dirty="0">
+                <a:solidFill>
+                  <a:srgbClr val="16171D"/>
+                </a:solidFill>
+                <a:latin typeface="Cambria"/>
+                <a:cs typeface="Cambria"/>
+              </a:rPr>
+              <a:t xml:space="preserve">4 = 4/1</a:t>
+            </a:r>
+            <a:r>
+              <a:rPr lang="en-US" sz="1425" dirty="0">
+                <a:solidFill>
+                  <a:srgbClr val="16171D"/>
+                </a:solidFill>
+                <a:latin typeface="Segoe UI"/>
+                <a:cs typeface="Segoe UI"/>
+              </a:rPr>
+              <a:t xml:space="preserve">. Flip it: </a:t>
+            </a:r>
+            <a:r>
+              <a:rPr lang="en-US" sz="1425" dirty="0">
+                <a:solidFill>
+                  <a:srgbClr val="16171D"/>
+                </a:solidFill>
+                <a:latin typeface="Cambria"/>
+                <a:cs typeface="Cambria"/>
+              </a:rPr>
+              <a:t xml:space="preserve">1/4</a:t>
+            </a:r>
+            <a:r>
+              <a:rPr lang="en-US" sz="1425" dirty="0">
+                <a:solidFill>
+                  <a:srgbClr val="16171D"/>
+                </a:solidFill>
+                <a:latin typeface="Segoe UI"/>
+                <a:cs typeface="Segoe UI"/>
+              </a:rPr>
+              <a:t xml:space="preserve">.</a:t>
+            </a:r>
+            <a:br>
+              <a:rPr lang="en-US" sz="1425" dirty="0">
+                <a:solidFill>
+                  <a:srgbClr val="16171D"/>
+                </a:solidFill>
+                <a:latin typeface="Segoe UI"/>
+                <a:cs typeface="Segoe UI"/>
+              </a:rPr>
+            </a:br>
+            <a:r>
+              <a:rPr lang="en-US" sz="1425" dirty="0" b="1">
+                <a:solidFill>
+                  <a:srgbClr val="16171D"/>
+                </a:solidFill>
+                <a:latin typeface="Segoe UI"/>
+                <a:cs typeface="Segoe UI"/>
+              </a:rPr>
+              <a:t xml:space="preserve">2.</a:t>
+            </a:r>
+            <a:r>
+              <a:rPr lang="en-US" sz="1425" dirty="0">
+                <a:solidFill>
+                  <a:srgbClr val="16171D"/>
+                </a:solidFill>
+                <a:latin typeface="Segoe UI"/>
+                <a:cs typeface="Segoe UI"/>
+              </a:rPr>
+              <a:t xml:space="preserve"> Change the sign: </a:t>
+            </a:r>
+            <a:r>
+              <a:rPr lang="en-US" sz="1425" dirty="0">
+                <a:solidFill>
+                  <a:srgbClr val="16171D"/>
+                </a:solidFill>
+                <a:latin typeface="Cambria"/>
+                <a:cs typeface="Cambria"/>
+              </a:rPr>
+              <a:t xml:space="preserve">−¼</a:t>
+            </a:r>
+            <a:r>
+              <a:rPr lang="en-US" sz="1425" dirty="0">
+                <a:solidFill>
+                  <a:srgbClr val="16171D"/>
+                </a:solidFill>
+                <a:latin typeface="Segoe UI"/>
+                <a:cs typeface="Segoe UI"/>
+              </a:rPr>
+              <a:t xml:space="preserve">.</a:t>
+            </a:r>
+            <a:br>
+              <a:rPr lang="en-US" sz="1425" dirty="0">
+                <a:solidFill>
+                  <a:srgbClr val="16171D"/>
+                </a:solidFill>
+                <a:latin typeface="Segoe UI"/>
+                <a:cs typeface="Segoe UI"/>
+              </a:rPr>
+            </a:br>
+            <a:r>
+              <a:rPr lang="en-US" sz="1425" dirty="0" b="1">
+                <a:solidFill>
+                  <a:srgbClr val="16171D"/>
+                </a:solidFill>
+                <a:latin typeface="Segoe UI"/>
+                <a:cs typeface="Segoe UI"/>
+              </a:rPr>
+              <a:t xml:space="preserve">3.</a:t>
+            </a:r>
+            <a:r>
+              <a:rPr lang="en-US" sz="1425" dirty="0">
+                <a:solidFill>
+                  <a:srgbClr val="16171D"/>
+                </a:solidFill>
+                <a:latin typeface="Segoe UI"/>
+                <a:cs typeface="Segoe UI"/>
+              </a:rPr>
+              <a:t xml:space="preserve"> Check: </a:t>
+            </a:r>
+            <a:r>
+              <a:rPr lang="en-US" sz="1425" dirty="0">
+                <a:solidFill>
+                  <a:srgbClr val="16171D"/>
+                </a:solidFill>
+                <a:latin typeface="Cambria"/>
+                <a:cs typeface="Cambria"/>
+              </a:rPr>
+              <a:t xml:space="preserve">4 · (−¼) = −1</a:t>
+            </a:r>
+            <a:r>
+              <a:rPr lang="en-US" sz="1425" dirty="0">
+                <a:solidFill>
+                  <a:srgbClr val="16171D"/>
+                </a:solidFill>
+                <a:latin typeface="Segoe UI"/>
+                <a:cs typeface="Segoe UI"/>
+              </a:rPr>
+              <a:t xml:space="preserve">.</a:t>
+            </a:r>
+            <a:endParaRPr lang="en-US" sz="1425" dirty="0"/>
+          </a:p>
+        </p:txBody>
+      </p:sp>
+      <p:sp>
+        <p:nvSpPr>
+          <p:cNvPr id="19" name="Shape 19"/>
+          <p:cNvSpPr txBox="1"/>
+          <p:nvPr/>
+        </p:nvSpPr>
+        <p:spPr>
+          <a:xfrm>
+            <a:off x="6210148" y="4034028"/>
+            <a:ext cx="5295748" cy="2282190"/>
+          </a:xfrm>
+          <a:prstGeom prst="roundRect">
+            <a:avLst>
+              <a:gd name="adj" fmla="val 8000"/>
+            </a:avLst>
+          </a:prstGeom>
+          <a:solidFill>
+            <a:srgbClr val="FFFFFF"/>
+          </a:solidFill>
+          <a:ln w="12700">
+            <a:solidFill>
+              <a:srgbClr val="E3E4EC"/>
+            </a:solidFill>
           </a:ln>
         </p:spPr>
         <p:txBody>
@@ -6645,18 +7515,62 @@
                 <a:spcPct val="100000"/>
               </a:lnSpc>
             </a:pPr>
-            <a:r>
-              <a:rPr lang="en-US" sz="1950" dirty="0">
-                <a:solidFill>
-                  <a:srgbClr val="16171D"/>
-                </a:solidFill>
-                <a:latin typeface="Segoe UI"/>
-                <a:cs typeface="Segoe UI"/>
-              </a:rPr>
-              <a:t xml:space="preserve">4. The ratio of 9th-graders to 10th-graders is </a:t>
-            </a:r>
-            <a:r>
-              <a:rPr lang="en-US" sz="1950" dirty="0">
+            <a:endParaRPr lang="en-US" sz="1950" dirty="0"/>
+          </a:p>
+        </p:txBody>
+      </p:sp>
+      <p:sp>
+        <p:nvSpPr>
+          <p:cNvPr id="16" name="Shape 16"/>
+          <p:cNvSpPr txBox="1"/>
+          <p:nvPr/>
+        </p:nvSpPr>
+        <p:spPr>
+          <a:xfrm>
+            <a:off x="6419698" y="4205478"/>
+            <a:ext cx="4876648" cy="534924"/>
+          </a:xfrm>
+          <a:prstGeom prst="rect">
+            <a:avLst/>
+          </a:prstGeom>
+          <a:noFill/>
+          <a:ln>
+            <a:noFill/>
+          </a:ln>
+        </p:spPr>
+        <p:txBody>
+          <a:bodyPr wrap="square" lIns="36576" tIns="27432" rIns="36576" bIns="27432" anchor="t">
+            <a:noAutofit/>
+          </a:bodyPr>
+          <a:lstStyle/>
+          <a:p>
+            <a:pPr algn="l">
+              <a:lnSpc>
+                <a:spcPct val="100000"/>
+              </a:lnSpc>
+            </a:pPr>
+            <a:r>
+              <a:rPr lang="en-US" sz="1575" dirty="0" b="1">
+                <a:solidFill>
+                  <a:srgbClr val="16171D"/>
+                </a:solidFill>
+                <a:latin typeface="Segoe UI"/>
+                <a:cs typeface="Segoe UI"/>
+              </a:rPr>
+              <a:t xml:space="preserve">4.</a:t>
+            </a:r>
+            <a:r>
+              <a:rPr lang="en-US" sz="1575" dirty="0">
+                <a:solidFill>
+                  <a:srgbClr val="16171D"/>
+                </a:solidFill>
+                <a:latin typeface="Segoe UI"/>
+                <a:cs typeface="Segoe UI"/>
+              </a:rPr>
+              <a:t xml:space="preserve"> The ratio of 9th-graders to 10th-graders is </a:t>
+            </a:r>
+            <a:r>
+              <a:rPr lang="en-US" sz="1575" dirty="0">
                 <a:solidFill>
                   <a:srgbClr val="16171D"/>
                 </a:solidFill>
@@ -6666,39 +7580,113 @@
               <a:t xml:space="preserve">1 : 1</a:t>
             </a:r>
             <a:r>
-              <a:rPr lang="en-US" sz="1950" dirty="0">
-                <a:solidFill>
-                  <a:srgbClr val="16171D"/>
-                </a:solidFill>
-                <a:latin typeface="Segoe UI"/>
-                <a:cs typeface="Segoe UI"/>
-              </a:rPr>
-              <a:t xml:space="preserve">. What is the slope of this relationship? </a:t>
-            </a:r>
-            <a:r>
               <a:rPr lang="en-US" sz="1575" dirty="0">
                 <a:solidFill>
-                  <a:srgbClr val="5F6272"/>
-                </a:solidFill>
-                <a:latin typeface="Segoe UI"/>
-                <a:cs typeface="Segoe UI"/>
-              </a:rPr>
-              <a:t xml:space="preserve">(SE p. 320)</a:t>
-            </a:r>
-            <a:endParaRPr lang="en-US" sz="1950" dirty="0"/>
-          </a:p>
-        </p:txBody>
-      </p:sp>
-      <p:sp>
-        <p:nvSpPr>
-          <p:cNvPr id="11" name="Shape 11"/>
-          <p:cNvSpPr txBox="1"/>
-          <p:nvPr/>
-        </p:nvSpPr>
-        <p:spPr>
-          <a:xfrm>
-            <a:off x="6362548" y="4323588"/>
-            <a:ext cx="2078888" cy="518922"/>
+                  <a:srgbClr val="16171D"/>
+                </a:solidFill>
+                <a:latin typeface="Segoe UI"/>
+                <a:cs typeface="Segoe UI"/>
+              </a:rPr>
+              <a:t xml:space="preserve">. What is the slope of this relationship?</a:t>
+            </a:r>
+            <a:endParaRPr lang="en-US" sz="1575" dirty="0"/>
+          </a:p>
+        </p:txBody>
+      </p:sp>
+      <p:sp>
+        <p:nvSpPr>
+          <p:cNvPr id="17" name="Shape 17"/>
+          <p:cNvSpPr txBox="1"/>
+          <p:nvPr/>
+        </p:nvSpPr>
+        <p:spPr>
+          <a:xfrm>
+            <a:off x="6419698" y="4778502"/>
+            <a:ext cx="4876648" cy="294894"/>
+          </a:xfrm>
+          <a:prstGeom prst="rect">
+            <a:avLst/>
+          </a:prstGeom>
+          <a:noFill/>
+          <a:ln>
+            <a:noFill/>
+          </a:ln>
+        </p:spPr>
+        <p:txBody>
+          <a:bodyPr wrap="square" lIns="36576" tIns="27432" rIns="36576" bIns="27432" anchor="t">
+            <a:noAutofit/>
+          </a:bodyPr>
+          <a:lstStyle/>
+          <a:p>
+            <a:pPr algn="l">
+              <a:lnSpc>
+                <a:spcPct val="100000"/>
+              </a:lnSpc>
+            </a:pPr>
+            <a:r>
+              <a:rPr lang="en-US" sz="1575" dirty="0" b="1">
+                <a:solidFill>
+                  <a:srgbClr val="16171D"/>
+                </a:solidFill>
+                <a:latin typeface="Segoe UI"/>
+                <a:cs typeface="Segoe UI"/>
+              </a:rPr>
+              <a:t xml:space="preserve">Formula:</a:t>
+            </a:r>
+            <a:r>
+              <a:rPr lang="en-US" sz="1575" dirty="0">
+                <a:solidFill>
+                  <a:srgbClr val="16171D"/>
+                </a:solidFill>
+                <a:latin typeface="Segoe UI"/>
+                <a:cs typeface="Segoe UI"/>
+              </a:rPr>
+              <a:t xml:space="preserve"> slope = change in </a:t>
+            </a:r>
+            <a:r>
+              <a:rPr lang="en-US" sz="1575" dirty="0" i="1">
+                <a:solidFill>
+                  <a:srgbClr val="16171D"/>
+                </a:solidFill>
+                <a:latin typeface="Cambria"/>
+                <a:cs typeface="Cambria"/>
+              </a:rPr>
+              <a:t xml:space="preserve">y</a:t>
+            </a:r>
+            <a:r>
+              <a:rPr lang="en-US" sz="1575" dirty="0">
+                <a:solidFill>
+                  <a:srgbClr val="16171D"/>
+                </a:solidFill>
+                <a:latin typeface="Segoe UI"/>
+                <a:cs typeface="Segoe UI"/>
+              </a:rPr>
+              <a:t xml:space="preserve"> ÷ change in </a:t>
+            </a:r>
+            <a:r>
+              <a:rPr lang="en-US" sz="1575" dirty="0" i="1">
+                <a:solidFill>
+                  <a:srgbClr val="16171D"/>
+                </a:solidFill>
+                <a:latin typeface="Cambria"/>
+                <a:cs typeface="Cambria"/>
+              </a:rPr>
+              <a:t xml:space="preserve">x</a:t>
+            </a:r>
+            <a:endParaRPr lang="en-US" sz="1575" dirty="0"/>
+          </a:p>
+        </p:txBody>
+      </p:sp>
+      <p:sp>
+        <p:nvSpPr>
+          <p:cNvPr id="18" name="Shape 18"/>
+          <p:cNvSpPr txBox="1"/>
+          <p:nvPr/>
+        </p:nvSpPr>
+        <p:spPr>
+          <a:xfrm>
+            <a:off x="6419698" y="5111496"/>
+            <a:ext cx="4876648" cy="1033272"/>
           </a:xfrm>
           <a:prstGeom prst="roundRect">
             <a:avLst>
@@ -6734,7 +7722,7 @@
               <a:t xml:space="preserve">ANSWER   </a:t>
             </a:r>
             <a:r>
-              <a:rPr lang="en-US" sz="2325" dirty="0">
+              <a:rPr lang="en-US" sz="1425" dirty="0" b="1">
                 <a:solidFill>
                   <a:srgbClr val="16171D"/>
                 </a:solidFill>
@@ -6743,13 +7731,151 @@
               </a:rPr>
               <a:t xml:space="preserve">1</a:t>
             </a:r>
-            <a:endParaRPr lang="en-US" sz="2325" dirty="0"/>
-          </a:p>
-        </p:txBody>
-      </p:sp>
-      <p:sp>
-        <p:nvSpPr>
-          <p:cNvPr id="12" name="Slide Number 12"/>
+            <a:br>
+              <a:rPr lang="en-US" sz="1425" dirty="0">
+                <a:solidFill>
+                  <a:srgbClr val="16171D"/>
+                </a:solidFill>
+                <a:latin typeface="Segoe UI"/>
+                <a:cs typeface="Segoe UI"/>
+              </a:rPr>
+            </a:br>
+            <a:r>
+              <a:rPr lang="en-US" sz="1425" dirty="0" b="1">
+                <a:solidFill>
+                  <a:srgbClr val="16171D"/>
+                </a:solidFill>
+                <a:latin typeface="Segoe UI"/>
+                <a:cs typeface="Segoe UI"/>
+              </a:rPr>
+              <a:t xml:space="preserve">1.</a:t>
+            </a:r>
+            <a:r>
+              <a:rPr lang="en-US" sz="1425" dirty="0">
+                <a:solidFill>
+                  <a:srgbClr val="16171D"/>
+                </a:solidFill>
+                <a:latin typeface="Segoe UI"/>
+                <a:cs typeface="Segoe UI"/>
+              </a:rPr>
+              <a:t xml:space="preserve"> </a:t>
+            </a:r>
+            <a:r>
+              <a:rPr lang="en-US" sz="1425" dirty="0">
+                <a:solidFill>
+                  <a:srgbClr val="16171D"/>
+                </a:solidFill>
+                <a:latin typeface="Cambria"/>
+                <a:cs typeface="Cambria"/>
+              </a:rPr>
+              <a:t xml:space="preserve">1 : 1</a:t>
+            </a:r>
+            <a:r>
+              <a:rPr lang="en-US" sz="1425" dirty="0">
+                <a:solidFill>
+                  <a:srgbClr val="16171D"/>
+                </a:solidFill>
+                <a:latin typeface="Segoe UI"/>
+                <a:cs typeface="Segoe UI"/>
+              </a:rPr>
+              <a:t xml:space="preserve"> means 1 tenth-grader for every 1 ninth-grader.</a:t>
+            </a:r>
+            <a:br>
+              <a:rPr lang="en-US" sz="1425" dirty="0">
+                <a:solidFill>
+                  <a:srgbClr val="16171D"/>
+                </a:solidFill>
+                <a:latin typeface="Segoe UI"/>
+                <a:cs typeface="Segoe UI"/>
+              </a:rPr>
+            </a:br>
+            <a:r>
+              <a:rPr lang="en-US" sz="1425" dirty="0" b="1">
+                <a:solidFill>
+                  <a:srgbClr val="16171D"/>
+                </a:solidFill>
+                <a:latin typeface="Segoe UI"/>
+                <a:cs typeface="Segoe UI"/>
+              </a:rPr>
+              <a:t xml:space="preserve">2.</a:t>
+            </a:r>
+            <a:r>
+              <a:rPr lang="en-US" sz="1425" dirty="0">
+                <a:solidFill>
+                  <a:srgbClr val="16171D"/>
+                </a:solidFill>
+                <a:latin typeface="Segoe UI"/>
+                <a:cs typeface="Segoe UI"/>
+              </a:rPr>
+              <a:t xml:space="preserve"> </a:t>
+            </a:r>
+            <a:r>
+              <a:rPr lang="en-US" sz="1425" dirty="0">
+                <a:solidFill>
+                  <a:srgbClr val="16171D"/>
+                </a:solidFill>
+                <a:latin typeface="Cambria"/>
+                <a:cs typeface="Cambria"/>
+              </a:rPr>
+              <a:t xml:space="preserve">1 ÷ 1 = 1</a:t>
+            </a:r>
+            <a:r>
+              <a:rPr lang="en-US" sz="1425" dirty="0">
+                <a:solidFill>
+                  <a:srgbClr val="16171D"/>
+                </a:solidFill>
+                <a:latin typeface="Segoe UI"/>
+                <a:cs typeface="Segoe UI"/>
+              </a:rPr>
+              <a:t xml:space="preserve">, so </a:t>
+            </a:r>
+            <a:r>
+              <a:rPr lang="en-US" sz="1425" dirty="0" i="1">
+                <a:solidFill>
+                  <a:srgbClr val="16171D"/>
+                </a:solidFill>
+                <a:latin typeface="Cambria"/>
+                <a:cs typeface="Cambria"/>
+              </a:rPr>
+              <a:t xml:space="preserve">y</a:t>
+            </a:r>
+            <a:r>
+              <a:rPr lang="en-US" sz="1425" dirty="0">
+                <a:solidFill>
+                  <a:srgbClr val="16171D"/>
+                </a:solidFill>
+                <a:latin typeface="Cambria"/>
+                <a:cs typeface="Cambria"/>
+              </a:rPr>
+              <a:t xml:space="preserve"> = </a:t>
+            </a:r>
+            <a:r>
+              <a:rPr lang="en-US" sz="1425" dirty="0" i="1">
+                <a:solidFill>
+                  <a:srgbClr val="16171D"/>
+                </a:solidFill>
+                <a:latin typeface="Cambria"/>
+                <a:cs typeface="Cambria"/>
+              </a:rPr>
+              <a:t xml:space="preserve">x</a:t>
+            </a:r>
+            <a:r>
+              <a:rPr lang="en-US" sz="1425" dirty="0">
+                <a:solidFill>
+                  <a:srgbClr val="16171D"/>
+                </a:solidFill>
+                <a:latin typeface="Segoe UI"/>
+                <a:cs typeface="Segoe UI"/>
+              </a:rPr>
+              <a:t xml:space="preserve"> and the slope is 1.</a:t>
+            </a:r>
+            <a:endParaRPr lang="en-US" sz="1425" dirty="0"/>
+          </a:p>
+        </p:txBody>
+      </p:sp>
+      <p:sp>
+        <p:nvSpPr>
+          <p:cNvPr id="20" name="Slide Number 20"/>
           <p:cNvSpPr txBox="1"/>
           <p:nvPr/>
         </p:nvSpPr>
@@ -6823,7 +7949,7 @@
                                           </p:stCondLst>
                                         </p:cTn>
                                         <p:tgtEl>
-                                          <p:spTgt spid="5"/>
+                                          <p:spTgt spid="6"/>
                                         </p:tgtEl>
                                         <p:attrNameLst>
                                           <p:attrName>style.visibility</p:attrName>
@@ -6837,7 +7963,7 @@
                                       <p:cBhvr>
                                         <p:cTn id="4" dur="500"/>
                                         <p:tgtEl>
-                                          <p:spTgt spid="5"/>
+                                          <p:spTgt spid="6"/>
                                         </p:tgtEl>
                                       </p:cBhvr>
                                     </p:animEffect>
@@ -6845,7 +7971,7 @@
                                       <p:cBhvr>
                                         <p:cTn id="5" dur="500" fill="hold"/>
                                         <p:tgtEl>
-                                          <p:spTgt spid="5"/>
+                                          <p:spTgt spid="6"/>
                                         </p:tgtEl>
                                         <p:attrNameLst>
                                           <p:attrName>ppt_w</p:attrName>
@@ -6868,7 +7994,7 @@
                                       <p:cBhvr>
                                         <p:cTn id="6" dur="500" fill="hold"/>
                                         <p:tgtEl>
-                                          <p:spTgt spid="5"/>
+                                          <p:spTgt spid="6"/>
                                         </p:tgtEl>
                                         <p:attrNameLst>
                                           <p:attrName>ppt_h</p:attrName>
@@ -6922,7 +8048,7 @@
                                           </p:stCondLst>
                                         </p:cTn>
                                         <p:tgtEl>
-                                          <p:spTgt spid="7"/>
+                                          <p:spTgt spid="10"/>
                                         </p:tgtEl>
                                         <p:attrNameLst>
                                           <p:attrName>style.visibility</p:attrName>
@@ -6936,7 +8062,7 @@
                                       <p:cBhvr>
                                         <p:cTn id="11" dur="500"/>
                                         <p:tgtEl>
-                                          <p:spTgt spid="7"/>
+                                          <p:spTgt spid="10"/>
                                         </p:tgtEl>
                                       </p:cBhvr>
                                     </p:animEffect>
@@ -6944,7 +8070,7 @@
                                       <p:cBhvr>
                                         <p:cTn id="12" dur="500" fill="hold"/>
                                         <p:tgtEl>
-                                          <p:spTgt spid="7"/>
+                                          <p:spTgt spid="10"/>
                                         </p:tgtEl>
                                         <p:attrNameLst>
                                           <p:attrName>ppt_w</p:attrName>
@@ -6967,7 +8093,7 @@
                                       <p:cBhvr>
                                         <p:cTn id="13" dur="500" fill="hold"/>
                                         <p:tgtEl>
-                                          <p:spTgt spid="7"/>
+                                          <p:spTgt spid="10"/>
                                         </p:tgtEl>
                                         <p:attrNameLst>
                                           <p:attrName>ppt_h</p:attrName>
@@ -7021,7 +8147,7 @@
                                           </p:stCondLst>
                                         </p:cTn>
                                         <p:tgtEl>
-                                          <p:spTgt spid="9"/>
+                                          <p:spTgt spid="14"/>
                                         </p:tgtEl>
                                         <p:attrNameLst>
                                           <p:attrName>style.visibility</p:attrName>
@@ -7035,7 +8161,7 @@
                                       <p:cBhvr>
                                         <p:cTn id="18" dur="500"/>
                                         <p:tgtEl>
-                                          <p:spTgt spid="9"/>
+                                          <p:spTgt spid="14"/>
                                         </p:tgtEl>
                                       </p:cBhvr>
                                     </p:animEffect>
@@ -7043,7 +8169,7 @@
                                       <p:cBhvr>
                                         <p:cTn id="19" dur="500" fill="hold"/>
                                         <p:tgtEl>
-                                          <p:spTgt spid="9"/>
+                                          <p:spTgt spid="14"/>
                                         </p:tgtEl>
                                         <p:attrNameLst>
                                           <p:attrName>ppt_w</p:attrName>
@@ -7066,7 +8192,7 @@
                                       <p:cBhvr>
                                         <p:cTn id="20" dur="500" fill="hold"/>
                                         <p:tgtEl>
-                                          <p:spTgt spid="9"/>
+                                          <p:spTgt spid="14"/>
                                         </p:tgtEl>
                                         <p:attrNameLst>
                                           <p:attrName>ppt_h</p:attrName>
@@ -7120,7 +8246,7 @@
                                           </p:stCondLst>
                                         </p:cTn>
                                         <p:tgtEl>
-                                          <p:spTgt spid="11"/>
+                                          <p:spTgt spid="18"/>
                                         </p:tgtEl>
                                         <p:attrNameLst>
                                           <p:attrName>style.visibility</p:attrName>
@@ -7134,7 +8260,7 @@
                                       <p:cBhvr>
                                         <p:cTn id="25" dur="500"/>
                                         <p:tgtEl>
-                                          <p:spTgt spid="11"/>
+                                          <p:spTgt spid="18"/>
                                         </p:tgtEl>
                                       </p:cBhvr>
                                     </p:animEffect>
@@ -7142,7 +8268,7 @@
                                       <p:cBhvr>
                                         <p:cTn id="26" dur="500" fill="hold"/>
                                         <p:tgtEl>
-                                          <p:spTgt spid="11"/>
+                                          <p:spTgt spid="18"/>
                                         </p:tgtEl>
                                         <p:attrNameLst>
                                           <p:attrName>ppt_w</p:attrName>
@@ -7165,7 +8291,7 @@
                                       <p:cBhvr>
                                         <p:cTn id="27" dur="500" fill="hold"/>
                                         <p:tgtEl>
-                                          <p:spTgt spid="11"/>
+                                          <p:spTgt spid="18"/>
                                         </p:tgtEl>
                                         <p:attrNameLst>
                                           <p:attrName>ppt_h</p:attrName>
@@ -7273,7 +8399,7 @@
                 <a:latin typeface="Segoe UI"/>
                 <a:cs typeface="Segoe UI"/>
               </a:rPr>
-              <a:t xml:space="preserve">Day 2 · Bell Work · Review of Day 1</a:t>
+              <a:t xml:space="preserve">Day 2 · Bell Work · Review</a:t>
             </a:r>
             <a:endParaRPr lang="en-US" sz="1200" dirty="0"/>
           </a:p>
@@ -7325,21 +8451,27 @@
       </p:sp>
       <p:sp>
         <p:nvSpPr>
-          <p:cNvPr id="4" name="Shape 4"/>
-          <p:cNvSpPr txBox="1"/>
-          <p:nvPr/>
-        </p:nvSpPr>
-        <p:spPr>
-          <a:xfrm>
-            <a:off x="685800" y="1675638"/>
-            <a:ext cx="5143348" cy="946404"/>
-          </a:xfrm>
-          <a:prstGeom prst="rect">
-            <a:avLst/>
-          </a:prstGeom>
-          <a:noFill/>
-          <a:ln>
-            <a:noFill/>
+          <p:cNvPr id="7" name="Shape 7"/>
+          <p:cNvSpPr txBox="1"/>
+          <p:nvPr/>
+        </p:nvSpPr>
+        <p:spPr>
+          <a:xfrm>
+            <a:off x="685800" y="1618488"/>
+            <a:ext cx="5295748" cy="2065020"/>
+          </a:xfrm>
+          <a:prstGeom prst="roundRect">
+            <a:avLst>
+              <a:gd name="adj" fmla="val 8000"/>
+            </a:avLst>
+          </a:prstGeom>
+          <a:solidFill>
+            <a:srgbClr val="FFFFFF"/>
+          </a:solidFill>
+          <a:ln w="12700">
+            <a:solidFill>
+              <a:srgbClr val="E3E4EC"/>
+            </a:solidFill>
           </a:ln>
         </p:spPr>
         <p:txBody>
@@ -7353,27 +8485,61 @@
                 <a:spcPct val="100000"/>
               </a:lnSpc>
             </a:pPr>
-            <a:r>
-              <a:rPr lang="en-US" sz="1950" dirty="0">
-                <a:solidFill>
-                  <a:srgbClr val="16171D"/>
-                </a:solidFill>
-                <a:latin typeface="Segoe UI"/>
-                <a:cs typeface="Segoe UI"/>
-              </a:rPr>
-              <a:t xml:space="preserve">1. Travis County pays $15 per ton of cardboard. How much is paid for 3 tons? </a:t>
+            <a:endParaRPr lang="en-US" sz="1950" dirty="0"/>
+          </a:p>
+        </p:txBody>
+      </p:sp>
+      <p:sp>
+        <p:nvSpPr>
+          <p:cNvPr id="4" name="Shape 4"/>
+          <p:cNvSpPr txBox="1"/>
+          <p:nvPr/>
+        </p:nvSpPr>
+        <p:spPr>
+          <a:xfrm>
+            <a:off x="895350" y="1789938"/>
+            <a:ext cx="4876648" cy="534924"/>
+          </a:xfrm>
+          <a:prstGeom prst="rect">
+            <a:avLst/>
+          </a:prstGeom>
+          <a:noFill/>
+          <a:ln>
+            <a:noFill/>
+          </a:ln>
+        </p:spPr>
+        <p:txBody>
+          <a:bodyPr wrap="square" lIns="36576" tIns="27432" rIns="36576" bIns="27432" anchor="t">
+            <a:noAutofit/>
+          </a:bodyPr>
+          <a:lstStyle/>
+          <a:p>
+            <a:pPr algn="l">
+              <a:lnSpc>
+                <a:spcPct val="100000"/>
+              </a:lnSpc>
+            </a:pPr>
+            <a:r>
+              <a:rPr lang="en-US" sz="1575" dirty="0" b="1">
+                <a:solidFill>
+                  <a:srgbClr val="16171D"/>
+                </a:solidFill>
+                <a:latin typeface="Segoe UI"/>
+                <a:cs typeface="Segoe UI"/>
+              </a:rPr>
+              <a:t xml:space="preserve">1.</a:t>
             </a:r>
             <a:r>
               <a:rPr lang="en-US" sz="1575" dirty="0">
                 <a:solidFill>
-                  <a:srgbClr val="5F6272"/>
-                </a:solidFill>
-                <a:latin typeface="Segoe UI"/>
-                <a:cs typeface="Segoe UI"/>
-              </a:rPr>
-              <a:t xml:space="preserve">(SE p. 322)</a:t>
-            </a:r>
-            <a:endParaRPr lang="en-US" sz="1950" dirty="0"/>
+                  <a:srgbClr val="16171D"/>
+                </a:solidFill>
+                <a:latin typeface="Segoe UI"/>
+                <a:cs typeface="Segoe UI"/>
+              </a:rPr>
+              <a:t xml:space="preserve"> Travis County pays $15 per ton of cardboard. How much is paid for 3 tons?</a:t>
+            </a:r>
+            <a:endParaRPr lang="en-US" sz="1575" dirty="0"/>
           </a:p>
         </p:txBody>
       </p:sp>
@@ -7385,8 +8551,62 @@
         </p:nvSpPr>
         <p:spPr>
           <a:xfrm>
-            <a:off x="685800" y="2755392"/>
-            <a:ext cx="2410541" cy="518922"/>
+            <a:off x="895350" y="2362962"/>
+            <a:ext cx="4876648" cy="294894"/>
+          </a:xfrm>
+          <a:prstGeom prst="rect">
+            <a:avLst/>
+          </a:prstGeom>
+          <a:noFill/>
+          <a:ln>
+            <a:noFill/>
+          </a:ln>
+        </p:spPr>
+        <p:txBody>
+          <a:bodyPr wrap="square" lIns="36576" tIns="27432" rIns="36576" bIns="27432" anchor="t">
+            <a:noAutofit/>
+          </a:bodyPr>
+          <a:lstStyle/>
+          <a:p>
+            <a:pPr algn="l">
+              <a:lnSpc>
+                <a:spcPct val="100000"/>
+              </a:lnSpc>
+            </a:pPr>
+            <a:r>
+              <a:rPr lang="en-US" sz="1575" dirty="0" b="1">
+                <a:solidFill>
+                  <a:srgbClr val="16171D"/>
+                </a:solidFill>
+                <a:latin typeface="Segoe UI"/>
+                <a:cs typeface="Segoe UI"/>
+              </a:rPr>
+              <a:t xml:space="preserve">Formula:</a:t>
+            </a:r>
+            <a:r>
+              <a:rPr lang="en-US" sz="1575" dirty="0">
+                <a:solidFill>
+                  <a:srgbClr val="16171D"/>
+                </a:solidFill>
+                <a:latin typeface="Segoe UI"/>
+                <a:cs typeface="Segoe UI"/>
+              </a:rPr>
+              <a:t xml:space="preserve"> total = rate × amount</a:t>
+            </a:r>
+            <a:endParaRPr lang="en-US" sz="1575" dirty="0"/>
+          </a:p>
+        </p:txBody>
+      </p:sp>
+      <p:sp>
+        <p:nvSpPr>
+          <p:cNvPr id="6" name="Shape 6"/>
+          <p:cNvSpPr txBox="1"/>
+          <p:nvPr/>
+        </p:nvSpPr>
+        <p:spPr>
+          <a:xfrm>
+            <a:off x="895350" y="2695956"/>
+            <a:ext cx="3964187" cy="816102"/>
           </a:xfrm>
           <a:prstGeom prst="roundRect">
             <a:avLst>
@@ -7422,36 +8642,120 @@
               <a:t xml:space="preserve">ANSWER   </a:t>
             </a:r>
             <a:r>
-              <a:rPr lang="en-US" sz="2325" dirty="0">
+              <a:rPr lang="en-US" sz="1425" dirty="0" b="1">
+                <a:solidFill>
+                  <a:srgbClr val="16171D"/>
+                </a:solidFill>
+                <a:latin typeface="Segoe UI"/>
+                <a:cs typeface="Segoe UI"/>
+              </a:rPr>
+              <a:t xml:space="preserve">$45</a:t>
+            </a:r>
+            <a:br>
+              <a:rPr lang="en-US" sz="1425" dirty="0">
+                <a:solidFill>
+                  <a:srgbClr val="16171D"/>
+                </a:solidFill>
+                <a:latin typeface="Segoe UI"/>
+                <a:cs typeface="Segoe UI"/>
+              </a:rPr>
+            </a:br>
+            <a:r>
+              <a:rPr lang="en-US" sz="1425" dirty="0" b="1">
+                <a:solidFill>
+                  <a:srgbClr val="16171D"/>
+                </a:solidFill>
+                <a:latin typeface="Segoe UI"/>
+                <a:cs typeface="Segoe UI"/>
+              </a:rPr>
+              <a:t xml:space="preserve">1.</a:t>
+            </a:r>
+            <a:r>
+              <a:rPr lang="en-US" sz="1425" dirty="0">
+                <a:solidFill>
+                  <a:srgbClr val="16171D"/>
+                </a:solidFill>
+                <a:latin typeface="Segoe UI"/>
+                <a:cs typeface="Segoe UI"/>
+              </a:rPr>
+              <a:t xml:space="preserve"> Rate: $15 per ton. Amount: 3 tons.</a:t>
+            </a:r>
+            <a:br>
+              <a:rPr lang="en-US" sz="1425" dirty="0">
+                <a:solidFill>
+                  <a:srgbClr val="16171D"/>
+                </a:solidFill>
+                <a:latin typeface="Segoe UI"/>
+                <a:cs typeface="Segoe UI"/>
+              </a:rPr>
+            </a:br>
+            <a:r>
+              <a:rPr lang="en-US" sz="1425" dirty="0" b="1">
+                <a:solidFill>
+                  <a:srgbClr val="16171D"/>
+                </a:solidFill>
+                <a:latin typeface="Segoe UI"/>
+                <a:cs typeface="Segoe UI"/>
+              </a:rPr>
+              <a:t xml:space="preserve">2.</a:t>
+            </a:r>
+            <a:r>
+              <a:rPr lang="en-US" sz="1425" dirty="0">
+                <a:solidFill>
+                  <a:srgbClr val="16171D"/>
+                </a:solidFill>
+                <a:latin typeface="Segoe UI"/>
+                <a:cs typeface="Segoe UI"/>
+              </a:rPr>
+              <a:t xml:space="preserve"> </a:t>
+            </a:r>
+            <a:r>
+              <a:rPr lang="en-US" sz="1425" dirty="0">
                 <a:solidFill>
                   <a:srgbClr val="16171D"/>
                 </a:solidFill>
                 <a:latin typeface="Cambria"/>
                 <a:cs typeface="Cambria"/>
               </a:rPr>
-              <a:t xml:space="preserve">$45</a:t>
-            </a:r>
-            <a:endParaRPr lang="en-US" sz="2325" dirty="0"/>
-          </a:p>
-        </p:txBody>
-      </p:sp>
-      <p:sp>
-        <p:nvSpPr>
-          <p:cNvPr id="6" name="Shape 6"/>
-          <p:cNvSpPr txBox="1"/>
-          <p:nvPr/>
-        </p:nvSpPr>
-        <p:spPr>
-          <a:xfrm>
-            <a:off x="685800" y="3541014"/>
-            <a:ext cx="5143348" cy="946404"/>
-          </a:xfrm>
-          <a:prstGeom prst="rect">
-            <a:avLst/>
-          </a:prstGeom>
-          <a:noFill/>
-          <a:ln>
-            <a:noFill/>
+              <a:t xml:space="preserve">15 · 3 = 45</a:t>
+            </a:r>
+            <a:r>
+              <a:rPr lang="en-US" sz="1425" dirty="0">
+                <a:solidFill>
+                  <a:srgbClr val="16171D"/>
+                </a:solidFill>
+                <a:latin typeface="Segoe UI"/>
+                <a:cs typeface="Segoe UI"/>
+              </a:rPr>
+              <a:t xml:space="preserve">, so $45.</a:t>
+            </a:r>
+            <a:endParaRPr lang="en-US" sz="1425" dirty="0"/>
+          </a:p>
+        </p:txBody>
+      </p:sp>
+      <p:sp>
+        <p:nvSpPr>
+          <p:cNvPr id="11" name="Shape 11"/>
+          <p:cNvSpPr txBox="1"/>
+          <p:nvPr/>
+        </p:nvSpPr>
+        <p:spPr>
+          <a:xfrm>
+            <a:off x="685800" y="3816858"/>
+            <a:ext cx="5295748" cy="2282190"/>
+          </a:xfrm>
+          <a:prstGeom prst="roundRect">
+            <a:avLst>
+              <a:gd name="adj" fmla="val 8000"/>
+            </a:avLst>
+          </a:prstGeom>
+          <a:solidFill>
+            <a:srgbClr val="FFFFFF"/>
+          </a:solidFill>
+          <a:ln w="12700">
+            <a:solidFill>
+              <a:srgbClr val="E3E4EC"/>
+            </a:solidFill>
           </a:ln>
         </p:spPr>
         <p:txBody>
@@ -7465,18 +8769,62 @@
                 <a:spcPct val="100000"/>
               </a:lnSpc>
             </a:pPr>
-            <a:r>
-              <a:rPr lang="en-US" sz="1950" dirty="0">
-                <a:solidFill>
-                  <a:srgbClr val="16171D"/>
-                </a:solidFill>
-                <a:latin typeface="Segoe UI"/>
-                <a:cs typeface="Segoe UI"/>
-              </a:rPr>
-              <a:t xml:space="preserve">2. Hays County's graph passes through </a:t>
-            </a:r>
-            <a:r>
-              <a:rPr lang="en-US" sz="1950" dirty="0">
+            <a:endParaRPr lang="en-US" sz="1950" dirty="0"/>
+          </a:p>
+        </p:txBody>
+      </p:sp>
+      <p:sp>
+        <p:nvSpPr>
+          <p:cNvPr id="8" name="Shape 8"/>
+          <p:cNvSpPr txBox="1"/>
+          <p:nvPr/>
+        </p:nvSpPr>
+        <p:spPr>
+          <a:xfrm>
+            <a:off x="895350" y="3988308"/>
+            <a:ext cx="4876648" cy="534924"/>
+          </a:xfrm>
+          <a:prstGeom prst="rect">
+            <a:avLst/>
+          </a:prstGeom>
+          <a:noFill/>
+          <a:ln>
+            <a:noFill/>
+          </a:ln>
+        </p:spPr>
+        <p:txBody>
+          <a:bodyPr wrap="square" lIns="36576" tIns="27432" rIns="36576" bIns="27432" anchor="t">
+            <a:noAutofit/>
+          </a:bodyPr>
+          <a:lstStyle/>
+          <a:p>
+            <a:pPr algn="l">
+              <a:lnSpc>
+                <a:spcPct val="100000"/>
+              </a:lnSpc>
+            </a:pPr>
+            <a:r>
+              <a:rPr lang="en-US" sz="1575" dirty="0" b="1">
+                <a:solidFill>
+                  <a:srgbClr val="16171D"/>
+                </a:solidFill>
+                <a:latin typeface="Segoe UI"/>
+                <a:cs typeface="Segoe UI"/>
+              </a:rPr>
+              <a:t xml:space="preserve">2.</a:t>
+            </a:r>
+            <a:r>
+              <a:rPr lang="en-US" sz="1575" dirty="0">
+                <a:solidFill>
+                  <a:srgbClr val="16171D"/>
+                </a:solidFill>
+                <a:latin typeface="Segoe UI"/>
+                <a:cs typeface="Segoe UI"/>
+              </a:rPr>
+              <a:t xml:space="preserve"> Hays County's graph passes through </a:t>
+            </a:r>
+            <a:r>
+              <a:rPr lang="en-US" sz="1575" dirty="0">
                 <a:solidFill>
                   <a:srgbClr val="16171D"/>
                 </a:solidFill>
@@ -7486,7 +8834,7 @@
               <a:t xml:space="preserve">(0, 0)</a:t>
             </a:r>
             <a:r>
-              <a:rPr lang="en-US" sz="1950" dirty="0">
+              <a:rPr lang="en-US" sz="1575" dirty="0">
                 <a:solidFill>
                   <a:srgbClr val="16171D"/>
                 </a:solidFill>
@@ -7496,7 +8844,7 @@
               <a:t xml:space="preserve"> and </a:t>
             </a:r>
             <a:r>
-              <a:rPr lang="en-US" sz="1950" dirty="0">
+              <a:rPr lang="en-US" sz="1575" dirty="0">
                 <a:solidFill>
                   <a:srgbClr val="16171D"/>
                 </a:solidFill>
@@ -7506,39 +8854,183 @@
               <a:t xml:space="preserve">(1, 20)</a:t>
             </a:r>
             <a:r>
-              <a:rPr lang="en-US" sz="1950" dirty="0">
-                <a:solidFill>
-                  <a:srgbClr val="16171D"/>
-                </a:solidFill>
-                <a:latin typeface="Segoe UI"/>
-                <a:cs typeface="Segoe UI"/>
-              </a:rPr>
-              <a:t xml:space="preserve">. What is the payout per ton? </a:t>
-            </a:r>
-            <a:r>
               <a:rPr lang="en-US" sz="1575" dirty="0">
                 <a:solidFill>
-                  <a:srgbClr val="5F6272"/>
-                </a:solidFill>
-                <a:latin typeface="Segoe UI"/>
-                <a:cs typeface="Segoe UI"/>
-              </a:rPr>
-              <a:t xml:space="preserve">(SE p. 322)</a:t>
-            </a:r>
-            <a:endParaRPr lang="en-US" sz="1950" dirty="0"/>
-          </a:p>
-        </p:txBody>
-      </p:sp>
-      <p:sp>
-        <p:nvSpPr>
-          <p:cNvPr id="7" name="Shape 7"/>
-          <p:cNvSpPr txBox="1"/>
-          <p:nvPr/>
-        </p:nvSpPr>
-        <p:spPr>
-          <a:xfrm>
-            <a:off x="685800" y="4620768"/>
-            <a:ext cx="2410541" cy="518922"/>
+                  <a:srgbClr val="16171D"/>
+                </a:solidFill>
+                <a:latin typeface="Segoe UI"/>
+                <a:cs typeface="Segoe UI"/>
+              </a:rPr>
+              <a:t xml:space="preserve">. What is the payout per ton?</a:t>
+            </a:r>
+            <a:endParaRPr lang="en-US" sz="1575" dirty="0"/>
+          </a:p>
+        </p:txBody>
+      </p:sp>
+      <p:sp>
+        <p:nvSpPr>
+          <p:cNvPr id="9" name="Shape 9"/>
+          <p:cNvSpPr txBox="1"/>
+          <p:nvPr/>
+        </p:nvSpPr>
+        <p:spPr>
+          <a:xfrm>
+            <a:off x="895350" y="4561332"/>
+            <a:ext cx="4876648" cy="294894"/>
+          </a:xfrm>
+          <a:prstGeom prst="rect">
+            <a:avLst/>
+          </a:prstGeom>
+          <a:noFill/>
+          <a:ln>
+            <a:noFill/>
+          </a:ln>
+        </p:spPr>
+        <p:txBody>
+          <a:bodyPr wrap="square" lIns="36576" tIns="27432" rIns="36576" bIns="27432" anchor="t">
+            <a:noAutofit/>
+          </a:bodyPr>
+          <a:lstStyle/>
+          <a:p>
+            <a:pPr algn="l">
+              <a:lnSpc>
+                <a:spcPct val="100000"/>
+              </a:lnSpc>
+            </a:pPr>
+            <a:r>
+              <a:rPr lang="en-US" sz="1575" dirty="0" b="1">
+                <a:solidFill>
+                  <a:srgbClr val="16171D"/>
+                </a:solidFill>
+                <a:latin typeface="Segoe UI"/>
+                <a:cs typeface="Segoe UI"/>
+              </a:rPr>
+              <a:t xml:space="preserve">Formula:</a:t>
+            </a:r>
+            <a:r>
+              <a:rPr lang="en-US" sz="1575" dirty="0">
+                <a:solidFill>
+                  <a:srgbClr val="16171D"/>
+                </a:solidFill>
+                <a:latin typeface="Segoe UI"/>
+                <a:cs typeface="Segoe UI"/>
+              </a:rPr>
+              <a:t xml:space="preserve"> </a:t>
+            </a:r>
+            <a:r>
+              <a:rPr lang="en-US" sz="1575" dirty="0" i="1">
+                <a:solidFill>
+                  <a:srgbClr val="16171D"/>
+                </a:solidFill>
+                <a:latin typeface="Cambria"/>
+                <a:cs typeface="Cambria"/>
+              </a:rPr>
+              <a:t xml:space="preserve">m</a:t>
+            </a:r>
+            <a:r>
+              <a:rPr lang="en-US" sz="1575" dirty="0">
+                <a:solidFill>
+                  <a:srgbClr val="16171D"/>
+                </a:solidFill>
+                <a:latin typeface="Cambria"/>
+                <a:cs typeface="Cambria"/>
+              </a:rPr>
+              <a:t xml:space="preserve"> = (</a:t>
+            </a:r>
+            <a:r>
+              <a:rPr lang="en-US" sz="1575" dirty="0" i="1">
+                <a:solidFill>
+                  <a:srgbClr val="16171D"/>
+                </a:solidFill>
+                <a:latin typeface="Cambria"/>
+                <a:cs typeface="Cambria"/>
+              </a:rPr>
+              <a:t xml:space="preserve">y</a:t>
+            </a:r>
+            <a:r>
+              <a:rPr lang="en-US" sz="1575" dirty="0">
+                <a:solidFill>
+                  <a:srgbClr val="16171D"/>
+                </a:solidFill>
+                <a:latin typeface="Cambria"/>
+                <a:cs typeface="Cambria"/>
+              </a:rPr>
+              <a:t xml:space="preserve">₂ − </a:t>
+            </a:r>
+            <a:r>
+              <a:rPr lang="en-US" sz="1575" dirty="0" i="1">
+                <a:solidFill>
+                  <a:srgbClr val="16171D"/>
+                </a:solidFill>
+                <a:latin typeface="Cambria"/>
+                <a:cs typeface="Cambria"/>
+              </a:rPr>
+              <a:t xml:space="preserve">y</a:t>
+            </a:r>
+            <a:r>
+              <a:rPr lang="en-US" sz="1575" dirty="0">
+                <a:solidFill>
+                  <a:srgbClr val="16171D"/>
+                </a:solidFill>
+                <a:latin typeface="Cambria"/>
+                <a:cs typeface="Cambria"/>
+              </a:rPr>
+              <a:t xml:space="preserve">₁) ÷ (</a:t>
+            </a:r>
+            <a:r>
+              <a:rPr lang="en-US" sz="1575" dirty="0" i="1">
+                <a:solidFill>
+                  <a:srgbClr val="16171D"/>
+                </a:solidFill>
+                <a:latin typeface="Cambria"/>
+                <a:cs typeface="Cambria"/>
+              </a:rPr>
+              <a:t xml:space="preserve">x</a:t>
+            </a:r>
+            <a:r>
+              <a:rPr lang="en-US" sz="1575" dirty="0">
+                <a:solidFill>
+                  <a:srgbClr val="16171D"/>
+                </a:solidFill>
+                <a:latin typeface="Cambria"/>
+                <a:cs typeface="Cambria"/>
+              </a:rPr>
+              <a:t xml:space="preserve">₂ − </a:t>
+            </a:r>
+            <a:r>
+              <a:rPr lang="en-US" sz="1575" dirty="0" i="1">
+                <a:solidFill>
+                  <a:srgbClr val="16171D"/>
+                </a:solidFill>
+                <a:latin typeface="Cambria"/>
+                <a:cs typeface="Cambria"/>
+              </a:rPr>
+              <a:t xml:space="preserve">x</a:t>
+            </a:r>
+            <a:r>
+              <a:rPr lang="en-US" sz="1575" dirty="0">
+                <a:solidFill>
+                  <a:srgbClr val="16171D"/>
+                </a:solidFill>
+                <a:latin typeface="Cambria"/>
+                <a:cs typeface="Cambria"/>
+              </a:rPr>
+              <a:t xml:space="preserve">₁)</a:t>
+            </a:r>
+            <a:endParaRPr lang="en-US" sz="1575" dirty="0"/>
+          </a:p>
+        </p:txBody>
+      </p:sp>
+      <p:sp>
+        <p:nvSpPr>
+          <p:cNvPr id="10" name="Shape 10"/>
+          <p:cNvSpPr txBox="1"/>
+          <p:nvPr/>
+        </p:nvSpPr>
+        <p:spPr>
+          <a:xfrm>
+            <a:off x="895350" y="4894326"/>
+            <a:ext cx="4876648" cy="1033272"/>
           </a:xfrm>
           <a:prstGeom prst="roundRect">
             <a:avLst>
@@ -7574,36 +9066,200 @@
               <a:t xml:space="preserve">ANSWER   </a:t>
             </a:r>
             <a:r>
-              <a:rPr lang="en-US" sz="2325" dirty="0">
+              <a:rPr lang="en-US" sz="1425" dirty="0" b="1">
+                <a:solidFill>
+                  <a:srgbClr val="16171D"/>
+                </a:solidFill>
+                <a:latin typeface="Segoe UI"/>
+                <a:cs typeface="Segoe UI"/>
+              </a:rPr>
+              <a:t xml:space="preserve">$20</a:t>
+            </a:r>
+            <a:br>
+              <a:rPr lang="en-US" sz="1425" dirty="0">
+                <a:solidFill>
+                  <a:srgbClr val="16171D"/>
+                </a:solidFill>
+                <a:latin typeface="Segoe UI"/>
+                <a:cs typeface="Segoe UI"/>
+              </a:rPr>
+            </a:br>
+            <a:r>
+              <a:rPr lang="en-US" sz="1425" dirty="0" b="1">
+                <a:solidFill>
+                  <a:srgbClr val="16171D"/>
+                </a:solidFill>
+                <a:latin typeface="Segoe UI"/>
+                <a:cs typeface="Segoe UI"/>
+              </a:rPr>
+              <a:t xml:space="preserve">1.</a:t>
+            </a:r>
+            <a:r>
+              <a:rPr lang="en-US" sz="1425" dirty="0">
+                <a:solidFill>
+                  <a:srgbClr val="16171D"/>
+                </a:solidFill>
+                <a:latin typeface="Segoe UI"/>
+                <a:cs typeface="Segoe UI"/>
+              </a:rPr>
+              <a:t xml:space="preserve"> Change in </a:t>
+            </a:r>
+            <a:r>
+              <a:rPr lang="en-US" sz="1425" dirty="0" i="1">
                 <a:solidFill>
                   <a:srgbClr val="16171D"/>
                 </a:solidFill>
                 <a:latin typeface="Cambria"/>
                 <a:cs typeface="Cambria"/>
               </a:rPr>
-              <a:t xml:space="preserve">$20</a:t>
-            </a:r>
-            <a:endParaRPr lang="en-US" sz="2325" dirty="0"/>
-          </a:p>
-        </p:txBody>
-      </p:sp>
-      <p:sp>
-        <p:nvSpPr>
-          <p:cNvPr id="8" name="Shape 8"/>
-          <p:cNvSpPr txBox="1"/>
-          <p:nvPr/>
-        </p:nvSpPr>
-        <p:spPr>
-          <a:xfrm>
-            <a:off x="6362548" y="1675638"/>
-            <a:ext cx="5143348" cy="649224"/>
-          </a:xfrm>
-          <a:prstGeom prst="rect">
-            <a:avLst/>
-          </a:prstGeom>
-          <a:noFill/>
-          <a:ln>
-            <a:noFill/>
+              <a:t xml:space="preserve">y</a:t>
+            </a:r>
+            <a:r>
+              <a:rPr lang="en-US" sz="1425" dirty="0">
+                <a:solidFill>
+                  <a:srgbClr val="16171D"/>
+                </a:solidFill>
+                <a:latin typeface="Segoe UI"/>
+                <a:cs typeface="Segoe UI"/>
+              </a:rPr>
+              <a:t xml:space="preserve">: </a:t>
+            </a:r>
+            <a:r>
+              <a:rPr lang="en-US" sz="1425" dirty="0">
+                <a:solidFill>
+                  <a:srgbClr val="16171D"/>
+                </a:solidFill>
+                <a:latin typeface="Cambria"/>
+                <a:cs typeface="Cambria"/>
+              </a:rPr>
+              <a:t xml:space="preserve">20 − 0 = 20</a:t>
+            </a:r>
+            <a:r>
+              <a:rPr lang="en-US" sz="1425" dirty="0">
+                <a:solidFill>
+                  <a:srgbClr val="16171D"/>
+                </a:solidFill>
+                <a:latin typeface="Segoe UI"/>
+                <a:cs typeface="Segoe UI"/>
+              </a:rPr>
+              <a:t xml:space="preserve">. Change in </a:t>
+            </a:r>
+            <a:r>
+              <a:rPr lang="en-US" sz="1425" dirty="0" i="1">
+                <a:solidFill>
+                  <a:srgbClr val="16171D"/>
+                </a:solidFill>
+                <a:latin typeface="Cambria"/>
+                <a:cs typeface="Cambria"/>
+              </a:rPr>
+              <a:t xml:space="preserve">x</a:t>
+            </a:r>
+            <a:r>
+              <a:rPr lang="en-US" sz="1425" dirty="0">
+                <a:solidFill>
+                  <a:srgbClr val="16171D"/>
+                </a:solidFill>
+                <a:latin typeface="Segoe UI"/>
+                <a:cs typeface="Segoe UI"/>
+              </a:rPr>
+              <a:t xml:space="preserve">: </a:t>
+            </a:r>
+            <a:r>
+              <a:rPr lang="en-US" sz="1425" dirty="0">
+                <a:solidFill>
+                  <a:srgbClr val="16171D"/>
+                </a:solidFill>
+                <a:latin typeface="Cambria"/>
+                <a:cs typeface="Cambria"/>
+              </a:rPr>
+              <a:t xml:space="preserve">1 − 0 = 1</a:t>
+            </a:r>
+            <a:r>
+              <a:rPr lang="en-US" sz="1425" dirty="0">
+                <a:solidFill>
+                  <a:srgbClr val="16171D"/>
+                </a:solidFill>
+                <a:latin typeface="Segoe UI"/>
+                <a:cs typeface="Segoe UI"/>
+              </a:rPr>
+              <a:t xml:space="preserve">.</a:t>
+            </a:r>
+            <a:br>
+              <a:rPr lang="en-US" sz="1425" dirty="0">
+                <a:solidFill>
+                  <a:srgbClr val="16171D"/>
+                </a:solidFill>
+                <a:latin typeface="Segoe UI"/>
+                <a:cs typeface="Segoe UI"/>
+              </a:rPr>
+            </a:br>
+            <a:r>
+              <a:rPr lang="en-US" sz="1425" dirty="0" b="1">
+                <a:solidFill>
+                  <a:srgbClr val="16171D"/>
+                </a:solidFill>
+                <a:latin typeface="Segoe UI"/>
+                <a:cs typeface="Segoe UI"/>
+              </a:rPr>
+              <a:t xml:space="preserve">2.</a:t>
+            </a:r>
+            <a:r>
+              <a:rPr lang="en-US" sz="1425" dirty="0">
+                <a:solidFill>
+                  <a:srgbClr val="16171D"/>
+                </a:solidFill>
+                <a:latin typeface="Segoe UI"/>
+                <a:cs typeface="Segoe UI"/>
+              </a:rPr>
+              <a:t xml:space="preserve"> </a:t>
+            </a:r>
+            <a:r>
+              <a:rPr lang="en-US" sz="1425" dirty="0">
+                <a:solidFill>
+                  <a:srgbClr val="16171D"/>
+                </a:solidFill>
+                <a:latin typeface="Cambria"/>
+                <a:cs typeface="Cambria"/>
+              </a:rPr>
+              <a:t xml:space="preserve">20 ÷ 1 = 20</a:t>
+            </a:r>
+            <a:r>
+              <a:rPr lang="en-US" sz="1425" dirty="0">
+                <a:solidFill>
+                  <a:srgbClr val="16171D"/>
+                </a:solidFill>
+                <a:latin typeface="Segoe UI"/>
+                <a:cs typeface="Segoe UI"/>
+              </a:rPr>
+              <a:t xml:space="preserve">, so $20 per ton.</a:t>
+            </a:r>
+            <a:endParaRPr lang="en-US" sz="1425" dirty="0"/>
+          </a:p>
+        </p:txBody>
+      </p:sp>
+      <p:sp>
+        <p:nvSpPr>
+          <p:cNvPr id="15" name="Shape 15"/>
+          <p:cNvSpPr txBox="1"/>
+          <p:nvPr/>
+        </p:nvSpPr>
+        <p:spPr>
+          <a:xfrm>
+            <a:off x="6210148" y="1618488"/>
+            <a:ext cx="5295748" cy="2282190"/>
+          </a:xfrm>
+          <a:prstGeom prst="roundRect">
+            <a:avLst>
+              <a:gd name="adj" fmla="val 8000"/>
+            </a:avLst>
+          </a:prstGeom>
+          <a:solidFill>
+            <a:srgbClr val="FFFFFF"/>
+          </a:solidFill>
+          <a:ln w="12700">
+            <a:solidFill>
+              <a:srgbClr val="E3E4EC"/>
+            </a:solidFill>
           </a:ln>
         </p:spPr>
         <p:txBody>
@@ -7617,18 +9273,62 @@
                 <a:spcPct val="100000"/>
               </a:lnSpc>
             </a:pPr>
-            <a:r>
-              <a:rPr lang="en-US" sz="1950" dirty="0">
-                <a:solidFill>
-                  <a:srgbClr val="16171D"/>
-                </a:solidFill>
-                <a:latin typeface="Segoe UI"/>
-                <a:cs typeface="Segoe UI"/>
-              </a:rPr>
-              <a:t xml:space="preserve">3. </a:t>
-            </a:r>
-            <a:r>
-              <a:rPr lang="en-US" sz="1950" dirty="0" i="1">
+            <a:endParaRPr lang="en-US" sz="1950" dirty="0"/>
+          </a:p>
+        </p:txBody>
+      </p:sp>
+      <p:sp>
+        <p:nvSpPr>
+          <p:cNvPr id="12" name="Shape 12"/>
+          <p:cNvSpPr txBox="1"/>
+          <p:nvPr/>
+        </p:nvSpPr>
+        <p:spPr>
+          <a:xfrm>
+            <a:off x="6419698" y="1789938"/>
+            <a:ext cx="4876648" cy="534924"/>
+          </a:xfrm>
+          <a:prstGeom prst="rect">
+            <a:avLst/>
+          </a:prstGeom>
+          <a:noFill/>
+          <a:ln>
+            <a:noFill/>
+          </a:ln>
+        </p:spPr>
+        <p:txBody>
+          <a:bodyPr wrap="square" lIns="36576" tIns="27432" rIns="36576" bIns="27432" anchor="t">
+            <a:noAutofit/>
+          </a:bodyPr>
+          <a:lstStyle/>
+          <a:p>
+            <a:pPr algn="l">
+              <a:lnSpc>
+                <a:spcPct val="100000"/>
+              </a:lnSpc>
+            </a:pPr>
+            <a:r>
+              <a:rPr lang="en-US" sz="1575" dirty="0" b="1">
+                <a:solidFill>
+                  <a:srgbClr val="16171D"/>
+                </a:solidFill>
+                <a:latin typeface="Segoe UI"/>
+                <a:cs typeface="Segoe UI"/>
+              </a:rPr>
+              <a:t xml:space="preserve">3.</a:t>
+            </a:r>
+            <a:r>
+              <a:rPr lang="en-US" sz="1575" dirty="0">
+                <a:solidFill>
+                  <a:srgbClr val="16171D"/>
+                </a:solidFill>
+                <a:latin typeface="Segoe UI"/>
+                <a:cs typeface="Segoe UI"/>
+              </a:rPr>
+              <a:t xml:space="preserve"> </a:t>
+            </a:r>
+            <a:r>
+              <a:rPr lang="en-US" sz="1575" dirty="0" i="1">
                 <a:solidFill>
                   <a:srgbClr val="16171D"/>
                 </a:solidFill>
@@ -7638,7 +9338,7 @@
               <a:t xml:space="preserve">J</a:t>
             </a:r>
             <a:r>
-              <a:rPr lang="en-US" sz="1950" dirty="0">
+              <a:rPr lang="en-US" sz="1575" dirty="0">
                 <a:solidFill>
                   <a:srgbClr val="16171D"/>
                 </a:solidFill>
@@ -7648,7 +9348,7 @@
               <a:t xml:space="preserve">(</a:t>
             </a:r>
             <a:r>
-              <a:rPr lang="en-US" sz="1950" dirty="0" i="1">
+              <a:rPr lang="en-US" sz="1575" dirty="0" i="1">
                 <a:solidFill>
                   <a:srgbClr val="16171D"/>
                 </a:solidFill>
@@ -7658,7 +9358,7 @@
               <a:t xml:space="preserve">x</a:t>
             </a:r>
             <a:r>
-              <a:rPr lang="en-US" sz="1950" dirty="0">
+              <a:rPr lang="en-US" sz="1575" dirty="0">
                 <a:solidFill>
                   <a:srgbClr val="16171D"/>
                 </a:solidFill>
@@ -7668,7 +9368,7 @@
               <a:t xml:space="preserve">) = 9/5</a:t>
             </a:r>
             <a:r>
-              <a:rPr lang="en-US" sz="1950" dirty="0" i="1">
+              <a:rPr lang="en-US" sz="1575" dirty="0" i="1">
                 <a:solidFill>
                   <a:srgbClr val="16171D"/>
                 </a:solidFill>
@@ -7678,7 +9378,7 @@
               <a:t xml:space="preserve">x</a:t>
             </a:r>
             <a:r>
-              <a:rPr lang="en-US" sz="1950" dirty="0">
+              <a:rPr lang="en-US" sz="1575" dirty="0">
                 <a:solidFill>
                   <a:srgbClr val="16171D"/>
                 </a:solidFill>
@@ -7688,7 +9388,7 @@
               <a:t xml:space="preserve"> + 32</a:t>
             </a:r>
             <a:r>
-              <a:rPr lang="en-US" sz="1950" dirty="0">
+              <a:rPr lang="en-US" sz="1575" dirty="0">
                 <a:solidFill>
                   <a:srgbClr val="16171D"/>
                 </a:solidFill>
@@ -7698,7 +9398,7 @@
               <a:t xml:space="preserve"> converts °C to °F. What is </a:t>
             </a:r>
             <a:r>
-              <a:rPr lang="en-US" sz="1950" dirty="0" i="1">
+              <a:rPr lang="en-US" sz="1575" dirty="0" i="1">
                 <a:solidFill>
                   <a:srgbClr val="16171D"/>
                 </a:solidFill>
@@ -7708,7 +9408,7 @@
               <a:t xml:space="preserve">J</a:t>
             </a:r>
             <a:r>
-              <a:rPr lang="en-US" sz="1950" dirty="0">
+              <a:rPr lang="en-US" sz="1575" dirty="0">
                 <a:solidFill>
                   <a:srgbClr val="16171D"/>
                 </a:solidFill>
@@ -7718,39 +9418,93 @@
               <a:t xml:space="preserve">(10)</a:t>
             </a:r>
             <a:r>
-              <a:rPr lang="en-US" sz="1950" dirty="0">
-                <a:solidFill>
-                  <a:srgbClr val="16171D"/>
-                </a:solidFill>
-                <a:latin typeface="Segoe UI"/>
-                <a:cs typeface="Segoe UI"/>
-              </a:rPr>
-              <a:t xml:space="preserve">? </a:t>
-            </a:r>
-            <a:r>
               <a:rPr lang="en-US" sz="1575" dirty="0">
                 <a:solidFill>
-                  <a:srgbClr val="5F6272"/>
-                </a:solidFill>
-                <a:latin typeface="Segoe UI"/>
-                <a:cs typeface="Segoe UI"/>
-              </a:rPr>
-              <a:t xml:space="preserve">(SE p. 323)</a:t>
-            </a:r>
-            <a:endParaRPr lang="en-US" sz="1950" dirty="0"/>
-          </a:p>
-        </p:txBody>
-      </p:sp>
-      <p:sp>
-        <p:nvSpPr>
-          <p:cNvPr id="9" name="Shape 9"/>
-          <p:cNvSpPr txBox="1"/>
-          <p:nvPr/>
-        </p:nvSpPr>
-        <p:spPr>
-          <a:xfrm>
-            <a:off x="6362548" y="2458212"/>
-            <a:ext cx="2244715" cy="518922"/>
+                  <a:srgbClr val="16171D"/>
+                </a:solidFill>
+                <a:latin typeface="Segoe UI"/>
+                <a:cs typeface="Segoe UI"/>
+              </a:rPr>
+              <a:t xml:space="preserve">?</a:t>
+            </a:r>
+            <a:endParaRPr lang="en-US" sz="1575" dirty="0"/>
+          </a:p>
+        </p:txBody>
+      </p:sp>
+      <p:sp>
+        <p:nvSpPr>
+          <p:cNvPr id="13" name="Shape 13"/>
+          <p:cNvSpPr txBox="1"/>
+          <p:nvPr/>
+        </p:nvSpPr>
+        <p:spPr>
+          <a:xfrm>
+            <a:off x="6419698" y="2362962"/>
+            <a:ext cx="4876648" cy="294894"/>
+          </a:xfrm>
+          <a:prstGeom prst="rect">
+            <a:avLst/>
+          </a:prstGeom>
+          <a:noFill/>
+          <a:ln>
+            <a:noFill/>
+          </a:ln>
+        </p:spPr>
+        <p:txBody>
+          <a:bodyPr wrap="square" lIns="36576" tIns="27432" rIns="36576" bIns="27432" anchor="t">
+            <a:noAutofit/>
+          </a:bodyPr>
+          <a:lstStyle/>
+          <a:p>
+            <a:pPr algn="l">
+              <a:lnSpc>
+                <a:spcPct val="100000"/>
+              </a:lnSpc>
+            </a:pPr>
+            <a:r>
+              <a:rPr lang="en-US" sz="1575" dirty="0" b="1">
+                <a:solidFill>
+                  <a:srgbClr val="16171D"/>
+                </a:solidFill>
+                <a:latin typeface="Segoe UI"/>
+                <a:cs typeface="Segoe UI"/>
+              </a:rPr>
+              <a:t xml:space="preserve">Formula:</a:t>
+            </a:r>
+            <a:r>
+              <a:rPr lang="en-US" sz="1575" dirty="0">
+                <a:solidFill>
+                  <a:srgbClr val="16171D"/>
+                </a:solidFill>
+                <a:latin typeface="Segoe UI"/>
+                <a:cs typeface="Segoe UI"/>
+              </a:rPr>
+              <a:t xml:space="preserve"> put the number in for </a:t>
+            </a:r>
+            <a:r>
+              <a:rPr lang="en-US" sz="1575" dirty="0" i="1">
+                <a:solidFill>
+                  <a:srgbClr val="16171D"/>
+                </a:solidFill>
+                <a:latin typeface="Cambria"/>
+                <a:cs typeface="Cambria"/>
+              </a:rPr>
+              <a:t xml:space="preserve">x</a:t>
+            </a:r>
+            <a:endParaRPr lang="en-US" sz="1575" dirty="0"/>
+          </a:p>
+        </p:txBody>
+      </p:sp>
+      <p:sp>
+        <p:nvSpPr>
+          <p:cNvPr id="14" name="Shape 14"/>
+          <p:cNvSpPr txBox="1"/>
+          <p:nvPr/>
+        </p:nvSpPr>
+        <p:spPr>
+          <a:xfrm>
+            <a:off x="6419698" y="2695956"/>
+            <a:ext cx="3868415" cy="1033272"/>
           </a:xfrm>
           <a:prstGeom prst="roundRect">
             <a:avLst>
@@ -7786,7 +9540,7 @@
               <a:t xml:space="preserve">ANSWER   </a:t>
             </a:r>
             <a:r>
-              <a:rPr lang="en-US" sz="2325" dirty="0">
+              <a:rPr lang="en-US" sz="1425" dirty="0" b="1">
                 <a:solidFill>
                   <a:srgbClr val="16171D"/>
                 </a:solidFill>
@@ -7795,27 +9549,190 @@
               </a:rPr>
               <a:t xml:space="preserve">50</a:t>
             </a:r>
-            <a:endParaRPr lang="en-US" sz="2325" dirty="0"/>
-          </a:p>
-        </p:txBody>
-      </p:sp>
-      <p:sp>
-        <p:nvSpPr>
-          <p:cNvPr id="10" name="Shape 10"/>
-          <p:cNvSpPr txBox="1"/>
-          <p:nvPr/>
-        </p:nvSpPr>
-        <p:spPr>
-          <a:xfrm>
-            <a:off x="6362548" y="3243834"/>
-            <a:ext cx="5143348" cy="946404"/>
-          </a:xfrm>
-          <a:prstGeom prst="rect">
-            <a:avLst/>
-          </a:prstGeom>
-          <a:noFill/>
-          <a:ln>
-            <a:noFill/>
+            <a:br>
+              <a:rPr lang="en-US" sz="1425" dirty="0">
+                <a:solidFill>
+                  <a:srgbClr val="16171D"/>
+                </a:solidFill>
+                <a:latin typeface="Segoe UI"/>
+                <a:cs typeface="Segoe UI"/>
+              </a:rPr>
+            </a:br>
+            <a:r>
+              <a:rPr lang="en-US" sz="1425" dirty="0" b="1">
+                <a:solidFill>
+                  <a:srgbClr val="16171D"/>
+                </a:solidFill>
+                <a:latin typeface="Segoe UI"/>
+                <a:cs typeface="Segoe UI"/>
+              </a:rPr>
+              <a:t xml:space="preserve">1.</a:t>
+            </a:r>
+            <a:r>
+              <a:rPr lang="en-US" sz="1425" dirty="0">
+                <a:solidFill>
+                  <a:srgbClr val="16171D"/>
+                </a:solidFill>
+                <a:latin typeface="Segoe UI"/>
+                <a:cs typeface="Segoe UI"/>
+              </a:rPr>
+              <a:t xml:space="preserve"> </a:t>
+            </a:r>
+            <a:r>
+              <a:rPr lang="en-US" sz="1425" dirty="0" i="1">
+                <a:solidFill>
+                  <a:srgbClr val="16171D"/>
+                </a:solidFill>
+                <a:latin typeface="Cambria"/>
+                <a:cs typeface="Cambria"/>
+              </a:rPr>
+              <a:t xml:space="preserve">J</a:t>
+            </a:r>
+            <a:r>
+              <a:rPr lang="en-US" sz="1425" dirty="0">
+                <a:solidFill>
+                  <a:srgbClr val="16171D"/>
+                </a:solidFill>
+                <a:latin typeface="Cambria"/>
+                <a:cs typeface="Cambria"/>
+              </a:rPr>
+              <a:t xml:space="preserve">(10) = 9/5 · 10 + 32</a:t>
+            </a:r>
+            <a:r>
+              <a:rPr lang="en-US" sz="1425" dirty="0">
+                <a:solidFill>
+                  <a:srgbClr val="16171D"/>
+                </a:solidFill>
+                <a:latin typeface="Segoe UI"/>
+                <a:cs typeface="Segoe UI"/>
+              </a:rPr>
+              <a:t xml:space="preserve">.</a:t>
+            </a:r>
+            <a:br>
+              <a:rPr lang="en-US" sz="1425" dirty="0">
+                <a:solidFill>
+                  <a:srgbClr val="16171D"/>
+                </a:solidFill>
+                <a:latin typeface="Segoe UI"/>
+                <a:cs typeface="Segoe UI"/>
+              </a:rPr>
+            </a:br>
+            <a:r>
+              <a:rPr lang="en-US" sz="1425" dirty="0" b="1">
+                <a:solidFill>
+                  <a:srgbClr val="16171D"/>
+                </a:solidFill>
+                <a:latin typeface="Segoe UI"/>
+                <a:cs typeface="Segoe UI"/>
+              </a:rPr>
+              <a:t xml:space="preserve">2.</a:t>
+            </a:r>
+            <a:r>
+              <a:rPr lang="en-US" sz="1425" dirty="0">
+                <a:solidFill>
+                  <a:srgbClr val="16171D"/>
+                </a:solidFill>
+                <a:latin typeface="Segoe UI"/>
+                <a:cs typeface="Segoe UI"/>
+              </a:rPr>
+              <a:t xml:space="preserve"> Multiply: </a:t>
+            </a:r>
+            <a:r>
+              <a:rPr lang="en-US" sz="1425" dirty="0">
+                <a:solidFill>
+                  <a:srgbClr val="16171D"/>
+                </a:solidFill>
+                <a:latin typeface="Cambria"/>
+                <a:cs typeface="Cambria"/>
+              </a:rPr>
+              <a:t xml:space="preserve">9/5 · 10 = 90 ÷ 5 = 18</a:t>
+            </a:r>
+            <a:r>
+              <a:rPr lang="en-US" sz="1425" dirty="0">
+                <a:solidFill>
+                  <a:srgbClr val="16171D"/>
+                </a:solidFill>
+                <a:latin typeface="Segoe UI"/>
+                <a:cs typeface="Segoe UI"/>
+              </a:rPr>
+              <a:t xml:space="preserve">.</a:t>
+            </a:r>
+            <a:br>
+              <a:rPr lang="en-US" sz="1425" dirty="0">
+                <a:solidFill>
+                  <a:srgbClr val="16171D"/>
+                </a:solidFill>
+                <a:latin typeface="Segoe UI"/>
+                <a:cs typeface="Segoe UI"/>
+              </a:rPr>
+            </a:br>
+            <a:r>
+              <a:rPr lang="en-US" sz="1425" dirty="0" b="1">
+                <a:solidFill>
+                  <a:srgbClr val="16171D"/>
+                </a:solidFill>
+                <a:latin typeface="Segoe UI"/>
+                <a:cs typeface="Segoe UI"/>
+              </a:rPr>
+              <a:t xml:space="preserve">3.</a:t>
+            </a:r>
+            <a:r>
+              <a:rPr lang="en-US" sz="1425" dirty="0">
+                <a:solidFill>
+                  <a:srgbClr val="16171D"/>
+                </a:solidFill>
+                <a:latin typeface="Segoe UI"/>
+                <a:cs typeface="Segoe UI"/>
+              </a:rPr>
+              <a:t xml:space="preserve"> Add: </a:t>
+            </a:r>
+            <a:r>
+              <a:rPr lang="en-US" sz="1425" dirty="0">
+                <a:solidFill>
+                  <a:srgbClr val="16171D"/>
+                </a:solidFill>
+                <a:latin typeface="Cambria"/>
+                <a:cs typeface="Cambria"/>
+              </a:rPr>
+              <a:t xml:space="preserve">18 + 32 = 50</a:t>
+            </a:r>
+            <a:r>
+              <a:rPr lang="en-US" sz="1425" dirty="0">
+                <a:solidFill>
+                  <a:srgbClr val="16171D"/>
+                </a:solidFill>
+                <a:latin typeface="Segoe UI"/>
+                <a:cs typeface="Segoe UI"/>
+              </a:rPr>
+              <a:t xml:space="preserve">. 10°C is 50°F.</a:t>
+            </a:r>
+            <a:endParaRPr lang="en-US" sz="1425" dirty="0"/>
+          </a:p>
+        </p:txBody>
+      </p:sp>
+      <p:sp>
+        <p:nvSpPr>
+          <p:cNvPr id="19" name="Shape 19"/>
+          <p:cNvSpPr txBox="1"/>
+          <p:nvPr/>
+        </p:nvSpPr>
+        <p:spPr>
+          <a:xfrm>
+            <a:off x="6210148" y="4034028"/>
+            <a:ext cx="5295748" cy="2522220"/>
+          </a:xfrm>
+          <a:prstGeom prst="roundRect">
+            <a:avLst>
+              <a:gd name="adj" fmla="val 8000"/>
+            </a:avLst>
+          </a:prstGeom>
+          <a:solidFill>
+            <a:srgbClr val="FFFFFF"/>
+          </a:solidFill>
+          <a:ln w="12700">
+            <a:solidFill>
+              <a:srgbClr val="E3E4EC"/>
+            </a:solidFill>
           </a:ln>
         </p:spPr>
         <p:txBody>
@@ -7829,40 +9746,128 @@
                 <a:spcPct val="100000"/>
               </a:lnSpc>
             </a:pPr>
-            <a:r>
-              <a:rPr lang="en-US" sz="1950" dirty="0">
-                <a:solidFill>
-                  <a:srgbClr val="16171D"/>
-                </a:solidFill>
-                <a:latin typeface="Segoe UI"/>
-                <a:cs typeface="Segoe UI"/>
-              </a:rPr>
-              <a:t xml:space="preserve">4. Miguel started with $0 and had $80 after 4 months. How much did he save each month? </a:t>
+            <a:endParaRPr lang="en-US" sz="1950" dirty="0"/>
+          </a:p>
+        </p:txBody>
+      </p:sp>
+      <p:sp>
+        <p:nvSpPr>
+          <p:cNvPr id="16" name="Shape 16"/>
+          <p:cNvSpPr txBox="1"/>
+          <p:nvPr/>
+        </p:nvSpPr>
+        <p:spPr>
+          <a:xfrm>
+            <a:off x="6419698" y="4205478"/>
+            <a:ext cx="4876648" cy="534924"/>
+          </a:xfrm>
+          <a:prstGeom prst="rect">
+            <a:avLst/>
+          </a:prstGeom>
+          <a:noFill/>
+          <a:ln>
+            <a:noFill/>
+          </a:ln>
+        </p:spPr>
+        <p:txBody>
+          <a:bodyPr wrap="square" lIns="36576" tIns="27432" rIns="36576" bIns="27432" anchor="t">
+            <a:noAutofit/>
+          </a:bodyPr>
+          <a:lstStyle/>
+          <a:p>
+            <a:pPr algn="l">
+              <a:lnSpc>
+                <a:spcPct val="100000"/>
+              </a:lnSpc>
+            </a:pPr>
+            <a:r>
+              <a:rPr lang="en-US" sz="1575" dirty="0" b="1">
+                <a:solidFill>
+                  <a:srgbClr val="16171D"/>
+                </a:solidFill>
+                <a:latin typeface="Segoe UI"/>
+                <a:cs typeface="Segoe UI"/>
+              </a:rPr>
+              <a:t xml:space="preserve">4.</a:t>
             </a:r>
             <a:r>
               <a:rPr lang="en-US" sz="1575" dirty="0">
                 <a:solidFill>
-                  <a:srgbClr val="5F6272"/>
-                </a:solidFill>
-                <a:latin typeface="Segoe UI"/>
-                <a:cs typeface="Segoe UI"/>
-              </a:rPr>
-              <a:t xml:space="preserve">(SE p. 324)</a:t>
-            </a:r>
-            <a:endParaRPr lang="en-US" sz="1950" dirty="0"/>
-          </a:p>
-        </p:txBody>
-      </p:sp>
-      <p:sp>
-        <p:nvSpPr>
-          <p:cNvPr id="11" name="Shape 11"/>
-          <p:cNvSpPr txBox="1"/>
-          <p:nvPr/>
-        </p:nvSpPr>
-        <p:spPr>
-          <a:xfrm>
-            <a:off x="6362548" y="4323588"/>
-            <a:ext cx="2410541" cy="518922"/>
+                  <a:srgbClr val="16171D"/>
+                </a:solidFill>
+                <a:latin typeface="Segoe UI"/>
+                <a:cs typeface="Segoe UI"/>
+              </a:rPr>
+              <a:t xml:space="preserve"> Miguel started with $0 and had $80 after 4 months. How much did he save each month?</a:t>
+            </a:r>
+            <a:endParaRPr lang="en-US" sz="1575" dirty="0"/>
+          </a:p>
+        </p:txBody>
+      </p:sp>
+      <p:sp>
+        <p:nvSpPr>
+          <p:cNvPr id="17" name="Shape 17"/>
+          <p:cNvSpPr txBox="1"/>
+          <p:nvPr/>
+        </p:nvSpPr>
+        <p:spPr>
+          <a:xfrm>
+            <a:off x="6419698" y="4778502"/>
+            <a:ext cx="4876648" cy="534924"/>
+          </a:xfrm>
+          <a:prstGeom prst="rect">
+            <a:avLst/>
+          </a:prstGeom>
+          <a:noFill/>
+          <a:ln>
+            <a:noFill/>
+          </a:ln>
+        </p:spPr>
+        <p:txBody>
+          <a:bodyPr wrap="square" lIns="36576" tIns="27432" rIns="36576" bIns="27432" anchor="t">
+            <a:noAutofit/>
+          </a:bodyPr>
+          <a:lstStyle/>
+          <a:p>
+            <a:pPr algn="l">
+              <a:lnSpc>
+                <a:spcPct val="100000"/>
+              </a:lnSpc>
+            </a:pPr>
+            <a:r>
+              <a:rPr lang="en-US" sz="1575" dirty="0" b="1">
+                <a:solidFill>
+                  <a:srgbClr val="16171D"/>
+                </a:solidFill>
+                <a:latin typeface="Segoe UI"/>
+                <a:cs typeface="Segoe UI"/>
+              </a:rPr>
+              <a:t xml:space="preserve">Formula:</a:t>
+            </a:r>
+            <a:r>
+              <a:rPr lang="en-US" sz="1575" dirty="0">
+                <a:solidFill>
+                  <a:srgbClr val="16171D"/>
+                </a:solidFill>
+                <a:latin typeface="Segoe UI"/>
+                <a:cs typeface="Segoe UI"/>
+              </a:rPr>
+              <a:t xml:space="preserve"> rate = change in amount ÷ change in time</a:t>
+            </a:r>
+            <a:endParaRPr lang="en-US" sz="1575" dirty="0"/>
+          </a:p>
+        </p:txBody>
+      </p:sp>
+      <p:sp>
+        <p:nvSpPr>
+          <p:cNvPr id="18" name="Shape 18"/>
+          <p:cNvSpPr txBox="1"/>
+          <p:nvPr/>
+        </p:nvSpPr>
+        <p:spPr>
+          <a:xfrm>
+            <a:off x="6419698" y="5351526"/>
+            <a:ext cx="4251503" cy="1033272"/>
           </a:xfrm>
           <a:prstGeom prst="roundRect">
             <a:avLst>
@@ -7898,22 +9903,149 @@
               <a:t xml:space="preserve">ANSWER   </a:t>
             </a:r>
             <a:r>
-              <a:rPr lang="en-US" sz="2325" dirty="0">
+              <a:rPr lang="en-US" sz="1425" dirty="0" b="1">
+                <a:solidFill>
+                  <a:srgbClr val="16171D"/>
+                </a:solidFill>
+                <a:latin typeface="Segoe UI"/>
+                <a:cs typeface="Segoe UI"/>
+              </a:rPr>
+              <a:t xml:space="preserve">$20</a:t>
+            </a:r>
+            <a:br>
+              <a:rPr lang="en-US" sz="1425" dirty="0">
+                <a:solidFill>
+                  <a:srgbClr val="16171D"/>
+                </a:solidFill>
+                <a:latin typeface="Segoe UI"/>
+                <a:cs typeface="Segoe UI"/>
+              </a:rPr>
+            </a:br>
+            <a:r>
+              <a:rPr lang="en-US" sz="1425" dirty="0" b="1">
+                <a:solidFill>
+                  <a:srgbClr val="16171D"/>
+                </a:solidFill>
+                <a:latin typeface="Segoe UI"/>
+                <a:cs typeface="Segoe UI"/>
+              </a:rPr>
+              <a:t xml:space="preserve">1.</a:t>
+            </a:r>
+            <a:r>
+              <a:rPr lang="en-US" sz="1425" dirty="0">
+                <a:solidFill>
+                  <a:srgbClr val="16171D"/>
+                </a:solidFill>
+                <a:latin typeface="Segoe UI"/>
+                <a:cs typeface="Segoe UI"/>
+              </a:rPr>
+              <a:t xml:space="preserve"> Change in money: </a:t>
+            </a:r>
+            <a:r>
+              <a:rPr lang="en-US" sz="1425" dirty="0">
                 <a:solidFill>
                   <a:srgbClr val="16171D"/>
                 </a:solidFill>
                 <a:latin typeface="Cambria"/>
                 <a:cs typeface="Cambria"/>
               </a:rPr>
-              <a:t xml:space="preserve">$20</a:t>
-            </a:r>
-            <a:endParaRPr lang="en-US" sz="2325" dirty="0"/>
-          </a:p>
-        </p:txBody>
-      </p:sp>
-      <p:sp>
-        <p:nvSpPr>
-          <p:cNvPr id="12" name="Slide Number 12"/>
+              <a:t xml:space="preserve">80 − 0 = 80</a:t>
+            </a:r>
+            <a:r>
+              <a:rPr lang="en-US" sz="1425" dirty="0">
+                <a:solidFill>
+                  <a:srgbClr val="16171D"/>
+                </a:solidFill>
+                <a:latin typeface="Segoe UI"/>
+                <a:cs typeface="Segoe UI"/>
+              </a:rPr>
+              <a:t xml:space="preserve"> dollars.</a:t>
+            </a:r>
+            <a:br>
+              <a:rPr lang="en-US" sz="1425" dirty="0">
+                <a:solidFill>
+                  <a:srgbClr val="16171D"/>
+                </a:solidFill>
+                <a:latin typeface="Segoe UI"/>
+                <a:cs typeface="Segoe UI"/>
+              </a:rPr>
+            </a:br>
+            <a:r>
+              <a:rPr lang="en-US" sz="1425" dirty="0" b="1">
+                <a:solidFill>
+                  <a:srgbClr val="16171D"/>
+                </a:solidFill>
+                <a:latin typeface="Segoe UI"/>
+                <a:cs typeface="Segoe UI"/>
+              </a:rPr>
+              <a:t xml:space="preserve">2.</a:t>
+            </a:r>
+            <a:r>
+              <a:rPr lang="en-US" sz="1425" dirty="0">
+                <a:solidFill>
+                  <a:srgbClr val="16171D"/>
+                </a:solidFill>
+                <a:latin typeface="Segoe UI"/>
+                <a:cs typeface="Segoe UI"/>
+              </a:rPr>
+              <a:t xml:space="preserve"> Change in time: 4 months.</a:t>
+            </a:r>
+            <a:br>
+              <a:rPr lang="en-US" sz="1425" dirty="0">
+                <a:solidFill>
+                  <a:srgbClr val="16171D"/>
+                </a:solidFill>
+                <a:latin typeface="Segoe UI"/>
+                <a:cs typeface="Segoe UI"/>
+              </a:rPr>
+            </a:br>
+            <a:r>
+              <a:rPr lang="en-US" sz="1425" dirty="0" b="1">
+                <a:solidFill>
+                  <a:srgbClr val="16171D"/>
+                </a:solidFill>
+                <a:latin typeface="Segoe UI"/>
+                <a:cs typeface="Segoe UI"/>
+              </a:rPr>
+              <a:t xml:space="preserve">3.</a:t>
+            </a:r>
+            <a:r>
+              <a:rPr lang="en-US" sz="1425" dirty="0">
+                <a:solidFill>
+                  <a:srgbClr val="16171D"/>
+                </a:solidFill>
+                <a:latin typeface="Segoe UI"/>
+                <a:cs typeface="Segoe UI"/>
+              </a:rPr>
+              <a:t xml:space="preserve"> </a:t>
+            </a:r>
+            <a:r>
+              <a:rPr lang="en-US" sz="1425" dirty="0">
+                <a:solidFill>
+                  <a:srgbClr val="16171D"/>
+                </a:solidFill>
+                <a:latin typeface="Cambria"/>
+                <a:cs typeface="Cambria"/>
+              </a:rPr>
+              <a:t xml:space="preserve">80 ÷ 4 = 20</a:t>
+            </a:r>
+            <a:r>
+              <a:rPr lang="en-US" sz="1425" dirty="0">
+                <a:solidFill>
+                  <a:srgbClr val="16171D"/>
+                </a:solidFill>
+                <a:latin typeface="Segoe UI"/>
+                <a:cs typeface="Segoe UI"/>
+              </a:rPr>
+              <a:t xml:space="preserve">, so $20 per month.</a:t>
+            </a:r>
+            <a:endParaRPr lang="en-US" sz="1425" dirty="0"/>
+          </a:p>
+        </p:txBody>
+      </p:sp>
+      <p:sp>
+        <p:nvSpPr>
+          <p:cNvPr id="20" name="Slide Number 20"/>
           <p:cNvSpPr txBox="1"/>
           <p:nvPr/>
         </p:nvSpPr>
@@ -7987,7 +10119,7 @@
                                           </p:stCondLst>
                                         </p:cTn>
                                         <p:tgtEl>
-                                          <p:spTgt spid="5"/>
+                                          <p:spTgt spid="6"/>
                                         </p:tgtEl>
                                         <p:attrNameLst>
                                           <p:attrName>style.visibility</p:attrName>
@@ -8001,7 +10133,7 @@
                                       <p:cBhvr>
                                         <p:cTn id="4" dur="500"/>
                                         <p:tgtEl>
-                                          <p:spTgt spid="5"/>
+                                          <p:spTgt spid="6"/>
                                         </p:tgtEl>
                                       </p:cBhvr>
                                     </p:animEffect>
@@ -8009,7 +10141,7 @@
                                       <p:cBhvr>
                                         <p:cTn id="5" dur="500" fill="hold"/>
                                         <p:tgtEl>
-                                          <p:spTgt spid="5"/>
+                                          <p:spTgt spid="6"/>
                                         </p:tgtEl>
                                         <p:attrNameLst>
                                           <p:attrName>ppt_w</p:attrName>
@@ -8032,7 +10164,7 @@
                                       <p:cBhvr>
                                         <p:cTn id="6" dur="500" fill="hold"/>
                                         <p:tgtEl>
-                                          <p:spTgt spid="5"/>
+                                          <p:spTgt spid="6"/>
                                         </p:tgtEl>
                                         <p:attrNameLst>
                                           <p:attrName>ppt_h</p:attrName>
@@ -8086,7 +10218,7 @@
                                           </p:stCondLst>
                                         </p:cTn>
                                         <p:tgtEl>
-                                          <p:spTgt spid="7"/>
+                                          <p:spTgt spid="10"/>
                                         </p:tgtEl>
                                         <p:attrNameLst>
                                           <p:attrName>style.visibility</p:attrName>
@@ -8100,7 +10232,7 @@
                                       <p:cBhvr>
                                         <p:cTn id="11" dur="500"/>
                                         <p:tgtEl>
-                                          <p:spTgt spid="7"/>
+                                          <p:spTgt spid="10"/>
                                         </p:tgtEl>
                                       </p:cBhvr>
                                     </p:animEffect>
@@ -8108,7 +10240,7 @@
                                       <p:cBhvr>
                                         <p:cTn id="12" dur="500" fill="hold"/>
                                         <p:tgtEl>
-                                          <p:spTgt spid="7"/>
+                                          <p:spTgt spid="10"/>
                                         </p:tgtEl>
                                         <p:attrNameLst>
                                           <p:attrName>ppt_w</p:attrName>
@@ -8131,7 +10263,7 @@
                                       <p:cBhvr>
                                         <p:cTn id="13" dur="500" fill="hold"/>
                                         <p:tgtEl>
-                                          <p:spTgt spid="7"/>
+                                          <p:spTgt spid="10"/>
                                         </p:tgtEl>
                                         <p:attrNameLst>
                                           <p:attrName>ppt_h</p:attrName>
@@ -8185,7 +10317,7 @@
                                           </p:stCondLst>
                                         </p:cTn>
                                         <p:tgtEl>
-                                          <p:spTgt spid="9"/>
+                                          <p:spTgt spid="14"/>
                                         </p:tgtEl>
                                         <p:attrNameLst>
                                           <p:attrName>style.visibility</p:attrName>
@@ -8199,7 +10331,7 @@
                                       <p:cBhvr>
                                         <p:cTn id="18" dur="500"/>
                                         <p:tgtEl>
-                                          <p:spTgt spid="9"/>
+                                          <p:spTgt spid="14"/>
                                         </p:tgtEl>
                                       </p:cBhvr>
                                     </p:animEffect>
@@ -8207,7 +10339,7 @@
                                       <p:cBhvr>
                                         <p:cTn id="19" dur="500" fill="hold"/>
                                         <p:tgtEl>
-                                          <p:spTgt spid="9"/>
+                                          <p:spTgt spid="14"/>
                                         </p:tgtEl>
                                         <p:attrNameLst>
                                           <p:attrName>ppt_w</p:attrName>
@@ -8230,7 +10362,7 @@
                                       <p:cBhvr>
                                         <p:cTn id="20" dur="500" fill="hold"/>
                                         <p:tgtEl>
-                                          <p:spTgt spid="9"/>
+                                          <p:spTgt spid="14"/>
                                         </p:tgtEl>
                                         <p:attrNameLst>
                                           <p:attrName>ppt_h</p:attrName>
@@ -8284,7 +10416,7 @@
                                           </p:stCondLst>
                                         </p:cTn>
                                         <p:tgtEl>
-                                          <p:spTgt spid="11"/>
+                                          <p:spTgt spid="18"/>
                                         </p:tgtEl>
                                         <p:attrNameLst>
                                           <p:attrName>style.visibility</p:attrName>
@@ -8298,7 +10430,7 @@
                                       <p:cBhvr>
                                         <p:cTn id="25" dur="500"/>
                                         <p:tgtEl>
-                                          <p:spTgt spid="11"/>
+                                          <p:spTgt spid="18"/>
                                         </p:tgtEl>
                                       </p:cBhvr>
                                     </p:animEffect>
@@ -8306,7 +10438,7 @@
                                       <p:cBhvr>
                                         <p:cTn id="26" dur="500" fill="hold"/>
                                         <p:tgtEl>
-                                          <p:spTgt spid="11"/>
+                                          <p:spTgt spid="18"/>
                                         </p:tgtEl>
                                         <p:attrNameLst>
                                           <p:attrName>ppt_w</p:attrName>
@@ -8329,7 +10461,7 @@
                                       <p:cBhvr>
                                         <p:cTn id="27" dur="500" fill="hold"/>
                                         <p:tgtEl>
-                                          <p:spTgt spid="11"/>
+                                          <p:spTgt spid="18"/>
                                         </p:tgtEl>
                                         <p:attrNameLst>
                                           <p:attrName>ppt_h</p:attrName>

--- a/IEP/t2-lesson4-comparing-linear-functions-IEP.pptx
+++ b/IEP/t2-lesson4-comparing-linear-functions-IEP.pptx
@@ -404,7 +404,7 @@
           <a:p>
             <a:r>
               <a:rPr lang="en-US" dirty="0"/>
-              <a:t>Give students time to try all items before revealing. Students may use the steps slide and their notes.</a:t>
+              <a:t>Give students time to try all items before revealing. Students may use the steps slide and their notes. After each answer, click once per step and read it aloud so students can find where their work went wrong.</a:t>
             </a:r>
           </a:p>
         </p:txBody>
@@ -4806,14 +4806,14 @@
       </p:sp>
       <p:sp>
         <p:nvSpPr>
-          <p:cNvPr id="6" name="Shape 6"/>
+          <p:cNvPr id="9" name="Shape 9"/>
           <p:cNvSpPr txBox="1"/>
           <p:nvPr/>
         </p:nvSpPr>
         <p:spPr>
           <a:xfrm>
             <a:off x="685800" y="1618488"/>
-            <a:ext cx="10820095" cy="1309116"/>
+            <a:ext cx="3479698" cy="3073908"/>
           </a:xfrm>
           <a:prstGeom prst="roundRect">
             <a:avLst>
@@ -4853,7 +4853,7 @@
         <p:spPr>
           <a:xfrm>
             <a:off x="895350" y="1789938"/>
-            <a:ext cx="10400995" cy="352044"/>
+            <a:ext cx="3060598" cy="946404"/>
           </a:xfrm>
           <a:prstGeom prst="rect">
             <a:avLst/>
@@ -4896,7 +4896,7 @@
         </p:nvSpPr>
         <p:spPr>
           <a:xfrm>
-            <a:off x="895350" y="2237232"/>
+            <a:off x="895350" y="2831592"/>
             <a:ext cx="2078888" cy="518922"/>
           </a:xfrm>
           <a:prstGeom prst="roundRect">
@@ -4948,14 +4948,176 @@
       </p:sp>
       <p:sp>
         <p:nvSpPr>
-          <p:cNvPr id="9" name="Shape 9"/>
-          <p:cNvSpPr txBox="1"/>
-          <p:nvPr/>
-        </p:nvSpPr>
-        <p:spPr>
-          <a:xfrm>
-            <a:off x="685800" y="3060954"/>
-            <a:ext cx="10820095" cy="1309116"/>
+          <p:cNvPr id="6" name="Shape 6"/>
+          <p:cNvSpPr txBox="1"/>
+          <p:nvPr/>
+        </p:nvSpPr>
+        <p:spPr>
+          <a:xfrm>
+            <a:off x="895350" y="3445764"/>
+            <a:ext cx="3060598" cy="294894"/>
+          </a:xfrm>
+          <a:prstGeom prst="rect">
+            <a:avLst/>
+          </a:prstGeom>
+          <a:noFill/>
+          <a:ln>
+            <a:noFill/>
+          </a:ln>
+        </p:spPr>
+        <p:txBody>
+          <a:bodyPr wrap="square" lIns="36576" tIns="27432" rIns="36576" bIns="27432" anchor="t">
+            <a:noAutofit/>
+          </a:bodyPr>
+          <a:lstStyle/>
+          <a:p>
+            <a:pPr algn="l">
+              <a:lnSpc>
+                <a:spcPct val="100000"/>
+              </a:lnSpc>
+            </a:pPr>
+            <a:r>
+              <a:rPr lang="en-US" sz="1575" dirty="0" b="1">
+                <a:solidFill>
+                  <a:srgbClr val="16171D"/>
+                </a:solidFill>
+                <a:latin typeface="Segoe UI"/>
+                <a:cs typeface="Segoe UI"/>
+              </a:rPr>
+              <a:t xml:space="preserve">1.</a:t>
+            </a:r>
+            <a:r>
+              <a:rPr lang="en-US" sz="1575" dirty="0">
+                <a:solidFill>
+                  <a:srgbClr val="16171D"/>
+                </a:solidFill>
+                <a:latin typeface="Segoe UI"/>
+                <a:cs typeface="Segoe UI"/>
+              </a:rPr>
+              <a:t xml:space="preserve"> Change in y: 9 − 1 = 8.</a:t>
+            </a:r>
+            <a:endParaRPr lang="en-US" sz="1575" dirty="0"/>
+          </a:p>
+        </p:txBody>
+      </p:sp>
+      <p:sp>
+        <p:nvSpPr>
+          <p:cNvPr id="7" name="Shape 7"/>
+          <p:cNvSpPr txBox="1"/>
+          <p:nvPr/>
+        </p:nvSpPr>
+        <p:spPr>
+          <a:xfrm>
+            <a:off x="895350" y="3835908"/>
+            <a:ext cx="3060598" cy="294894"/>
+          </a:xfrm>
+          <a:prstGeom prst="rect">
+            <a:avLst/>
+          </a:prstGeom>
+          <a:noFill/>
+          <a:ln>
+            <a:noFill/>
+          </a:ln>
+        </p:spPr>
+        <p:txBody>
+          <a:bodyPr wrap="square" lIns="36576" tIns="27432" rIns="36576" bIns="27432" anchor="t">
+            <a:noAutofit/>
+          </a:bodyPr>
+          <a:lstStyle/>
+          <a:p>
+            <a:pPr algn="l">
+              <a:lnSpc>
+                <a:spcPct val="100000"/>
+              </a:lnSpc>
+            </a:pPr>
+            <a:r>
+              <a:rPr lang="en-US" sz="1575" dirty="0" b="1">
+                <a:solidFill>
+                  <a:srgbClr val="16171D"/>
+                </a:solidFill>
+                <a:latin typeface="Segoe UI"/>
+                <a:cs typeface="Segoe UI"/>
+              </a:rPr>
+              <a:t xml:space="preserve">2.</a:t>
+            </a:r>
+            <a:r>
+              <a:rPr lang="en-US" sz="1575" dirty="0">
+                <a:solidFill>
+                  <a:srgbClr val="16171D"/>
+                </a:solidFill>
+                <a:latin typeface="Segoe UI"/>
+                <a:cs typeface="Segoe UI"/>
+              </a:rPr>
+              <a:t xml:space="preserve"> Change in x: 2 − 0 = 2.</a:t>
+            </a:r>
+            <a:endParaRPr lang="en-US" sz="1575" dirty="0"/>
+          </a:p>
+        </p:txBody>
+      </p:sp>
+      <p:sp>
+        <p:nvSpPr>
+          <p:cNvPr id="8" name="Shape 8"/>
+          <p:cNvSpPr txBox="1"/>
+          <p:nvPr/>
+        </p:nvSpPr>
+        <p:spPr>
+          <a:xfrm>
+            <a:off x="895350" y="4226052"/>
+            <a:ext cx="3060598" cy="294894"/>
+          </a:xfrm>
+          <a:prstGeom prst="rect">
+            <a:avLst/>
+          </a:prstGeom>
+          <a:noFill/>
+          <a:ln>
+            <a:noFill/>
+          </a:ln>
+        </p:spPr>
+        <p:txBody>
+          <a:bodyPr wrap="square" lIns="36576" tIns="27432" rIns="36576" bIns="27432" anchor="t">
+            <a:noAutofit/>
+          </a:bodyPr>
+          <a:lstStyle/>
+          <a:p>
+            <a:pPr algn="l">
+              <a:lnSpc>
+                <a:spcPct val="100000"/>
+              </a:lnSpc>
+            </a:pPr>
+            <a:r>
+              <a:rPr lang="en-US" sz="1575" dirty="0" b="1">
+                <a:solidFill>
+                  <a:srgbClr val="16171D"/>
+                </a:solidFill>
+                <a:latin typeface="Segoe UI"/>
+                <a:cs typeface="Segoe UI"/>
+              </a:rPr>
+              <a:t xml:space="preserve">3.</a:t>
+            </a:r>
+            <a:r>
+              <a:rPr lang="en-US" sz="1575" dirty="0">
+                <a:solidFill>
+                  <a:srgbClr val="16171D"/>
+                </a:solidFill>
+                <a:latin typeface="Segoe UI"/>
+                <a:cs typeface="Segoe UI"/>
+              </a:rPr>
+              <a:t xml:space="preserve"> Divide: 8 ÷ 2 = 4.</a:t>
+            </a:r>
+            <a:endParaRPr lang="en-US" sz="1575" dirty="0"/>
+          </a:p>
+        </p:txBody>
+      </p:sp>
+      <p:sp>
+        <p:nvSpPr>
+          <p:cNvPr id="14" name="Shape 14"/>
+          <p:cNvSpPr txBox="1"/>
+          <p:nvPr/>
+        </p:nvSpPr>
+        <p:spPr>
+          <a:xfrm>
+            <a:off x="4355998" y="1618488"/>
+            <a:ext cx="3479698" cy="2923794"/>
           </a:xfrm>
           <a:prstGeom prst="roundRect">
             <a:avLst>
@@ -4988,14 +5150,14 @@
       </p:sp>
       <p:sp>
         <p:nvSpPr>
-          <p:cNvPr id="7" name="Shape 7"/>
-          <p:cNvSpPr txBox="1"/>
-          <p:nvPr/>
-        </p:nvSpPr>
-        <p:spPr>
-          <a:xfrm>
-            <a:off x="895350" y="3232404"/>
-            <a:ext cx="10400995" cy="352044"/>
+          <p:cNvPr id="10" name="Shape 10"/>
+          <p:cNvSpPr txBox="1"/>
+          <p:nvPr/>
+        </p:nvSpPr>
+        <p:spPr>
+          <a:xfrm>
+            <a:off x="4565548" y="1789938"/>
+            <a:ext cx="3060598" cy="946404"/>
           </a:xfrm>
           <a:prstGeom prst="rect">
             <a:avLst/>
@@ -5112,14 +5274,14 @@
       </p:sp>
       <p:sp>
         <p:nvSpPr>
-          <p:cNvPr id="8" name="Shape 8"/>
-          <p:cNvSpPr txBox="1"/>
-          <p:nvPr/>
-        </p:nvSpPr>
-        <p:spPr>
-          <a:xfrm>
-            <a:off x="895350" y="3679698"/>
-            <a:ext cx="3239673" cy="518922"/>
+          <p:cNvPr id="11" name="Shape 11"/>
+          <p:cNvSpPr txBox="1"/>
+          <p:nvPr/>
+        </p:nvSpPr>
+        <p:spPr>
+          <a:xfrm>
+            <a:off x="4565548" y="2831592"/>
+            <a:ext cx="3060598" cy="518922"/>
           </a:xfrm>
           <a:prstGeom prst="roundRect">
             <a:avLst>
@@ -5176,8 +5338,116 @@
         </p:nvSpPr>
         <p:spPr>
           <a:xfrm>
-            <a:off x="685800" y="4503420"/>
-            <a:ext cx="10820095" cy="1309116"/>
+            <a:off x="4565548" y="3445764"/>
+            <a:ext cx="3060598" cy="534924"/>
+          </a:xfrm>
+          <a:prstGeom prst="rect">
+            <a:avLst/>
+          </a:prstGeom>
+          <a:noFill/>
+          <a:ln>
+            <a:noFill/>
+          </a:ln>
+        </p:spPr>
+        <p:txBody>
+          <a:bodyPr wrap="square" lIns="36576" tIns="27432" rIns="36576" bIns="27432" anchor="t">
+            <a:noAutofit/>
+          </a:bodyPr>
+          <a:lstStyle/>
+          <a:p>
+            <a:pPr algn="l">
+              <a:lnSpc>
+                <a:spcPct val="100000"/>
+              </a:lnSpc>
+            </a:pPr>
+            <a:r>
+              <a:rPr lang="en-US" sz="1575" dirty="0" b="1">
+                <a:solidFill>
+                  <a:srgbClr val="16171D"/>
+                </a:solidFill>
+                <a:latin typeface="Segoe UI"/>
+                <a:cs typeface="Segoe UI"/>
+              </a:rPr>
+              <a:t xml:space="preserve">1.</a:t>
+            </a:r>
+            <a:r>
+              <a:rPr lang="en-US" sz="1575" dirty="0">
+                <a:solidFill>
+                  <a:srgbClr val="16171D"/>
+                </a:solidFill>
+                <a:latin typeface="Segoe UI"/>
+                <a:cs typeface="Segoe UI"/>
+              </a:rPr>
+              <a:t xml:space="preserve"> The slope is the number with x: both are 4.</a:t>
+            </a:r>
+            <a:endParaRPr lang="en-US" sz="1575" dirty="0"/>
+          </a:p>
+        </p:txBody>
+      </p:sp>
+      <p:sp>
+        <p:nvSpPr>
+          <p:cNvPr id="13" name="Shape 13"/>
+          <p:cNvSpPr txBox="1"/>
+          <p:nvPr/>
+        </p:nvSpPr>
+        <p:spPr>
+          <a:xfrm>
+            <a:off x="4565548" y="4075938"/>
+            <a:ext cx="3060598" cy="294894"/>
+          </a:xfrm>
+          <a:prstGeom prst="rect">
+            <a:avLst/>
+          </a:prstGeom>
+          <a:noFill/>
+          <a:ln>
+            <a:noFill/>
+          </a:ln>
+        </p:spPr>
+        <p:txBody>
+          <a:bodyPr wrap="square" lIns="36576" tIns="27432" rIns="36576" bIns="27432" anchor="t">
+            <a:noAutofit/>
+          </a:bodyPr>
+          <a:lstStyle/>
+          <a:p>
+            <a:pPr algn="l">
+              <a:lnSpc>
+                <a:spcPct val="100000"/>
+              </a:lnSpc>
+            </a:pPr>
+            <a:r>
+              <a:rPr lang="en-US" sz="1575" dirty="0" b="1">
+                <a:solidFill>
+                  <a:srgbClr val="16171D"/>
+                </a:solidFill>
+                <a:latin typeface="Segoe UI"/>
+                <a:cs typeface="Segoe UI"/>
+              </a:rPr>
+              <a:t xml:space="preserve">2.</a:t>
+            </a:r>
+            <a:r>
+              <a:rPr lang="en-US" sz="1575" dirty="0">
+                <a:solidFill>
+                  <a:srgbClr val="16171D"/>
+                </a:solidFill>
+                <a:latin typeface="Segoe UI"/>
+                <a:cs typeface="Segoe UI"/>
+              </a:rPr>
+              <a:t xml:space="preserve"> Same slope means parallel.</a:t>
+            </a:r>
+            <a:endParaRPr lang="en-US" sz="1575" dirty="0"/>
+          </a:p>
+        </p:txBody>
+      </p:sp>
+      <p:sp>
+        <p:nvSpPr>
+          <p:cNvPr id="19" name="Shape 19"/>
+          <p:cNvSpPr txBox="1"/>
+          <p:nvPr/>
+        </p:nvSpPr>
+        <p:spPr>
+          <a:xfrm>
+            <a:off x="8026197" y="1618488"/>
+            <a:ext cx="3479698" cy="3461004"/>
           </a:xfrm>
           <a:prstGeom prst="roundRect">
             <a:avLst>
@@ -5210,14 +5480,14 @@
       </p:sp>
       <p:sp>
         <p:nvSpPr>
-          <p:cNvPr id="10" name="Shape 10"/>
-          <p:cNvSpPr txBox="1"/>
-          <p:nvPr/>
-        </p:nvSpPr>
-        <p:spPr>
-          <a:xfrm>
-            <a:off x="895350" y="4674870"/>
-            <a:ext cx="10400995" cy="352044"/>
+          <p:cNvPr id="15" name="Shape 15"/>
+          <p:cNvSpPr txBox="1"/>
+          <p:nvPr/>
+        </p:nvSpPr>
+        <p:spPr>
+          <a:xfrm>
+            <a:off x="8235747" y="1789938"/>
+            <a:ext cx="3060598" cy="649224"/>
           </a:xfrm>
           <a:prstGeom prst="rect">
             <a:avLst/>
@@ -5294,14 +5564,14 @@
       </p:sp>
       <p:sp>
         <p:nvSpPr>
-          <p:cNvPr id="11" name="Shape 11"/>
-          <p:cNvSpPr txBox="1"/>
-          <p:nvPr/>
-        </p:nvSpPr>
-        <p:spPr>
-          <a:xfrm>
-            <a:off x="895350" y="5122164"/>
-            <a:ext cx="3902979" cy="518922"/>
+          <p:cNvPr id="16" name="Shape 16"/>
+          <p:cNvSpPr txBox="1"/>
+          <p:nvPr/>
+        </p:nvSpPr>
+        <p:spPr>
+          <a:xfrm>
+            <a:off x="8235747" y="2534412"/>
+            <a:ext cx="3060598" cy="873252"/>
           </a:xfrm>
           <a:prstGeom prst="roundRect">
             <a:avLst>
@@ -5352,7 +5622,115 @@
       </p:sp>
       <p:sp>
         <p:nvSpPr>
-          <p:cNvPr id="13" name="Slide Number 13"/>
+          <p:cNvPr id="17" name="Shape 17"/>
+          <p:cNvSpPr txBox="1"/>
+          <p:nvPr/>
+        </p:nvSpPr>
+        <p:spPr>
+          <a:xfrm>
+            <a:off x="8235747" y="3502914"/>
+            <a:ext cx="3060598" cy="534924"/>
+          </a:xfrm>
+          <a:prstGeom prst="rect">
+            <a:avLst/>
+          </a:prstGeom>
+          <a:noFill/>
+          <a:ln>
+            <a:noFill/>
+          </a:ln>
+        </p:spPr>
+        <p:txBody>
+          <a:bodyPr wrap="square" lIns="36576" tIns="27432" rIns="36576" bIns="27432" anchor="t">
+            <a:noAutofit/>
+          </a:bodyPr>
+          <a:lstStyle/>
+          <a:p>
+            <a:pPr algn="l">
+              <a:lnSpc>
+                <a:spcPct val="100000"/>
+              </a:lnSpc>
+            </a:pPr>
+            <a:r>
+              <a:rPr lang="en-US" sz="1575" dirty="0" b="1">
+                <a:solidFill>
+                  <a:srgbClr val="16171D"/>
+                </a:solidFill>
+                <a:latin typeface="Segoe UI"/>
+                <a:cs typeface="Segoe UI"/>
+              </a:rPr>
+              <a:t xml:space="preserve">1.</a:t>
+            </a:r>
+            <a:r>
+              <a:rPr lang="en-US" sz="1575" dirty="0">
+                <a:solidFill>
+                  <a:srgbClr val="16171D"/>
+                </a:solidFill>
+                <a:latin typeface="Segoe UI"/>
+                <a:cs typeface="Segoe UI"/>
+              </a:rPr>
+              <a:t xml:space="preserve"> In y = mx + b, 50 is b: the value when x = 0.</a:t>
+            </a:r>
+            <a:endParaRPr lang="en-US" sz="1575" dirty="0"/>
+          </a:p>
+        </p:txBody>
+      </p:sp>
+      <p:sp>
+        <p:nvSpPr>
+          <p:cNvPr id="18" name="Shape 18"/>
+          <p:cNvSpPr txBox="1"/>
+          <p:nvPr/>
+        </p:nvSpPr>
+        <p:spPr>
+          <a:xfrm>
+            <a:off x="8235747" y="4133088"/>
+            <a:ext cx="3060598" cy="774954"/>
+          </a:xfrm>
+          <a:prstGeom prst="rect">
+            <a:avLst/>
+          </a:prstGeom>
+          <a:noFill/>
+          <a:ln>
+            <a:noFill/>
+          </a:ln>
+        </p:spPr>
+        <p:txBody>
+          <a:bodyPr wrap="square" lIns="36576" tIns="27432" rIns="36576" bIns="27432" anchor="t">
+            <a:noAutofit/>
+          </a:bodyPr>
+          <a:lstStyle/>
+          <a:p>
+            <a:pPr algn="l">
+              <a:lnSpc>
+                <a:spcPct val="100000"/>
+              </a:lnSpc>
+            </a:pPr>
+            <a:r>
+              <a:rPr lang="en-US" sz="1575" dirty="0" b="1">
+                <a:solidFill>
+                  <a:srgbClr val="16171D"/>
+                </a:solidFill>
+                <a:latin typeface="Segoe UI"/>
+                <a:cs typeface="Segoe UI"/>
+              </a:rPr>
+              <a:t xml:space="preserve">2.</a:t>
+            </a:r>
+            <a:r>
+              <a:rPr lang="en-US" sz="1575" dirty="0">
+                <a:solidFill>
+                  <a:srgbClr val="16171D"/>
+                </a:solidFill>
+                <a:latin typeface="Segoe UI"/>
+                <a:cs typeface="Segoe UI"/>
+              </a:rPr>
+              <a:t xml:space="preserve"> x = 0 months is the start, so 50 is the $50 saved at the start.</a:t>
+            </a:r>
+            <a:endParaRPr lang="en-US" sz="1575" dirty="0"/>
+          </a:p>
+        </p:txBody>
+      </p:sp>
+      <p:sp>
+        <p:nvSpPr>
+          <p:cNvPr id="20" name="Slide Number 20"/>
           <p:cNvSpPr txBox="1"/>
           <p:nvPr/>
         </p:nvSpPr>
@@ -5512,7 +5890,7 @@
                             </p:stCondLst>
                             <p:childTnLst>
                               <p:par>
-                                <p:cTn id="14" presetID="53" presetClass="entr" presetSubtype="16" fill="hold" nodeType="clickEffect">
+                                <p:cTn id="14" presetID="42" presetClass="entr" presetSubtype="0" fill="hold" nodeType="clickEffect">
                                   <p:stCondLst>
                                     <p:cond delay="0"/>
                                   </p:stCondLst>
@@ -5520,6 +5898,204 @@
                                     <p:set>
                                       <p:cBhvr>
                                         <p:cTn id="10" dur="1" fill="hold">
+                                          <p:stCondLst>
+                                            <p:cond delay="0"/>
+                                          </p:stCondLst>
+                                        </p:cTn>
+                                        <p:tgtEl>
+                                          <p:spTgt spid="6"/>
+                                        </p:tgtEl>
+                                        <p:attrNameLst>
+                                          <p:attrName>style.visibility</p:attrName>
+                                        </p:attrNameLst>
+                                      </p:cBhvr>
+                                      <p:to>
+                                        <p:strVal val="visible"/>
+                                      </p:to>
+                                    </p:set>
+                                    <p:animEffect transition="in" filter="fade">
+                                      <p:cBhvr>
+                                        <p:cTn id="11" dur="500"/>
+                                        <p:tgtEl>
+                                          <p:spTgt spid="6"/>
+                                        </p:tgtEl>
+                                      </p:cBhvr>
+                                    </p:animEffect>
+                                    <p:anim calcmode="lin" valueType="num">
+                                      <p:cBhvr>
+                                        <p:cTn id="12" dur="500" fill="hold"/>
+                                        <p:tgtEl>
+                                          <p:spTgt spid="6"/>
+                                        </p:tgtEl>
+                                        <p:attrNameLst>
+                                          <p:attrName>ppt_x</p:attrName>
+                                        </p:attrNameLst>
+                                      </p:cBhvr>
+                                      <p:tavLst>
+                                        <p:tav tm="0">
+                                          <p:val>
+                                            <p:strVal val="#ppt_x"/>
+                                          </p:val>
+                                        </p:tav>
+                                        <p:tav tm="100000">
+                                          <p:val>
+                                            <p:strVal val="#ppt_x"/>
+                                          </p:val>
+                                        </p:tav>
+                                      </p:tavLst>
+                                    </p:anim>
+                                    <p:anim calcmode="lin" valueType="num">
+                                      <p:cBhvr>
+                                        <p:cTn id="13" dur="500" fill="hold"/>
+                                        <p:tgtEl>
+                                          <p:spTgt spid="6"/>
+                                        </p:tgtEl>
+                                        <p:attrNameLst>
+                                          <p:attrName>ppt_y</p:attrName>
+                                        </p:attrNameLst>
+                                      </p:cBhvr>
+                                      <p:tavLst>
+                                        <p:tav tm="0">
+                                          <p:val>
+                                            <p:strVal val="#ppt_y+.1"/>
+                                          </p:val>
+                                        </p:tav>
+                                        <p:tav tm="100000">
+                                          <p:val>
+                                            <p:strVal val="#ppt_y"/>
+                                          </p:val>
+                                        </p:tav>
+                                      </p:tavLst>
+                                    </p:anim>
+                                  </p:childTnLst>
+                                </p:cTn>
+                              </p:par>
+                            </p:childTnLst>
+                          </p:cTn>
+                        </p:par>
+                      </p:childTnLst>
+                    </p:cTn>
+                  </p:par>
+                  <p:par>
+                    <p:cTn id="22" fill="hold">
+                      <p:stCondLst>
+                        <p:cond delay="indefinite"/>
+                      </p:stCondLst>
+                      <p:childTnLst>
+                        <p:par>
+                          <p:cTn id="23" fill="hold">
+                            <p:stCondLst>
+                              <p:cond delay="0"/>
+                            </p:stCondLst>
+                            <p:childTnLst>
+                              <p:par>
+                                <p:cTn id="21" presetID="42" presetClass="entr" presetSubtype="0" fill="hold" nodeType="clickEffect">
+                                  <p:stCondLst>
+                                    <p:cond delay="0"/>
+                                  </p:stCondLst>
+                                  <p:childTnLst>
+                                    <p:set>
+                                      <p:cBhvr>
+                                        <p:cTn id="17" dur="1" fill="hold">
+                                          <p:stCondLst>
+                                            <p:cond delay="0"/>
+                                          </p:stCondLst>
+                                        </p:cTn>
+                                        <p:tgtEl>
+                                          <p:spTgt spid="7"/>
+                                        </p:tgtEl>
+                                        <p:attrNameLst>
+                                          <p:attrName>style.visibility</p:attrName>
+                                        </p:attrNameLst>
+                                      </p:cBhvr>
+                                      <p:to>
+                                        <p:strVal val="visible"/>
+                                      </p:to>
+                                    </p:set>
+                                    <p:animEffect transition="in" filter="fade">
+                                      <p:cBhvr>
+                                        <p:cTn id="18" dur="500"/>
+                                        <p:tgtEl>
+                                          <p:spTgt spid="7"/>
+                                        </p:tgtEl>
+                                      </p:cBhvr>
+                                    </p:animEffect>
+                                    <p:anim calcmode="lin" valueType="num">
+                                      <p:cBhvr>
+                                        <p:cTn id="19" dur="500" fill="hold"/>
+                                        <p:tgtEl>
+                                          <p:spTgt spid="7"/>
+                                        </p:tgtEl>
+                                        <p:attrNameLst>
+                                          <p:attrName>ppt_x</p:attrName>
+                                        </p:attrNameLst>
+                                      </p:cBhvr>
+                                      <p:tavLst>
+                                        <p:tav tm="0">
+                                          <p:val>
+                                            <p:strVal val="#ppt_x"/>
+                                          </p:val>
+                                        </p:tav>
+                                        <p:tav tm="100000">
+                                          <p:val>
+                                            <p:strVal val="#ppt_x"/>
+                                          </p:val>
+                                        </p:tav>
+                                      </p:tavLst>
+                                    </p:anim>
+                                    <p:anim calcmode="lin" valueType="num">
+                                      <p:cBhvr>
+                                        <p:cTn id="20" dur="500" fill="hold"/>
+                                        <p:tgtEl>
+                                          <p:spTgt spid="7"/>
+                                        </p:tgtEl>
+                                        <p:attrNameLst>
+                                          <p:attrName>ppt_y</p:attrName>
+                                        </p:attrNameLst>
+                                      </p:cBhvr>
+                                      <p:tavLst>
+                                        <p:tav tm="0">
+                                          <p:val>
+                                            <p:strVal val="#ppt_y+.1"/>
+                                          </p:val>
+                                        </p:tav>
+                                        <p:tav tm="100000">
+                                          <p:val>
+                                            <p:strVal val="#ppt_y"/>
+                                          </p:val>
+                                        </p:tav>
+                                      </p:tavLst>
+                                    </p:anim>
+                                  </p:childTnLst>
+                                </p:cTn>
+                              </p:par>
+                            </p:childTnLst>
+                          </p:cTn>
+                        </p:par>
+                      </p:childTnLst>
+                    </p:cTn>
+                  </p:par>
+                  <p:par>
+                    <p:cTn id="29" fill="hold">
+                      <p:stCondLst>
+                        <p:cond delay="indefinite"/>
+                      </p:stCondLst>
+                      <p:childTnLst>
+                        <p:par>
+                          <p:cTn id="30" fill="hold">
+                            <p:stCondLst>
+                              <p:cond delay="0"/>
+                            </p:stCondLst>
+                            <p:childTnLst>
+                              <p:par>
+                                <p:cTn id="28" presetID="42" presetClass="entr" presetSubtype="0" fill="hold" nodeType="clickEffect">
+                                  <p:stCondLst>
+                                    <p:cond delay="0"/>
+                                  </p:stCondLst>
+                                  <p:childTnLst>
+                                    <p:set>
+                                      <p:cBhvr>
+                                        <p:cTn id="24" dur="1" fill="hold">
                                           <p:stCondLst>
                                             <p:cond delay="0"/>
                                           </p:stCondLst>
@@ -5537,7 +6113,7 @@
                                     </p:set>
                                     <p:animEffect transition="in" filter="fade">
                                       <p:cBhvr>
-                                        <p:cTn id="11" dur="500"/>
+                                        <p:cTn id="25" dur="500"/>
                                         <p:tgtEl>
                                           <p:spTgt spid="8"/>
                                         </p:tgtEl>
@@ -5545,9 +6121,108 @@
                                     </p:animEffect>
                                     <p:anim calcmode="lin" valueType="num">
                                       <p:cBhvr>
-                                        <p:cTn id="12" dur="500" fill="hold"/>
+                                        <p:cTn id="26" dur="500" fill="hold"/>
                                         <p:tgtEl>
                                           <p:spTgt spid="8"/>
+                                        </p:tgtEl>
+                                        <p:attrNameLst>
+                                          <p:attrName>ppt_x</p:attrName>
+                                        </p:attrNameLst>
+                                      </p:cBhvr>
+                                      <p:tavLst>
+                                        <p:tav tm="0">
+                                          <p:val>
+                                            <p:strVal val="#ppt_x"/>
+                                          </p:val>
+                                        </p:tav>
+                                        <p:tav tm="100000">
+                                          <p:val>
+                                            <p:strVal val="#ppt_x"/>
+                                          </p:val>
+                                        </p:tav>
+                                      </p:tavLst>
+                                    </p:anim>
+                                    <p:anim calcmode="lin" valueType="num">
+                                      <p:cBhvr>
+                                        <p:cTn id="27" dur="500" fill="hold"/>
+                                        <p:tgtEl>
+                                          <p:spTgt spid="8"/>
+                                        </p:tgtEl>
+                                        <p:attrNameLst>
+                                          <p:attrName>ppt_y</p:attrName>
+                                        </p:attrNameLst>
+                                      </p:cBhvr>
+                                      <p:tavLst>
+                                        <p:tav tm="0">
+                                          <p:val>
+                                            <p:strVal val="#ppt_y+.1"/>
+                                          </p:val>
+                                        </p:tav>
+                                        <p:tav tm="100000">
+                                          <p:val>
+                                            <p:strVal val="#ppt_y"/>
+                                          </p:val>
+                                        </p:tav>
+                                      </p:tavLst>
+                                    </p:anim>
+                                  </p:childTnLst>
+                                </p:cTn>
+                              </p:par>
+                            </p:childTnLst>
+                          </p:cTn>
+                        </p:par>
+                      </p:childTnLst>
+                    </p:cTn>
+                  </p:par>
+                  <p:par>
+                    <p:cTn id="36" fill="hold">
+                      <p:stCondLst>
+                        <p:cond delay="indefinite"/>
+                      </p:stCondLst>
+                      <p:childTnLst>
+                        <p:par>
+                          <p:cTn id="37" fill="hold">
+                            <p:stCondLst>
+                              <p:cond delay="0"/>
+                            </p:stCondLst>
+                            <p:childTnLst>
+                              <p:par>
+                                <p:cTn id="35" presetID="53" presetClass="entr" presetSubtype="16" fill="hold" nodeType="clickEffect">
+                                  <p:stCondLst>
+                                    <p:cond delay="0"/>
+                                  </p:stCondLst>
+                                  <p:childTnLst>
+                                    <p:set>
+                                      <p:cBhvr>
+                                        <p:cTn id="31" dur="1" fill="hold">
+                                          <p:stCondLst>
+                                            <p:cond delay="0"/>
+                                          </p:stCondLst>
+                                        </p:cTn>
+                                        <p:tgtEl>
+                                          <p:spTgt spid="11"/>
+                                        </p:tgtEl>
+                                        <p:attrNameLst>
+                                          <p:attrName>style.visibility</p:attrName>
+                                        </p:attrNameLst>
+                                      </p:cBhvr>
+                                      <p:to>
+                                        <p:strVal val="visible"/>
+                                      </p:to>
+                                    </p:set>
+                                    <p:animEffect transition="in" filter="fade">
+                                      <p:cBhvr>
+                                        <p:cTn id="32" dur="500"/>
+                                        <p:tgtEl>
+                                          <p:spTgt spid="11"/>
+                                        </p:tgtEl>
+                                      </p:cBhvr>
+                                    </p:animEffect>
+                                    <p:anim calcmode="lin" valueType="num">
+                                      <p:cBhvr>
+                                        <p:cTn id="33" dur="500" fill="hold"/>
+                                        <p:tgtEl>
+                                          <p:spTgt spid="11"/>
                                         </p:tgtEl>
                                         <p:attrNameLst>
                                           <p:attrName>ppt_w</p:attrName>
@@ -5568,9 +6243,9 @@
                                     </p:anim>
                                     <p:anim calcmode="lin" valueType="num">
                                       <p:cBhvr>
-                                        <p:cTn id="13" dur="500" fill="hold"/>
+                                        <p:cTn id="34" dur="500" fill="hold"/>
                                         <p:tgtEl>
-                                          <p:spTgt spid="8"/>
+                                          <p:spTgt spid="11"/>
                                         </p:tgtEl>
                                         <p:attrNameLst>
                                           <p:attrName>ppt_h</p:attrName>
@@ -5599,32 +6274,32 @@
                     </p:cTn>
                   </p:par>
                   <p:par>
-                    <p:cTn id="22" fill="hold">
+                    <p:cTn id="43" fill="hold">
                       <p:stCondLst>
                         <p:cond delay="indefinite"/>
                       </p:stCondLst>
                       <p:childTnLst>
                         <p:par>
-                          <p:cTn id="23" fill="hold">
+                          <p:cTn id="44" fill="hold">
                             <p:stCondLst>
                               <p:cond delay="0"/>
                             </p:stCondLst>
                             <p:childTnLst>
                               <p:par>
-                                <p:cTn id="21" presetID="53" presetClass="entr" presetSubtype="16" fill="hold" nodeType="clickEffect">
+                                <p:cTn id="42" presetID="42" presetClass="entr" presetSubtype="0" fill="hold" nodeType="clickEffect">
                                   <p:stCondLst>
                                     <p:cond delay="0"/>
                                   </p:stCondLst>
                                   <p:childTnLst>
                                     <p:set>
                                       <p:cBhvr>
-                                        <p:cTn id="17" dur="1" fill="hold">
+                                        <p:cTn id="38" dur="1" fill="hold">
                                           <p:stCondLst>
                                             <p:cond delay="0"/>
                                           </p:stCondLst>
                                         </p:cTn>
                                         <p:tgtEl>
-                                          <p:spTgt spid="11"/>
+                                          <p:spTgt spid="12"/>
                                         </p:tgtEl>
                                         <p:attrNameLst>
                                           <p:attrName>style.visibility</p:attrName>
@@ -5636,17 +6311,215 @@
                                     </p:set>
                                     <p:animEffect transition="in" filter="fade">
                                       <p:cBhvr>
-                                        <p:cTn id="18" dur="500"/>
+                                        <p:cTn id="39" dur="500"/>
                                         <p:tgtEl>
-                                          <p:spTgt spid="11"/>
+                                          <p:spTgt spid="12"/>
                                         </p:tgtEl>
                                       </p:cBhvr>
                                     </p:animEffect>
                                     <p:anim calcmode="lin" valueType="num">
                                       <p:cBhvr>
-                                        <p:cTn id="19" dur="500" fill="hold"/>
+                                        <p:cTn id="40" dur="500" fill="hold"/>
                                         <p:tgtEl>
-                                          <p:spTgt spid="11"/>
+                                          <p:spTgt spid="12"/>
+                                        </p:tgtEl>
+                                        <p:attrNameLst>
+                                          <p:attrName>ppt_x</p:attrName>
+                                        </p:attrNameLst>
+                                      </p:cBhvr>
+                                      <p:tavLst>
+                                        <p:tav tm="0">
+                                          <p:val>
+                                            <p:strVal val="#ppt_x"/>
+                                          </p:val>
+                                        </p:tav>
+                                        <p:tav tm="100000">
+                                          <p:val>
+                                            <p:strVal val="#ppt_x"/>
+                                          </p:val>
+                                        </p:tav>
+                                      </p:tavLst>
+                                    </p:anim>
+                                    <p:anim calcmode="lin" valueType="num">
+                                      <p:cBhvr>
+                                        <p:cTn id="41" dur="500" fill="hold"/>
+                                        <p:tgtEl>
+                                          <p:spTgt spid="12"/>
+                                        </p:tgtEl>
+                                        <p:attrNameLst>
+                                          <p:attrName>ppt_y</p:attrName>
+                                        </p:attrNameLst>
+                                      </p:cBhvr>
+                                      <p:tavLst>
+                                        <p:tav tm="0">
+                                          <p:val>
+                                            <p:strVal val="#ppt_y+.1"/>
+                                          </p:val>
+                                        </p:tav>
+                                        <p:tav tm="100000">
+                                          <p:val>
+                                            <p:strVal val="#ppt_y"/>
+                                          </p:val>
+                                        </p:tav>
+                                      </p:tavLst>
+                                    </p:anim>
+                                  </p:childTnLst>
+                                </p:cTn>
+                              </p:par>
+                            </p:childTnLst>
+                          </p:cTn>
+                        </p:par>
+                      </p:childTnLst>
+                    </p:cTn>
+                  </p:par>
+                  <p:par>
+                    <p:cTn id="50" fill="hold">
+                      <p:stCondLst>
+                        <p:cond delay="indefinite"/>
+                      </p:stCondLst>
+                      <p:childTnLst>
+                        <p:par>
+                          <p:cTn id="51" fill="hold">
+                            <p:stCondLst>
+                              <p:cond delay="0"/>
+                            </p:stCondLst>
+                            <p:childTnLst>
+                              <p:par>
+                                <p:cTn id="49" presetID="42" presetClass="entr" presetSubtype="0" fill="hold" nodeType="clickEffect">
+                                  <p:stCondLst>
+                                    <p:cond delay="0"/>
+                                  </p:stCondLst>
+                                  <p:childTnLst>
+                                    <p:set>
+                                      <p:cBhvr>
+                                        <p:cTn id="45" dur="1" fill="hold">
+                                          <p:stCondLst>
+                                            <p:cond delay="0"/>
+                                          </p:stCondLst>
+                                        </p:cTn>
+                                        <p:tgtEl>
+                                          <p:spTgt spid="13"/>
+                                        </p:tgtEl>
+                                        <p:attrNameLst>
+                                          <p:attrName>style.visibility</p:attrName>
+                                        </p:attrNameLst>
+                                      </p:cBhvr>
+                                      <p:to>
+                                        <p:strVal val="visible"/>
+                                      </p:to>
+                                    </p:set>
+                                    <p:animEffect transition="in" filter="fade">
+                                      <p:cBhvr>
+                                        <p:cTn id="46" dur="500"/>
+                                        <p:tgtEl>
+                                          <p:spTgt spid="13"/>
+                                        </p:tgtEl>
+                                      </p:cBhvr>
+                                    </p:animEffect>
+                                    <p:anim calcmode="lin" valueType="num">
+                                      <p:cBhvr>
+                                        <p:cTn id="47" dur="500" fill="hold"/>
+                                        <p:tgtEl>
+                                          <p:spTgt spid="13"/>
+                                        </p:tgtEl>
+                                        <p:attrNameLst>
+                                          <p:attrName>ppt_x</p:attrName>
+                                        </p:attrNameLst>
+                                      </p:cBhvr>
+                                      <p:tavLst>
+                                        <p:tav tm="0">
+                                          <p:val>
+                                            <p:strVal val="#ppt_x"/>
+                                          </p:val>
+                                        </p:tav>
+                                        <p:tav tm="100000">
+                                          <p:val>
+                                            <p:strVal val="#ppt_x"/>
+                                          </p:val>
+                                        </p:tav>
+                                      </p:tavLst>
+                                    </p:anim>
+                                    <p:anim calcmode="lin" valueType="num">
+                                      <p:cBhvr>
+                                        <p:cTn id="48" dur="500" fill="hold"/>
+                                        <p:tgtEl>
+                                          <p:spTgt spid="13"/>
+                                        </p:tgtEl>
+                                        <p:attrNameLst>
+                                          <p:attrName>ppt_y</p:attrName>
+                                        </p:attrNameLst>
+                                      </p:cBhvr>
+                                      <p:tavLst>
+                                        <p:tav tm="0">
+                                          <p:val>
+                                            <p:strVal val="#ppt_y+.1"/>
+                                          </p:val>
+                                        </p:tav>
+                                        <p:tav tm="100000">
+                                          <p:val>
+                                            <p:strVal val="#ppt_y"/>
+                                          </p:val>
+                                        </p:tav>
+                                      </p:tavLst>
+                                    </p:anim>
+                                  </p:childTnLst>
+                                </p:cTn>
+                              </p:par>
+                            </p:childTnLst>
+                          </p:cTn>
+                        </p:par>
+                      </p:childTnLst>
+                    </p:cTn>
+                  </p:par>
+                  <p:par>
+                    <p:cTn id="57" fill="hold">
+                      <p:stCondLst>
+                        <p:cond delay="indefinite"/>
+                      </p:stCondLst>
+                      <p:childTnLst>
+                        <p:par>
+                          <p:cTn id="58" fill="hold">
+                            <p:stCondLst>
+                              <p:cond delay="0"/>
+                            </p:stCondLst>
+                            <p:childTnLst>
+                              <p:par>
+                                <p:cTn id="56" presetID="53" presetClass="entr" presetSubtype="16" fill="hold" nodeType="clickEffect">
+                                  <p:stCondLst>
+                                    <p:cond delay="0"/>
+                                  </p:stCondLst>
+                                  <p:childTnLst>
+                                    <p:set>
+                                      <p:cBhvr>
+                                        <p:cTn id="52" dur="1" fill="hold">
+                                          <p:stCondLst>
+                                            <p:cond delay="0"/>
+                                          </p:stCondLst>
+                                        </p:cTn>
+                                        <p:tgtEl>
+                                          <p:spTgt spid="16"/>
+                                        </p:tgtEl>
+                                        <p:attrNameLst>
+                                          <p:attrName>style.visibility</p:attrName>
+                                        </p:attrNameLst>
+                                      </p:cBhvr>
+                                      <p:to>
+                                        <p:strVal val="visible"/>
+                                      </p:to>
+                                    </p:set>
+                                    <p:animEffect transition="in" filter="fade">
+                                      <p:cBhvr>
+                                        <p:cTn id="53" dur="500"/>
+                                        <p:tgtEl>
+                                          <p:spTgt spid="16"/>
+                                        </p:tgtEl>
+                                      </p:cBhvr>
+                                    </p:animEffect>
+                                    <p:anim calcmode="lin" valueType="num">
+                                      <p:cBhvr>
+                                        <p:cTn id="54" dur="500" fill="hold"/>
+                                        <p:tgtEl>
+                                          <p:spTgt spid="16"/>
                                         </p:tgtEl>
                                         <p:attrNameLst>
                                           <p:attrName>ppt_w</p:attrName>
@@ -5667,9 +6540,9 @@
                                     </p:anim>
                                     <p:anim calcmode="lin" valueType="num">
                                       <p:cBhvr>
-                                        <p:cTn id="20" dur="500" fill="hold"/>
+                                        <p:cTn id="55" dur="500" fill="hold"/>
                                         <p:tgtEl>
-                                          <p:spTgt spid="11"/>
+                                          <p:spTgt spid="16"/>
                                         </p:tgtEl>
                                         <p:attrNameLst>
                                           <p:attrName>ppt_h</p:attrName>
@@ -5684,6 +6557,204 @@
                                         <p:tav tm="100000">
                                           <p:val>
                                             <p:strVal val="#ppt_h"/>
+                                          </p:val>
+                                        </p:tav>
+                                      </p:tavLst>
+                                    </p:anim>
+                                  </p:childTnLst>
+                                </p:cTn>
+                              </p:par>
+                            </p:childTnLst>
+                          </p:cTn>
+                        </p:par>
+                      </p:childTnLst>
+                    </p:cTn>
+                  </p:par>
+                  <p:par>
+                    <p:cTn id="64" fill="hold">
+                      <p:stCondLst>
+                        <p:cond delay="indefinite"/>
+                      </p:stCondLst>
+                      <p:childTnLst>
+                        <p:par>
+                          <p:cTn id="65" fill="hold">
+                            <p:stCondLst>
+                              <p:cond delay="0"/>
+                            </p:stCondLst>
+                            <p:childTnLst>
+                              <p:par>
+                                <p:cTn id="63" presetID="42" presetClass="entr" presetSubtype="0" fill="hold" nodeType="clickEffect">
+                                  <p:stCondLst>
+                                    <p:cond delay="0"/>
+                                  </p:stCondLst>
+                                  <p:childTnLst>
+                                    <p:set>
+                                      <p:cBhvr>
+                                        <p:cTn id="59" dur="1" fill="hold">
+                                          <p:stCondLst>
+                                            <p:cond delay="0"/>
+                                          </p:stCondLst>
+                                        </p:cTn>
+                                        <p:tgtEl>
+                                          <p:spTgt spid="17"/>
+                                        </p:tgtEl>
+                                        <p:attrNameLst>
+                                          <p:attrName>style.visibility</p:attrName>
+                                        </p:attrNameLst>
+                                      </p:cBhvr>
+                                      <p:to>
+                                        <p:strVal val="visible"/>
+                                      </p:to>
+                                    </p:set>
+                                    <p:animEffect transition="in" filter="fade">
+                                      <p:cBhvr>
+                                        <p:cTn id="60" dur="500"/>
+                                        <p:tgtEl>
+                                          <p:spTgt spid="17"/>
+                                        </p:tgtEl>
+                                      </p:cBhvr>
+                                    </p:animEffect>
+                                    <p:anim calcmode="lin" valueType="num">
+                                      <p:cBhvr>
+                                        <p:cTn id="61" dur="500" fill="hold"/>
+                                        <p:tgtEl>
+                                          <p:spTgt spid="17"/>
+                                        </p:tgtEl>
+                                        <p:attrNameLst>
+                                          <p:attrName>ppt_x</p:attrName>
+                                        </p:attrNameLst>
+                                      </p:cBhvr>
+                                      <p:tavLst>
+                                        <p:tav tm="0">
+                                          <p:val>
+                                            <p:strVal val="#ppt_x"/>
+                                          </p:val>
+                                        </p:tav>
+                                        <p:tav tm="100000">
+                                          <p:val>
+                                            <p:strVal val="#ppt_x"/>
+                                          </p:val>
+                                        </p:tav>
+                                      </p:tavLst>
+                                    </p:anim>
+                                    <p:anim calcmode="lin" valueType="num">
+                                      <p:cBhvr>
+                                        <p:cTn id="62" dur="500" fill="hold"/>
+                                        <p:tgtEl>
+                                          <p:spTgt spid="17"/>
+                                        </p:tgtEl>
+                                        <p:attrNameLst>
+                                          <p:attrName>ppt_y</p:attrName>
+                                        </p:attrNameLst>
+                                      </p:cBhvr>
+                                      <p:tavLst>
+                                        <p:tav tm="0">
+                                          <p:val>
+                                            <p:strVal val="#ppt_y+.1"/>
+                                          </p:val>
+                                        </p:tav>
+                                        <p:tav tm="100000">
+                                          <p:val>
+                                            <p:strVal val="#ppt_y"/>
+                                          </p:val>
+                                        </p:tav>
+                                      </p:tavLst>
+                                    </p:anim>
+                                  </p:childTnLst>
+                                </p:cTn>
+                              </p:par>
+                            </p:childTnLst>
+                          </p:cTn>
+                        </p:par>
+                      </p:childTnLst>
+                    </p:cTn>
+                  </p:par>
+                  <p:par>
+                    <p:cTn id="71" fill="hold">
+                      <p:stCondLst>
+                        <p:cond delay="indefinite"/>
+                      </p:stCondLst>
+                      <p:childTnLst>
+                        <p:par>
+                          <p:cTn id="72" fill="hold">
+                            <p:stCondLst>
+                              <p:cond delay="0"/>
+                            </p:stCondLst>
+                            <p:childTnLst>
+                              <p:par>
+                                <p:cTn id="70" presetID="42" presetClass="entr" presetSubtype="0" fill="hold" nodeType="clickEffect">
+                                  <p:stCondLst>
+                                    <p:cond delay="0"/>
+                                  </p:stCondLst>
+                                  <p:childTnLst>
+                                    <p:set>
+                                      <p:cBhvr>
+                                        <p:cTn id="66" dur="1" fill="hold">
+                                          <p:stCondLst>
+                                            <p:cond delay="0"/>
+                                          </p:stCondLst>
+                                        </p:cTn>
+                                        <p:tgtEl>
+                                          <p:spTgt spid="18"/>
+                                        </p:tgtEl>
+                                        <p:attrNameLst>
+                                          <p:attrName>style.visibility</p:attrName>
+                                        </p:attrNameLst>
+                                      </p:cBhvr>
+                                      <p:to>
+                                        <p:strVal val="visible"/>
+                                      </p:to>
+                                    </p:set>
+                                    <p:animEffect transition="in" filter="fade">
+                                      <p:cBhvr>
+                                        <p:cTn id="67" dur="500"/>
+                                        <p:tgtEl>
+                                          <p:spTgt spid="18"/>
+                                        </p:tgtEl>
+                                      </p:cBhvr>
+                                    </p:animEffect>
+                                    <p:anim calcmode="lin" valueType="num">
+                                      <p:cBhvr>
+                                        <p:cTn id="68" dur="500" fill="hold"/>
+                                        <p:tgtEl>
+                                          <p:spTgt spid="18"/>
+                                        </p:tgtEl>
+                                        <p:attrNameLst>
+                                          <p:attrName>ppt_x</p:attrName>
+                                        </p:attrNameLst>
+                                      </p:cBhvr>
+                                      <p:tavLst>
+                                        <p:tav tm="0">
+                                          <p:val>
+                                            <p:strVal val="#ppt_x"/>
+                                          </p:val>
+                                        </p:tav>
+                                        <p:tav tm="100000">
+                                          <p:val>
+                                            <p:strVal val="#ppt_x"/>
+                                          </p:val>
+                                        </p:tav>
+                                      </p:tavLst>
+                                    </p:anim>
+                                    <p:anim calcmode="lin" valueType="num">
+                                      <p:cBhvr>
+                                        <p:cTn id="69" dur="500" fill="hold"/>
+                                        <p:tgtEl>
+                                          <p:spTgt spid="18"/>
+                                        </p:tgtEl>
+                                        <p:attrNameLst>
+                                          <p:attrName>ppt_y</p:attrName>
+                                        </p:attrNameLst>
+                                      </p:cBhvr>
+                                      <p:tavLst>
+                                        <p:tav tm="0">
+                                          <p:val>
+                                            <p:strVal val="#ppt_y+.1"/>
+                                          </p:val>
+                                        </p:tav>
+                                        <p:tav tm="100000">
+                                          <p:val>
+                                            <p:strVal val="#ppt_y"/>
                                           </p:val>
                                         </p:tav>
                                       </p:tavLst>

--- a/IEP/t2-lesson4-comparing-linear-functions-IEP.pptx
+++ b/IEP/t2-lesson4-comparing-linear-functions-IEP.pptx
@@ -8559,7 +8559,7 @@
         <p:spPr>
           <a:xfrm>
             <a:off x="6210148" y="4034028"/>
-            <a:ext cx="5295748" cy="2282190"/>
+            <a:ext cx="5295748" cy="2739390"/>
           </a:xfrm>
           <a:prstGeom prst="roundRect">
             <a:avLst>
@@ -8599,7 +8599,7 @@
         <p:spPr>
           <a:xfrm>
             <a:off x="6419698" y="4205478"/>
-            <a:ext cx="4876648" cy="534924"/>
+            <a:ext cx="4876648" cy="774954"/>
           </a:xfrm>
           <a:prstGeom prst="rect">
             <a:avLst/>
@@ -8638,17 +8638,17 @@
                 <a:latin typeface="Segoe UI"/>
                 <a:cs typeface="Segoe UI"/>
               </a:rPr>
-              <a:t xml:space="preserve"> The ratio of 9th-graders to 10th-graders is </a:t>
-            </a:r>
-            <a:r>
-              <a:rPr lang="en-US" sz="1575" dirty="0">
+              <a:t xml:space="preserve"> Function </a:t>
+            </a:r>
+            <a:r>
+              <a:rPr lang="en-US" sz="1575" dirty="0" i="1">
                 <a:solidFill>
                   <a:srgbClr val="16171D"/>
                 </a:solidFill>
                 <a:latin typeface="Cambria"/>
                 <a:cs typeface="Cambria"/>
               </a:rPr>
-              <a:t xml:space="preserve">1 : 1</a:t>
+              <a:t xml:space="preserve">p</a:t>
             </a:r>
             <a:r>
               <a:rPr lang="en-US" sz="1575" dirty="0">
@@ -8658,7 +8658,67 @@
                 <a:latin typeface="Segoe UI"/>
                 <a:cs typeface="Segoe UI"/>
               </a:rPr>
-              <a:t xml:space="preserve">. What is the slope of this relationship?</a:t>
+              <a:t xml:space="preserve"> passes through </a:t>
+            </a:r>
+            <a:r>
+              <a:rPr lang="en-US" sz="1575" dirty="0">
+                <a:solidFill>
+                  <a:srgbClr val="16171D"/>
+                </a:solidFill>
+                <a:latin typeface="Cambria"/>
+                <a:cs typeface="Cambria"/>
+              </a:rPr>
+              <a:t xml:space="preserve">(0, 1)</a:t>
+            </a:r>
+            <a:r>
+              <a:rPr lang="en-US" sz="1575" dirty="0">
+                <a:solidFill>
+                  <a:srgbClr val="16171D"/>
+                </a:solidFill>
+                <a:latin typeface="Segoe UI"/>
+                <a:cs typeface="Segoe UI"/>
+              </a:rPr>
+              <a:t xml:space="preserve"> and </a:t>
+            </a:r>
+            <a:r>
+              <a:rPr lang="en-US" sz="1575" dirty="0">
+                <a:solidFill>
+                  <a:srgbClr val="16171D"/>
+                </a:solidFill>
+                <a:latin typeface="Cambria"/>
+                <a:cs typeface="Cambria"/>
+              </a:rPr>
+              <a:t xml:space="preserve">(4, 4)</a:t>
+            </a:r>
+            <a:r>
+              <a:rPr lang="en-US" sz="1575" dirty="0">
+                <a:solidFill>
+                  <a:srgbClr val="16171D"/>
+                </a:solidFill>
+                <a:latin typeface="Segoe UI"/>
+                <a:cs typeface="Segoe UI"/>
+              </a:rPr>
+              <a:t xml:space="preserve">. Which function has a greater rate of change than function </a:t>
+            </a:r>
+            <a:r>
+              <a:rPr lang="en-US" sz="1575" dirty="0" i="1">
+                <a:solidFill>
+                  <a:srgbClr val="16171D"/>
+                </a:solidFill>
+                <a:latin typeface="Cambria"/>
+                <a:cs typeface="Cambria"/>
+              </a:rPr>
+              <a:t xml:space="preserve">p</a:t>
+            </a:r>
+            <a:r>
+              <a:rPr lang="en-US" sz="1575" dirty="0">
+                <a:solidFill>
+                  <a:srgbClr val="16171D"/>
+                </a:solidFill>
+                <a:latin typeface="Segoe UI"/>
+                <a:cs typeface="Segoe UI"/>
+              </a:rPr>
+              <a:t xml:space="preserve">?</a:t>
             </a:r>
             <a:endParaRPr lang="en-US" sz="1575" dirty="0"/>
           </a:p>
@@ -8672,7 +8732,7 @@
         </p:nvSpPr>
         <p:spPr>
           <a:xfrm>
-            <a:off x="6419698" y="4778502"/>
+            <a:off x="6419698" y="5018532"/>
             <a:ext cx="4876648" cy="294894"/>
           </a:xfrm>
           <a:prstGeom prst="rect">
@@ -8712,7 +8772,7 @@
                 <a:latin typeface="Segoe UI"/>
                 <a:cs typeface="Segoe UI"/>
               </a:rPr>
-              <a:t xml:space="preserve"> slope = change in </a:t>
+              <a:t xml:space="preserve"> </a:t>
             </a:r>
             <a:r>
               <a:rPr lang="en-US" sz="1575" dirty="0" i="1">
@@ -8722,27 +8782,97 @@
                 <a:latin typeface="Cambria"/>
                 <a:cs typeface="Cambria"/>
               </a:rPr>
-              <a:t xml:space="preserve">y</a:t>
+              <a:t xml:space="preserve">m</a:t>
             </a:r>
             <a:r>
               <a:rPr lang="en-US" sz="1575" dirty="0">
-                <a:solidFill>
-                  <a:srgbClr val="16171D"/>
-                </a:solidFill>
-                <a:latin typeface="Segoe UI"/>
-                <a:cs typeface="Segoe UI"/>
-              </a:rPr>
-              <a:t xml:space="preserve"> ÷ change in </a:t>
-            </a:r>
-            <a:r>
-              <a:rPr lang="en-US" sz="1575" dirty="0" i="1">
                 <a:solidFill>
                   <a:srgbClr val="16171D"/>
                 </a:solidFill>
                 <a:latin typeface="Cambria"/>
                 <a:cs typeface="Cambria"/>
               </a:rPr>
+              <a:t xml:space="preserve"> = (</a:t>
+            </a:r>
+            <a:r>
+              <a:rPr lang="en-US" sz="1575" dirty="0" i="1">
+                <a:solidFill>
+                  <a:srgbClr val="16171D"/>
+                </a:solidFill>
+                <a:latin typeface="Cambria"/>
+                <a:cs typeface="Cambria"/>
+              </a:rPr>
+              <a:t xml:space="preserve">y</a:t>
+            </a:r>
+            <a:r>
+              <a:rPr lang="en-US" sz="1575" dirty="0">
+                <a:solidFill>
+                  <a:srgbClr val="16171D"/>
+                </a:solidFill>
+                <a:latin typeface="Cambria"/>
+                <a:cs typeface="Cambria"/>
+              </a:rPr>
+              <a:t xml:space="preserve">₂ − </a:t>
+            </a:r>
+            <a:r>
+              <a:rPr lang="en-US" sz="1575" dirty="0" i="1">
+                <a:solidFill>
+                  <a:srgbClr val="16171D"/>
+                </a:solidFill>
+                <a:latin typeface="Cambria"/>
+                <a:cs typeface="Cambria"/>
+              </a:rPr>
+              <a:t xml:space="preserve">y</a:t>
+            </a:r>
+            <a:r>
+              <a:rPr lang="en-US" sz="1575" dirty="0">
+                <a:solidFill>
+                  <a:srgbClr val="16171D"/>
+                </a:solidFill>
+                <a:latin typeface="Cambria"/>
+                <a:cs typeface="Cambria"/>
+              </a:rPr>
+              <a:t xml:space="preserve">₁) ÷ (</a:t>
+            </a:r>
+            <a:r>
+              <a:rPr lang="en-US" sz="1575" dirty="0" i="1">
+                <a:solidFill>
+                  <a:srgbClr val="16171D"/>
+                </a:solidFill>
+                <a:latin typeface="Cambria"/>
+                <a:cs typeface="Cambria"/>
+              </a:rPr>
               <a:t xml:space="preserve">x</a:t>
+            </a:r>
+            <a:r>
+              <a:rPr lang="en-US" sz="1575" dirty="0">
+                <a:solidFill>
+                  <a:srgbClr val="16171D"/>
+                </a:solidFill>
+                <a:latin typeface="Cambria"/>
+                <a:cs typeface="Cambria"/>
+              </a:rPr>
+              <a:t xml:space="preserve">₂ − </a:t>
+            </a:r>
+            <a:r>
+              <a:rPr lang="en-US" sz="1575" dirty="0" i="1">
+                <a:solidFill>
+                  <a:srgbClr val="16171D"/>
+                </a:solidFill>
+                <a:latin typeface="Cambria"/>
+                <a:cs typeface="Cambria"/>
+              </a:rPr>
+              <a:t xml:space="preserve">x</a:t>
+            </a:r>
+            <a:r>
+              <a:rPr lang="en-US" sz="1575" dirty="0">
+                <a:solidFill>
+                  <a:srgbClr val="16171D"/>
+                </a:solidFill>
+                <a:latin typeface="Cambria"/>
+                <a:cs typeface="Cambria"/>
+              </a:rPr>
+              <a:t xml:space="preserve">₁)</a:t>
             </a:r>
             <a:endParaRPr lang="en-US" sz="1575" dirty="0"/>
           </a:p>
@@ -8756,8 +8886,8 @@
         </p:nvSpPr>
         <p:spPr>
           <a:xfrm>
-            <a:off x="6419698" y="5111496"/>
-            <a:ext cx="4876648" cy="1033272"/>
+            <a:off x="6419698" y="5351526"/>
+            <a:ext cx="4876648" cy="1250442"/>
           </a:xfrm>
           <a:prstGeom prst="roundRect">
             <a:avLst>
@@ -8793,14 +8923,44 @@
               <a:t xml:space="preserve">ANSWER   </a:t>
             </a:r>
             <a:r>
-              <a:rPr lang="en-US" sz="1425" dirty="0" b="1">
+              <a:rPr lang="en-US" sz="1425" dirty="0" b="1" i="1">
                 <a:solidFill>
                   <a:srgbClr val="16171D"/>
                 </a:solidFill>
                 <a:latin typeface="Cambria"/>
                 <a:cs typeface="Cambria"/>
               </a:rPr>
-              <a:t xml:space="preserve">1</a:t>
+              <a:t xml:space="preserve">y</a:t>
+            </a:r>
+            <a:r>
+              <a:rPr lang="en-US" sz="1425" dirty="0" b="1">
+                <a:solidFill>
+                  <a:srgbClr val="16171D"/>
+                </a:solidFill>
+                <a:latin typeface="Cambria"/>
+                <a:cs typeface="Cambria"/>
+              </a:rPr>
+              <a:t xml:space="preserve"> = </a:t>
+            </a:r>
+            <a:r>
+              <a:rPr lang="en-US" sz="1425" dirty="0" b="1" i="1">
+                <a:solidFill>
+                  <a:srgbClr val="16171D"/>
+                </a:solidFill>
+                <a:latin typeface="Cambria"/>
+                <a:cs typeface="Cambria"/>
+              </a:rPr>
+              <a:t xml:space="preserve">x</a:t>
+            </a:r>
+            <a:r>
+              <a:rPr lang="en-US" sz="1425" dirty="0" b="1">
+                <a:solidFill>
+                  <a:srgbClr val="16171D"/>
+                </a:solidFill>
+                <a:latin typeface="Cambria"/>
+                <a:cs typeface="Cambria"/>
+              </a:rPr>
+              <a:t xml:space="preserve"> − 2</a:t>
             </a:r>
             <a:br>
               <a:rPr lang="en-US" sz="1425" dirty="0">
@@ -8829,17 +8989,17 @@
                 <a:latin typeface="Segoe UI"/>
                 <a:cs typeface="Segoe UI"/>
               </a:rPr>
-              <a:t xml:space="preserve"> </a:t>
-            </a:r>
-            <a:r>
-              <a:rPr lang="en-US" sz="1425" dirty="0">
+              <a:t xml:space="preserve"> Slope of </a:t>
+            </a:r>
+            <a:r>
+              <a:rPr lang="en-US" sz="1425" dirty="0" i="1">
                 <a:solidFill>
                   <a:srgbClr val="16171D"/>
                 </a:solidFill>
                 <a:latin typeface="Cambria"/>
                 <a:cs typeface="Cambria"/>
               </a:rPr>
-              <a:t xml:space="preserve">1 : 1</a:t>
+              <a:t xml:space="preserve">p</a:t>
             </a:r>
             <a:r>
               <a:rPr lang="en-US" sz="1425" dirty="0">
@@ -8849,7 +9009,27 @@
                 <a:latin typeface="Segoe UI"/>
                 <a:cs typeface="Segoe UI"/>
               </a:rPr>
-              <a:t xml:space="preserve"> means 1 tenth-grader for every 1 ninth-grader.</a:t>
+              <a:t xml:space="preserve">: </a:t>
+            </a:r>
+            <a:r>
+              <a:rPr lang="en-US" sz="1425" dirty="0">
+                <a:solidFill>
+                  <a:srgbClr val="16171D"/>
+                </a:solidFill>
+                <a:latin typeface="Cambria"/>
+                <a:cs typeface="Cambria"/>
+              </a:rPr>
+              <a:t xml:space="preserve">(4 − 1) ÷ (4 − 0) = 3/4 = 0.75</a:t>
+            </a:r>
+            <a:r>
+              <a:rPr lang="en-US" sz="1425" dirty="0">
+                <a:solidFill>
+                  <a:srgbClr val="16171D"/>
+                </a:solidFill>
+                <a:latin typeface="Segoe UI"/>
+                <a:cs typeface="Segoe UI"/>
+              </a:rPr>
+              <a:t xml:space="preserve">.</a:t>
             </a:r>
             <a:br>
               <a:rPr lang="en-US" sz="1425" dirty="0">
@@ -8878,7 +9058,7 @@
                 <a:latin typeface="Segoe UI"/>
                 <a:cs typeface="Segoe UI"/>
               </a:rPr>
-              <a:t xml:space="preserve"> </a:t>
+              <a:t xml:space="preserve"> Compare each slope with 0.75: </a:t>
             </a:r>
             <a:r>
               <a:rPr lang="en-US" sz="1425" dirty="0">
@@ -8888,7 +9068,7 @@
                 <a:latin typeface="Cambria"/>
                 <a:cs typeface="Cambria"/>
               </a:rPr>
-              <a:t xml:space="preserve">1 ÷ 1 = 1</a:t>
+              <a:t xml:space="preserve">1</a:t>
             </a:r>
             <a:r>
               <a:rPr lang="en-US" sz="1425" dirty="0">
@@ -8898,17 +9078,27 @@
                 <a:latin typeface="Segoe UI"/>
                 <a:cs typeface="Segoe UI"/>
               </a:rPr>
-              <a:t xml:space="preserve">, so </a:t>
-            </a:r>
-            <a:r>
-              <a:rPr lang="en-US" sz="1425" dirty="0" i="1">
+              <a:t xml:space="preserve">, </a:t>
+            </a:r>
+            <a:r>
+              <a:rPr lang="en-US" sz="1425" dirty="0">
                 <a:solidFill>
                   <a:srgbClr val="16171D"/>
                 </a:solidFill>
                 <a:latin typeface="Cambria"/>
                 <a:cs typeface="Cambria"/>
               </a:rPr>
-              <a:t xml:space="preserve">y</a:t>
+              <a:t xml:space="preserve">0.5</a:t>
+            </a:r>
+            <a:r>
+              <a:rPr lang="en-US" sz="1425" dirty="0">
+                <a:solidFill>
+                  <a:srgbClr val="16171D"/>
+                </a:solidFill>
+                <a:latin typeface="Segoe UI"/>
+                <a:cs typeface="Segoe UI"/>
+              </a:rPr>
+              <a:t xml:space="preserve">, </a:t>
             </a:r>
             <a:r>
               <a:rPr lang="en-US" sz="1425" dirty="0">
@@ -8918,16 +9108,36 @@
                 <a:latin typeface="Cambria"/>
                 <a:cs typeface="Cambria"/>
               </a:rPr>
-              <a:t xml:space="preserve"> = </a:t>
-            </a:r>
-            <a:r>
-              <a:rPr lang="en-US" sz="1425" dirty="0" i="1">
+              <a:t xml:space="preserve">0.75</a:t>
+            </a:r>
+            <a:r>
+              <a:rPr lang="en-US" sz="1425" dirty="0">
+                <a:solidFill>
+                  <a:srgbClr val="16171D"/>
+                </a:solidFill>
+                <a:latin typeface="Segoe UI"/>
+                <a:cs typeface="Segoe UI"/>
+              </a:rPr>
+              <a:t xml:space="preserve"> (</a:t>
+            </a:r>
+            <a:r>
+              <a:rPr lang="en-US" sz="1425" dirty="0">
                 <a:solidFill>
                   <a:srgbClr val="16171D"/>
                 </a:solidFill>
                 <a:latin typeface="Cambria"/>
                 <a:cs typeface="Cambria"/>
               </a:rPr>
+              <a:t xml:space="preserve">3</a:t>
+            </a:r>
+            <a:r>
+              <a:rPr lang="en-US" sz="1425" dirty="0" i="1">
+                <a:solidFill>
+                  <a:srgbClr val="16171D"/>
+                </a:solidFill>
+                <a:latin typeface="Cambria"/>
+                <a:cs typeface="Cambria"/>
+              </a:rPr>
               <a:t xml:space="preserve">x</a:t>
             </a:r>
             <a:r>
@@ -8935,10 +9145,189 @@
                 <a:solidFill>
                   <a:srgbClr val="16171D"/>
                 </a:solidFill>
-                <a:latin typeface="Segoe UI"/>
-                <a:cs typeface="Segoe UI"/>
-              </a:rPr>
-              <a:t xml:space="preserve"> and the slope is 1.</a:t>
+                <a:latin typeface="Cambria"/>
+                <a:cs typeface="Cambria"/>
+              </a:rPr>
+              <a:t xml:space="preserve"> − 4</a:t>
+            </a:r>
+            <a:r>
+              <a:rPr lang="en-US" sz="1425" dirty="0" i="1">
+                <a:solidFill>
+                  <a:srgbClr val="16171D"/>
+                </a:solidFill>
+                <a:latin typeface="Cambria"/>
+                <a:cs typeface="Cambria"/>
+              </a:rPr>
+              <a:t xml:space="preserve">y</a:t>
+            </a:r>
+            <a:r>
+              <a:rPr lang="en-US" sz="1425" dirty="0">
+                <a:solidFill>
+                  <a:srgbClr val="16171D"/>
+                </a:solidFill>
+                <a:latin typeface="Cambria"/>
+                <a:cs typeface="Cambria"/>
+              </a:rPr>
+              <a:t xml:space="preserve"> = 8</a:t>
+            </a:r>
+            <a:r>
+              <a:rPr lang="en-US" sz="1425" dirty="0">
+                <a:solidFill>
+                  <a:srgbClr val="16171D"/>
+                </a:solidFill>
+                <a:latin typeface="Segoe UI"/>
+                <a:cs typeface="Segoe UI"/>
+              </a:rPr>
+              <a:t xml:space="preserve"> is </a:t>
+            </a:r>
+            <a:r>
+              <a:rPr lang="en-US" sz="1425" dirty="0" i="1">
+                <a:solidFill>
+                  <a:srgbClr val="16171D"/>
+                </a:solidFill>
+                <a:latin typeface="Cambria"/>
+                <a:cs typeface="Cambria"/>
+              </a:rPr>
+              <a:t xml:space="preserve">y</a:t>
+            </a:r>
+            <a:r>
+              <a:rPr lang="en-US" sz="1425" dirty="0">
+                <a:solidFill>
+                  <a:srgbClr val="16171D"/>
+                </a:solidFill>
+                <a:latin typeface="Cambria"/>
+                <a:cs typeface="Cambria"/>
+              </a:rPr>
+              <a:t xml:space="preserve"> = ¾</a:t>
+            </a:r>
+            <a:r>
+              <a:rPr lang="en-US" sz="1425" dirty="0" i="1">
+                <a:solidFill>
+                  <a:srgbClr val="16171D"/>
+                </a:solidFill>
+                <a:latin typeface="Cambria"/>
+                <a:cs typeface="Cambria"/>
+              </a:rPr>
+              <a:t xml:space="preserve">x</a:t>
+            </a:r>
+            <a:r>
+              <a:rPr lang="en-US" sz="1425" dirty="0">
+                <a:solidFill>
+                  <a:srgbClr val="16171D"/>
+                </a:solidFill>
+                <a:latin typeface="Cambria"/>
+                <a:cs typeface="Cambria"/>
+              </a:rPr>
+              <a:t xml:space="preserve"> − 2</a:t>
+            </a:r>
+            <a:r>
+              <a:rPr lang="en-US" sz="1425" dirty="0">
+                <a:solidFill>
+                  <a:srgbClr val="16171D"/>
+                </a:solidFill>
+                <a:latin typeface="Segoe UI"/>
+                <a:cs typeface="Segoe UI"/>
+              </a:rPr>
+              <a:t xml:space="preserve">), </a:t>
+            </a:r>
+            <a:r>
+              <a:rPr lang="en-US" sz="1425" dirty="0">
+                <a:solidFill>
+                  <a:srgbClr val="16171D"/>
+                </a:solidFill>
+                <a:latin typeface="Cambria"/>
+                <a:cs typeface="Cambria"/>
+              </a:rPr>
+              <a:t xml:space="preserve">0.7</a:t>
+            </a:r>
+            <a:r>
+              <a:rPr lang="en-US" sz="1425" dirty="0">
+                <a:solidFill>
+                  <a:srgbClr val="16171D"/>
+                </a:solidFill>
+                <a:latin typeface="Segoe UI"/>
+                <a:cs typeface="Segoe UI"/>
+              </a:rPr>
+              <a:t xml:space="preserve">.</a:t>
+            </a:r>
+            <a:br>
+              <a:rPr lang="en-US" sz="1425" dirty="0">
+                <a:solidFill>
+                  <a:srgbClr val="16171D"/>
+                </a:solidFill>
+                <a:latin typeface="Segoe UI"/>
+                <a:cs typeface="Segoe UI"/>
+              </a:rPr>
+            </a:br>
+            <a:r>
+              <a:rPr lang="en-US" sz="1425" dirty="0" b="1">
+                <a:solidFill>
+                  <a:srgbClr val="16171D"/>
+                </a:solidFill>
+                <a:latin typeface="Segoe UI"/>
+                <a:cs typeface="Segoe UI"/>
+              </a:rPr>
+              <a:t xml:space="preserve">3.</a:t>
+            </a:r>
+            <a:r>
+              <a:rPr lang="en-US" sz="1425" dirty="0">
+                <a:solidFill>
+                  <a:srgbClr val="16171D"/>
+                </a:solidFill>
+                <a:latin typeface="Segoe UI"/>
+                <a:cs typeface="Segoe UI"/>
+              </a:rPr>
+              <a:t xml:space="preserve"> Only 1 is greater: </a:t>
+            </a:r>
+            <a:r>
+              <a:rPr lang="en-US" sz="1425" dirty="0" i="1">
+                <a:solidFill>
+                  <a:srgbClr val="16171D"/>
+                </a:solidFill>
+                <a:latin typeface="Cambria"/>
+                <a:cs typeface="Cambria"/>
+              </a:rPr>
+              <a:t xml:space="preserve">y</a:t>
+            </a:r>
+            <a:r>
+              <a:rPr lang="en-US" sz="1425" dirty="0">
+                <a:solidFill>
+                  <a:srgbClr val="16171D"/>
+                </a:solidFill>
+                <a:latin typeface="Cambria"/>
+                <a:cs typeface="Cambria"/>
+              </a:rPr>
+              <a:t xml:space="preserve"> = </a:t>
+            </a:r>
+            <a:r>
+              <a:rPr lang="en-US" sz="1425" dirty="0" i="1">
+                <a:solidFill>
+                  <a:srgbClr val="16171D"/>
+                </a:solidFill>
+                <a:latin typeface="Cambria"/>
+                <a:cs typeface="Cambria"/>
+              </a:rPr>
+              <a:t xml:space="preserve">x</a:t>
+            </a:r>
+            <a:r>
+              <a:rPr lang="en-US" sz="1425" dirty="0">
+                <a:solidFill>
+                  <a:srgbClr val="16171D"/>
+                </a:solidFill>
+                <a:latin typeface="Cambria"/>
+                <a:cs typeface="Cambria"/>
+              </a:rPr>
+              <a:t xml:space="preserve"> − 2</a:t>
+            </a:r>
+            <a:r>
+              <a:rPr lang="en-US" sz="1425" dirty="0">
+                <a:solidFill>
+                  <a:srgbClr val="16171D"/>
+                </a:solidFill>
+                <a:latin typeface="Segoe UI"/>
+                <a:cs typeface="Segoe UI"/>
+              </a:rPr>
+              <a:t xml:space="preserve">.</a:t>
             </a:r>
             <a:endParaRPr lang="en-US" sz="1425" dirty="0"/>
           </a:p>
@@ -10790,7 +11179,7 @@
         <p:spPr>
           <a:xfrm>
             <a:off x="6210148" y="4034028"/>
-            <a:ext cx="5295748" cy="2522220"/>
+            <a:ext cx="5295748" cy="2739390"/>
           </a:xfrm>
           <a:prstGeom prst="roundRect">
             <a:avLst>
@@ -10830,7 +11219,7 @@
         <p:spPr>
           <a:xfrm>
             <a:off x="6419698" y="4205478"/>
-            <a:ext cx="4876648" cy="534924"/>
+            <a:ext cx="4876648" cy="774954"/>
           </a:xfrm>
           <a:prstGeom prst="rect">
             <a:avLst/>
@@ -10869,7 +11258,67 @@
                 <a:latin typeface="Segoe UI"/>
                 <a:cs typeface="Segoe UI"/>
               </a:rPr>
-              <a:t xml:space="preserve"> Miguel started with $0 and had $80 after 4 months. How much did he save each month?</a:t>
+              <a:t xml:space="preserve"> A 200-gallon tank drains 10 gallons each minute: </a:t>
+            </a:r>
+            <a:r>
+              <a:rPr lang="en-US" sz="1575" dirty="0" i="1">
+                <a:solidFill>
+                  <a:srgbClr val="16171D"/>
+                </a:solidFill>
+                <a:latin typeface="Cambria"/>
+                <a:cs typeface="Cambria"/>
+              </a:rPr>
+              <a:t xml:space="preserve">w</a:t>
+            </a:r>
+            <a:r>
+              <a:rPr lang="en-US" sz="1575" dirty="0">
+                <a:solidFill>
+                  <a:srgbClr val="16171D"/>
+                </a:solidFill>
+                <a:latin typeface="Cambria"/>
+                <a:cs typeface="Cambria"/>
+              </a:rPr>
+              <a:t xml:space="preserve">(</a:t>
+            </a:r>
+            <a:r>
+              <a:rPr lang="en-US" sz="1575" dirty="0" i="1">
+                <a:solidFill>
+                  <a:srgbClr val="16171D"/>
+                </a:solidFill>
+                <a:latin typeface="Cambria"/>
+                <a:cs typeface="Cambria"/>
+              </a:rPr>
+              <a:t xml:space="preserve">t</a:t>
+            </a:r>
+            <a:r>
+              <a:rPr lang="en-US" sz="1575" dirty="0">
+                <a:solidFill>
+                  <a:srgbClr val="16171D"/>
+                </a:solidFill>
+                <a:latin typeface="Cambria"/>
+                <a:cs typeface="Cambria"/>
+              </a:rPr>
+              <a:t xml:space="preserve">) = 200 − 10</a:t>
+            </a:r>
+            <a:r>
+              <a:rPr lang="en-US" sz="1575" dirty="0" i="1">
+                <a:solidFill>
+                  <a:srgbClr val="16171D"/>
+                </a:solidFill>
+                <a:latin typeface="Cambria"/>
+                <a:cs typeface="Cambria"/>
+              </a:rPr>
+              <a:t xml:space="preserve">t</a:t>
+            </a:r>
+            <a:r>
+              <a:rPr lang="en-US" sz="1575" dirty="0">
+                <a:solidFill>
+                  <a:srgbClr val="16171D"/>
+                </a:solidFill>
+                <a:latin typeface="Segoe UI"/>
+                <a:cs typeface="Segoe UI"/>
+              </a:rPr>
+              <a:t xml:space="preserve">. What is the range of the function for this situation?</a:t>
             </a:r>
             <a:endParaRPr lang="en-US" sz="1575" dirty="0"/>
           </a:p>
@@ -10883,8 +11332,8 @@
         </p:nvSpPr>
         <p:spPr>
           <a:xfrm>
-            <a:off x="6419698" y="4778502"/>
-            <a:ext cx="4876648" cy="534924"/>
+            <a:off x="6419698" y="5018532"/>
+            <a:ext cx="4876648" cy="294894"/>
           </a:xfrm>
           <a:prstGeom prst="rect">
             <a:avLst/>
@@ -10923,7 +11372,7 @@
                 <a:latin typeface="Segoe UI"/>
                 <a:cs typeface="Segoe UI"/>
               </a:rPr>
-              <a:t xml:space="preserve"> rate = change in amount ÷ change in time</a:t>
+              <a:t xml:space="preserve"> range = the outputs</a:t>
             </a:r>
             <a:endParaRPr lang="en-US" sz="1575" dirty="0"/>
           </a:p>
@@ -10938,7 +11387,7 @@
         <p:spPr>
           <a:xfrm>
             <a:off x="6419698" y="5351526"/>
-            <a:ext cx="4251503" cy="1033272"/>
+            <a:ext cx="4876648" cy="1250442"/>
           </a:xfrm>
           <a:prstGeom prst="roundRect">
             <a:avLst>
@@ -10978,10 +11427,50 @@
                 <a:solidFill>
                   <a:srgbClr val="16171D"/>
                 </a:solidFill>
-                <a:latin typeface="Segoe UI"/>
-                <a:cs typeface="Segoe UI"/>
-              </a:rPr>
-              <a:t xml:space="preserve">$20</a:t>
+                <a:latin typeface="Cambria"/>
+                <a:cs typeface="Cambria"/>
+              </a:rPr>
+              <a:t xml:space="preserve">0 ≤ </a:t>
+            </a:r>
+            <a:r>
+              <a:rPr lang="en-US" sz="1425" dirty="0" b="1" i="1">
+                <a:solidFill>
+                  <a:srgbClr val="16171D"/>
+                </a:solidFill>
+                <a:latin typeface="Cambria"/>
+                <a:cs typeface="Cambria"/>
+              </a:rPr>
+              <a:t xml:space="preserve">w</a:t>
+            </a:r>
+            <a:r>
+              <a:rPr lang="en-US" sz="1425" dirty="0" b="1">
+                <a:solidFill>
+                  <a:srgbClr val="16171D"/>
+                </a:solidFill>
+                <a:latin typeface="Cambria"/>
+                <a:cs typeface="Cambria"/>
+              </a:rPr>
+              <a:t xml:space="preserve">(</a:t>
+            </a:r>
+            <a:r>
+              <a:rPr lang="en-US" sz="1425" dirty="0" b="1" i="1">
+                <a:solidFill>
+                  <a:srgbClr val="16171D"/>
+                </a:solidFill>
+                <a:latin typeface="Cambria"/>
+                <a:cs typeface="Cambria"/>
+              </a:rPr>
+              <a:t xml:space="preserve">t</a:t>
+            </a:r>
+            <a:r>
+              <a:rPr lang="en-US" sz="1425" dirty="0" b="1">
+                <a:solidFill>
+                  <a:srgbClr val="16171D"/>
+                </a:solidFill>
+                <a:latin typeface="Cambria"/>
+                <a:cs typeface="Cambria"/>
+              </a:rPr>
+              <a:t xml:space="preserve">) ≤ 200</a:t>
             </a:r>
             <a:br>
               <a:rPr lang="en-US" sz="1425" dirty="0">
@@ -11010,27 +11499,57 @@
                 <a:latin typeface="Segoe UI"/>
                 <a:cs typeface="Segoe UI"/>
               </a:rPr>
-              <a:t xml:space="preserve"> Change in money: </a:t>
-            </a:r>
-            <a:r>
-              <a:rPr lang="en-US" sz="1425" dirty="0">
+              <a:t xml:space="preserve"> The output is </a:t>
+            </a:r>
+            <a:r>
+              <a:rPr lang="en-US" sz="1425" dirty="0" i="1">
                 <a:solidFill>
                   <a:srgbClr val="16171D"/>
                 </a:solidFill>
                 <a:latin typeface="Cambria"/>
                 <a:cs typeface="Cambria"/>
               </a:rPr>
-              <a:t xml:space="preserve">80 − 0 = 80</a:t>
+              <a:t xml:space="preserve">w</a:t>
             </a:r>
             <a:r>
               <a:rPr lang="en-US" sz="1425" dirty="0">
                 <a:solidFill>
                   <a:srgbClr val="16171D"/>
                 </a:solidFill>
-                <a:latin typeface="Segoe UI"/>
-                <a:cs typeface="Segoe UI"/>
-              </a:rPr>
-              <a:t xml:space="preserve"> dollars.</a:t>
+                <a:latin typeface="Cambria"/>
+                <a:cs typeface="Cambria"/>
+              </a:rPr>
+              <a:t xml:space="preserve">(</a:t>
+            </a:r>
+            <a:r>
+              <a:rPr lang="en-US" sz="1425" dirty="0" i="1">
+                <a:solidFill>
+                  <a:srgbClr val="16171D"/>
+                </a:solidFill>
+                <a:latin typeface="Cambria"/>
+                <a:cs typeface="Cambria"/>
+              </a:rPr>
+              <a:t xml:space="preserve">t</a:t>
+            </a:r>
+            <a:r>
+              <a:rPr lang="en-US" sz="1425" dirty="0">
+                <a:solidFill>
+                  <a:srgbClr val="16171D"/>
+                </a:solidFill>
+                <a:latin typeface="Cambria"/>
+                <a:cs typeface="Cambria"/>
+              </a:rPr>
+              <a:t xml:space="preserve">)</a:t>
+            </a:r>
+            <a:r>
+              <a:rPr lang="en-US" sz="1425" dirty="0">
+                <a:solidFill>
+                  <a:srgbClr val="16171D"/>
+                </a:solidFill>
+                <a:latin typeface="Segoe UI"/>
+                <a:cs typeface="Segoe UI"/>
+              </a:rPr>
+              <a:t xml:space="preserve">, the gallons left.</a:t>
             </a:r>
             <a:br>
               <a:rPr lang="en-US" sz="1425" dirty="0">
@@ -11059,7 +11578,77 @@
                 <a:latin typeface="Segoe UI"/>
                 <a:cs typeface="Segoe UI"/>
               </a:rPr>
-              <a:t xml:space="preserve"> Change in time: 4 months.</a:t>
+              <a:t xml:space="preserve"> Most: 200 gallons at the start. Least: 0 gallons, when </a:t>
+            </a:r>
+            <a:r>
+              <a:rPr lang="en-US" sz="1425" dirty="0">
+                <a:solidFill>
+                  <a:srgbClr val="16171D"/>
+                </a:solidFill>
+                <a:latin typeface="Cambria"/>
+                <a:cs typeface="Cambria"/>
+              </a:rPr>
+              <a:t xml:space="preserve">200 − 10</a:t>
+            </a:r>
+            <a:r>
+              <a:rPr lang="en-US" sz="1425" dirty="0" i="1">
+                <a:solidFill>
+                  <a:srgbClr val="16171D"/>
+                </a:solidFill>
+                <a:latin typeface="Cambria"/>
+                <a:cs typeface="Cambria"/>
+              </a:rPr>
+              <a:t xml:space="preserve">t</a:t>
+            </a:r>
+            <a:r>
+              <a:rPr lang="en-US" sz="1425" dirty="0">
+                <a:solidFill>
+                  <a:srgbClr val="16171D"/>
+                </a:solidFill>
+                <a:latin typeface="Cambria"/>
+                <a:cs typeface="Cambria"/>
+              </a:rPr>
+              <a:t xml:space="preserve"> = 0</a:t>
+            </a:r>
+            <a:r>
+              <a:rPr lang="en-US" sz="1425" dirty="0">
+                <a:solidFill>
+                  <a:srgbClr val="16171D"/>
+                </a:solidFill>
+                <a:latin typeface="Segoe UI"/>
+                <a:cs typeface="Segoe UI"/>
+              </a:rPr>
+              <a:t xml:space="preserve"> at </a:t>
+            </a:r>
+            <a:r>
+              <a:rPr lang="en-US" sz="1425" dirty="0" i="1">
+                <a:solidFill>
+                  <a:srgbClr val="16171D"/>
+                </a:solidFill>
+                <a:latin typeface="Cambria"/>
+                <a:cs typeface="Cambria"/>
+              </a:rPr>
+              <a:t xml:space="preserve">t</a:t>
+            </a:r>
+            <a:r>
+              <a:rPr lang="en-US" sz="1425" dirty="0">
+                <a:solidFill>
+                  <a:srgbClr val="16171D"/>
+                </a:solidFill>
+                <a:latin typeface="Cambria"/>
+                <a:cs typeface="Cambria"/>
+              </a:rPr>
+              <a:t xml:space="preserve"> = 20</a:t>
+            </a:r>
+            <a:r>
+              <a:rPr lang="en-US" sz="1425" dirty="0">
+                <a:solidFill>
+                  <a:srgbClr val="16171D"/>
+                </a:solidFill>
+                <a:latin typeface="Segoe UI"/>
+                <a:cs typeface="Segoe UI"/>
+              </a:rPr>
+              <a:t xml:space="preserve">.</a:t>
             </a:r>
             <a:br>
               <a:rPr lang="en-US" sz="1425" dirty="0">
@@ -11088,7 +11677,7 @@
                 <a:latin typeface="Segoe UI"/>
                 <a:cs typeface="Segoe UI"/>
               </a:rPr>
-              <a:t xml:space="preserve"> </a:t>
+              <a:t xml:space="preserve"> Range: </a:t>
             </a:r>
             <a:r>
               <a:rPr lang="en-US" sz="1425" dirty="0">
@@ -11098,17 +11687,57 @@
                 <a:latin typeface="Cambria"/>
                 <a:cs typeface="Cambria"/>
               </a:rPr>
-              <a:t xml:space="preserve">80 ÷ 4 = 20</a:t>
+              <a:t xml:space="preserve">0 ≤ </a:t>
+            </a:r>
+            <a:r>
+              <a:rPr lang="en-US" sz="1425" dirty="0" i="1">
+                <a:solidFill>
+                  <a:srgbClr val="16171D"/>
+                </a:solidFill>
+                <a:latin typeface="Cambria"/>
+                <a:cs typeface="Cambria"/>
+              </a:rPr>
+              <a:t xml:space="preserve">w</a:t>
             </a:r>
             <a:r>
               <a:rPr lang="en-US" sz="1425" dirty="0">
                 <a:solidFill>
                   <a:srgbClr val="16171D"/>
                 </a:solidFill>
-                <a:latin typeface="Segoe UI"/>
-                <a:cs typeface="Segoe UI"/>
-              </a:rPr>
-              <a:t xml:space="preserve">, so $20 per month.</a:t>
+                <a:latin typeface="Cambria"/>
+                <a:cs typeface="Cambria"/>
+              </a:rPr>
+              <a:t xml:space="preserve">(</a:t>
+            </a:r>
+            <a:r>
+              <a:rPr lang="en-US" sz="1425" dirty="0" i="1">
+                <a:solidFill>
+                  <a:srgbClr val="16171D"/>
+                </a:solidFill>
+                <a:latin typeface="Cambria"/>
+                <a:cs typeface="Cambria"/>
+              </a:rPr>
+              <a:t xml:space="preserve">t</a:t>
+            </a:r>
+            <a:r>
+              <a:rPr lang="en-US" sz="1425" dirty="0">
+                <a:solidFill>
+                  <a:srgbClr val="16171D"/>
+                </a:solidFill>
+                <a:latin typeface="Cambria"/>
+                <a:cs typeface="Cambria"/>
+              </a:rPr>
+              <a:t xml:space="preserve">) ≤ 200</a:t>
+            </a:r>
+            <a:r>
+              <a:rPr lang="en-US" sz="1425" dirty="0">
+                <a:solidFill>
+                  <a:srgbClr val="16171D"/>
+                </a:solidFill>
+                <a:latin typeface="Segoe UI"/>
+                <a:cs typeface="Segoe UI"/>
+              </a:rPr>
+              <a:t xml:space="preserve">.</a:t>
             </a:r>
             <a:endParaRPr lang="en-US" sz="1425" dirty="0"/>
           </a:p>
